--- a/docs/onboarding/AnkoraOne-Apresentacao-Onboarding.pptx
+++ b/docs/onboarding/AnkoraOne-Apresentacao-Onboarding.pptx
@@ -23,9 +23,11 @@
     <p:sldId id="271" r:id="rId17"/>
     <p:sldId id="272" r:id="rId18"/>
     <p:sldId id="273" r:id="rId19"/>
+    <p:sldId id="274" r:id="rId20"/>
+    <p:sldId id="275" r:id="rId21"/>
   </p:sldIdLst>
   <p:notesMasterIdLst>
-    <p:notesMasterId r:id="rId20"/>
+    <p:notesMasterId r:id="rId22"/>
   </p:notesMasterIdLst>
   <p:sldSz cx="12192000" cy="6858000"/>
   <p:notesSz cx="6858000" cy="12192000"/>
@@ -124,7 +126,7 @@
   <p:extLst>
     <p:ext uri="{521415D9-36F7-43E2-AB2F-B90AF26B5E84}">
       <p14:sectionLst xmlns:p14="http://schemas.microsoft.com/office/powerpoint/2010/main">
-        <p14:section name="Abertura" id="{344d1515-85e6-022b-ab0c-0ce68a2ce623}">
+        <p14:section name="Abertura" id="{56759ea1-9d6e-0cf8-341e-464f77914f3c}">
           <p14:sldIdLst>
             <p14:sldId id="256"/>
             <p14:sldId id="257"/>
@@ -134,7 +136,7 @@
             <p14:sldId id="261"/>
           </p14:sldIdLst>
         </p14:section>
-        <p14:section name="Navegar e trabalhar" id="{919981b8-7b8f-12bd-03cd-795fb62e3488}">
+        <p14:section name="Navegar e trabalhar" id="{70dc23ed-05cb-6673-c2d0-c6f78af92a72}">
           <p14:sldIdLst>
             <p14:sldId id="262"/>
             <p14:sldId id="263"/>
@@ -142,20 +144,22 @@
             <p14:sldId id="265"/>
             <p14:sldId id="266"/>
             <p14:sldId id="267"/>
+            <p14:sldId id="268"/>
           </p14:sldIdLst>
         </p14:section>
-        <p14:section name="Guia por referencial" id="{0119038f-8be0-8602-9201-fa603ceb1702}">
+        <p14:section name="Guia por referencial" id="{cc85fff8-17fc-597f-eea7-85c6726640fd}">
           <p14:sldIdLst>
-            <p14:sldId id="268"/>
             <p14:sldId id="269"/>
             <p14:sldId id="270"/>
             <p14:sldId id="271"/>
+            <p14:sldId id="272"/>
+            <p14:sldId id="273"/>
           </p14:sldIdLst>
         </p14:section>
-        <p14:section name="Fecho" id="{bde07117-bcb4-69e7-35e3-9ca7527e6dee}">
+        <p14:section name="Fecho" id="{670e9f66-a7e8-afea-d7c6-e465fea43333}">
           <p14:sldIdLst>
-            <p14:sldId id="272"/>
-            <p14:sldId id="273"/>
+            <p14:sldId id="274"/>
+            <p14:sldId id="275"/>
           </p14:sldIdLst>
         </p14:section>
       </p14:sectionLst>
@@ -1396,6 +1400,94 @@
 </p:notes>
 </file>
 
+<file path=ppt/notesSlides/notesSlide19.xml><?xml version="1.0" encoding="utf-8"?>
+<p:notes xmlns:a="http://schemas.openxmlformats.org/drawingml/2006/main" xmlns:r="http://schemas.openxmlformats.org/officeDocument/2006/relationships" xmlns:p="http://schemas.openxmlformats.org/presentationml/2006/main">
+  <p:cSld>
+    <p:spTree>
+      <p:nvGrpSpPr>
+        <p:cNvPr id="1" name=""/>
+        <p:cNvGrpSpPr/>
+        <p:nvPr/>
+      </p:nvGrpSpPr>
+      <p:grpSpPr>
+        <a:xfrm>
+          <a:off x="0" y="0"/>
+          <a:ext cx="0" cy="0"/>
+          <a:chOff x="0" y="0"/>
+          <a:chExt cx="0" cy="0"/>
+        </a:xfrm>
+      </p:grpSpPr>
+      <p:sp>
+        <p:nvSpPr>
+          <p:cNvPr id="2" name="Slide Image Placeholder 1"/>
+          <p:cNvSpPr>
+            <a:spLocks noGrp="1" noRot="1" noChangeAspect="1"/>
+          </p:cNvSpPr>
+          <p:nvPr>
+            <p:ph type="sldImg"/>
+          </p:nvPr>
+        </p:nvSpPr>
+        <p:spPr/>
+      </p:sp>
+      <p:sp>
+        <p:nvSpPr>
+          <p:cNvPr id="3" name="Notes Placeholder 2"/>
+          <p:cNvSpPr>
+            <a:spLocks noGrp="1"/>
+          </p:cNvSpPr>
+          <p:nvPr>
+            <p:ph type="body" idx="1"/>
+          </p:nvPr>
+        </p:nvSpPr>
+        <p:spPr/>
+        <p:txBody>
+          <a:bodyPr/>
+          <a:lstStyle/>
+          <a:p>
+            <a:r>
+              <a:rPr lang="en-US" dirty="0"/>
+              <a:t/>
+            </a:r>
+            <a:endParaRPr lang="en-US" dirty="0"/>
+          </a:p>
+        </p:txBody>
+      </p:sp>
+      <p:sp>
+        <p:nvSpPr>
+          <p:cNvPr id="4" name="Slide Number Placeholder 3"/>
+          <p:cNvSpPr>
+            <a:spLocks noGrp="1"/>
+          </p:cNvSpPr>
+          <p:nvPr>
+            <p:ph type="sldNum" sz="quarter" idx="10"/>
+          </p:nvPr>
+        </p:nvSpPr>
+        <p:spPr/>
+        <p:txBody>
+          <a:bodyPr/>
+          <a:lstStyle/>
+          <a:p>
+            <a:fld id="{F7021451-1387-4CA6-816F-3879F97B5CBC}" type="slidenum">
+              <a:rPr lang="en-US"/>
+              <a:t>19</a:t>
+            </a:fld>
+            <a:endParaRPr lang="en-US"/>
+          </a:p>
+        </p:txBody>
+      </p:sp>
+    </p:spTree>
+    <p:extLst>
+      <p:ext uri="{BB962C8B-B14F-4D97-AF65-F5344CB8AC3E}">
+        <p14:creationId xmlns:p14="http://schemas.microsoft.com/office/powerpoint/2010/main" val="1024086991"/>
+      </p:ext>
+    </p:extLst>
+  </p:cSld>
+  <p:clrMapOvr>
+    <a:masterClrMapping/>
+  </p:clrMapOvr>
+</p:notes>
+</file>
+
 <file path=ppt/notesSlides/notesSlide2.xml><?xml version="1.0" encoding="utf-8"?>
 <p:notes xmlns:a="http://schemas.openxmlformats.org/drawingml/2006/main" xmlns:r="http://schemas.openxmlformats.org/officeDocument/2006/relationships" xmlns:p="http://schemas.openxmlformats.org/presentationml/2006/main">
   <p:cSld>
@@ -1466,6 +1558,94 @@
             <a:fld id="{F7021451-1387-4CA6-816F-3879F97B5CBC}" type="slidenum">
               <a:rPr lang="en-US"/>
               <a:t>2</a:t>
+            </a:fld>
+            <a:endParaRPr lang="en-US"/>
+          </a:p>
+        </p:txBody>
+      </p:sp>
+    </p:spTree>
+    <p:extLst>
+      <p:ext uri="{BB962C8B-B14F-4D97-AF65-F5344CB8AC3E}">
+        <p14:creationId xmlns:p14="http://schemas.microsoft.com/office/powerpoint/2010/main" val="1024086991"/>
+      </p:ext>
+    </p:extLst>
+  </p:cSld>
+  <p:clrMapOvr>
+    <a:masterClrMapping/>
+  </p:clrMapOvr>
+</p:notes>
+</file>
+
+<file path=ppt/notesSlides/notesSlide20.xml><?xml version="1.0" encoding="utf-8"?>
+<p:notes xmlns:a="http://schemas.openxmlformats.org/drawingml/2006/main" xmlns:r="http://schemas.openxmlformats.org/officeDocument/2006/relationships" xmlns:p="http://schemas.openxmlformats.org/presentationml/2006/main">
+  <p:cSld>
+    <p:spTree>
+      <p:nvGrpSpPr>
+        <p:cNvPr id="1" name=""/>
+        <p:cNvGrpSpPr/>
+        <p:nvPr/>
+      </p:nvGrpSpPr>
+      <p:grpSpPr>
+        <a:xfrm>
+          <a:off x="0" y="0"/>
+          <a:ext cx="0" cy="0"/>
+          <a:chOff x="0" y="0"/>
+          <a:chExt cx="0" cy="0"/>
+        </a:xfrm>
+      </p:grpSpPr>
+      <p:sp>
+        <p:nvSpPr>
+          <p:cNvPr id="2" name="Slide Image Placeholder 1"/>
+          <p:cNvSpPr>
+            <a:spLocks noGrp="1" noRot="1" noChangeAspect="1"/>
+          </p:cNvSpPr>
+          <p:nvPr>
+            <p:ph type="sldImg"/>
+          </p:nvPr>
+        </p:nvSpPr>
+        <p:spPr/>
+      </p:sp>
+      <p:sp>
+        <p:nvSpPr>
+          <p:cNvPr id="3" name="Notes Placeholder 2"/>
+          <p:cNvSpPr>
+            <a:spLocks noGrp="1"/>
+          </p:cNvSpPr>
+          <p:nvPr>
+            <p:ph type="body" idx="1"/>
+          </p:nvPr>
+        </p:nvSpPr>
+        <p:spPr/>
+        <p:txBody>
+          <a:bodyPr/>
+          <a:lstStyle/>
+          <a:p>
+            <a:r>
+              <a:rPr lang="en-US" dirty="0"/>
+              <a:t/>
+            </a:r>
+            <a:endParaRPr lang="en-US" dirty="0"/>
+          </a:p>
+        </p:txBody>
+      </p:sp>
+      <p:sp>
+        <p:nvSpPr>
+          <p:cNvPr id="4" name="Slide Number Placeholder 3"/>
+          <p:cNvSpPr>
+            <a:spLocks noGrp="1"/>
+          </p:cNvSpPr>
+          <p:nvPr>
+            <p:ph type="sldNum" sz="quarter" idx="10"/>
+          </p:nvPr>
+        </p:nvSpPr>
+        <p:spPr/>
+        <p:txBody>
+          <a:bodyPr/>
+          <a:lstStyle/>
+          <a:p>
+            <a:fld id="{F7021451-1387-4CA6-816F-3879F97B5CBC}" type="slidenum">
+              <a:rPr lang="en-US"/>
+              <a:t>20</a:t>
             </a:fld>
             <a:endParaRPr lang="en-US"/>
           </a:p>
@@ -3111,7 +3291,7 @@
                   <a:srgbClr val="C9CFDA"/>
                 </a:solidFill>
               </a:rPr>
-              <a:t>Regime Jurídico da Cibersegurança (NIS2) e ISO/IEC 27001: criação da conta, navegação, uso diário e guia por referencial</a:t>
+              <a:t>Regime Jurídico da Cibersegurança (NIS2), ISO/IEC 27001 e ISO/IEC 42001: criação da conta, navegação, uso diário e guia por referencial</a:t>
             </a:r>
             <a:endParaRPr lang="en-US" sz="1800" dirty="0"/>
           </a:p>
@@ -3147,7 +3327,7 @@
                   <a:srgbClr val="CFA04A"/>
                 </a:solidFill>
               </a:rPr>
-              <a:t>app.ankoraone.com  ·  outubro de 2026</a:t>
+              <a:t>app.ankoraone.com  ·  versão 1.2  ·  outubro de 2026</a:t>
             </a:r>
             <a:endParaRPr lang="en-US" sz="1200" dirty="0"/>
           </a:p>
@@ -4015,7 +4195,7 @@
                   <a:schemeClr val="tx1"/>
                 </a:solidFill>
               </a:rPr>
-              <a:t>Avaliar a maturidade de 0 a 5 e transformar lacunas em tarefas</a:t>
+              <a:t>Carregue o que já tem: a plataforma propõe onde pertence</a:t>
             </a:r>
             <a:endParaRPr lang="en-US" sz="3200" dirty="0"/>
           </a:p>
@@ -4023,26 +4203,62 @@
       </p:sp>
       <p:sp>
         <p:nvSpPr>
-          <p:cNvPr id="3" name="card-51"/>
+          <p:cNvPr id="3" name="Text 1"/>
+          <p:cNvSpPr txBox="1"/>
+          <p:nvPr/>
+        </p:nvSpPr>
+        <p:spPr>
+          <a:xfrm>
+            <a:off x="548640" y="1234440"/>
+            <a:ext cx="10972800" cy="411480"/>
+          </a:xfrm>
+          <a:prstGeom prst="rect">
+            <a:avLst/>
+          </a:prstGeom>
+          <a:noFill/>
+          <a:ln/>
+        </p:spPr>
+        <p:txBody>
+          <a:bodyPr wrap="square" lIns="0" tIns="0" rIns="0" bIns="0" rtlCol="0" anchor="t"/>
+          <a:lstStyle/>
+          <a:p>
+            <a:pPr indent="0" marL="0">
+              <a:buNone/>
+            </a:pPr>
+            <a:r>
+              <a:rPr lang="en-US" sz="1500" dirty="0">
+                <a:solidFill>
+                  <a:srgbClr val="5B6474"/>
+                </a:solidFill>
+              </a:rPr>
+              <a:t>Governar › Repositório documental: todos os ficheiros do cliente nas mesmas 13 pastas, no repositório escolhido (plataforma, Google Drive, OneDrive ou NAS).</a:t>
+            </a:r>
+            <a:endParaRPr lang="en-US" sz="1500" dirty="0"/>
+          </a:p>
+        </p:txBody>
+      </p:sp>
+      <p:sp>
+        <p:nvSpPr>
+          <p:cNvPr id="4" name="card-51"/>
           <p:cNvSpPr/>
           <p:nvPr/>
         </p:nvSpPr>
         <p:spPr>
           <a:xfrm>
-            <a:off x="548640" y="1508760"/>
-            <a:ext cx="1737360" cy="1417320"/>
+            <a:off x="548640" y="1874520"/>
+            <a:ext cx="2606040" cy="2423160"/>
           </a:xfrm>
           <a:prstGeom prst="roundRect">
             <a:avLst>
-              <a:gd name="adj" fmla="val 7742"/>
+              <a:gd name="adj" fmla="val 4528"/>
             </a:avLst>
           </a:prstGeom>
           <a:solidFill>
-            <a:srgbClr val="E9EDF2"/>
+            <a:srgbClr val="F3F5F8"/>
           </a:solidFill>
           <a:ln w="12700">
             <a:solidFill>
-              <a:srgbClr val="E9EDF2"/>
+              <a:srgbClr val="F3F5F8"/>
             </a:solidFill>
             <a:prstDash val="solid"/>
           </a:ln>
@@ -4050,170 +4266,120 @@
       </p:sp>
       <p:sp>
         <p:nvSpPr>
-          <p:cNvPr id="4" name="Text 2"/>
-          <p:cNvSpPr txBox="1"/>
-          <p:nvPr/>
-        </p:nvSpPr>
-        <p:spPr>
-          <a:xfrm>
-            <a:off x="548640" y="1600200"/>
-            <a:ext cx="1737360" cy="685800"/>
-          </a:xfrm>
-          <a:prstGeom prst="rect">
-            <a:avLst/>
-          </a:prstGeom>
-          <a:noFill/>
-          <a:ln/>
-        </p:spPr>
-        <p:txBody>
-          <a:bodyPr wrap="square" lIns="0" tIns="0" rIns="0" bIns="0" rtlCol="0" anchor="t"/>
-          <a:lstStyle/>
-          <a:p>
-            <a:pPr algn="ctr" indent="0" marL="0">
-              <a:buNone/>
-            </a:pPr>
-            <a:r>
-              <a:rPr lang="en-US" sz="3600" b="1" dirty="0">
-                <a:solidFill>
-                  <a:srgbClr val="070A13"/>
-                </a:solidFill>
-              </a:rPr>
-              <a:t>0</a:t>
-            </a:r>
-            <a:endParaRPr lang="en-US" sz="3600" dirty="0"/>
-          </a:p>
-        </p:txBody>
-      </p:sp>
-      <p:sp>
-        <p:nvSpPr>
-          <p:cNvPr id="5" name="Text 3"/>
-          <p:cNvSpPr txBox="1"/>
-          <p:nvPr/>
-        </p:nvSpPr>
-        <p:spPr>
-          <a:xfrm>
-            <a:off x="640080" y="2331720"/>
-            <a:ext cx="1554480" cy="502920"/>
-          </a:xfrm>
-          <a:prstGeom prst="rect">
-            <a:avLst/>
-          </a:prstGeom>
-          <a:noFill/>
-          <a:ln/>
-        </p:spPr>
-        <p:txBody>
-          <a:bodyPr wrap="square" lIns="0" tIns="0" rIns="0" bIns="0" rtlCol="0" anchor="t"/>
-          <a:lstStyle/>
-          <a:p>
-            <a:pPr algn="ctr" indent="0" marL="0">
-              <a:buNone/>
-            </a:pPr>
-            <a:r>
-              <a:rPr lang="en-US" sz="1300" b="1" dirty="0">
-                <a:solidFill>
-                  <a:srgbClr val="111827"/>
-                </a:solidFill>
-              </a:rPr>
-              <a:t>Inexistente</a:t>
-            </a:r>
-            <a:endParaRPr lang="en-US" sz="1300" dirty="0"/>
-          </a:p>
-        </p:txBody>
-      </p:sp>
-      <p:sp>
-        <p:nvSpPr>
-          <p:cNvPr id="6" name="card-52"/>
+          <p:cNvPr id="5" name="icon-bg-52"/>
           <p:cNvSpPr/>
           <p:nvPr/>
         </p:nvSpPr>
         <p:spPr>
           <a:xfrm>
-            <a:off x="2404872" y="1508760"/>
-            <a:ext cx="1737360" cy="1417320"/>
-          </a:xfrm>
-          <a:prstGeom prst="roundRect">
-            <a:avLst>
-              <a:gd name="adj" fmla="val 7742"/>
-            </a:avLst>
+            <a:off x="777240" y="2103120"/>
+            <a:ext cx="640080" cy="640080"/>
+          </a:xfrm>
+          <a:prstGeom prst="ellipse">
+            <a:avLst/>
           </a:prstGeom>
           <a:solidFill>
-            <a:srgbClr val="DCE2EA"/>
+            <a:srgbClr val="070A13"/>
           </a:solidFill>
           <a:ln w="12700">
             <a:solidFill>
-              <a:srgbClr val="DCE2EA"/>
+              <a:srgbClr val="070A13"/>
             </a:solidFill>
             <a:prstDash val="solid"/>
           </a:ln>
         </p:spPr>
       </p:sp>
-      <p:sp>
-        <p:nvSpPr>
-          <p:cNvPr id="7" name="Text 5"/>
-          <p:cNvSpPr txBox="1"/>
-          <p:nvPr/>
-        </p:nvSpPr>
-        <p:spPr>
-          <a:xfrm>
-            <a:off x="2404872" y="1600200"/>
-            <a:ext cx="1737360" cy="685800"/>
-          </a:xfrm>
-          <a:prstGeom prst="rect">
-            <a:avLst/>
-          </a:prstGeom>
-          <a:noFill/>
-          <a:ln/>
-        </p:spPr>
-        <p:txBody>
-          <a:bodyPr wrap="square" lIns="0" tIns="0" rIns="0" bIns="0" rtlCol="0" anchor="t"/>
-          <a:lstStyle/>
-          <a:p>
-            <a:pPr algn="ctr" indent="0" marL="0">
-              <a:buNone/>
-            </a:pPr>
-            <a:r>
-              <a:rPr lang="en-US" sz="3600" b="1" dirty="0">
-                <a:solidFill>
-                  <a:srgbClr val="070A13"/>
-                </a:solidFill>
-              </a:rPr>
-              <a:t>1</a:t>
-            </a:r>
-            <a:endParaRPr lang="en-US" sz="3600" dirty="0"/>
-          </a:p>
-        </p:txBody>
-      </p:sp>
-      <p:sp>
-        <p:nvSpPr>
-          <p:cNvPr id="8" name="Text 6"/>
-          <p:cNvSpPr txBox="1"/>
-          <p:nvPr/>
-        </p:nvSpPr>
-        <p:spPr>
-          <a:xfrm>
-            <a:off x="2496312" y="2331720"/>
-            <a:ext cx="1554480" cy="502920"/>
-          </a:xfrm>
-          <a:prstGeom prst="rect">
-            <a:avLst/>
-          </a:prstGeom>
-          <a:noFill/>
-          <a:ln/>
-        </p:spPr>
-        <p:txBody>
-          <a:bodyPr wrap="square" lIns="0" tIns="0" rIns="0" bIns="0" rtlCol="0" anchor="t"/>
-          <a:lstStyle/>
-          <a:p>
-            <a:pPr algn="ctr" indent="0" marL="0">
-              <a:buNone/>
-            </a:pPr>
-            <a:r>
-              <a:rPr lang="en-US" sz="1300" b="1" dirty="0">
+      <p:pic>
+        <p:nvPicPr>
+          <p:cNvPr id="6" name="icon-52" descr="preencoded.png">    </p:cNvPr>
+          <p:cNvPicPr>
+            <a:picLocks noChangeAspect="1"/>
+          </p:cNvPicPr>
+          <p:nvPr/>
+        </p:nvPicPr>
+        <p:blipFill>
+          <a:blip r:embed="rId1"/>
+          <a:stretch>
+            <a:fillRect/>
+          </a:stretch>
+        </p:blipFill>
+        <p:spPr>
+          <a:xfrm>
+            <a:off x="918058" y="2243938"/>
+            <a:ext cx="358445" cy="358445"/>
+          </a:xfrm>
+          <a:prstGeom prst="rect">
+            <a:avLst/>
+          </a:prstGeom>
+        </p:spPr>
+      </p:pic>
+      <p:sp>
+        <p:nvSpPr>
+          <p:cNvPr id="7" name="Text 4"/>
+          <p:cNvSpPr txBox="1"/>
+          <p:nvPr/>
+        </p:nvSpPr>
+        <p:spPr>
+          <a:xfrm>
+            <a:off x="777240" y="2880360"/>
+            <a:ext cx="2194560" cy="411480"/>
+          </a:xfrm>
+          <a:prstGeom prst="rect">
+            <a:avLst/>
+          </a:prstGeom>
+          <a:noFill/>
+          <a:ln/>
+        </p:spPr>
+        <p:txBody>
+          <a:bodyPr wrap="square" lIns="0" tIns="0" rIns="0" bIns="0" rtlCol="0" anchor="t"/>
+          <a:lstStyle/>
+          <a:p>
+            <a:pPr indent="0" marL="0">
+              <a:buNone/>
+            </a:pPr>
+            <a:r>
+              <a:rPr lang="en-US" sz="1700" b="1" dirty="0">
                 <a:solidFill>
                   <a:srgbClr val="111827"/>
                 </a:solidFill>
               </a:rPr>
-              <a:t>Inicial</a:t>
+              <a:t>Carregar</a:t>
+            </a:r>
+            <a:endParaRPr lang="en-US" sz="1700" dirty="0"/>
+          </a:p>
+        </p:txBody>
+      </p:sp>
+      <p:sp>
+        <p:nvSpPr>
+          <p:cNvPr id="8" name="Text 5"/>
+          <p:cNvSpPr txBox="1"/>
+          <p:nvPr/>
+        </p:nvSpPr>
+        <p:spPr>
+          <a:xfrm>
+            <a:off x="777240" y="3337560"/>
+            <a:ext cx="2194560" cy="1188720"/>
+          </a:xfrm>
+          <a:prstGeom prst="rect">
+            <a:avLst/>
+          </a:prstGeom>
+          <a:noFill/>
+          <a:ln/>
+        </p:spPr>
+        <p:txBody>
+          <a:bodyPr wrap="square" lIns="0" tIns="0" rIns="0" bIns="0" rtlCol="0" anchor="t"/>
+          <a:lstStyle/>
+          <a:p>
+            <a:pPr indent="0" marL="0">
+              <a:buNone/>
+            </a:pPr>
+            <a:r>
+              <a:rPr lang="en-US" sz="1300" dirty="0">
+                <a:solidFill>
+                  <a:srgbClr val="5B6474"/>
+                </a:solidFill>
+              </a:rPr>
+              <a:t>Na área Por classificar, ou diretamente na pasta «00 Por classificar» e Procurar na pasta</a:t>
             </a:r>
             <a:endParaRPr lang="en-US" sz="1300" dirty="0"/>
           </a:p>
@@ -4221,217 +4387,17 @@
       </p:sp>
       <p:sp>
         <p:nvSpPr>
-          <p:cNvPr id="9" name="card-53"/>
+          <p:cNvPr id="9" name="seta-rep-0"/>
           <p:cNvSpPr/>
           <p:nvPr/>
         </p:nvSpPr>
         <p:spPr>
           <a:xfrm>
-            <a:off x="4261104" y="1508760"/>
-            <a:ext cx="1737360" cy="1417320"/>
-          </a:xfrm>
-          <a:prstGeom prst="roundRect">
-            <a:avLst>
-              <a:gd name="adj" fmla="val 7742"/>
-            </a:avLst>
-          </a:prstGeom>
-          <a:solidFill>
-            <a:srgbClr val="C6CFDB"/>
-          </a:solidFill>
-          <a:ln w="12700">
-            <a:solidFill>
-              <a:srgbClr val="C6CFDB"/>
-            </a:solidFill>
-            <a:prstDash val="solid"/>
-          </a:ln>
-        </p:spPr>
-      </p:sp>
-      <p:sp>
-        <p:nvSpPr>
-          <p:cNvPr id="10" name="Text 8"/>
-          <p:cNvSpPr txBox="1"/>
-          <p:nvPr/>
-        </p:nvSpPr>
-        <p:spPr>
-          <a:xfrm>
-            <a:off x="4261104" y="1600200"/>
-            <a:ext cx="1737360" cy="685800"/>
-          </a:xfrm>
-          <a:prstGeom prst="rect">
-            <a:avLst/>
-          </a:prstGeom>
-          <a:noFill/>
-          <a:ln/>
-        </p:spPr>
-        <p:txBody>
-          <a:bodyPr wrap="square" lIns="0" tIns="0" rIns="0" bIns="0" rtlCol="0" anchor="t"/>
-          <a:lstStyle/>
-          <a:p>
-            <a:pPr algn="ctr" indent="0" marL="0">
-              <a:buNone/>
-            </a:pPr>
-            <a:r>
-              <a:rPr lang="en-US" sz="3600" b="1" dirty="0">
-                <a:solidFill>
-                  <a:srgbClr val="070A13"/>
-                </a:solidFill>
-              </a:rPr>
-              <a:t>2</a:t>
-            </a:r>
-            <a:endParaRPr lang="en-US" sz="3600" dirty="0"/>
-          </a:p>
-        </p:txBody>
-      </p:sp>
-      <p:sp>
-        <p:nvSpPr>
-          <p:cNvPr id="11" name="Text 9"/>
-          <p:cNvSpPr txBox="1"/>
-          <p:nvPr/>
-        </p:nvSpPr>
-        <p:spPr>
-          <a:xfrm>
-            <a:off x="4352544" y="2331720"/>
-            <a:ext cx="1554480" cy="502920"/>
-          </a:xfrm>
-          <a:prstGeom prst="rect">
-            <a:avLst/>
-          </a:prstGeom>
-          <a:noFill/>
-          <a:ln/>
-        </p:spPr>
-        <p:txBody>
-          <a:bodyPr wrap="square" lIns="0" tIns="0" rIns="0" bIns="0" rtlCol="0" anchor="t"/>
-          <a:lstStyle/>
-          <a:p>
-            <a:pPr algn="ctr" indent="0" marL="0">
-              <a:buNone/>
-            </a:pPr>
-            <a:r>
-              <a:rPr lang="en-US" sz="1300" b="1" dirty="0">
-                <a:solidFill>
-                  <a:srgbClr val="111827"/>
-                </a:solidFill>
-              </a:rPr>
-              <a:t>Em desenvolvimento</a:t>
-            </a:r>
-            <a:endParaRPr lang="en-US" sz="1300" dirty="0"/>
-          </a:p>
-        </p:txBody>
-      </p:sp>
-      <p:sp>
-        <p:nvSpPr>
-          <p:cNvPr id="12" name="card-54"/>
-          <p:cNvSpPr/>
-          <p:nvPr/>
-        </p:nvSpPr>
-        <p:spPr>
-          <a:xfrm>
-            <a:off x="6117336" y="1508760"/>
-            <a:ext cx="1737360" cy="1417320"/>
-          </a:xfrm>
-          <a:prstGeom prst="roundRect">
-            <a:avLst>
-              <a:gd name="adj" fmla="val 7742"/>
-            </a:avLst>
-          </a:prstGeom>
-          <a:solidFill>
-            <a:srgbClr val="9AA7BA"/>
-          </a:solidFill>
-          <a:ln w="12700">
-            <a:solidFill>
-              <a:srgbClr val="9AA7BA"/>
-            </a:solidFill>
-            <a:prstDash val="solid"/>
-          </a:ln>
-        </p:spPr>
-      </p:sp>
-      <p:sp>
-        <p:nvSpPr>
-          <p:cNvPr id="13" name="Text 11"/>
-          <p:cNvSpPr txBox="1"/>
-          <p:nvPr/>
-        </p:nvSpPr>
-        <p:spPr>
-          <a:xfrm>
-            <a:off x="6117336" y="1600200"/>
-            <a:ext cx="1737360" cy="685800"/>
-          </a:xfrm>
-          <a:prstGeom prst="rect">
-            <a:avLst/>
-          </a:prstGeom>
-          <a:noFill/>
-          <a:ln/>
-        </p:spPr>
-        <p:txBody>
-          <a:bodyPr wrap="square" lIns="0" tIns="0" rIns="0" bIns="0" rtlCol="0" anchor="t"/>
-          <a:lstStyle/>
-          <a:p>
-            <a:pPr algn="ctr" indent="0" marL="0">
-              <a:buNone/>
-            </a:pPr>
-            <a:r>
-              <a:rPr lang="en-US" sz="3600" b="1" dirty="0">
-                <a:solidFill>
-                  <a:srgbClr val="070A13"/>
-                </a:solidFill>
-              </a:rPr>
-              <a:t>3</a:t>
-            </a:r>
-            <a:endParaRPr lang="en-US" sz="3600" dirty="0"/>
-          </a:p>
-        </p:txBody>
-      </p:sp>
-      <p:sp>
-        <p:nvSpPr>
-          <p:cNvPr id="14" name="Text 12"/>
-          <p:cNvSpPr txBox="1"/>
-          <p:nvPr/>
-        </p:nvSpPr>
-        <p:spPr>
-          <a:xfrm>
-            <a:off x="6208776" y="2331720"/>
-            <a:ext cx="1554480" cy="502920"/>
-          </a:xfrm>
-          <a:prstGeom prst="rect">
-            <a:avLst/>
-          </a:prstGeom>
-          <a:noFill/>
-          <a:ln/>
-        </p:spPr>
-        <p:txBody>
-          <a:bodyPr wrap="square" lIns="0" tIns="0" rIns="0" bIns="0" rtlCol="0" anchor="t"/>
-          <a:lstStyle/>
-          <a:p>
-            <a:pPr algn="ctr" indent="0" marL="0">
-              <a:buNone/>
-            </a:pPr>
-            <a:r>
-              <a:rPr lang="en-US" sz="1300" b="1" dirty="0">
-                <a:solidFill>
-                  <a:srgbClr val="111827"/>
-                </a:solidFill>
-              </a:rPr>
-              <a:t>Definido</a:t>
-            </a:r>
-            <a:endParaRPr lang="en-US" sz="1300" dirty="0"/>
-          </a:p>
-        </p:txBody>
-      </p:sp>
-      <p:sp>
-        <p:nvSpPr>
-          <p:cNvPr id="15" name="card-55"/>
-          <p:cNvSpPr/>
-          <p:nvPr/>
-        </p:nvSpPr>
-        <p:spPr>
-          <a:xfrm>
-            <a:off x="7973568" y="1508760"/>
-            <a:ext cx="1737360" cy="1417320"/>
-          </a:xfrm>
-          <a:prstGeom prst="roundRect">
-            <a:avLst>
-              <a:gd name="adj" fmla="val 7742"/>
-            </a:avLst>
+            <a:off x="3182112" y="3108960"/>
+            <a:ext cx="128016" cy="320040"/>
+          </a:xfrm>
+          <a:prstGeom prst="chevron">
+            <a:avLst/>
           </a:prstGeom>
           <a:solidFill>
             <a:srgbClr val="CFA04A"/>
@@ -4446,91 +4412,44 @@
       </p:sp>
       <p:sp>
         <p:nvSpPr>
-          <p:cNvPr id="16" name="Text 14"/>
-          <p:cNvSpPr txBox="1"/>
-          <p:nvPr/>
-        </p:nvSpPr>
-        <p:spPr>
-          <a:xfrm>
-            <a:off x="7973568" y="1600200"/>
-            <a:ext cx="1737360" cy="685800"/>
-          </a:xfrm>
-          <a:prstGeom prst="rect">
-            <a:avLst/>
-          </a:prstGeom>
-          <a:noFill/>
-          <a:ln/>
-        </p:spPr>
-        <p:txBody>
-          <a:bodyPr wrap="square" lIns="0" tIns="0" rIns="0" bIns="0" rtlCol="0" anchor="t"/>
-          <a:lstStyle/>
-          <a:p>
-            <a:pPr algn="ctr" indent="0" marL="0">
-              <a:buNone/>
-            </a:pPr>
-            <a:r>
-              <a:rPr lang="en-US" sz="3600" b="1" dirty="0">
-                <a:solidFill>
-                  <a:srgbClr val="070A13"/>
-                </a:solidFill>
-              </a:rPr>
-              <a:t>4</a:t>
-            </a:r>
-            <a:endParaRPr lang="en-US" sz="3600" dirty="0"/>
-          </a:p>
-        </p:txBody>
-      </p:sp>
-      <p:sp>
-        <p:nvSpPr>
-          <p:cNvPr id="17" name="Text 15"/>
-          <p:cNvSpPr txBox="1"/>
-          <p:nvPr/>
-        </p:nvSpPr>
-        <p:spPr>
-          <a:xfrm>
-            <a:off x="8065008" y="2331720"/>
-            <a:ext cx="1554480" cy="502920"/>
-          </a:xfrm>
-          <a:prstGeom prst="rect">
-            <a:avLst/>
-          </a:prstGeom>
-          <a:noFill/>
-          <a:ln/>
-        </p:spPr>
-        <p:txBody>
-          <a:bodyPr wrap="square" lIns="0" tIns="0" rIns="0" bIns="0" rtlCol="0" anchor="t"/>
-          <a:lstStyle/>
-          <a:p>
-            <a:pPr algn="ctr" indent="0" marL="0">
-              <a:buNone/>
-            </a:pPr>
-            <a:r>
-              <a:rPr lang="en-US" sz="1300" b="1" dirty="0">
-                <a:solidFill>
-                  <a:srgbClr val="111827"/>
-                </a:solidFill>
-              </a:rPr>
-              <a:t>Gerido</a:t>
-            </a:r>
-            <a:endParaRPr lang="en-US" sz="1300" dirty="0"/>
-          </a:p>
-        </p:txBody>
-      </p:sp>
-      <p:sp>
-        <p:nvSpPr>
-          <p:cNvPr id="18" name="card-56"/>
+          <p:cNvPr id="10" name="card-53"/>
           <p:cNvSpPr/>
           <p:nvPr/>
         </p:nvSpPr>
         <p:spPr>
           <a:xfrm>
-            <a:off x="9829800" y="1508760"/>
-            <a:ext cx="1737360" cy="1417320"/>
+            <a:off x="3337560" y="1874520"/>
+            <a:ext cx="2606040" cy="2423160"/>
           </a:xfrm>
           <a:prstGeom prst="roundRect">
             <a:avLst>
-              <a:gd name="adj" fmla="val 7742"/>
+              <a:gd name="adj" fmla="val 4528"/>
             </a:avLst>
+          </a:prstGeom>
+          <a:solidFill>
+            <a:srgbClr val="F3F5F8"/>
+          </a:solidFill>
+          <a:ln w="12700">
+            <a:solidFill>
+              <a:srgbClr val="F3F5F8"/>
+            </a:solidFill>
+            <a:prstDash val="solid"/>
+          </a:ln>
+        </p:spPr>
+      </p:sp>
+      <p:sp>
+        <p:nvSpPr>
+          <p:cNvPr id="11" name="icon-bg-54"/>
+          <p:cNvSpPr/>
+          <p:nvPr/>
+        </p:nvSpPr>
+        <p:spPr>
+          <a:xfrm>
+            <a:off x="3566160" y="2103120"/>
+            <a:ext cx="640080" cy="640080"/>
+          </a:xfrm>
+          <a:prstGeom prst="ellipse">
+            <a:avLst/>
           </a:prstGeom>
           <a:solidFill>
             <a:srgbClr val="070A13"/>
@@ -4543,73 +4462,270 @@
           </a:ln>
         </p:spPr>
       </p:sp>
-      <p:sp>
-        <p:nvSpPr>
-          <p:cNvPr id="19" name="Text 17"/>
-          <p:cNvSpPr txBox="1"/>
-          <p:nvPr/>
-        </p:nvSpPr>
-        <p:spPr>
-          <a:xfrm>
-            <a:off x="9829800" y="1600200"/>
-            <a:ext cx="1737360" cy="685800"/>
-          </a:xfrm>
-          <a:prstGeom prst="rect">
-            <a:avLst/>
-          </a:prstGeom>
-          <a:noFill/>
-          <a:ln/>
-        </p:spPr>
-        <p:txBody>
-          <a:bodyPr wrap="square" lIns="0" tIns="0" rIns="0" bIns="0" rtlCol="0" anchor="t"/>
-          <a:lstStyle/>
-          <a:p>
-            <a:pPr algn="ctr" indent="0" marL="0">
-              <a:buNone/>
-            </a:pPr>
-            <a:r>
-              <a:rPr lang="en-US" sz="3600" b="1" dirty="0">
-                <a:solidFill>
-                  <a:srgbClr val="CFA04A"/>
-                </a:solidFill>
-              </a:rPr>
-              <a:t>5</a:t>
-            </a:r>
-            <a:endParaRPr lang="en-US" sz="3600" dirty="0"/>
-          </a:p>
-        </p:txBody>
-      </p:sp>
-      <p:sp>
-        <p:nvSpPr>
-          <p:cNvPr id="20" name="Text 18"/>
-          <p:cNvSpPr txBox="1"/>
-          <p:nvPr/>
-        </p:nvSpPr>
-        <p:spPr>
-          <a:xfrm>
-            <a:off x="9921240" y="2331720"/>
-            <a:ext cx="1554480" cy="502920"/>
-          </a:xfrm>
-          <a:prstGeom prst="rect">
-            <a:avLst/>
-          </a:prstGeom>
-          <a:noFill/>
-          <a:ln/>
-        </p:spPr>
-        <p:txBody>
-          <a:bodyPr wrap="square" lIns="0" tIns="0" rIns="0" bIns="0" rtlCol="0" anchor="t"/>
-          <a:lstStyle/>
-          <a:p>
-            <a:pPr algn="ctr" indent="0" marL="0">
-              <a:buNone/>
-            </a:pPr>
-            <a:r>
-              <a:rPr lang="en-US" sz="1300" b="1" dirty="0">
+      <p:pic>
+        <p:nvPicPr>
+          <p:cNvPr id="12" name="icon-54" descr="preencoded.png">    </p:cNvPr>
+          <p:cNvPicPr>
+            <a:picLocks noChangeAspect="1"/>
+          </p:cNvPicPr>
+          <p:nvPr/>
+        </p:nvPicPr>
+        <p:blipFill>
+          <a:blip r:embed="rId2"/>
+          <a:stretch>
+            <a:fillRect/>
+          </a:stretch>
+        </p:blipFill>
+        <p:spPr>
+          <a:xfrm>
+            <a:off x="3706978" y="2243938"/>
+            <a:ext cx="358445" cy="358445"/>
+          </a:xfrm>
+          <a:prstGeom prst="rect">
+            <a:avLst/>
+          </a:prstGeom>
+        </p:spPr>
+      </p:pic>
+      <p:sp>
+        <p:nvSpPr>
+          <p:cNvPr id="13" name="Text 9"/>
+          <p:cNvSpPr txBox="1"/>
+          <p:nvPr/>
+        </p:nvSpPr>
+        <p:spPr>
+          <a:xfrm>
+            <a:off x="3566160" y="2880360"/>
+            <a:ext cx="2194560" cy="411480"/>
+          </a:xfrm>
+          <a:prstGeom prst="rect">
+            <a:avLst/>
+          </a:prstGeom>
+          <a:noFill/>
+          <a:ln/>
+        </p:spPr>
+        <p:txBody>
+          <a:bodyPr wrap="square" lIns="0" tIns="0" rIns="0" bIns="0" rtlCol="0" anchor="t"/>
+          <a:lstStyle/>
+          <a:p>
+            <a:pPr indent="0" marL="0">
+              <a:buNone/>
+            </a:pPr>
+            <a:r>
+              <a:rPr lang="en-US" sz="1700" b="1" dirty="0">
+                <a:solidFill>
+                  <a:srgbClr val="111827"/>
+                </a:solidFill>
+              </a:rPr>
+              <a:t>Pré-selecionar</a:t>
+            </a:r>
+            <a:endParaRPr lang="en-US" sz="1700" dirty="0"/>
+          </a:p>
+        </p:txBody>
+      </p:sp>
+      <p:sp>
+        <p:nvSpPr>
+          <p:cNvPr id="14" name="Text 10"/>
+          <p:cNvSpPr txBox="1"/>
+          <p:nvPr/>
+        </p:nvSpPr>
+        <p:spPr>
+          <a:xfrm>
+            <a:off x="3566160" y="3337560"/>
+            <a:ext cx="2194560" cy="1188720"/>
+          </a:xfrm>
+          <a:prstGeom prst="rect">
+            <a:avLst/>
+          </a:prstGeom>
+          <a:noFill/>
+          <a:ln/>
+        </p:spPr>
+        <p:txBody>
+          <a:bodyPr wrap="square" lIns="0" tIns="0" rIns="0" bIns="0" rtlCol="0" anchor="t"/>
+          <a:lstStyle/>
+          <a:p>
+            <a:pPr indent="0" marL="0">
+              <a:buNone/>
+            </a:pPr>
+            <a:r>
+              <a:rPr lang="en-US" sz="1300" dirty="0">
+                <a:solidFill>
+                  <a:srgbClr val="5B6474"/>
+                </a:solidFill>
+              </a:rPr>
+              <a:t>Sem IA: medidas, tarefas e controlos ISO com texto parecido</a:t>
+            </a:r>
+            <a:endParaRPr lang="en-US" sz="1300" dirty="0"/>
+          </a:p>
+        </p:txBody>
+      </p:sp>
+      <p:sp>
+        <p:nvSpPr>
+          <p:cNvPr id="15" name="seta-rep-1"/>
+          <p:cNvSpPr/>
+          <p:nvPr/>
+        </p:nvSpPr>
+        <p:spPr>
+          <a:xfrm>
+            <a:off x="5971032" y="3108960"/>
+            <a:ext cx="128016" cy="320040"/>
+          </a:xfrm>
+          <a:prstGeom prst="chevron">
+            <a:avLst/>
+          </a:prstGeom>
+          <a:solidFill>
+            <a:srgbClr val="CFA04A"/>
+          </a:solidFill>
+          <a:ln w="12700">
+            <a:solidFill>
+              <a:srgbClr val="CFA04A"/>
+            </a:solidFill>
+            <a:prstDash val="solid"/>
+          </a:ln>
+        </p:spPr>
+      </p:sp>
+      <p:sp>
+        <p:nvSpPr>
+          <p:cNvPr id="16" name="card-55"/>
+          <p:cNvSpPr/>
+          <p:nvPr/>
+        </p:nvSpPr>
+        <p:spPr>
+          <a:xfrm>
+            <a:off x="6126480" y="1874520"/>
+            <a:ext cx="2606040" cy="2423160"/>
+          </a:xfrm>
+          <a:prstGeom prst="roundRect">
+            <a:avLst>
+              <a:gd name="adj" fmla="val 4528"/>
+            </a:avLst>
+          </a:prstGeom>
+          <a:solidFill>
+            <a:srgbClr val="070A13"/>
+          </a:solidFill>
+          <a:ln w="12700">
+            <a:solidFill>
+              <a:srgbClr val="070A13"/>
+            </a:solidFill>
+            <a:prstDash val="solid"/>
+          </a:ln>
+        </p:spPr>
+      </p:sp>
+      <p:sp>
+        <p:nvSpPr>
+          <p:cNvPr id="17" name="icon-bg-56"/>
+          <p:cNvSpPr/>
+          <p:nvPr/>
+        </p:nvSpPr>
+        <p:spPr>
+          <a:xfrm>
+            <a:off x="6355080" y="2103120"/>
+            <a:ext cx="640080" cy="640080"/>
+          </a:xfrm>
+          <a:prstGeom prst="ellipse">
+            <a:avLst/>
+          </a:prstGeom>
+          <a:solidFill>
+            <a:srgbClr val="CFA04A"/>
+          </a:solidFill>
+          <a:ln w="12700">
+            <a:solidFill>
+              <a:srgbClr val="CFA04A"/>
+            </a:solidFill>
+            <a:prstDash val="solid"/>
+          </a:ln>
+        </p:spPr>
+      </p:sp>
+      <p:pic>
+        <p:nvPicPr>
+          <p:cNvPr id="18" name="icon-56" descr="preencoded.png">    </p:cNvPr>
+          <p:cNvPicPr>
+            <a:picLocks noChangeAspect="1"/>
+          </p:cNvPicPr>
+          <p:nvPr/>
+        </p:nvPicPr>
+        <p:blipFill>
+          <a:blip r:embed="rId3"/>
+          <a:stretch>
+            <a:fillRect/>
+          </a:stretch>
+        </p:blipFill>
+        <p:spPr>
+          <a:xfrm>
+            <a:off x="6495898" y="2243938"/>
+            <a:ext cx="358445" cy="358445"/>
+          </a:xfrm>
+          <a:prstGeom prst="rect">
+            <a:avLst/>
+          </a:prstGeom>
+        </p:spPr>
+      </p:pic>
+      <p:sp>
+        <p:nvSpPr>
+          <p:cNvPr id="19" name="Text 14"/>
+          <p:cNvSpPr txBox="1"/>
+          <p:nvPr/>
+        </p:nvSpPr>
+        <p:spPr>
+          <a:xfrm>
+            <a:off x="6355080" y="2880360"/>
+            <a:ext cx="2194560" cy="411480"/>
+          </a:xfrm>
+          <a:prstGeom prst="rect">
+            <a:avLst/>
+          </a:prstGeom>
+          <a:noFill/>
+          <a:ln/>
+        </p:spPr>
+        <p:txBody>
+          <a:bodyPr wrap="square" lIns="0" tIns="0" rIns="0" bIns="0" rtlCol="0" anchor="t"/>
+          <a:lstStyle/>
+          <a:p>
+            <a:pPr indent="0" marL="0">
+              <a:buNone/>
+            </a:pPr>
+            <a:r>
+              <a:rPr lang="en-US" sz="1700" b="1" dirty="0">
                 <a:solidFill>
                   <a:srgbClr val="FFFFFF"/>
                 </a:solidFill>
               </a:rPr>
-              <a:t>Otimizado</a:t>
+              <a:t>Classificar</a:t>
+            </a:r>
+            <a:endParaRPr lang="en-US" sz="1700" dirty="0"/>
+          </a:p>
+        </p:txBody>
+      </p:sp>
+      <p:sp>
+        <p:nvSpPr>
+          <p:cNvPr id="20" name="Text 15"/>
+          <p:cNvSpPr txBox="1"/>
+          <p:nvPr/>
+        </p:nvSpPr>
+        <p:spPr>
+          <a:xfrm>
+            <a:off x="6355080" y="3337560"/>
+            <a:ext cx="2194560" cy="1188720"/>
+          </a:xfrm>
+          <a:prstGeom prst="rect">
+            <a:avLst/>
+          </a:prstGeom>
+          <a:noFill/>
+          <a:ln/>
+        </p:spPr>
+        <p:txBody>
+          <a:bodyPr wrap="square" lIns="0" tIns="0" rIns="0" bIns="0" rtlCol="0" anchor="t"/>
+          <a:lstStyle/>
+          <a:p>
+            <a:pPr indent="0" marL="0">
+              <a:buNone/>
+            </a:pPr>
+            <a:r>
+              <a:rPr lang="en-US" sz="1300" dirty="0">
+                <a:solidFill>
+                  <a:srgbClr val="E6E9EF"/>
+                </a:solidFill>
+              </a:rPr>
+              <a:t>A IA propõe o tipo e até 8 ligações, cada uma com excerto e confiança; até 25 de cada vez</a:t>
             </a:r>
             <a:endParaRPr lang="en-US" sz="1300" dirty="0"/>
           </a:p>
@@ -4617,39 +4733,28 @@
       </p:sp>
       <p:sp>
         <p:nvSpPr>
-          <p:cNvPr id="21" name="Text 19"/>
-          <p:cNvSpPr txBox="1"/>
-          <p:nvPr/>
-        </p:nvSpPr>
-        <p:spPr>
-          <a:xfrm>
-            <a:off x="7955280" y="3017520"/>
-            <a:ext cx="3657600" cy="320040"/>
-          </a:xfrm>
-          <a:prstGeom prst="rect">
-            <a:avLst/>
-          </a:prstGeom>
-          <a:noFill/>
-          <a:ln/>
-        </p:spPr>
-        <p:txBody>
-          <a:bodyPr wrap="square" lIns="0" tIns="0" rIns="0" bIns="0" rtlCol="0" anchor="t"/>
-          <a:lstStyle/>
-          <a:p>
-            <a:pPr algn="r" indent="0" marL="0">
-              <a:buNone/>
-            </a:pPr>
-            <a:r>
-              <a:rPr lang="en-US" sz="1200" b="1" dirty="0">
-                <a:solidFill>
-                  <a:srgbClr val="8A6620"/>
-                </a:solidFill>
-              </a:rPr>
-              <a:t>Nível-alvo por omissão: 4 (Gerido)</a:t>
-            </a:r>
-            <a:endParaRPr lang="en-US" sz="1200" dirty="0"/>
-          </a:p>
-        </p:txBody>
+          <p:cNvPr id="21" name="seta-rep-2"/>
+          <p:cNvSpPr/>
+          <p:nvPr/>
+        </p:nvSpPr>
+        <p:spPr>
+          <a:xfrm>
+            <a:off x="8759952" y="3108960"/>
+            <a:ext cx="128016" cy="320040"/>
+          </a:xfrm>
+          <a:prstGeom prst="chevron">
+            <a:avLst/>
+          </a:prstGeom>
+          <a:solidFill>
+            <a:srgbClr val="CFA04A"/>
+          </a:solidFill>
+          <a:ln w="12700">
+            <a:solidFill>
+              <a:srgbClr val="CFA04A"/>
+            </a:solidFill>
+            <a:prstDash val="solid"/>
+          </a:ln>
+        </p:spPr>
       </p:sp>
       <p:sp>
         <p:nvSpPr>
@@ -4659,12 +4764,12 @@
         </p:nvSpPr>
         <p:spPr>
           <a:xfrm>
-            <a:off x="548640" y="3657600"/>
-            <a:ext cx="2606040" cy="2103120"/>
+            <a:off x="8915400" y="1874520"/>
+            <a:ext cx="2606040" cy="2423160"/>
           </a:xfrm>
           <a:prstGeom prst="roundRect">
             <a:avLst>
-              <a:gd name="adj" fmla="val 5217"/>
+              <a:gd name="adj" fmla="val 4528"/>
             </a:avLst>
           </a:prstGeom>
           <a:solidFill>
@@ -4680,363 +4785,139 @@
       </p:sp>
       <p:sp>
         <p:nvSpPr>
-          <p:cNvPr id="23" name="Text 21"/>
-          <p:cNvSpPr txBox="1"/>
-          <p:nvPr/>
-        </p:nvSpPr>
-        <p:spPr>
-          <a:xfrm>
-            <a:off x="777240" y="3840480"/>
-            <a:ext cx="2194560" cy="411480"/>
-          </a:xfrm>
-          <a:prstGeom prst="rect">
-            <a:avLst/>
-          </a:prstGeom>
-          <a:noFill/>
-          <a:ln/>
-        </p:spPr>
-        <p:txBody>
-          <a:bodyPr wrap="square" lIns="0" tIns="0" rIns="0" bIns="0" rtlCol="0" anchor="t"/>
-          <a:lstStyle/>
-          <a:p>
-            <a:pPr indent="0" marL="0">
-              <a:buNone/>
-            </a:pPr>
-            <a:r>
-              <a:rPr lang="en-US" sz="1700" b="1" dirty="0">
-                <a:solidFill>
-                  <a:srgbClr val="070A13"/>
-                </a:solidFill>
-              </a:rPr>
-              <a:t>Avaliação</a:t>
-            </a:r>
-            <a:endParaRPr lang="en-US" sz="1700" dirty="0"/>
-          </a:p>
-        </p:txBody>
-      </p:sp>
-      <p:sp>
-        <p:nvSpPr>
-          <p:cNvPr id="24" name="Text 22"/>
-          <p:cNvSpPr txBox="1"/>
-          <p:nvPr/>
-        </p:nvSpPr>
-        <p:spPr>
-          <a:xfrm>
-            <a:off x="777240" y="4343400"/>
-            <a:ext cx="2194560" cy="1280160"/>
-          </a:xfrm>
-          <a:prstGeom prst="rect">
-            <a:avLst/>
-          </a:prstGeom>
-          <a:noFill/>
-          <a:ln/>
-        </p:spPr>
-        <p:txBody>
-          <a:bodyPr wrap="square" lIns="0" tIns="0" rIns="0" bIns="0" rtlCol="0" anchor="t"/>
-          <a:lstStyle/>
-          <a:p>
-            <a:pPr indent="0" marL="0">
-              <a:buNone/>
-            </a:pPr>
-            <a:r>
-              <a:rPr lang="en-US" sz="1300" dirty="0">
-                <a:solidFill>
-                  <a:srgbClr val="5B6474"/>
-                </a:solidFill>
-              </a:rPr>
-              <a:t>O consultor cria-a com os referenciais (ex.: NIS2 e ISO/IEC 27001)</a:t>
-            </a:r>
-            <a:endParaRPr lang="en-US" sz="1300" dirty="0"/>
-          </a:p>
-        </p:txBody>
-      </p:sp>
-      <p:sp>
-        <p:nvSpPr>
-          <p:cNvPr id="25" name="seta-0"/>
+          <p:cNvPr id="23" name="icon-bg-58"/>
           <p:cNvSpPr/>
           <p:nvPr/>
         </p:nvSpPr>
         <p:spPr>
           <a:xfrm>
-            <a:off x="3182112" y="4526280"/>
-            <a:ext cx="128016" cy="320040"/>
-          </a:xfrm>
-          <a:prstGeom prst="chevron">
+            <a:off x="9144000" y="2103120"/>
+            <a:ext cx="640080" cy="640080"/>
+          </a:xfrm>
+          <a:prstGeom prst="ellipse">
             <a:avLst/>
           </a:prstGeom>
           <a:solidFill>
-            <a:srgbClr val="CFA04A"/>
+            <a:srgbClr val="070A13"/>
           </a:solidFill>
           <a:ln w="12700">
             <a:solidFill>
-              <a:srgbClr val="CFA04A"/>
+              <a:srgbClr val="070A13"/>
             </a:solidFill>
             <a:prstDash val="solid"/>
           </a:ln>
         </p:spPr>
       </p:sp>
-      <p:sp>
-        <p:nvSpPr>
-          <p:cNvPr id="26" name="card-58"/>
+      <p:pic>
+        <p:nvPicPr>
+          <p:cNvPr id="24" name="icon-58" descr="preencoded.png">    </p:cNvPr>
+          <p:cNvPicPr>
+            <a:picLocks noChangeAspect="1"/>
+          </p:cNvPicPr>
+          <p:nvPr/>
+        </p:nvPicPr>
+        <p:blipFill>
+          <a:blip r:embed="rId4"/>
+          <a:stretch>
+            <a:fillRect/>
+          </a:stretch>
+        </p:blipFill>
+        <p:spPr>
+          <a:xfrm>
+            <a:off x="9284818" y="2243938"/>
+            <a:ext cx="358445" cy="358445"/>
+          </a:xfrm>
+          <a:prstGeom prst="rect">
+            <a:avLst/>
+          </a:prstGeom>
+        </p:spPr>
+      </p:pic>
+      <p:sp>
+        <p:nvSpPr>
+          <p:cNvPr id="25" name="Text 19"/>
+          <p:cNvSpPr txBox="1"/>
+          <p:nvPr/>
+        </p:nvSpPr>
+        <p:spPr>
+          <a:xfrm>
+            <a:off x="9144000" y="2880360"/>
+            <a:ext cx="2194560" cy="411480"/>
+          </a:xfrm>
+          <a:prstGeom prst="rect">
+            <a:avLst/>
+          </a:prstGeom>
+          <a:noFill/>
+          <a:ln/>
+        </p:spPr>
+        <p:txBody>
+          <a:bodyPr wrap="square" lIns="0" tIns="0" rIns="0" bIns="0" rtlCol="0" anchor="t"/>
+          <a:lstStyle/>
+          <a:p>
+            <a:pPr indent="0" marL="0">
+              <a:buNone/>
+            </a:pPr>
+            <a:r>
+              <a:rPr lang="en-US" sz="1700" b="1" dirty="0">
+                <a:solidFill>
+                  <a:srgbClr val="111827"/>
+                </a:solidFill>
+              </a:rPr>
+              <a:t>Rever e indexar</a:t>
+            </a:r>
+            <a:endParaRPr lang="en-US" sz="1700" dirty="0"/>
+          </a:p>
+        </p:txBody>
+      </p:sp>
+      <p:sp>
+        <p:nvSpPr>
+          <p:cNvPr id="26" name="Text 20"/>
+          <p:cNvSpPr txBox="1"/>
+          <p:nvPr/>
+        </p:nvSpPr>
+        <p:spPr>
+          <a:xfrm>
+            <a:off x="9144000" y="3337560"/>
+            <a:ext cx="2194560" cy="1188720"/>
+          </a:xfrm>
+          <a:prstGeom prst="rect">
+            <a:avLst/>
+          </a:prstGeom>
+          <a:noFill/>
+          <a:ln/>
+        </p:spPr>
+        <p:txBody>
+          <a:bodyPr wrap="square" lIns="0" tIns="0" rIns="0" bIns="0" rtlCol="0" anchor="t"/>
+          <a:lstStyle/>
+          <a:p>
+            <a:pPr indent="0" marL="0">
+              <a:buNone/>
+            </a:pPr>
+            <a:r>
+              <a:rPr lang="en-US" sz="1300" dirty="0">
+                <a:solidFill>
+                  <a:srgbClr val="5B6474"/>
+                </a:solidFill>
+              </a:rPr>
+              <a:t>Uma pessoa confirma; nasce uma evidência Por rever; nada muda de estado sozinho</a:t>
+            </a:r>
+            <a:endParaRPr lang="en-US" sz="1300" dirty="0"/>
+          </a:p>
+        </p:txBody>
+      </p:sp>
+      <p:sp>
+        <p:nvSpPr>
+          <p:cNvPr id="27" name="card-59"/>
           <p:cNvSpPr/>
           <p:nvPr/>
         </p:nvSpPr>
         <p:spPr>
           <a:xfrm>
-            <a:off x="3337560" y="3657600"/>
-            <a:ext cx="2606040" cy="2103120"/>
+            <a:off x="548640" y="4572000"/>
+            <a:ext cx="11064240" cy="1097280"/>
           </a:xfrm>
           <a:prstGeom prst="roundRect">
             <a:avLst>
-              <a:gd name="adj" fmla="val 5217"/>
-            </a:avLst>
-          </a:prstGeom>
-          <a:solidFill>
-            <a:srgbClr val="F3F5F8"/>
-          </a:solidFill>
-          <a:ln w="12700">
-            <a:solidFill>
-              <a:srgbClr val="F3F5F8"/>
-            </a:solidFill>
-            <a:prstDash val="solid"/>
-          </a:ln>
-        </p:spPr>
-      </p:sp>
-      <p:sp>
-        <p:nvSpPr>
-          <p:cNvPr id="27" name="Text 25"/>
-          <p:cNvSpPr txBox="1"/>
-          <p:nvPr/>
-        </p:nvSpPr>
-        <p:spPr>
-          <a:xfrm>
-            <a:off x="3566160" y="3840480"/>
-            <a:ext cx="2194560" cy="411480"/>
-          </a:xfrm>
-          <a:prstGeom prst="rect">
-            <a:avLst/>
-          </a:prstGeom>
-          <a:noFill/>
-          <a:ln/>
-        </p:spPr>
-        <p:txBody>
-          <a:bodyPr wrap="square" lIns="0" tIns="0" rIns="0" bIns="0" rtlCol="0" anchor="t"/>
-          <a:lstStyle/>
-          <a:p>
-            <a:pPr indent="0" marL="0">
-              <a:buNone/>
-            </a:pPr>
-            <a:r>
-              <a:rPr lang="en-US" sz="1700" b="1" dirty="0">
-                <a:solidFill>
-                  <a:srgbClr val="070A13"/>
-                </a:solidFill>
-              </a:rPr>
-              <a:t>Respostas</a:t>
-            </a:r>
-            <a:endParaRPr lang="en-US" sz="1700" dirty="0"/>
-          </a:p>
-        </p:txBody>
-      </p:sp>
-      <p:sp>
-        <p:nvSpPr>
-          <p:cNvPr id="28" name="Text 26"/>
-          <p:cNvSpPr txBox="1"/>
-          <p:nvPr/>
-        </p:nvSpPr>
-        <p:spPr>
-          <a:xfrm>
-            <a:off x="3566160" y="4343400"/>
-            <a:ext cx="2194560" cy="1280160"/>
-          </a:xfrm>
-          <a:prstGeom prst="rect">
-            <a:avLst/>
-          </a:prstGeom>
-          <a:noFill/>
-          <a:ln/>
-        </p:spPr>
-        <p:txBody>
-          <a:bodyPr wrap="square" lIns="0" tIns="0" rIns="0" bIns="0" rtlCol="0" anchor="t"/>
-          <a:lstStyle/>
-          <a:p>
-            <a:pPr indent="0" marL="0">
-              <a:buNone/>
-            </a:pPr>
-            <a:r>
-              <a:rPr lang="en-US" sz="1300" dirty="0">
-                <a:solidFill>
-                  <a:srgbClr val="5B6474"/>
-                </a:solidFill>
-              </a:rPr>
-              <a:t>A equipa responde e liga evidências a cada pergunta</a:t>
-            </a:r>
-            <a:endParaRPr lang="en-US" sz="1300" dirty="0"/>
-          </a:p>
-        </p:txBody>
-      </p:sp>
-      <p:sp>
-        <p:nvSpPr>
-          <p:cNvPr id="29" name="seta-1"/>
-          <p:cNvSpPr/>
-          <p:nvPr/>
-        </p:nvSpPr>
-        <p:spPr>
-          <a:xfrm>
-            <a:off x="5971032" y="4526280"/>
-            <a:ext cx="128016" cy="320040"/>
-          </a:xfrm>
-          <a:prstGeom prst="chevron">
-            <a:avLst/>
-          </a:prstGeom>
-          <a:solidFill>
-            <a:srgbClr val="CFA04A"/>
-          </a:solidFill>
-          <a:ln w="12700">
-            <a:solidFill>
-              <a:srgbClr val="CFA04A"/>
-            </a:solidFill>
-            <a:prstDash val="solid"/>
-          </a:ln>
-        </p:spPr>
-      </p:sp>
-      <p:sp>
-        <p:nvSpPr>
-          <p:cNvPr id="30" name="card-59"/>
-          <p:cNvSpPr/>
-          <p:nvPr/>
-        </p:nvSpPr>
-        <p:spPr>
-          <a:xfrm>
-            <a:off x="6126480" y="3657600"/>
-            <a:ext cx="2606040" cy="2103120"/>
-          </a:xfrm>
-          <a:prstGeom prst="roundRect">
-            <a:avLst>
-              <a:gd name="adj" fmla="val 5217"/>
-            </a:avLst>
-          </a:prstGeom>
-          <a:solidFill>
-            <a:srgbClr val="F3F5F8"/>
-          </a:solidFill>
-          <a:ln w="12700">
-            <a:solidFill>
-              <a:srgbClr val="F3F5F8"/>
-            </a:solidFill>
-            <a:prstDash val="solid"/>
-          </a:ln>
-        </p:spPr>
-      </p:sp>
-      <p:sp>
-        <p:nvSpPr>
-          <p:cNvPr id="31" name="Text 29"/>
-          <p:cNvSpPr txBox="1"/>
-          <p:nvPr/>
-        </p:nvSpPr>
-        <p:spPr>
-          <a:xfrm>
-            <a:off x="6355080" y="3840480"/>
-            <a:ext cx="2194560" cy="411480"/>
-          </a:xfrm>
-          <a:prstGeom prst="rect">
-            <a:avLst/>
-          </a:prstGeom>
-          <a:noFill/>
-          <a:ln/>
-        </p:spPr>
-        <p:txBody>
-          <a:bodyPr wrap="square" lIns="0" tIns="0" rIns="0" bIns="0" rtlCol="0" anchor="t"/>
-          <a:lstStyle/>
-          <a:p>
-            <a:pPr indent="0" marL="0">
-              <a:buNone/>
-            </a:pPr>
-            <a:r>
-              <a:rPr lang="en-US" sz="1700" b="1" dirty="0">
-                <a:solidFill>
-                  <a:srgbClr val="070A13"/>
-                </a:solidFill>
-              </a:rPr>
-              <a:t>Pontuação</a:t>
-            </a:r>
-            <a:endParaRPr lang="en-US" sz="1700" dirty="0"/>
-          </a:p>
-        </p:txBody>
-      </p:sp>
-      <p:sp>
-        <p:nvSpPr>
-          <p:cNvPr id="32" name="Text 30"/>
-          <p:cNvSpPr txBox="1"/>
-          <p:nvPr/>
-        </p:nvSpPr>
-        <p:spPr>
-          <a:xfrm>
-            <a:off x="6355080" y="4343400"/>
-            <a:ext cx="2194560" cy="1280160"/>
-          </a:xfrm>
-          <a:prstGeom prst="rect">
-            <a:avLst/>
-          </a:prstGeom>
-          <a:noFill/>
-          <a:ln/>
-        </p:spPr>
-        <p:txBody>
-          <a:bodyPr wrap="square" lIns="0" tIns="0" rIns="0" bIns="0" rtlCol="0" anchor="t"/>
-          <a:lstStyle/>
-          <a:p>
-            <a:pPr indent="0" marL="0">
-              <a:buNone/>
-            </a:pPr>
-            <a:r>
-              <a:rPr lang="en-US" sz="1300" dirty="0">
-                <a:solidFill>
-                  <a:srgbClr val="5B6474"/>
-                </a:solidFill>
-              </a:rPr>
-              <a:t>Por domínio, por referencial e global</a:t>
-            </a:r>
-            <a:endParaRPr lang="en-US" sz="1300" dirty="0"/>
-          </a:p>
-        </p:txBody>
-      </p:sp>
-      <p:sp>
-        <p:nvSpPr>
-          <p:cNvPr id="33" name="seta-2"/>
-          <p:cNvSpPr/>
-          <p:nvPr/>
-        </p:nvSpPr>
-        <p:spPr>
-          <a:xfrm>
-            <a:off x="8759952" y="4526280"/>
-            <a:ext cx="128016" cy="320040"/>
-          </a:xfrm>
-          <a:prstGeom prst="chevron">
-            <a:avLst/>
-          </a:prstGeom>
-          <a:solidFill>
-            <a:srgbClr val="CFA04A"/>
-          </a:solidFill>
-          <a:ln w="12700">
-            <a:solidFill>
-              <a:srgbClr val="CFA04A"/>
-            </a:solidFill>
-            <a:prstDash val="solid"/>
-          </a:ln>
-        </p:spPr>
-      </p:sp>
-      <p:sp>
-        <p:nvSpPr>
-          <p:cNvPr id="34" name="card-60"/>
-          <p:cNvSpPr/>
-          <p:nvPr/>
-        </p:nvSpPr>
-        <p:spPr>
-          <a:xfrm>
-            <a:off x="8915400" y="3657600"/>
-            <a:ext cx="2606040" cy="2103120"/>
-          </a:xfrm>
-          <a:prstGeom prst="roundRect">
-            <a:avLst>
-              <a:gd name="adj" fmla="val 5217"/>
+              <a:gd name="adj" fmla="val 10000"/>
             </a:avLst>
           </a:prstGeom>
           <a:solidFill>
@@ -5052,73 +4933,48 @@
       </p:sp>
       <p:sp>
         <p:nvSpPr>
-          <p:cNvPr id="35" name="Text 33"/>
-          <p:cNvSpPr txBox="1"/>
-          <p:nvPr/>
-        </p:nvSpPr>
-        <p:spPr>
-          <a:xfrm>
-            <a:off x="9144000" y="3840480"/>
-            <a:ext cx="2194560" cy="411480"/>
-          </a:xfrm>
-          <a:prstGeom prst="rect">
-            <a:avLst/>
-          </a:prstGeom>
-          <a:noFill/>
-          <a:ln/>
-        </p:spPr>
-        <p:txBody>
-          <a:bodyPr wrap="square" lIns="0" tIns="0" rIns="0" bIns="0" rtlCol="0" anchor="t"/>
+          <p:cNvPr id="28" name="Text 22"/>
+          <p:cNvSpPr txBox="1"/>
+          <p:nvPr/>
+        </p:nvSpPr>
+        <p:spPr>
+          <a:xfrm>
+            <a:off x="822960" y="4709160"/>
+            <a:ext cx="10515600" cy="822960"/>
+          </a:xfrm>
+          <a:prstGeom prst="rect">
+            <a:avLst/>
+          </a:prstGeom>
+          <a:noFill/>
+          <a:ln/>
+        </p:spPr>
+        <p:txBody>
+          <a:bodyPr wrap="square" lIns="0" tIns="0" rIns="0" bIns="0" rtlCol="0" anchor="ctr"/>
           <a:lstStyle/>
           <a:p>
             <a:pPr indent="0" marL="0">
               <a:buNone/>
             </a:pPr>
             <a:r>
-              <a:rPr lang="en-US" sz="1700" b="1" dirty="0">
+              <a:rPr lang="en-US" sz="1400" b="1" dirty="0">
                 <a:solidFill>
                   <a:srgbClr val="17766C"/>
                 </a:solidFill>
               </a:rPr>
-              <a:t>Plano de ação</a:t>
-            </a:r>
-            <a:endParaRPr lang="en-US" sz="1700" dirty="0"/>
-          </a:p>
-        </p:txBody>
-      </p:sp>
-      <p:sp>
-        <p:nvSpPr>
-          <p:cNvPr id="36" name="Text 34"/>
-          <p:cNvSpPr txBox="1"/>
-          <p:nvPr/>
-        </p:nvSpPr>
-        <p:spPr>
-          <a:xfrm>
-            <a:off x="9144000" y="4343400"/>
-            <a:ext cx="2194560" cy="1280160"/>
-          </a:xfrm>
-          <a:prstGeom prst="rect">
-            <a:avLst/>
-          </a:prstGeom>
-          <a:noFill/>
-          <a:ln/>
-        </p:spPr>
-        <p:txBody>
-          <a:bodyPr wrap="square" lIns="0" tIns="0" rIns="0" bIns="0" rtlCol="0" anchor="t"/>
-          <a:lstStyle/>
-          <a:p>
+              <a:t>Qualidade das propostas: </a:t>
+            </a:r>
             <a:pPr indent="0" marL="0">
               <a:buNone/>
             </a:pPr>
             <a:r>
-              <a:rPr lang="en-US" sz="1300" dirty="0">
-                <a:solidFill>
-                  <a:srgbClr val="5B6474"/>
-                </a:solidFill>
-              </a:rPr>
-              <a:t>Recomendações com prioridade, esforço e prazo, que viram tarefas</a:t>
-            </a:r>
-            <a:endParaRPr lang="en-US" sz="1300" dirty="0"/>
+              <a:rPr lang="en-US" sz="1400" dirty="0">
+                <a:solidFill>
+                  <a:srgbClr val="111827"/>
+                </a:solidFill>
+              </a:rPr>
+              <a:t>quantas ligações propostas as pessoas mantêm, por nível de confiança. Documentos com endereços de ativos expostos à Internet nunca seguem para a IA.</a:t>
+            </a:r>
+            <a:endParaRPr lang="en-US" sz="1400" dirty="0"/>
           </a:p>
         </p:txBody>
       </p:sp>
@@ -5224,7 +5080,7 @@
                   <a:schemeClr val="tx1"/>
                 </a:solidFill>
               </a:rPr>
-              <a:t>O assistente de IA prepara rascunhos, não decide</a:t>
+              <a:t>Avaliar a maturidade de 0 a 5 e transformar lacunas em tarefas</a:t>
             </a:r>
             <a:endParaRPr lang="en-US" sz="3200" dirty="0"/>
           </a:p>
@@ -5232,215 +5088,513 @@
       </p:sp>
       <p:sp>
         <p:nvSpPr>
-          <p:cNvPr id="3" name="icon-bg-61"/>
+          <p:cNvPr id="3" name="card-60"/>
           <p:cNvSpPr/>
           <p:nvPr/>
         </p:nvSpPr>
         <p:spPr>
           <a:xfrm>
-            <a:off x="548640" y="1417320"/>
-            <a:ext cx="731520" cy="731520"/>
-          </a:xfrm>
-          <a:prstGeom prst="ellipse">
-            <a:avLst/>
+            <a:off x="548640" y="1508760"/>
+            <a:ext cx="1737360" cy="1417320"/>
+          </a:xfrm>
+          <a:prstGeom prst="roundRect">
+            <a:avLst>
+              <a:gd name="adj" fmla="val 7742"/>
+            </a:avLst>
           </a:prstGeom>
           <a:solidFill>
-            <a:schemeClr val="tx1"/>
+            <a:srgbClr val="E9EDF2"/>
           </a:solidFill>
           <a:ln w="12700">
             <a:solidFill>
-              <a:schemeClr val="tx1"/>
+              <a:srgbClr val="E9EDF2"/>
             </a:solidFill>
             <a:prstDash val="solid"/>
           </a:ln>
         </p:spPr>
       </p:sp>
-      <p:pic>
-        <p:nvPicPr>
-          <p:cNvPr id="4" name="icon-61" descr="preencoded.png">    </p:cNvPr>
-          <p:cNvPicPr>
-            <a:picLocks noChangeAspect="1"/>
-          </p:cNvPicPr>
-          <p:nvPr/>
-        </p:nvPicPr>
-        <p:blipFill>
-          <a:blip r:embed="rId1"/>
-          <a:stretch>
-            <a:fillRect/>
-          </a:stretch>
-        </p:blipFill>
-        <p:spPr>
-          <a:xfrm>
-            <a:off x="709574" y="1578254"/>
-            <a:ext cx="409651" cy="409651"/>
-          </a:xfrm>
-          <a:prstGeom prst="rect">
-            <a:avLst/>
-          </a:prstGeom>
-        </p:spPr>
-      </p:pic>
-      <p:sp>
-        <p:nvSpPr>
-          <p:cNvPr id="5" name="Text 2"/>
-          <p:cNvSpPr txBox="1"/>
-          <p:nvPr/>
-        </p:nvSpPr>
-        <p:spPr>
-          <a:xfrm>
-            <a:off x="1463040" y="1508760"/>
-            <a:ext cx="4572000" cy="594360"/>
-          </a:xfrm>
-          <a:prstGeom prst="rect">
-            <a:avLst/>
-          </a:prstGeom>
-          <a:noFill/>
-          <a:ln/>
-        </p:spPr>
-        <p:txBody>
-          <a:bodyPr wrap="square" lIns="0" tIns="0" rIns="0" bIns="0" rtlCol="0" anchor="t"/>
-          <a:lstStyle/>
-          <a:p>
-            <a:pPr indent="0" marL="0">
-              <a:buNone/>
-            </a:pPr>
-            <a:r>
-              <a:rPr lang="en-US" sz="1700" b="1" dirty="0">
+      <p:sp>
+        <p:nvSpPr>
+          <p:cNvPr id="4" name="Text 2"/>
+          <p:cNvSpPr txBox="1"/>
+          <p:nvPr/>
+        </p:nvSpPr>
+        <p:spPr>
+          <a:xfrm>
+            <a:off x="548640" y="1600200"/>
+            <a:ext cx="1737360" cy="685800"/>
+          </a:xfrm>
+          <a:prstGeom prst="rect">
+            <a:avLst/>
+          </a:prstGeom>
+          <a:noFill/>
+          <a:ln/>
+        </p:spPr>
+        <p:txBody>
+          <a:bodyPr wrap="square" lIns="0" tIns="0" rIns="0" bIns="0" rtlCol="0" anchor="t"/>
+          <a:lstStyle/>
+          <a:p>
+            <a:pPr algn="ctr" indent="0" marL="0">
+              <a:buNone/>
+            </a:pPr>
+            <a:r>
+              <a:rPr lang="en-US" sz="3600" b="1" dirty="0">
+                <a:solidFill>
+                  <a:srgbClr val="070A13"/>
+                </a:solidFill>
+              </a:rPr>
+              <a:t>0</a:t>
+            </a:r>
+            <a:endParaRPr lang="en-US" sz="3600" dirty="0"/>
+          </a:p>
+        </p:txBody>
+      </p:sp>
+      <p:sp>
+        <p:nvSpPr>
+          <p:cNvPr id="5" name="Text 3"/>
+          <p:cNvSpPr txBox="1"/>
+          <p:nvPr/>
+        </p:nvSpPr>
+        <p:spPr>
+          <a:xfrm>
+            <a:off x="640080" y="2331720"/>
+            <a:ext cx="1554480" cy="502920"/>
+          </a:xfrm>
+          <a:prstGeom prst="rect">
+            <a:avLst/>
+          </a:prstGeom>
+          <a:noFill/>
+          <a:ln/>
+        </p:spPr>
+        <p:txBody>
+          <a:bodyPr wrap="square" lIns="0" tIns="0" rIns="0" bIns="0" rtlCol="0" anchor="t"/>
+          <a:lstStyle/>
+          <a:p>
+            <a:pPr algn="ctr" indent="0" marL="0">
+              <a:buNone/>
+            </a:pPr>
+            <a:r>
+              <a:rPr lang="en-US" sz="1300" b="1" dirty="0">
                 <a:solidFill>
                   <a:srgbClr val="111827"/>
                 </a:solidFill>
               </a:rPr>
-              <a:t>Ativo só onde há documentos para construir ou analisar</a:t>
-            </a:r>
-            <a:endParaRPr lang="en-US" sz="1700" dirty="0"/>
-          </a:p>
-        </p:txBody>
-      </p:sp>
-      <p:sp>
-        <p:nvSpPr>
-          <p:cNvPr id="6" name="Text 3"/>
-          <p:cNvSpPr txBox="1"/>
-          <p:nvPr/>
-        </p:nvSpPr>
-        <p:spPr>
-          <a:xfrm>
-            <a:off x="548640" y="2377440"/>
-            <a:ext cx="5486400" cy="2743200"/>
-          </a:xfrm>
-          <a:prstGeom prst="rect">
-            <a:avLst/>
-          </a:prstGeom>
-          <a:noFill/>
-          <a:ln/>
-        </p:spPr>
-        <p:txBody>
-          <a:bodyPr wrap="square" lIns="0" tIns="0" rIns="0" bIns="0" rtlCol="0" anchor="t"/>
-          <a:lstStyle/>
-          <a:p>
-            <a:pPr marL="342900" indent="-342900">
-              <a:spcAft>
-                <a:spcPts val="800"/>
-              </a:spcAft>
-              <a:buSzPct val="100000"/>
-              <a:buChar char="•"/>
-            </a:pPr>
-            <a:r>
-              <a:rPr lang="en-US" sz="1500" dirty="0">
-                <a:solidFill>
-                  <a:srgbClr val="111827"/>
-                </a:solidFill>
-              </a:rPr>
-              <a:t>Políticas, procedimentos e planos de evidências por medida</a:t>
-            </a:r>
-            <a:endParaRPr lang="en-US" sz="1500" dirty="0"/>
-          </a:p>
-          <a:p>
-            <a:pPr marL="342900" indent="-342900">
-              <a:spcAft>
-                <a:spcPts val="800"/>
-              </a:spcAft>
-              <a:buSzPct val="100000"/>
-              <a:buChar char="•"/>
-            </a:pPr>
-            <a:r>
-              <a:rPr lang="en-US" sz="1500" dirty="0">
-                <a:solidFill>
-                  <a:srgbClr val="111827"/>
-                </a:solidFill>
-              </a:rPr>
-              <a:t>Análise de evidências face ao critério oficial</a:t>
-            </a:r>
-            <a:endParaRPr lang="en-US" sz="1500" dirty="0"/>
-          </a:p>
-          <a:p>
-            <a:pPr marL="342900" indent="-342900">
-              <a:spcAft>
-                <a:spcPts val="800"/>
-              </a:spcAft>
-              <a:buSzPct val="100000"/>
-              <a:buChar char="•"/>
-            </a:pPr>
-            <a:r>
-              <a:rPr lang="en-US" sz="1500" dirty="0">
-                <a:solidFill>
-                  <a:srgbClr val="111827"/>
-                </a:solidFill>
-              </a:rPr>
-              <a:t>Notificações de incidentes e relatório anual</a:t>
-            </a:r>
-            <a:endParaRPr lang="en-US" sz="1500" dirty="0"/>
-          </a:p>
-          <a:p>
-            <a:pPr marL="342900" indent="-342900">
-              <a:spcAft>
-                <a:spcPts val="800"/>
-              </a:spcAft>
-              <a:buSzPct val="100000"/>
-              <a:buChar char="•"/>
-            </a:pPr>
-            <a:r>
-              <a:rPr lang="en-US" sz="1500" dirty="0">
-                <a:solidFill>
-                  <a:srgbClr val="111827"/>
-                </a:solidFill>
-              </a:rPr>
-              <a:t>Questionários a fornecedores e leitura de respostas</a:t>
-            </a:r>
-            <a:endParaRPr lang="en-US" sz="1500" dirty="0"/>
-          </a:p>
-          <a:p>
-            <a:pPr marL="342900" indent="-342900">
-              <a:spcAft>
-                <a:spcPts val="800"/>
-              </a:spcAft>
-              <a:buSzPct val="100000"/>
-              <a:buChar char="•"/>
-            </a:pPr>
-            <a:r>
-              <a:rPr lang="en-US" sz="1500" dirty="0">
-                <a:solidFill>
-                  <a:srgbClr val="111827"/>
-                </a:solidFill>
-              </a:rPr>
-              <a:t>Recomendações para o plano de ação</a:t>
-            </a:r>
-            <a:endParaRPr lang="en-US" sz="1500" dirty="0"/>
-          </a:p>
-        </p:txBody>
-      </p:sp>
-      <p:sp>
-        <p:nvSpPr>
-          <p:cNvPr id="7" name="card-62"/>
+              <a:t>Inexistente</a:t>
+            </a:r>
+            <a:endParaRPr lang="en-US" sz="1300" dirty="0"/>
+          </a:p>
+        </p:txBody>
+      </p:sp>
+      <p:sp>
+        <p:nvSpPr>
+          <p:cNvPr id="6" name="card-61"/>
           <p:cNvSpPr/>
           <p:nvPr/>
         </p:nvSpPr>
         <p:spPr>
           <a:xfrm>
-            <a:off x="6583680" y="1417320"/>
-            <a:ext cx="5029200" cy="4526280"/>
+            <a:off x="2404872" y="1508760"/>
+            <a:ext cx="1737360" cy="1417320"/>
           </a:xfrm>
           <a:prstGeom prst="roundRect">
             <a:avLst>
-              <a:gd name="adj" fmla="val 2424"/>
+              <a:gd name="adj" fmla="val 7742"/>
+            </a:avLst>
+          </a:prstGeom>
+          <a:solidFill>
+            <a:srgbClr val="DCE2EA"/>
+          </a:solidFill>
+          <a:ln w="12700">
+            <a:solidFill>
+              <a:srgbClr val="DCE2EA"/>
+            </a:solidFill>
+            <a:prstDash val="solid"/>
+          </a:ln>
+        </p:spPr>
+      </p:sp>
+      <p:sp>
+        <p:nvSpPr>
+          <p:cNvPr id="7" name="Text 5"/>
+          <p:cNvSpPr txBox="1"/>
+          <p:nvPr/>
+        </p:nvSpPr>
+        <p:spPr>
+          <a:xfrm>
+            <a:off x="2404872" y="1600200"/>
+            <a:ext cx="1737360" cy="685800"/>
+          </a:xfrm>
+          <a:prstGeom prst="rect">
+            <a:avLst/>
+          </a:prstGeom>
+          <a:noFill/>
+          <a:ln/>
+        </p:spPr>
+        <p:txBody>
+          <a:bodyPr wrap="square" lIns="0" tIns="0" rIns="0" bIns="0" rtlCol="0" anchor="t"/>
+          <a:lstStyle/>
+          <a:p>
+            <a:pPr algn="ctr" indent="0" marL="0">
+              <a:buNone/>
+            </a:pPr>
+            <a:r>
+              <a:rPr lang="en-US" sz="3600" b="1" dirty="0">
+                <a:solidFill>
+                  <a:srgbClr val="070A13"/>
+                </a:solidFill>
+              </a:rPr>
+              <a:t>1</a:t>
+            </a:r>
+            <a:endParaRPr lang="en-US" sz="3600" dirty="0"/>
+          </a:p>
+        </p:txBody>
+      </p:sp>
+      <p:sp>
+        <p:nvSpPr>
+          <p:cNvPr id="8" name="Text 6"/>
+          <p:cNvSpPr txBox="1"/>
+          <p:nvPr/>
+        </p:nvSpPr>
+        <p:spPr>
+          <a:xfrm>
+            <a:off x="2496312" y="2331720"/>
+            <a:ext cx="1554480" cy="502920"/>
+          </a:xfrm>
+          <a:prstGeom prst="rect">
+            <a:avLst/>
+          </a:prstGeom>
+          <a:noFill/>
+          <a:ln/>
+        </p:spPr>
+        <p:txBody>
+          <a:bodyPr wrap="square" lIns="0" tIns="0" rIns="0" bIns="0" rtlCol="0" anchor="t"/>
+          <a:lstStyle/>
+          <a:p>
+            <a:pPr algn="ctr" indent="0" marL="0">
+              <a:buNone/>
+            </a:pPr>
+            <a:r>
+              <a:rPr lang="en-US" sz="1300" b="1" dirty="0">
+                <a:solidFill>
+                  <a:srgbClr val="111827"/>
+                </a:solidFill>
+              </a:rPr>
+              <a:t>Inicial</a:t>
+            </a:r>
+            <a:endParaRPr lang="en-US" sz="1300" dirty="0"/>
+          </a:p>
+        </p:txBody>
+      </p:sp>
+      <p:sp>
+        <p:nvSpPr>
+          <p:cNvPr id="9" name="card-62"/>
+          <p:cNvSpPr/>
+          <p:nvPr/>
+        </p:nvSpPr>
+        <p:spPr>
+          <a:xfrm>
+            <a:off x="4261104" y="1508760"/>
+            <a:ext cx="1737360" cy="1417320"/>
+          </a:xfrm>
+          <a:prstGeom prst="roundRect">
+            <a:avLst>
+              <a:gd name="adj" fmla="val 7742"/>
+            </a:avLst>
+          </a:prstGeom>
+          <a:solidFill>
+            <a:srgbClr val="C6CFDB"/>
+          </a:solidFill>
+          <a:ln w="12700">
+            <a:solidFill>
+              <a:srgbClr val="C6CFDB"/>
+            </a:solidFill>
+            <a:prstDash val="solid"/>
+          </a:ln>
+        </p:spPr>
+      </p:sp>
+      <p:sp>
+        <p:nvSpPr>
+          <p:cNvPr id="10" name="Text 8"/>
+          <p:cNvSpPr txBox="1"/>
+          <p:nvPr/>
+        </p:nvSpPr>
+        <p:spPr>
+          <a:xfrm>
+            <a:off x="4261104" y="1600200"/>
+            <a:ext cx="1737360" cy="685800"/>
+          </a:xfrm>
+          <a:prstGeom prst="rect">
+            <a:avLst/>
+          </a:prstGeom>
+          <a:noFill/>
+          <a:ln/>
+        </p:spPr>
+        <p:txBody>
+          <a:bodyPr wrap="square" lIns="0" tIns="0" rIns="0" bIns="0" rtlCol="0" anchor="t"/>
+          <a:lstStyle/>
+          <a:p>
+            <a:pPr algn="ctr" indent="0" marL="0">
+              <a:buNone/>
+            </a:pPr>
+            <a:r>
+              <a:rPr lang="en-US" sz="3600" b="1" dirty="0">
+                <a:solidFill>
+                  <a:srgbClr val="070A13"/>
+                </a:solidFill>
+              </a:rPr>
+              <a:t>2</a:t>
+            </a:r>
+            <a:endParaRPr lang="en-US" sz="3600" dirty="0"/>
+          </a:p>
+        </p:txBody>
+      </p:sp>
+      <p:sp>
+        <p:nvSpPr>
+          <p:cNvPr id="11" name="Text 9"/>
+          <p:cNvSpPr txBox="1"/>
+          <p:nvPr/>
+        </p:nvSpPr>
+        <p:spPr>
+          <a:xfrm>
+            <a:off x="4352544" y="2331720"/>
+            <a:ext cx="1554480" cy="502920"/>
+          </a:xfrm>
+          <a:prstGeom prst="rect">
+            <a:avLst/>
+          </a:prstGeom>
+          <a:noFill/>
+          <a:ln/>
+        </p:spPr>
+        <p:txBody>
+          <a:bodyPr wrap="square" lIns="0" tIns="0" rIns="0" bIns="0" rtlCol="0" anchor="t"/>
+          <a:lstStyle/>
+          <a:p>
+            <a:pPr algn="ctr" indent="0" marL="0">
+              <a:buNone/>
+            </a:pPr>
+            <a:r>
+              <a:rPr lang="en-US" sz="1300" b="1" dirty="0">
+                <a:solidFill>
+                  <a:srgbClr val="111827"/>
+                </a:solidFill>
+              </a:rPr>
+              <a:t>Em desenvolvimento</a:t>
+            </a:r>
+            <a:endParaRPr lang="en-US" sz="1300" dirty="0"/>
+          </a:p>
+        </p:txBody>
+      </p:sp>
+      <p:sp>
+        <p:nvSpPr>
+          <p:cNvPr id="12" name="card-63"/>
+          <p:cNvSpPr/>
+          <p:nvPr/>
+        </p:nvSpPr>
+        <p:spPr>
+          <a:xfrm>
+            <a:off x="6117336" y="1508760"/>
+            <a:ext cx="1737360" cy="1417320"/>
+          </a:xfrm>
+          <a:prstGeom prst="roundRect">
+            <a:avLst>
+              <a:gd name="adj" fmla="val 7742"/>
+            </a:avLst>
+          </a:prstGeom>
+          <a:solidFill>
+            <a:srgbClr val="9AA7BA"/>
+          </a:solidFill>
+          <a:ln w="12700">
+            <a:solidFill>
+              <a:srgbClr val="9AA7BA"/>
+            </a:solidFill>
+            <a:prstDash val="solid"/>
+          </a:ln>
+        </p:spPr>
+      </p:sp>
+      <p:sp>
+        <p:nvSpPr>
+          <p:cNvPr id="13" name="Text 11"/>
+          <p:cNvSpPr txBox="1"/>
+          <p:nvPr/>
+        </p:nvSpPr>
+        <p:spPr>
+          <a:xfrm>
+            <a:off x="6117336" y="1600200"/>
+            <a:ext cx="1737360" cy="685800"/>
+          </a:xfrm>
+          <a:prstGeom prst="rect">
+            <a:avLst/>
+          </a:prstGeom>
+          <a:noFill/>
+          <a:ln/>
+        </p:spPr>
+        <p:txBody>
+          <a:bodyPr wrap="square" lIns="0" tIns="0" rIns="0" bIns="0" rtlCol="0" anchor="t"/>
+          <a:lstStyle/>
+          <a:p>
+            <a:pPr algn="ctr" indent="0" marL="0">
+              <a:buNone/>
+            </a:pPr>
+            <a:r>
+              <a:rPr lang="en-US" sz="3600" b="1" dirty="0">
+                <a:solidFill>
+                  <a:srgbClr val="070A13"/>
+                </a:solidFill>
+              </a:rPr>
+              <a:t>3</a:t>
+            </a:r>
+            <a:endParaRPr lang="en-US" sz="3600" dirty="0"/>
+          </a:p>
+        </p:txBody>
+      </p:sp>
+      <p:sp>
+        <p:nvSpPr>
+          <p:cNvPr id="14" name="Text 12"/>
+          <p:cNvSpPr txBox="1"/>
+          <p:nvPr/>
+        </p:nvSpPr>
+        <p:spPr>
+          <a:xfrm>
+            <a:off x="6208776" y="2331720"/>
+            <a:ext cx="1554480" cy="502920"/>
+          </a:xfrm>
+          <a:prstGeom prst="rect">
+            <a:avLst/>
+          </a:prstGeom>
+          <a:noFill/>
+          <a:ln/>
+        </p:spPr>
+        <p:txBody>
+          <a:bodyPr wrap="square" lIns="0" tIns="0" rIns="0" bIns="0" rtlCol="0" anchor="t"/>
+          <a:lstStyle/>
+          <a:p>
+            <a:pPr algn="ctr" indent="0" marL="0">
+              <a:buNone/>
+            </a:pPr>
+            <a:r>
+              <a:rPr lang="en-US" sz="1300" b="1" dirty="0">
+                <a:solidFill>
+                  <a:srgbClr val="111827"/>
+                </a:solidFill>
+              </a:rPr>
+              <a:t>Definido</a:t>
+            </a:r>
+            <a:endParaRPr lang="en-US" sz="1300" dirty="0"/>
+          </a:p>
+        </p:txBody>
+      </p:sp>
+      <p:sp>
+        <p:nvSpPr>
+          <p:cNvPr id="15" name="card-64"/>
+          <p:cNvSpPr/>
+          <p:nvPr/>
+        </p:nvSpPr>
+        <p:spPr>
+          <a:xfrm>
+            <a:off x="7973568" y="1508760"/>
+            <a:ext cx="1737360" cy="1417320"/>
+          </a:xfrm>
+          <a:prstGeom prst="roundRect">
+            <a:avLst>
+              <a:gd name="adj" fmla="val 7742"/>
+            </a:avLst>
+          </a:prstGeom>
+          <a:solidFill>
+            <a:srgbClr val="CFA04A"/>
+          </a:solidFill>
+          <a:ln w="12700">
+            <a:solidFill>
+              <a:srgbClr val="CFA04A"/>
+            </a:solidFill>
+            <a:prstDash val="solid"/>
+          </a:ln>
+        </p:spPr>
+      </p:sp>
+      <p:sp>
+        <p:nvSpPr>
+          <p:cNvPr id="16" name="Text 14"/>
+          <p:cNvSpPr txBox="1"/>
+          <p:nvPr/>
+        </p:nvSpPr>
+        <p:spPr>
+          <a:xfrm>
+            <a:off x="7973568" y="1600200"/>
+            <a:ext cx="1737360" cy="685800"/>
+          </a:xfrm>
+          <a:prstGeom prst="rect">
+            <a:avLst/>
+          </a:prstGeom>
+          <a:noFill/>
+          <a:ln/>
+        </p:spPr>
+        <p:txBody>
+          <a:bodyPr wrap="square" lIns="0" tIns="0" rIns="0" bIns="0" rtlCol="0" anchor="t"/>
+          <a:lstStyle/>
+          <a:p>
+            <a:pPr algn="ctr" indent="0" marL="0">
+              <a:buNone/>
+            </a:pPr>
+            <a:r>
+              <a:rPr lang="en-US" sz="3600" b="1" dirty="0">
+                <a:solidFill>
+                  <a:srgbClr val="070A13"/>
+                </a:solidFill>
+              </a:rPr>
+              <a:t>4</a:t>
+            </a:r>
+            <a:endParaRPr lang="en-US" sz="3600" dirty="0"/>
+          </a:p>
+        </p:txBody>
+      </p:sp>
+      <p:sp>
+        <p:nvSpPr>
+          <p:cNvPr id="17" name="Text 15"/>
+          <p:cNvSpPr txBox="1"/>
+          <p:nvPr/>
+        </p:nvSpPr>
+        <p:spPr>
+          <a:xfrm>
+            <a:off x="8065008" y="2331720"/>
+            <a:ext cx="1554480" cy="502920"/>
+          </a:xfrm>
+          <a:prstGeom prst="rect">
+            <a:avLst/>
+          </a:prstGeom>
+          <a:noFill/>
+          <a:ln/>
+        </p:spPr>
+        <p:txBody>
+          <a:bodyPr wrap="square" lIns="0" tIns="0" rIns="0" bIns="0" rtlCol="0" anchor="t"/>
+          <a:lstStyle/>
+          <a:p>
+            <a:pPr algn="ctr" indent="0" marL="0">
+              <a:buNone/>
+            </a:pPr>
+            <a:r>
+              <a:rPr lang="en-US" sz="1300" b="1" dirty="0">
+                <a:solidFill>
+                  <a:srgbClr val="111827"/>
+                </a:solidFill>
+              </a:rPr>
+              <a:t>Gerido</a:t>
+            </a:r>
+            <a:endParaRPr lang="en-US" sz="1300" dirty="0"/>
+          </a:p>
+        </p:txBody>
+      </p:sp>
+      <p:sp>
+        <p:nvSpPr>
+          <p:cNvPr id="18" name="card-65"/>
+          <p:cNvSpPr/>
+          <p:nvPr/>
+        </p:nvSpPr>
+        <p:spPr>
+          <a:xfrm>
+            <a:off x="9829800" y="1508760"/>
+            <a:ext cx="1737360" cy="1417320"/>
+          </a:xfrm>
+          <a:prstGeom prst="roundRect">
+            <a:avLst>
+              <a:gd name="adj" fmla="val 7742"/>
             </a:avLst>
           </a:prstGeom>
           <a:solidFill>
@@ -5456,14 +5610,149 @@
       </p:sp>
       <p:sp>
         <p:nvSpPr>
-          <p:cNvPr id="8" name="Text 5"/>
-          <p:cNvSpPr txBox="1"/>
-          <p:nvPr/>
-        </p:nvSpPr>
-        <p:spPr>
-          <a:xfrm>
-            <a:off x="6903720" y="1691640"/>
-            <a:ext cx="4389120" cy="320040"/>
+          <p:cNvPr id="19" name="Text 17"/>
+          <p:cNvSpPr txBox="1"/>
+          <p:nvPr/>
+        </p:nvSpPr>
+        <p:spPr>
+          <a:xfrm>
+            <a:off x="9829800" y="1600200"/>
+            <a:ext cx="1737360" cy="685800"/>
+          </a:xfrm>
+          <a:prstGeom prst="rect">
+            <a:avLst/>
+          </a:prstGeom>
+          <a:noFill/>
+          <a:ln/>
+        </p:spPr>
+        <p:txBody>
+          <a:bodyPr wrap="square" lIns="0" tIns="0" rIns="0" bIns="0" rtlCol="0" anchor="t"/>
+          <a:lstStyle/>
+          <a:p>
+            <a:pPr algn="ctr" indent="0" marL="0">
+              <a:buNone/>
+            </a:pPr>
+            <a:r>
+              <a:rPr lang="en-US" sz="3600" b="1" dirty="0">
+                <a:solidFill>
+                  <a:srgbClr val="CFA04A"/>
+                </a:solidFill>
+              </a:rPr>
+              <a:t>5</a:t>
+            </a:r>
+            <a:endParaRPr lang="en-US" sz="3600" dirty="0"/>
+          </a:p>
+        </p:txBody>
+      </p:sp>
+      <p:sp>
+        <p:nvSpPr>
+          <p:cNvPr id="20" name="Text 18"/>
+          <p:cNvSpPr txBox="1"/>
+          <p:nvPr/>
+        </p:nvSpPr>
+        <p:spPr>
+          <a:xfrm>
+            <a:off x="9921240" y="2331720"/>
+            <a:ext cx="1554480" cy="502920"/>
+          </a:xfrm>
+          <a:prstGeom prst="rect">
+            <a:avLst/>
+          </a:prstGeom>
+          <a:noFill/>
+          <a:ln/>
+        </p:spPr>
+        <p:txBody>
+          <a:bodyPr wrap="square" lIns="0" tIns="0" rIns="0" bIns="0" rtlCol="0" anchor="t"/>
+          <a:lstStyle/>
+          <a:p>
+            <a:pPr algn="ctr" indent="0" marL="0">
+              <a:buNone/>
+            </a:pPr>
+            <a:r>
+              <a:rPr lang="en-US" sz="1300" b="1" dirty="0">
+                <a:solidFill>
+                  <a:srgbClr val="FFFFFF"/>
+                </a:solidFill>
+              </a:rPr>
+              <a:t>Otimizado</a:t>
+            </a:r>
+            <a:endParaRPr lang="en-US" sz="1300" dirty="0"/>
+          </a:p>
+        </p:txBody>
+      </p:sp>
+      <p:sp>
+        <p:nvSpPr>
+          <p:cNvPr id="21" name="Text 19"/>
+          <p:cNvSpPr txBox="1"/>
+          <p:nvPr/>
+        </p:nvSpPr>
+        <p:spPr>
+          <a:xfrm>
+            <a:off x="7955280" y="3017520"/>
+            <a:ext cx="3657600" cy="320040"/>
+          </a:xfrm>
+          <a:prstGeom prst="rect">
+            <a:avLst/>
+          </a:prstGeom>
+          <a:noFill/>
+          <a:ln/>
+        </p:spPr>
+        <p:txBody>
+          <a:bodyPr wrap="square" lIns="0" tIns="0" rIns="0" bIns="0" rtlCol="0" anchor="t"/>
+          <a:lstStyle/>
+          <a:p>
+            <a:pPr algn="r" indent="0" marL="0">
+              <a:buNone/>
+            </a:pPr>
+            <a:r>
+              <a:rPr lang="en-US" sz="1200" b="1" dirty="0">
+                <a:solidFill>
+                  <a:srgbClr val="8A6620"/>
+                </a:solidFill>
+              </a:rPr>
+              <a:t>Nível-alvo por omissão: 4 (Gerido)</a:t>
+            </a:r>
+            <a:endParaRPr lang="en-US" sz="1200" dirty="0"/>
+          </a:p>
+        </p:txBody>
+      </p:sp>
+      <p:sp>
+        <p:nvSpPr>
+          <p:cNvPr id="22" name="card-66"/>
+          <p:cNvSpPr/>
+          <p:nvPr/>
+        </p:nvSpPr>
+        <p:spPr>
+          <a:xfrm>
+            <a:off x="548640" y="3657600"/>
+            <a:ext cx="2606040" cy="2103120"/>
+          </a:xfrm>
+          <a:prstGeom prst="roundRect">
+            <a:avLst>
+              <a:gd name="adj" fmla="val 5217"/>
+            </a:avLst>
+          </a:prstGeom>
+          <a:solidFill>
+            <a:srgbClr val="F3F5F8"/>
+          </a:solidFill>
+          <a:ln w="12700">
+            <a:solidFill>
+              <a:srgbClr val="F3F5F8"/>
+            </a:solidFill>
+            <a:prstDash val="solid"/>
+          </a:ln>
+        </p:spPr>
+      </p:sp>
+      <p:sp>
+        <p:nvSpPr>
+          <p:cNvPr id="23" name="Text 21"/>
+          <p:cNvSpPr txBox="1"/>
+          <p:nvPr/>
+        </p:nvSpPr>
+        <p:spPr>
+          <a:xfrm>
+            <a:off x="777240" y="3840480"/>
+            <a:ext cx="2194560" cy="411480"/>
           </a:xfrm>
           <a:prstGeom prst="rect">
             <a:avLst/>
@@ -5479,139 +5768,27 @@
               <a:buNone/>
             </a:pPr>
             <a:r>
-              <a:rPr lang="en-US" sz="1200" b="1" spc="300" kern="0" dirty="0">
-                <a:solidFill>
-                  <a:srgbClr val="CFA04A"/>
-                </a:solidFill>
-              </a:rPr>
-              <a:t>REGRAS</a:t>
-            </a:r>
-            <a:endParaRPr lang="en-US" sz="1200" dirty="0"/>
-          </a:p>
-        </p:txBody>
-      </p:sp>
-      <p:sp>
-        <p:nvSpPr>
-          <p:cNvPr id="9" name="Text 6"/>
-          <p:cNvSpPr txBox="1"/>
-          <p:nvPr/>
-        </p:nvSpPr>
-        <p:spPr>
-          <a:xfrm>
-            <a:off x="6903720" y="2148840"/>
-            <a:ext cx="4434840" cy="3566160"/>
-          </a:xfrm>
-          <a:prstGeom prst="rect">
-            <a:avLst/>
-          </a:prstGeom>
-          <a:noFill/>
-          <a:ln/>
-        </p:spPr>
-        <p:txBody>
-          <a:bodyPr wrap="square" lIns="0" tIns="0" rIns="0" bIns="0" rtlCol="0" anchor="t"/>
-          <a:lstStyle/>
-          <a:p>
-            <a:pPr marL="342900" indent="-342900">
-              <a:spcAft>
-                <a:spcPts val="1000"/>
-              </a:spcAft>
-              <a:buSzPct val="100000"/>
-              <a:buChar char="•"/>
-            </a:pPr>
-            <a:r>
-              <a:rPr lang="en-US" sz="1500" dirty="0">
-                <a:solidFill>
-                  <a:srgbClr val="E6E9EF"/>
-                </a:solidFill>
-              </a:rPr>
-              <a:t>Usa só os textos oficiais da Biblioteca Legal</a:t>
-            </a:r>
-            <a:endParaRPr lang="en-US" sz="1500" dirty="0"/>
-          </a:p>
-          <a:p>
-            <a:pPr marL="342900" indent="-342900">
-              <a:spcAft>
-                <a:spcPts val="1000"/>
-              </a:spcAft>
-              <a:buSzPct val="100000"/>
-              <a:buChar char="•"/>
-            </a:pPr>
-            <a:r>
-              <a:rPr lang="en-US" sz="1500" dirty="0">
-                <a:solidFill>
-                  <a:srgbClr val="E6E9EF"/>
-                </a:solidFill>
-              </a:rPr>
-              <a:t>O resultado é sempre um rascunho a aprovar por uma pessoa</a:t>
-            </a:r>
-            <a:endParaRPr lang="en-US" sz="1500" dirty="0"/>
-          </a:p>
-          <a:p>
-            <a:pPr marL="342900" indent="-342900">
-              <a:spcAft>
-                <a:spcPts val="1000"/>
-              </a:spcAft>
-              <a:buSzPct val="100000"/>
-              <a:buChar char="•"/>
-            </a:pPr>
-            <a:r>
-              <a:rPr lang="en-US" sz="1500" dirty="0">
-                <a:solidFill>
-                  <a:srgbClr val="E6E9EF"/>
-                </a:solidFill>
-              </a:rPr>
-              <a:t>Não recebe contactos, inventário de ativos nem evidências restritas</a:t>
-            </a:r>
-            <a:endParaRPr lang="en-US" sz="1500" dirty="0"/>
-          </a:p>
-          <a:p>
-            <a:pPr marL="342900" indent="-342900">
-              <a:spcAft>
-                <a:spcPts val="1000"/>
-              </a:spcAft>
-              <a:buSzPct val="100000"/>
-              <a:buChar char="•"/>
-            </a:pPr>
-            <a:r>
-              <a:rPr lang="en-US" sz="1500" dirty="0">
-                <a:solidFill>
-                  <a:srgbClr val="E6E9EF"/>
-                </a:solidFill>
-              </a:rPr>
-              <a:t>Cada pedido fica na auditoria e conta para a quota</a:t>
-            </a:r>
-            <a:endParaRPr lang="en-US" sz="1500" dirty="0"/>
-          </a:p>
-          <a:p>
-            <a:pPr marL="342900" indent="-342900">
-              <a:spcAft>
-                <a:spcPts val="1000"/>
-              </a:spcAft>
-              <a:buSzPct val="100000"/>
-              <a:buChar char="•"/>
-            </a:pPr>
-            <a:r>
-              <a:rPr lang="en-US" sz="1500" dirty="0">
-                <a:solidFill>
-                  <a:srgbClr val="E6E9EF"/>
-                </a:solidFill>
-              </a:rPr>
-              <a:t>Motor escolhido pelo administrador: Claude ou Base44</a:t>
-            </a:r>
-            <a:endParaRPr lang="en-US" sz="1500" dirty="0"/>
-          </a:p>
-        </p:txBody>
-      </p:sp>
-      <p:sp>
-        <p:nvSpPr>
-          <p:cNvPr id="10" name="Text 7"/>
-          <p:cNvSpPr txBox="1"/>
-          <p:nvPr/>
-        </p:nvSpPr>
-        <p:spPr>
-          <a:xfrm>
-            <a:off x="548640" y="5486400"/>
-            <a:ext cx="5486400" cy="320040"/>
+              <a:rPr lang="en-US" sz="1700" b="1" dirty="0">
+                <a:solidFill>
+                  <a:srgbClr val="070A13"/>
+                </a:solidFill>
+              </a:rPr>
+              <a:t>Avaliação</a:t>
+            </a:r>
+            <a:endParaRPr lang="en-US" sz="1700" dirty="0"/>
+          </a:p>
+        </p:txBody>
+      </p:sp>
+      <p:sp>
+        <p:nvSpPr>
+          <p:cNvPr id="24" name="Text 22"/>
+          <p:cNvSpPr txBox="1"/>
+          <p:nvPr/>
+        </p:nvSpPr>
+        <p:spPr>
+          <a:xfrm>
+            <a:off x="777240" y="4343400"/>
+            <a:ext cx="2194560" cy="1280160"/>
           </a:xfrm>
           <a:prstGeom prst="rect">
             <a:avLst/>
@@ -5627,14 +5804,386 @@
               <a:buNone/>
             </a:pPr>
             <a:r>
-              <a:rPr lang="en-US" sz="1200" dirty="0">
+              <a:rPr lang="en-US" sz="1300" dirty="0">
                 <a:solidFill>
                   <a:srgbClr val="5B6474"/>
                 </a:solidFill>
               </a:rPr>
-              <a:t>Incluído na licença Enterprise.</a:t>
-            </a:r>
-            <a:endParaRPr lang="en-US" sz="1200" dirty="0"/>
+              <a:t>O consultor cria-a com os referenciais (ex.: NIS2 e ISO/IEC 27001)</a:t>
+            </a:r>
+            <a:endParaRPr lang="en-US" sz="1300" dirty="0"/>
+          </a:p>
+        </p:txBody>
+      </p:sp>
+      <p:sp>
+        <p:nvSpPr>
+          <p:cNvPr id="25" name="seta-0"/>
+          <p:cNvSpPr/>
+          <p:nvPr/>
+        </p:nvSpPr>
+        <p:spPr>
+          <a:xfrm>
+            <a:off x="3182112" y="4526280"/>
+            <a:ext cx="128016" cy="320040"/>
+          </a:xfrm>
+          <a:prstGeom prst="chevron">
+            <a:avLst/>
+          </a:prstGeom>
+          <a:solidFill>
+            <a:srgbClr val="CFA04A"/>
+          </a:solidFill>
+          <a:ln w="12700">
+            <a:solidFill>
+              <a:srgbClr val="CFA04A"/>
+            </a:solidFill>
+            <a:prstDash val="solid"/>
+          </a:ln>
+        </p:spPr>
+      </p:sp>
+      <p:sp>
+        <p:nvSpPr>
+          <p:cNvPr id="26" name="card-67"/>
+          <p:cNvSpPr/>
+          <p:nvPr/>
+        </p:nvSpPr>
+        <p:spPr>
+          <a:xfrm>
+            <a:off x="3337560" y="3657600"/>
+            <a:ext cx="2606040" cy="2103120"/>
+          </a:xfrm>
+          <a:prstGeom prst="roundRect">
+            <a:avLst>
+              <a:gd name="adj" fmla="val 5217"/>
+            </a:avLst>
+          </a:prstGeom>
+          <a:solidFill>
+            <a:srgbClr val="F3F5F8"/>
+          </a:solidFill>
+          <a:ln w="12700">
+            <a:solidFill>
+              <a:srgbClr val="F3F5F8"/>
+            </a:solidFill>
+            <a:prstDash val="solid"/>
+          </a:ln>
+        </p:spPr>
+      </p:sp>
+      <p:sp>
+        <p:nvSpPr>
+          <p:cNvPr id="27" name="Text 25"/>
+          <p:cNvSpPr txBox="1"/>
+          <p:nvPr/>
+        </p:nvSpPr>
+        <p:spPr>
+          <a:xfrm>
+            <a:off x="3566160" y="3840480"/>
+            <a:ext cx="2194560" cy="411480"/>
+          </a:xfrm>
+          <a:prstGeom prst="rect">
+            <a:avLst/>
+          </a:prstGeom>
+          <a:noFill/>
+          <a:ln/>
+        </p:spPr>
+        <p:txBody>
+          <a:bodyPr wrap="square" lIns="0" tIns="0" rIns="0" bIns="0" rtlCol="0" anchor="t"/>
+          <a:lstStyle/>
+          <a:p>
+            <a:pPr indent="0" marL="0">
+              <a:buNone/>
+            </a:pPr>
+            <a:r>
+              <a:rPr lang="en-US" sz="1700" b="1" dirty="0">
+                <a:solidFill>
+                  <a:srgbClr val="070A13"/>
+                </a:solidFill>
+              </a:rPr>
+              <a:t>Respostas</a:t>
+            </a:r>
+            <a:endParaRPr lang="en-US" sz="1700" dirty="0"/>
+          </a:p>
+        </p:txBody>
+      </p:sp>
+      <p:sp>
+        <p:nvSpPr>
+          <p:cNvPr id="28" name="Text 26"/>
+          <p:cNvSpPr txBox="1"/>
+          <p:nvPr/>
+        </p:nvSpPr>
+        <p:spPr>
+          <a:xfrm>
+            <a:off x="3566160" y="4343400"/>
+            <a:ext cx="2194560" cy="1280160"/>
+          </a:xfrm>
+          <a:prstGeom prst="rect">
+            <a:avLst/>
+          </a:prstGeom>
+          <a:noFill/>
+          <a:ln/>
+        </p:spPr>
+        <p:txBody>
+          <a:bodyPr wrap="square" lIns="0" tIns="0" rIns="0" bIns="0" rtlCol="0" anchor="t"/>
+          <a:lstStyle/>
+          <a:p>
+            <a:pPr indent="0" marL="0">
+              <a:buNone/>
+            </a:pPr>
+            <a:r>
+              <a:rPr lang="en-US" sz="1300" dirty="0">
+                <a:solidFill>
+                  <a:srgbClr val="5B6474"/>
+                </a:solidFill>
+              </a:rPr>
+              <a:t>A equipa responde e liga evidências a cada pergunta</a:t>
+            </a:r>
+            <a:endParaRPr lang="en-US" sz="1300" dirty="0"/>
+          </a:p>
+        </p:txBody>
+      </p:sp>
+      <p:sp>
+        <p:nvSpPr>
+          <p:cNvPr id="29" name="seta-1"/>
+          <p:cNvSpPr/>
+          <p:nvPr/>
+        </p:nvSpPr>
+        <p:spPr>
+          <a:xfrm>
+            <a:off x="5971032" y="4526280"/>
+            <a:ext cx="128016" cy="320040"/>
+          </a:xfrm>
+          <a:prstGeom prst="chevron">
+            <a:avLst/>
+          </a:prstGeom>
+          <a:solidFill>
+            <a:srgbClr val="CFA04A"/>
+          </a:solidFill>
+          <a:ln w="12700">
+            <a:solidFill>
+              <a:srgbClr val="CFA04A"/>
+            </a:solidFill>
+            <a:prstDash val="solid"/>
+          </a:ln>
+        </p:spPr>
+      </p:sp>
+      <p:sp>
+        <p:nvSpPr>
+          <p:cNvPr id="30" name="card-68"/>
+          <p:cNvSpPr/>
+          <p:nvPr/>
+        </p:nvSpPr>
+        <p:spPr>
+          <a:xfrm>
+            <a:off x="6126480" y="3657600"/>
+            <a:ext cx="2606040" cy="2103120"/>
+          </a:xfrm>
+          <a:prstGeom prst="roundRect">
+            <a:avLst>
+              <a:gd name="adj" fmla="val 5217"/>
+            </a:avLst>
+          </a:prstGeom>
+          <a:solidFill>
+            <a:srgbClr val="F3F5F8"/>
+          </a:solidFill>
+          <a:ln w="12700">
+            <a:solidFill>
+              <a:srgbClr val="F3F5F8"/>
+            </a:solidFill>
+            <a:prstDash val="solid"/>
+          </a:ln>
+        </p:spPr>
+      </p:sp>
+      <p:sp>
+        <p:nvSpPr>
+          <p:cNvPr id="31" name="Text 29"/>
+          <p:cNvSpPr txBox="1"/>
+          <p:nvPr/>
+        </p:nvSpPr>
+        <p:spPr>
+          <a:xfrm>
+            <a:off x="6355080" y="3840480"/>
+            <a:ext cx="2194560" cy="411480"/>
+          </a:xfrm>
+          <a:prstGeom prst="rect">
+            <a:avLst/>
+          </a:prstGeom>
+          <a:noFill/>
+          <a:ln/>
+        </p:spPr>
+        <p:txBody>
+          <a:bodyPr wrap="square" lIns="0" tIns="0" rIns="0" bIns="0" rtlCol="0" anchor="t"/>
+          <a:lstStyle/>
+          <a:p>
+            <a:pPr indent="0" marL="0">
+              <a:buNone/>
+            </a:pPr>
+            <a:r>
+              <a:rPr lang="en-US" sz="1700" b="1" dirty="0">
+                <a:solidFill>
+                  <a:srgbClr val="070A13"/>
+                </a:solidFill>
+              </a:rPr>
+              <a:t>Pontuação</a:t>
+            </a:r>
+            <a:endParaRPr lang="en-US" sz="1700" dirty="0"/>
+          </a:p>
+        </p:txBody>
+      </p:sp>
+      <p:sp>
+        <p:nvSpPr>
+          <p:cNvPr id="32" name="Text 30"/>
+          <p:cNvSpPr txBox="1"/>
+          <p:nvPr/>
+        </p:nvSpPr>
+        <p:spPr>
+          <a:xfrm>
+            <a:off x="6355080" y="4343400"/>
+            <a:ext cx="2194560" cy="1280160"/>
+          </a:xfrm>
+          <a:prstGeom prst="rect">
+            <a:avLst/>
+          </a:prstGeom>
+          <a:noFill/>
+          <a:ln/>
+        </p:spPr>
+        <p:txBody>
+          <a:bodyPr wrap="square" lIns="0" tIns="0" rIns="0" bIns="0" rtlCol="0" anchor="t"/>
+          <a:lstStyle/>
+          <a:p>
+            <a:pPr indent="0" marL="0">
+              <a:buNone/>
+            </a:pPr>
+            <a:r>
+              <a:rPr lang="en-US" sz="1300" dirty="0">
+                <a:solidFill>
+                  <a:srgbClr val="5B6474"/>
+                </a:solidFill>
+              </a:rPr>
+              <a:t>Por domínio, por referencial e global</a:t>
+            </a:r>
+            <a:endParaRPr lang="en-US" sz="1300" dirty="0"/>
+          </a:p>
+        </p:txBody>
+      </p:sp>
+      <p:sp>
+        <p:nvSpPr>
+          <p:cNvPr id="33" name="seta-2"/>
+          <p:cNvSpPr/>
+          <p:nvPr/>
+        </p:nvSpPr>
+        <p:spPr>
+          <a:xfrm>
+            <a:off x="8759952" y="4526280"/>
+            <a:ext cx="128016" cy="320040"/>
+          </a:xfrm>
+          <a:prstGeom prst="chevron">
+            <a:avLst/>
+          </a:prstGeom>
+          <a:solidFill>
+            <a:srgbClr val="CFA04A"/>
+          </a:solidFill>
+          <a:ln w="12700">
+            <a:solidFill>
+              <a:srgbClr val="CFA04A"/>
+            </a:solidFill>
+            <a:prstDash val="solid"/>
+          </a:ln>
+        </p:spPr>
+      </p:sp>
+      <p:sp>
+        <p:nvSpPr>
+          <p:cNvPr id="34" name="card-69"/>
+          <p:cNvSpPr/>
+          <p:nvPr/>
+        </p:nvSpPr>
+        <p:spPr>
+          <a:xfrm>
+            <a:off x="8915400" y="3657600"/>
+            <a:ext cx="2606040" cy="2103120"/>
+          </a:xfrm>
+          <a:prstGeom prst="roundRect">
+            <a:avLst>
+              <a:gd name="adj" fmla="val 5217"/>
+            </a:avLst>
+          </a:prstGeom>
+          <a:solidFill>
+            <a:srgbClr val="E6F5F3"/>
+          </a:solidFill>
+          <a:ln w="12700">
+            <a:solidFill>
+              <a:srgbClr val="E6F5F3"/>
+            </a:solidFill>
+            <a:prstDash val="solid"/>
+          </a:ln>
+        </p:spPr>
+      </p:sp>
+      <p:sp>
+        <p:nvSpPr>
+          <p:cNvPr id="35" name="Text 33"/>
+          <p:cNvSpPr txBox="1"/>
+          <p:nvPr/>
+        </p:nvSpPr>
+        <p:spPr>
+          <a:xfrm>
+            <a:off x="9144000" y="3840480"/>
+            <a:ext cx="2194560" cy="411480"/>
+          </a:xfrm>
+          <a:prstGeom prst="rect">
+            <a:avLst/>
+          </a:prstGeom>
+          <a:noFill/>
+          <a:ln/>
+        </p:spPr>
+        <p:txBody>
+          <a:bodyPr wrap="square" lIns="0" tIns="0" rIns="0" bIns="0" rtlCol="0" anchor="t"/>
+          <a:lstStyle/>
+          <a:p>
+            <a:pPr indent="0" marL="0">
+              <a:buNone/>
+            </a:pPr>
+            <a:r>
+              <a:rPr lang="en-US" sz="1700" b="1" dirty="0">
+                <a:solidFill>
+                  <a:srgbClr val="17766C"/>
+                </a:solidFill>
+              </a:rPr>
+              <a:t>Plano de ação</a:t>
+            </a:r>
+            <a:endParaRPr lang="en-US" sz="1700" dirty="0"/>
+          </a:p>
+        </p:txBody>
+      </p:sp>
+      <p:sp>
+        <p:nvSpPr>
+          <p:cNvPr id="36" name="Text 34"/>
+          <p:cNvSpPr txBox="1"/>
+          <p:nvPr/>
+        </p:nvSpPr>
+        <p:spPr>
+          <a:xfrm>
+            <a:off x="9144000" y="4343400"/>
+            <a:ext cx="2194560" cy="1280160"/>
+          </a:xfrm>
+          <a:prstGeom prst="rect">
+            <a:avLst/>
+          </a:prstGeom>
+          <a:noFill/>
+          <a:ln/>
+        </p:spPr>
+        <p:txBody>
+          <a:bodyPr wrap="square" lIns="0" tIns="0" rIns="0" bIns="0" rtlCol="0" anchor="t"/>
+          <a:lstStyle/>
+          <a:p>
+            <a:pPr indent="0" marL="0">
+              <a:buNone/>
+            </a:pPr>
+            <a:r>
+              <a:rPr lang="en-US" sz="1300" dirty="0">
+                <a:solidFill>
+                  <a:srgbClr val="5B6474"/>
+                </a:solidFill>
+              </a:rPr>
+              <a:t>Recomendações com prioridade, esforço e prazo, que viram tarefas</a:t>
+            </a:r>
+            <a:endParaRPr lang="en-US" sz="1300" dirty="0"/>
           </a:p>
         </p:txBody>
       </p:sp>
@@ -5713,89 +6262,291 @@
           <p:cNvPr id="2" name="Text 0"/>
           <p:cNvSpPr/>
           <p:nvPr>
-            <p:ph idx="101" type="body" hasCustomPrompt="1"/>
+            <p:ph idx="101" type="title" hasCustomPrompt="1"/>
           </p:nvPr>
         </p:nvSpPr>
         <p:spPr>
           <a:xfrm>
-            <a:off x="731520" y="2377440"/>
-            <a:ext cx="10058400" cy="365760"/>
-          </a:xfrm>
-          <a:prstGeom prst="rect">
-            <a:avLst/>
-          </a:prstGeom>
-          <a:noFill/>
-          <a:ln/>
-        </p:spPr>
-        <p:txBody>
-          <a:bodyPr wrap="square" lIns="0" tIns="0" rIns="0" bIns="0" rtlCol="0"/>
+            <a:off x="548640" y="411480"/>
+            <a:ext cx="11064240" cy="822960"/>
+          </a:xfrm>
+          <a:prstGeom prst="rect">
+            <a:avLst/>
+          </a:prstGeom>
+          <a:noFill/>
+          <a:ln/>
+        </p:spPr>
+        <p:txBody>
+          <a:bodyPr wrap="square" lIns="0" tIns="0" rIns="0" bIns="0" rtlCol="0" anchor="t"/>
+          <a:lstStyle/>
+          <a:p>
+            <a:pPr algn="l" indent="0" marL="0">
+              <a:buNone/>
+            </a:pPr>
+            <a:r>
+              <a:rPr lang="en-US" sz="3200" b="1" dirty="0">
+                <a:solidFill>
+                  <a:schemeClr val="tx1"/>
+                </a:solidFill>
+              </a:rPr>
+              <a:t>O assistente de IA prepara rascunhos, não decide</a:t>
+            </a:r>
+            <a:endParaRPr lang="en-US" sz="3200" dirty="0"/>
+          </a:p>
+        </p:txBody>
+      </p:sp>
+      <p:sp>
+        <p:nvSpPr>
+          <p:cNvPr id="3" name="icon-bg-70"/>
+          <p:cNvSpPr/>
+          <p:nvPr/>
+        </p:nvSpPr>
+        <p:spPr>
+          <a:xfrm>
+            <a:off x="548640" y="1417320"/>
+            <a:ext cx="731520" cy="731520"/>
+          </a:xfrm>
+          <a:prstGeom prst="ellipse">
+            <a:avLst/>
+          </a:prstGeom>
+          <a:solidFill>
+            <a:schemeClr val="tx1"/>
+          </a:solidFill>
+          <a:ln w="12700">
+            <a:solidFill>
+              <a:schemeClr val="tx1"/>
+            </a:solidFill>
+            <a:prstDash val="solid"/>
+          </a:ln>
+        </p:spPr>
+      </p:sp>
+      <p:pic>
+        <p:nvPicPr>
+          <p:cNvPr id="4" name="icon-70" descr="preencoded.png">    </p:cNvPr>
+          <p:cNvPicPr>
+            <a:picLocks noChangeAspect="1"/>
+          </p:cNvPicPr>
+          <p:nvPr/>
+        </p:nvPicPr>
+        <p:blipFill>
+          <a:blip r:embed="rId1"/>
+          <a:stretch>
+            <a:fillRect/>
+          </a:stretch>
+        </p:blipFill>
+        <p:spPr>
+          <a:xfrm>
+            <a:off x="709574" y="1578254"/>
+            <a:ext cx="409651" cy="409651"/>
+          </a:xfrm>
+          <a:prstGeom prst="rect">
+            <a:avLst/>
+          </a:prstGeom>
+        </p:spPr>
+      </p:pic>
+      <p:sp>
+        <p:nvSpPr>
+          <p:cNvPr id="5" name="Text 2"/>
+          <p:cNvSpPr txBox="1"/>
+          <p:nvPr/>
+        </p:nvSpPr>
+        <p:spPr>
+          <a:xfrm>
+            <a:off x="1463040" y="1508760"/>
+            <a:ext cx="4572000" cy="594360"/>
+          </a:xfrm>
+          <a:prstGeom prst="rect">
+            <a:avLst/>
+          </a:prstGeom>
+          <a:noFill/>
+          <a:ln/>
+        </p:spPr>
+        <p:txBody>
+          <a:bodyPr wrap="square" lIns="0" tIns="0" rIns="0" bIns="0" rtlCol="0" anchor="t"/>
           <a:lstStyle/>
           <a:p>
             <a:pPr indent="0" marL="0">
               <a:buNone/>
             </a:pPr>
             <a:r>
-              <a:rPr lang="en-US" sz="1400" b="1" spc="400" kern="0" dirty="0">
-                <a:solidFill>
-                  <a:schemeClr val="accent1"/>
-                </a:solidFill>
-              </a:rPr>
-              <a:t>PARTE 3</a:t>
-            </a:r>
-            <a:endParaRPr lang="en-US" sz="1400" dirty="0"/>
-          </a:p>
-        </p:txBody>
-      </p:sp>
-      <p:sp>
-        <p:nvSpPr>
-          <p:cNvPr id="3" name="Text 0"/>
+              <a:rPr lang="en-US" sz="1700" b="1" dirty="0">
+                <a:solidFill>
+                  <a:srgbClr val="111827"/>
+                </a:solidFill>
+              </a:rPr>
+              <a:t>Ativo só onde há documentos para construir ou analisar</a:t>
+            </a:r>
+            <a:endParaRPr lang="en-US" sz="1700" dirty="0"/>
+          </a:p>
+        </p:txBody>
+      </p:sp>
+      <p:sp>
+        <p:nvSpPr>
+          <p:cNvPr id="6" name="Text 3"/>
+          <p:cNvSpPr txBox="1"/>
+          <p:nvPr/>
+        </p:nvSpPr>
+        <p:spPr>
+          <a:xfrm>
+            <a:off x="548640" y="2377440"/>
+            <a:ext cx="5486400" cy="2743200"/>
+          </a:xfrm>
+          <a:prstGeom prst="rect">
+            <a:avLst/>
+          </a:prstGeom>
+          <a:noFill/>
+          <a:ln/>
+        </p:spPr>
+        <p:txBody>
+          <a:bodyPr wrap="square" lIns="0" tIns="0" rIns="0" bIns="0" rtlCol="0" anchor="t"/>
+          <a:lstStyle/>
+          <a:p>
+            <a:pPr marL="342900" indent="-342900">
+              <a:spcAft>
+                <a:spcPts val="800"/>
+              </a:spcAft>
+              <a:buSzPct val="100000"/>
+              <a:buChar char="•"/>
+            </a:pPr>
+            <a:r>
+              <a:rPr lang="en-US" sz="1500" dirty="0">
+                <a:solidFill>
+                  <a:srgbClr val="111827"/>
+                </a:solidFill>
+              </a:rPr>
+              <a:t>Políticas, procedimentos e planos de evidências por medida</a:t>
+            </a:r>
+            <a:endParaRPr lang="en-US" sz="1500" dirty="0"/>
+          </a:p>
+          <a:p>
+            <a:pPr marL="342900" indent="-342900">
+              <a:spcAft>
+                <a:spcPts val="800"/>
+              </a:spcAft>
+              <a:buSzPct val="100000"/>
+              <a:buChar char="•"/>
+            </a:pPr>
+            <a:r>
+              <a:rPr lang="en-US" sz="1500" dirty="0">
+                <a:solidFill>
+                  <a:srgbClr val="111827"/>
+                </a:solidFill>
+              </a:rPr>
+              <a:t>Análise de evidências face ao critério oficial</a:t>
+            </a:r>
+            <a:endParaRPr lang="en-US" sz="1500" dirty="0"/>
+          </a:p>
+          <a:p>
+            <a:pPr marL="342900" indent="-342900">
+              <a:spcAft>
+                <a:spcPts val="800"/>
+              </a:spcAft>
+              <a:buSzPct val="100000"/>
+              <a:buChar char="•"/>
+            </a:pPr>
+            <a:r>
+              <a:rPr lang="en-US" sz="1500" dirty="0">
+                <a:solidFill>
+                  <a:srgbClr val="111827"/>
+                </a:solidFill>
+              </a:rPr>
+              <a:t>Classificação de documentos carregados</a:t>
+            </a:r>
+            <a:endParaRPr lang="en-US" sz="1500" dirty="0"/>
+          </a:p>
+          <a:p>
+            <a:pPr marL="342900" indent="-342900">
+              <a:spcAft>
+                <a:spcPts val="800"/>
+              </a:spcAft>
+              <a:buSzPct val="100000"/>
+              <a:buChar char="•"/>
+            </a:pPr>
+            <a:r>
+              <a:rPr lang="en-US" sz="1500" dirty="0">
+                <a:solidFill>
+                  <a:srgbClr val="111827"/>
+                </a:solidFill>
+              </a:rPr>
+              <a:t>Notificações de incidentes e relatório anual</a:t>
+            </a:r>
+            <a:endParaRPr lang="en-US" sz="1500" dirty="0"/>
+          </a:p>
+          <a:p>
+            <a:pPr marL="342900" indent="-342900">
+              <a:spcAft>
+                <a:spcPts val="800"/>
+              </a:spcAft>
+              <a:buSzPct val="100000"/>
+              <a:buChar char="•"/>
+            </a:pPr>
+            <a:r>
+              <a:rPr lang="en-US" sz="1500" dirty="0">
+                <a:solidFill>
+                  <a:srgbClr val="111827"/>
+                </a:solidFill>
+              </a:rPr>
+              <a:t>Questionários a fornecedores e leitura de respostas</a:t>
+            </a:r>
+            <a:endParaRPr lang="en-US" sz="1500" dirty="0"/>
+          </a:p>
+          <a:p>
+            <a:pPr marL="342900" indent="-342900">
+              <a:spcAft>
+                <a:spcPts val="800"/>
+              </a:spcAft>
+              <a:buSzPct val="100000"/>
+              <a:buChar char="•"/>
+            </a:pPr>
+            <a:r>
+              <a:rPr lang="en-US" sz="1500" dirty="0">
+                <a:solidFill>
+                  <a:srgbClr val="111827"/>
+                </a:solidFill>
+              </a:rPr>
+              <a:t>Recomendações para o plano de ação</a:t>
+            </a:r>
+            <a:endParaRPr lang="en-US" sz="1500" dirty="0"/>
+          </a:p>
+        </p:txBody>
+      </p:sp>
+      <p:sp>
+        <p:nvSpPr>
+          <p:cNvPr id="7" name="card-71"/>
           <p:cNvSpPr/>
-          <p:nvPr>
-            <p:ph idx="102" type="title" hasCustomPrompt="1"/>
-          </p:nvPr>
-        </p:nvSpPr>
-        <p:spPr>
-          <a:xfrm>
-            <a:off x="731520" y="2788920"/>
-            <a:ext cx="10515600" cy="1097280"/>
-          </a:xfrm>
-          <a:prstGeom prst="rect">
-            <a:avLst/>
-          </a:prstGeom>
-          <a:noFill/>
-          <a:ln/>
-        </p:spPr>
-        <p:txBody>
-          <a:bodyPr wrap="square" lIns="0" tIns="0" rIns="0" bIns="0" rtlCol="0" anchor="t"/>
-          <a:lstStyle/>
-          <a:p>
-            <a:pPr algn="l" indent="0" marL="0">
-              <a:buNone/>
-            </a:pPr>
-            <a:r>
-              <a:rPr lang="en-US" sz="4000" b="1" dirty="0">
-                <a:solidFill>
-                  <a:schemeClr val="bg1"/>
-                </a:solidFill>
-              </a:rPr>
-              <a:t>Guia por referencial</a:t>
-            </a:r>
-            <a:endParaRPr lang="en-US" sz="4000" dirty="0"/>
-          </a:p>
-        </p:txBody>
-      </p:sp>
-      <p:sp>
-        <p:nvSpPr>
-          <p:cNvPr id="4" name="Text 0"/>
-          <p:cNvSpPr/>
-          <p:nvPr>
-            <p:ph idx="103" type="body" hasCustomPrompt="1"/>
-          </p:nvPr>
-        </p:nvSpPr>
-        <p:spPr>
-          <a:xfrm>
-            <a:off x="731520" y="3931920"/>
-            <a:ext cx="9144000" cy="822960"/>
+          <p:nvPr/>
+        </p:nvSpPr>
+        <p:spPr>
+          <a:xfrm>
+            <a:off x="6583680" y="1417320"/>
+            <a:ext cx="5029200" cy="4526280"/>
+          </a:xfrm>
+          <a:prstGeom prst="roundRect">
+            <a:avLst>
+              <a:gd name="adj" fmla="val 2424"/>
+            </a:avLst>
+          </a:prstGeom>
+          <a:solidFill>
+            <a:srgbClr val="070A13"/>
+          </a:solidFill>
+          <a:ln w="12700">
+            <a:solidFill>
+              <a:srgbClr val="070A13"/>
+            </a:solidFill>
+            <a:prstDash val="solid"/>
+          </a:ln>
+        </p:spPr>
+      </p:sp>
+      <p:sp>
+        <p:nvSpPr>
+          <p:cNvPr id="8" name="Text 5"/>
+          <p:cNvSpPr txBox="1"/>
+          <p:nvPr/>
+        </p:nvSpPr>
+        <p:spPr>
+          <a:xfrm>
+            <a:off x="6903720" y="1691640"/>
+            <a:ext cx="4389120" cy="320040"/>
           </a:xfrm>
           <a:prstGeom prst="rect">
             <a:avLst/>
@@ -5811,14 +6562,162 @@
               <a:buNone/>
             </a:pPr>
             <a:r>
-              <a:rPr lang="en-US" sz="1800" dirty="0">
-                <a:solidFill>
-                  <a:srgbClr val="C9CFDA"/>
-                </a:solidFill>
-              </a:rPr>
-              <a:t>RJC e NIS2, ISO/IEC 27001 e os restantes referenciais da plataforma</a:t>
-            </a:r>
-            <a:endParaRPr lang="en-US" sz="1800" dirty="0"/>
+              <a:rPr lang="en-US" sz="1200" b="1" spc="300" kern="0" dirty="0">
+                <a:solidFill>
+                  <a:srgbClr val="CFA04A"/>
+                </a:solidFill>
+              </a:rPr>
+              <a:t>REGRAS</a:t>
+            </a:r>
+            <a:endParaRPr lang="en-US" sz="1200" dirty="0"/>
+          </a:p>
+        </p:txBody>
+      </p:sp>
+      <p:sp>
+        <p:nvSpPr>
+          <p:cNvPr id="9" name="Text 6"/>
+          <p:cNvSpPr txBox="1"/>
+          <p:nvPr/>
+        </p:nvSpPr>
+        <p:spPr>
+          <a:xfrm>
+            <a:off x="6903720" y="2148840"/>
+            <a:ext cx="4434840" cy="3566160"/>
+          </a:xfrm>
+          <a:prstGeom prst="rect">
+            <a:avLst/>
+          </a:prstGeom>
+          <a:noFill/>
+          <a:ln/>
+        </p:spPr>
+        <p:txBody>
+          <a:bodyPr wrap="square" lIns="0" tIns="0" rIns="0" bIns="0" rtlCol="0" anchor="t"/>
+          <a:lstStyle/>
+          <a:p>
+            <a:pPr marL="342900" indent="-342900">
+              <a:spcAft>
+                <a:spcPts val="1000"/>
+              </a:spcAft>
+              <a:buSzPct val="100000"/>
+              <a:buChar char="•"/>
+            </a:pPr>
+            <a:r>
+              <a:rPr lang="en-US" sz="1500" dirty="0">
+                <a:solidFill>
+                  <a:srgbClr val="E6E9EF"/>
+                </a:solidFill>
+              </a:rPr>
+              <a:t>Usa só os textos oficiais da Biblioteca Legal</a:t>
+            </a:r>
+            <a:endParaRPr lang="en-US" sz="1500" dirty="0"/>
+          </a:p>
+          <a:p>
+            <a:pPr marL="342900" indent="-342900">
+              <a:spcAft>
+                <a:spcPts val="1000"/>
+              </a:spcAft>
+              <a:buSzPct val="100000"/>
+              <a:buChar char="•"/>
+            </a:pPr>
+            <a:r>
+              <a:rPr lang="en-US" sz="1500" dirty="0">
+                <a:solidFill>
+                  <a:srgbClr val="E6E9EF"/>
+                </a:solidFill>
+              </a:rPr>
+              <a:t>O resultado é sempre um rascunho a aprovar por uma pessoa</a:t>
+            </a:r>
+            <a:endParaRPr lang="en-US" sz="1500" dirty="0"/>
+          </a:p>
+          <a:p>
+            <a:pPr marL="342900" indent="-342900">
+              <a:spcAft>
+                <a:spcPts val="1000"/>
+              </a:spcAft>
+              <a:buSzPct val="100000"/>
+              <a:buChar char="•"/>
+            </a:pPr>
+            <a:r>
+              <a:rPr lang="en-US" sz="1500" dirty="0">
+                <a:solidFill>
+                  <a:srgbClr val="E6E9EF"/>
+                </a:solidFill>
+              </a:rPr>
+              <a:t>Não recebe contactos, inventário de ativos nem evidências restritas</a:t>
+            </a:r>
+            <a:endParaRPr lang="en-US" sz="1500" dirty="0"/>
+          </a:p>
+          <a:p>
+            <a:pPr marL="342900" indent="-342900">
+              <a:spcAft>
+                <a:spcPts val="1000"/>
+              </a:spcAft>
+              <a:buSzPct val="100000"/>
+              <a:buChar char="•"/>
+            </a:pPr>
+            <a:r>
+              <a:rPr lang="en-US" sz="1500" dirty="0">
+                <a:solidFill>
+                  <a:srgbClr val="E6E9EF"/>
+                </a:solidFill>
+              </a:rPr>
+              <a:t>Cada pedido fica na auditoria e conta para a quota (máximo de 30 por minuto)</a:t>
+            </a:r>
+            <a:endParaRPr lang="en-US" sz="1500" dirty="0"/>
+          </a:p>
+          <a:p>
+            <a:pPr marL="342900" indent="-342900">
+              <a:spcAft>
+                <a:spcPts val="1000"/>
+              </a:spcAft>
+              <a:buSzPct val="100000"/>
+              <a:buChar char="•"/>
+            </a:pPr>
+            <a:r>
+              <a:rPr lang="en-US" sz="1500" dirty="0">
+                <a:solidFill>
+                  <a:srgbClr val="E6E9EF"/>
+                </a:solidFill>
+              </a:rPr>
+              <a:t>Motor escolhido pelo administrador: Claude ou Base44</a:t>
+            </a:r>
+            <a:endParaRPr lang="en-US" sz="1500" dirty="0"/>
+          </a:p>
+        </p:txBody>
+      </p:sp>
+      <p:sp>
+        <p:nvSpPr>
+          <p:cNvPr id="10" name="Text 7"/>
+          <p:cNvSpPr txBox="1"/>
+          <p:nvPr/>
+        </p:nvSpPr>
+        <p:spPr>
+          <a:xfrm>
+            <a:off x="548640" y="5486400"/>
+            <a:ext cx="5486400" cy="320040"/>
+          </a:xfrm>
+          <a:prstGeom prst="rect">
+            <a:avLst/>
+          </a:prstGeom>
+          <a:noFill/>
+          <a:ln/>
+        </p:spPr>
+        <p:txBody>
+          <a:bodyPr wrap="square" lIns="0" tIns="0" rIns="0" bIns="0" rtlCol="0" anchor="t"/>
+          <a:lstStyle/>
+          <a:p>
+            <a:pPr indent="0" marL="0">
+              <a:buNone/>
+            </a:pPr>
+            <a:r>
+              <a:rPr lang="en-US" sz="1200" dirty="0">
+                <a:solidFill>
+                  <a:srgbClr val="5B6474"/>
+                </a:solidFill>
+              </a:rPr>
+              <a:t>Incluído na licença Enterprise.</a:t>
+            </a:r>
+            <a:endParaRPr lang="en-US" sz="1200" dirty="0"/>
           </a:p>
         </p:txBody>
       </p:sp>
@@ -5834,7 +6733,7 @@
         </p:nvSpPr>
         <p:spPr>
           <a:xfrm>
-            <a:off x="731520" y="6263640"/>
+            <a:off x="548640" y="6309360"/>
             <a:ext cx="914400" cy="274320"/>
           </a:xfrm>
           <a:prstGeom prst="rect">
@@ -5852,7 +6751,7 @@
             <a:lvl1pPr>
               <a:defRPr sz="1000">
                 <a:solidFill>
-                  <a:srgbClr val="8892A6"/>
+                  <a:srgbClr val="5B6474"/>
                 </a:solidFill>
               </a:defRPr>
             </a:lvl1pPr>
@@ -5897,6 +6796,190 @@
           <p:cNvPr id="2" name="Text 0"/>
           <p:cNvSpPr/>
           <p:nvPr>
+            <p:ph idx="101" type="body" hasCustomPrompt="1"/>
+          </p:nvPr>
+        </p:nvSpPr>
+        <p:spPr>
+          <a:xfrm>
+            <a:off x="731520" y="2377440"/>
+            <a:ext cx="10058400" cy="365760"/>
+          </a:xfrm>
+          <a:prstGeom prst="rect">
+            <a:avLst/>
+          </a:prstGeom>
+          <a:noFill/>
+          <a:ln/>
+        </p:spPr>
+        <p:txBody>
+          <a:bodyPr wrap="square" lIns="0" tIns="0" rIns="0" bIns="0" rtlCol="0"/>
+          <a:lstStyle/>
+          <a:p>
+            <a:pPr indent="0" marL="0">
+              <a:buNone/>
+            </a:pPr>
+            <a:r>
+              <a:rPr lang="en-US" sz="1400" b="1" spc="400" kern="0" dirty="0">
+                <a:solidFill>
+                  <a:schemeClr val="accent1"/>
+                </a:solidFill>
+              </a:rPr>
+              <a:t>PARTE 3</a:t>
+            </a:r>
+            <a:endParaRPr lang="en-US" sz="1400" dirty="0"/>
+          </a:p>
+        </p:txBody>
+      </p:sp>
+      <p:sp>
+        <p:nvSpPr>
+          <p:cNvPr id="3" name="Text 0"/>
+          <p:cNvSpPr/>
+          <p:nvPr>
+            <p:ph idx="102" type="title" hasCustomPrompt="1"/>
+          </p:nvPr>
+        </p:nvSpPr>
+        <p:spPr>
+          <a:xfrm>
+            <a:off x="731520" y="2788920"/>
+            <a:ext cx="10515600" cy="1097280"/>
+          </a:xfrm>
+          <a:prstGeom prst="rect">
+            <a:avLst/>
+          </a:prstGeom>
+          <a:noFill/>
+          <a:ln/>
+        </p:spPr>
+        <p:txBody>
+          <a:bodyPr wrap="square" lIns="0" tIns="0" rIns="0" bIns="0" rtlCol="0" anchor="t"/>
+          <a:lstStyle/>
+          <a:p>
+            <a:pPr algn="l" indent="0" marL="0">
+              <a:buNone/>
+            </a:pPr>
+            <a:r>
+              <a:rPr lang="en-US" sz="4000" b="1" dirty="0">
+                <a:solidFill>
+                  <a:schemeClr val="bg1"/>
+                </a:solidFill>
+              </a:rPr>
+              <a:t>Guia por referencial</a:t>
+            </a:r>
+            <a:endParaRPr lang="en-US" sz="4000" dirty="0"/>
+          </a:p>
+        </p:txBody>
+      </p:sp>
+      <p:sp>
+        <p:nvSpPr>
+          <p:cNvPr id="4" name="Text 0"/>
+          <p:cNvSpPr/>
+          <p:nvPr>
+            <p:ph idx="103" type="body" hasCustomPrompt="1"/>
+          </p:nvPr>
+        </p:nvSpPr>
+        <p:spPr>
+          <a:xfrm>
+            <a:off x="731520" y="3931920"/>
+            <a:ext cx="9144000" cy="822960"/>
+          </a:xfrm>
+          <a:prstGeom prst="rect">
+            <a:avLst/>
+          </a:prstGeom>
+          <a:noFill/>
+          <a:ln/>
+        </p:spPr>
+        <p:txBody>
+          <a:bodyPr wrap="square" lIns="0" tIns="0" rIns="0" bIns="0" rtlCol="0" anchor="t"/>
+          <a:lstStyle/>
+          <a:p>
+            <a:pPr indent="0" marL="0">
+              <a:buNone/>
+            </a:pPr>
+            <a:r>
+              <a:rPr lang="en-US" sz="1800" dirty="0">
+                <a:solidFill>
+                  <a:srgbClr val="C9CFDA"/>
+                </a:solidFill>
+              </a:rPr>
+              <a:t>RJC e NIS2, ISO/IEC 27001, ISO/IEC 42001 e os restantes referenciais (com um guia de implementação para cada um dos três primeiros)</a:t>
+            </a:r>
+            <a:endParaRPr lang="en-US" sz="1800" dirty="0"/>
+          </a:p>
+        </p:txBody>
+      </p:sp>
+      <p:sp>
+        <p:nvSpPr>
+          <p:cNvPr id="25" name="Slide Number Placeholder 0"/>
+          <p:cNvSpPr>
+            <a:spLocks noGrp="1"/>
+          </p:cNvSpPr>
+          <p:nvPr>
+            <p:ph type="sldNum" sz="quarter" idx="4294967295"/>
+          </p:nvPr>
+        </p:nvSpPr>
+        <p:spPr>
+          <a:xfrm>
+            <a:off x="731520" y="6263640"/>
+            <a:ext cx="914400" cy="274320"/>
+          </a:xfrm>
+          <a:prstGeom prst="rect">
+            <a:avLst/>
+          </a:prstGeom>
+          <a:extLst>
+            <a:ext uri="{C572A759-6A51-4108-AA02-DFA0A04FC94B}">
+              <ma14:wrappingTextBoxFlag xmlns:ma14="http://schemas.microsoft.com/office/mac/drawingml/2011/main" val="0"/>
+            </a:ext>
+          </a:extLst>
+        </p:spPr>
+        <p:txBody>
+          <a:bodyPr/>
+          <a:lstStyle>
+            <a:lvl1pPr>
+              <a:defRPr sz="1000">
+                <a:solidFill>
+                  <a:srgbClr val="8892A6"/>
+                </a:solidFill>
+              </a:defRPr>
+            </a:lvl1pPr>
+          </a:lstStyle>
+          <a:p>
+            <a:pPr algn="l"/>
+            <a:fld id="{F7021451-1387-4CA6-816F-3879F97B5CBC}" type="slidenum">
+              <a:rPr b="0" lang="en-US"/>
+              <a:t>14</a:t>
+            </a:fld>
+            <a:endParaRPr lang="en-US"/>
+          </a:p>
+        </p:txBody>
+      </p:sp>
+    </p:spTree>
+  </p:cSld>
+  <p:clrMapOvr>
+    <a:masterClrMapping/>
+  </p:clrMapOvr>
+</p:sld>
+</file>
+
+<file path=ppt/slides/slide15.xml><?xml version="1.0" encoding="utf-8"?>
+<p:sld xmlns:a="http://schemas.openxmlformats.org/drawingml/2006/main" xmlns:r="http://schemas.openxmlformats.org/officeDocument/2006/relationships" xmlns:p="http://schemas.openxmlformats.org/presentationml/2006/main">
+  <p:cSld name="Slide 15">
+    <p:spTree>
+      <p:nvGrpSpPr>
+        <p:cNvPr id="1" name=""/>
+        <p:cNvGrpSpPr/>
+        <p:nvPr/>
+      </p:nvGrpSpPr>
+      <p:grpSpPr>
+        <a:xfrm>
+          <a:off x="0" y="0"/>
+          <a:ext cx="0" cy="0"/>
+          <a:chOff x="0" y="0"/>
+          <a:chExt cx="0" cy="0"/>
+        </a:xfrm>
+      </p:grpSpPr>
+      <p:sp>
+        <p:nvSpPr>
+          <p:cNvPr id="2" name="Text 0"/>
+          <p:cNvSpPr/>
+          <p:nvPr>
             <p:ph idx="101" type="title" hasCustomPrompt="1"/>
           </p:nvPr>
         </p:nvSpPr>
@@ -5932,7 +7015,7 @@
       </p:sp>
       <p:sp>
         <p:nvSpPr>
-          <p:cNvPr id="3" name="card-63"/>
+          <p:cNvPr id="3" name="card-72"/>
           <p:cNvSpPr/>
           <p:nvPr/>
         </p:nvSpPr>
@@ -6067,7 +7150,7 @@
       </p:sp>
       <p:sp>
         <p:nvSpPr>
-          <p:cNvPr id="7" name="card-64"/>
+          <p:cNvPr id="7" name="card-73"/>
           <p:cNvSpPr/>
           <p:nvPr/>
         </p:nvSpPr>
@@ -6202,7 +7285,7 @@
       </p:sp>
       <p:sp>
         <p:nvSpPr>
-          <p:cNvPr id="11" name="card-65"/>
+          <p:cNvPr id="11" name="card-74"/>
           <p:cNvSpPr/>
           <p:nvPr/>
         </p:nvSpPr>
@@ -6337,7 +7420,7 @@
       </p:sp>
       <p:sp>
         <p:nvSpPr>
-          <p:cNvPr id="15" name="card-66"/>
+          <p:cNvPr id="15" name="card-75"/>
           <p:cNvSpPr/>
           <p:nvPr/>
         </p:nvSpPr>
@@ -6472,7 +7555,7 @@
       </p:sp>
       <p:graphicFrame>
         <p:nvGraphicFramePr>
-          <p:cNvPr id="15" name="Table 0"/>
+          <p:cNvPr id="16" name="Table 0"/>
           <p:cNvGraphicFramePr>
             <a:graphicFrameLocks noGrp="1"/>
           </p:cNvGraphicFramePr>
@@ -7109,657 +8192,6 @@
             <a:pPr algn="l"/>
             <a:fld id="{F7021451-1387-4CA6-816F-3879F97B5CBC}" type="slidenum">
               <a:rPr b="0" lang="en-US"/>
-              <a:t>14</a:t>
-            </a:fld>
-            <a:endParaRPr lang="en-US"/>
-          </a:p>
-        </p:txBody>
-      </p:sp>
-    </p:spTree>
-  </p:cSld>
-  <p:clrMapOvr>
-    <a:masterClrMapping/>
-  </p:clrMapOvr>
-</p:sld>
-</file>
-
-<file path=ppt/slides/slide15.xml><?xml version="1.0" encoding="utf-8"?>
-<p:sld xmlns:a="http://schemas.openxmlformats.org/drawingml/2006/main" xmlns:r="http://schemas.openxmlformats.org/officeDocument/2006/relationships" xmlns:p="http://schemas.openxmlformats.org/presentationml/2006/main">
-  <p:cSld name="Slide 15">
-    <p:spTree>
-      <p:nvGrpSpPr>
-        <p:cNvPr id="1" name=""/>
-        <p:cNvGrpSpPr/>
-        <p:nvPr/>
-      </p:nvGrpSpPr>
-      <p:grpSpPr>
-        <a:xfrm>
-          <a:off x="0" y="0"/>
-          <a:ext cx="0" cy="0"/>
-          <a:chOff x="0" y="0"/>
-          <a:chExt cx="0" cy="0"/>
-        </a:xfrm>
-      </p:grpSpPr>
-      <p:sp>
-        <p:nvSpPr>
-          <p:cNvPr id="2" name="Text 0"/>
-          <p:cNvSpPr/>
-          <p:nvPr>
-            <p:ph idx="101" type="title" hasCustomPrompt="1"/>
-          </p:nvPr>
-        </p:nvSpPr>
-        <p:spPr>
-          <a:xfrm>
-            <a:off x="548640" y="411480"/>
-            <a:ext cx="11064240" cy="822960"/>
-          </a:xfrm>
-          <a:prstGeom prst="rect">
-            <a:avLst/>
-          </a:prstGeom>
-          <a:noFill/>
-          <a:ln/>
-        </p:spPr>
-        <p:txBody>
-          <a:bodyPr wrap="square" lIns="0" tIns="0" rIns="0" bIns="0" rtlCol="0" anchor="t"/>
-          <a:lstStyle/>
-          <a:p>
-            <a:pPr algn="l" indent="0" marL="0">
-              <a:buNone/>
-            </a:pPr>
-            <a:r>
-              <a:rPr lang="en-US" sz="3200" b="1" dirty="0">
-                <a:solidFill>
-                  <a:schemeClr val="tx1"/>
-                </a:solidFill>
-              </a:rPr>
-              <a:t>ISO/IEC 27001: um guia com Declaração de Aplicabilidade</a:t>
-            </a:r>
-            <a:endParaRPr lang="en-US" sz="3200" dirty="0"/>
-          </a:p>
-        </p:txBody>
-      </p:sp>
-      <p:sp>
-        <p:nvSpPr>
-          <p:cNvPr id="3" name="card-67"/>
-          <p:cNvSpPr/>
-          <p:nvPr/>
-        </p:nvSpPr>
-        <p:spPr>
-          <a:xfrm>
-            <a:off x="548640" y="1325880"/>
-            <a:ext cx="11064240" cy="731520"/>
-          </a:xfrm>
-          <a:prstGeom prst="roundRect">
-            <a:avLst>
-              <a:gd name="adj" fmla="val 15000"/>
-            </a:avLst>
-          </a:prstGeom>
-          <a:solidFill>
-            <a:srgbClr val="F7F2E7"/>
-          </a:solidFill>
-          <a:ln w="12700">
-            <a:solidFill>
-              <a:srgbClr val="F7F2E7"/>
-            </a:solidFill>
-            <a:prstDash val="solid"/>
-          </a:ln>
-        </p:spPr>
-      </p:sp>
-      <p:sp>
-        <p:nvSpPr>
-          <p:cNvPr id="4" name="Text 2"/>
-          <p:cNvSpPr txBox="1"/>
-          <p:nvPr/>
-        </p:nvSpPr>
-        <p:spPr>
-          <a:xfrm>
-            <a:off x="822960" y="1417320"/>
-            <a:ext cx="10515600" cy="548640"/>
-          </a:xfrm>
-          <a:prstGeom prst="rect">
-            <a:avLst/>
-          </a:prstGeom>
-          <a:noFill/>
-          <a:ln/>
-        </p:spPr>
-        <p:txBody>
-          <a:bodyPr wrap="square" lIns="0" tIns="0" rIns="0" bIns="0" rtlCol="0" anchor="ctr"/>
-          <a:lstStyle/>
-          <a:p>
-            <a:pPr indent="0" marL="0">
-              <a:buNone/>
-            </a:pPr>
-            <a:r>
-              <a:rPr lang="en-US" sz="1400" b="1" dirty="0">
-                <a:solidFill>
-                  <a:srgbClr val="8A6620"/>
-                </a:solidFill>
-              </a:rPr>
-              <a:t>Guia de preparação: </a:t>
-            </a:r>
-            <a:pPr indent="0" marL="0">
-              <a:buNone/>
-            </a:pPr>
-            <a:r>
-              <a:rPr lang="en-US" sz="1400" dirty="0">
-                <a:solidFill>
-                  <a:srgbClr val="111827"/>
-                </a:solidFill>
-              </a:rPr>
-              <a:t>a norma não está reproduzida (textos da AnkoraOne, validação com a norma em curso). Para certificação: texto oficial e entidade acreditada.</a:t>
-            </a:r>
-            <a:endParaRPr lang="en-US" sz="1400" dirty="0"/>
-          </a:p>
-        </p:txBody>
-      </p:sp>
-      <p:sp>
-        <p:nvSpPr>
-          <p:cNvPr id="5" name="card-68"/>
-          <p:cNvSpPr/>
-          <p:nvPr/>
-        </p:nvSpPr>
-        <p:spPr>
-          <a:xfrm>
-            <a:off x="548640" y="2286000"/>
-            <a:ext cx="4206240" cy="1051560"/>
-          </a:xfrm>
-          <a:prstGeom prst="roundRect">
-            <a:avLst>
-              <a:gd name="adj" fmla="val 10435"/>
-            </a:avLst>
-          </a:prstGeom>
-          <a:solidFill>
-            <a:srgbClr val="F3F5F8"/>
-          </a:solidFill>
-          <a:ln w="12700">
-            <a:solidFill>
-              <a:srgbClr val="F3F5F8"/>
-            </a:solidFill>
-            <a:prstDash val="solid"/>
-          </a:ln>
-        </p:spPr>
-      </p:sp>
-      <p:sp>
-        <p:nvSpPr>
-          <p:cNvPr id="6" name="Text 4"/>
-          <p:cNvSpPr txBox="1"/>
-          <p:nvPr/>
-        </p:nvSpPr>
-        <p:spPr>
-          <a:xfrm>
-            <a:off x="777240" y="2395728"/>
-            <a:ext cx="1188720" cy="822960"/>
-          </a:xfrm>
-          <a:prstGeom prst="rect">
-            <a:avLst/>
-          </a:prstGeom>
-          <a:noFill/>
-          <a:ln/>
-        </p:spPr>
-        <p:txBody>
-          <a:bodyPr wrap="square" lIns="0" tIns="0" rIns="0" bIns="0" rtlCol="0" anchor="ctr"/>
-          <a:lstStyle/>
-          <a:p>
-            <a:pPr indent="0" marL="0">
-              <a:buNone/>
-            </a:pPr>
-            <a:r>
-              <a:rPr lang="en-US" sz="4400" b="1" dirty="0">
-                <a:solidFill>
-                  <a:srgbClr val="070A13"/>
-                </a:solidFill>
-              </a:rPr>
-              <a:t>25</a:t>
-            </a:r>
-            <a:endParaRPr lang="en-US" sz="4400" dirty="0"/>
-          </a:p>
-        </p:txBody>
-      </p:sp>
-      <p:sp>
-        <p:nvSpPr>
-          <p:cNvPr id="7" name="Text 5"/>
-          <p:cNvSpPr txBox="1"/>
-          <p:nvPr/>
-        </p:nvSpPr>
-        <p:spPr>
-          <a:xfrm>
-            <a:off x="1965960" y="2423160"/>
-            <a:ext cx="2651760" cy="777240"/>
-          </a:xfrm>
-          <a:prstGeom prst="rect">
-            <a:avLst/>
-          </a:prstGeom>
-          <a:noFill/>
-          <a:ln/>
-        </p:spPr>
-        <p:txBody>
-          <a:bodyPr wrap="square" lIns="0" tIns="0" rIns="0" bIns="0" rtlCol="0" anchor="ctr"/>
-          <a:lstStyle/>
-          <a:p>
-            <a:pPr indent="0" marL="0">
-              <a:buNone/>
-            </a:pPr>
-            <a:r>
-              <a:rPr lang="en-US" sz="1400" dirty="0">
-                <a:solidFill>
-                  <a:srgbClr val="111827"/>
-                </a:solidFill>
-              </a:rPr>
-              <a:t>requisitos do sistema de gestão (cláusulas 4 a 10)</a:t>
-            </a:r>
-            <a:endParaRPr lang="en-US" sz="1400" dirty="0"/>
-          </a:p>
-        </p:txBody>
-      </p:sp>
-      <p:sp>
-        <p:nvSpPr>
-          <p:cNvPr id="8" name="card-69"/>
-          <p:cNvSpPr/>
-          <p:nvPr/>
-        </p:nvSpPr>
-        <p:spPr>
-          <a:xfrm>
-            <a:off x="548640" y="3474720"/>
-            <a:ext cx="4206240" cy="1051560"/>
-          </a:xfrm>
-          <a:prstGeom prst="roundRect">
-            <a:avLst>
-              <a:gd name="adj" fmla="val 10435"/>
-            </a:avLst>
-          </a:prstGeom>
-          <a:solidFill>
-            <a:srgbClr val="070A13"/>
-          </a:solidFill>
-          <a:ln w="12700">
-            <a:solidFill>
-              <a:srgbClr val="070A13"/>
-            </a:solidFill>
-            <a:prstDash val="solid"/>
-          </a:ln>
-        </p:spPr>
-      </p:sp>
-      <p:sp>
-        <p:nvSpPr>
-          <p:cNvPr id="9" name="Text 7"/>
-          <p:cNvSpPr txBox="1"/>
-          <p:nvPr/>
-        </p:nvSpPr>
-        <p:spPr>
-          <a:xfrm>
-            <a:off x="777240" y="3584448"/>
-            <a:ext cx="1188720" cy="822960"/>
-          </a:xfrm>
-          <a:prstGeom prst="rect">
-            <a:avLst/>
-          </a:prstGeom>
-          <a:noFill/>
-          <a:ln/>
-        </p:spPr>
-        <p:txBody>
-          <a:bodyPr wrap="square" lIns="0" tIns="0" rIns="0" bIns="0" rtlCol="0" anchor="ctr"/>
-          <a:lstStyle/>
-          <a:p>
-            <a:pPr indent="0" marL="0">
-              <a:buNone/>
-            </a:pPr>
-            <a:r>
-              <a:rPr lang="en-US" sz="4400" b="1" dirty="0">
-                <a:solidFill>
-                  <a:srgbClr val="CFA04A"/>
-                </a:solidFill>
-              </a:rPr>
-              <a:t>93</a:t>
-            </a:r>
-            <a:endParaRPr lang="en-US" sz="4400" dirty="0"/>
-          </a:p>
-        </p:txBody>
-      </p:sp>
-      <p:sp>
-        <p:nvSpPr>
-          <p:cNvPr id="10" name="Text 8"/>
-          <p:cNvSpPr txBox="1"/>
-          <p:nvPr/>
-        </p:nvSpPr>
-        <p:spPr>
-          <a:xfrm>
-            <a:off x="1965960" y="3611880"/>
-            <a:ext cx="2651760" cy="777240"/>
-          </a:xfrm>
-          <a:prstGeom prst="rect">
-            <a:avLst/>
-          </a:prstGeom>
-          <a:noFill/>
-          <a:ln/>
-        </p:spPr>
-        <p:txBody>
-          <a:bodyPr wrap="square" lIns="0" tIns="0" rIns="0" bIns="0" rtlCol="0" anchor="ctr"/>
-          <a:lstStyle/>
-          <a:p>
-            <a:pPr indent="0" marL="0">
-              <a:buNone/>
-            </a:pPr>
-            <a:r>
-              <a:rPr lang="en-US" sz="1400" dirty="0">
-                <a:solidFill>
-                  <a:srgbClr val="FFFFFF"/>
-                </a:solidFill>
-              </a:rPr>
-              <a:t>controlos do Anexo A, com aplicabilidade e justificação</a:t>
-            </a:r>
-            <a:endParaRPr lang="en-US" sz="1400" dirty="0"/>
-          </a:p>
-        </p:txBody>
-      </p:sp>
-      <p:sp>
-        <p:nvSpPr>
-          <p:cNvPr id="11" name="card-70"/>
-          <p:cNvSpPr/>
-          <p:nvPr/>
-        </p:nvSpPr>
-        <p:spPr>
-          <a:xfrm>
-            <a:off x="548640" y="4663440"/>
-            <a:ext cx="4206240" cy="1051560"/>
-          </a:xfrm>
-          <a:prstGeom prst="roundRect">
-            <a:avLst>
-              <a:gd name="adj" fmla="val 10435"/>
-            </a:avLst>
-          </a:prstGeom>
-          <a:solidFill>
-            <a:srgbClr val="F3F5F8"/>
-          </a:solidFill>
-          <a:ln w="12700">
-            <a:solidFill>
-              <a:srgbClr val="F3F5F8"/>
-            </a:solidFill>
-            <a:prstDash val="solid"/>
-          </a:ln>
-        </p:spPr>
-      </p:sp>
-      <p:sp>
-        <p:nvSpPr>
-          <p:cNvPr id="12" name="Text 10"/>
-          <p:cNvSpPr txBox="1"/>
-          <p:nvPr/>
-        </p:nvSpPr>
-        <p:spPr>
-          <a:xfrm>
-            <a:off x="777240" y="4773168"/>
-            <a:ext cx="1188720" cy="822960"/>
-          </a:xfrm>
-          <a:prstGeom prst="rect">
-            <a:avLst/>
-          </a:prstGeom>
-          <a:noFill/>
-          <a:ln/>
-        </p:spPr>
-        <p:txBody>
-          <a:bodyPr wrap="square" lIns="0" tIns="0" rIns="0" bIns="0" rtlCol="0" anchor="ctr"/>
-          <a:lstStyle/>
-          <a:p>
-            <a:pPr indent="0" marL="0">
-              <a:buNone/>
-            </a:pPr>
-            <a:r>
-              <a:rPr lang="en-US" sz="4400" b="1" dirty="0">
-                <a:solidFill>
-                  <a:srgbClr val="070A13"/>
-                </a:solidFill>
-              </a:rPr>
-              <a:t>92</a:t>
-            </a:r>
-            <a:endParaRPr lang="en-US" sz="4400" dirty="0"/>
-          </a:p>
-        </p:txBody>
-      </p:sp>
-      <p:sp>
-        <p:nvSpPr>
-          <p:cNvPr id="13" name="Text 11"/>
-          <p:cNvSpPr txBox="1"/>
-          <p:nvPr/>
-        </p:nvSpPr>
-        <p:spPr>
-          <a:xfrm>
-            <a:off x="1965960" y="4800600"/>
-            <a:ext cx="2651760" cy="777240"/>
-          </a:xfrm>
-          <a:prstGeom prst="rect">
-            <a:avLst/>
-          </a:prstGeom>
-          <a:noFill/>
-          <a:ln/>
-        </p:spPr>
-        <p:txBody>
-          <a:bodyPr wrap="square" lIns="0" tIns="0" rIns="0" bIns="0" rtlCol="0" anchor="ctr"/>
-          <a:lstStyle/>
-          <a:p>
-            <a:pPr indent="0" marL="0">
-              <a:buNone/>
-            </a:pPr>
-            <a:r>
-              <a:rPr lang="en-US" sz="1400" dirty="0">
-                <a:solidFill>
-                  <a:srgbClr val="111827"/>
-                </a:solidFill>
-              </a:rPr>
-              <a:t>controlos ligados ao QNRCS pelo Reg. 756/2026</a:t>
-            </a:r>
-            <a:endParaRPr lang="en-US" sz="1400" dirty="0"/>
-          </a:p>
-        </p:txBody>
-      </p:sp>
-      <p:sp>
-        <p:nvSpPr>
-          <p:cNvPr id="14" name="Text 12"/>
-          <p:cNvSpPr txBox="1"/>
-          <p:nvPr/>
-        </p:nvSpPr>
-        <p:spPr>
-          <a:xfrm>
-            <a:off x="5120640" y="2286000"/>
-            <a:ext cx="6492240" cy="365760"/>
-          </a:xfrm>
-          <a:prstGeom prst="rect">
-            <a:avLst/>
-          </a:prstGeom>
-          <a:noFill/>
-          <a:ln/>
-        </p:spPr>
-        <p:txBody>
-          <a:bodyPr wrap="square" lIns="0" tIns="0" rIns="0" bIns="0" rtlCol="0" anchor="t"/>
-          <a:lstStyle/>
-          <a:p>
-            <a:pPr indent="0" marL="0">
-              <a:buNone/>
-            </a:pPr>
-            <a:r>
-              <a:rPr lang="en-US" sz="1700" b="1" dirty="0">
-                <a:solidFill>
-                  <a:srgbClr val="17766C"/>
-                </a:solidFill>
-              </a:rPr>
-              <a:t>Como trabalhar (Biblioteca Legal › ISO/IEC 27001)</a:t>
-            </a:r>
-            <a:endParaRPr lang="en-US" sz="1700" dirty="0"/>
-          </a:p>
-        </p:txBody>
-      </p:sp>
-      <p:sp>
-        <p:nvSpPr>
-          <p:cNvPr id="15" name="Text 13"/>
-          <p:cNvSpPr txBox="1"/>
-          <p:nvPr/>
-        </p:nvSpPr>
-        <p:spPr>
-          <a:xfrm>
-            <a:off x="5120640" y="2743200"/>
-            <a:ext cx="6492240" cy="3108960"/>
-          </a:xfrm>
-          <a:prstGeom prst="rect">
-            <a:avLst/>
-          </a:prstGeom>
-          <a:noFill/>
-          <a:ln/>
-        </p:spPr>
-        <p:txBody>
-          <a:bodyPr wrap="square" lIns="0" tIns="0" rIns="0" bIns="0" rtlCol="0" anchor="t"/>
-          <a:lstStyle/>
-          <a:p>
-            <a:pPr marL="342900" indent="-342900">
-              <a:spcAft>
-                <a:spcPts val="800"/>
-              </a:spcAft>
-              <a:buSzPct val="100000"/>
-              <a:buFont typeface="+mj-lt"/>
-              <a:buAutoNum type="arabicPeriod" startAt="1"/>
-            </a:pPr>
-            <a:r>
-              <a:rPr lang="en-US" sz="1400" dirty="0">
-                <a:solidFill>
-                  <a:srgbClr val="111827"/>
-                </a:solidFill>
-              </a:rPr>
-              <a:t>Cláusulas 4 a 6: âmbito, política, metodologia de riscos e objetivos</a:t>
-            </a:r>
-            <a:endParaRPr lang="en-US" sz="1400" dirty="0"/>
-          </a:p>
-          <a:p>
-            <a:pPr marL="342900" indent="-342900">
-              <a:spcAft>
-                <a:spcPts val="800"/>
-              </a:spcAft>
-              <a:buSzPct val="100000"/>
-              <a:buFont typeface="+mj-lt"/>
-              <a:buAutoNum type="arabicPeriod" startAt="1"/>
-            </a:pPr>
-            <a:r>
-              <a:rPr lang="en-US" sz="1400" dirty="0">
-                <a:solidFill>
-                  <a:srgbClr val="111827"/>
-                </a:solidFill>
-              </a:rPr>
-              <a:t>Avaliação e tratamento de riscos em Gestão de Risco</a:t>
-            </a:r>
-            <a:endParaRPr lang="en-US" sz="1400" dirty="0"/>
-          </a:p>
-          <a:p>
-            <a:pPr marL="342900" indent="-342900">
-              <a:spcAft>
-                <a:spcPts val="800"/>
-              </a:spcAft>
-              <a:buSzPct val="100000"/>
-              <a:buFont typeface="+mj-lt"/>
-              <a:buAutoNum type="arabicPeriod" startAt="1"/>
-            </a:pPr>
-            <a:r>
-              <a:rPr lang="en-US" sz="1400" dirty="0">
-                <a:solidFill>
-                  <a:srgbClr val="111827"/>
-                </a:solidFill>
-              </a:rPr>
-              <a:t>Anexo A: aplicável ou não, com justificação, para cada controlo</a:t>
-            </a:r>
-            <a:endParaRPr lang="en-US" sz="1400" dirty="0"/>
-          </a:p>
-          <a:p>
-            <a:pPr marL="342900" indent="-342900">
-              <a:spcAft>
-                <a:spcPts val="800"/>
-              </a:spcAft>
-              <a:buSzPct val="100000"/>
-              <a:buFont typeface="+mj-lt"/>
-              <a:buAutoNum type="arabicPeriod" startAt="1"/>
-            </a:pPr>
-            <a:r>
-              <a:rPr lang="en-US" sz="1400" dirty="0">
-                <a:solidFill>
-                  <a:srgbClr val="111827"/>
-                </a:solidFill>
-              </a:rPr>
-              <a:t>Exportar a Declaração de Aplicabilidade e aprová-la em Documentos</a:t>
-            </a:r>
-            <a:endParaRPr lang="en-US" sz="1400" dirty="0"/>
-          </a:p>
-          <a:p>
-            <a:pPr marL="342900" indent="-342900">
-              <a:spcAft>
-                <a:spcPts val="800"/>
-              </a:spcAft>
-              <a:buSzPct val="100000"/>
-              <a:buFont typeface="+mj-lt"/>
-              <a:buAutoNum type="arabicPeriod" startAt="1"/>
-            </a:pPr>
-            <a:r>
-              <a:rPr lang="en-US" sz="1400" dirty="0">
-                <a:solidFill>
-                  <a:srgbClr val="111827"/>
-                </a:solidFill>
-              </a:rPr>
-              <a:t>Evidências por controlo; as do RJC ligadas contam também</a:t>
-            </a:r>
-            <a:endParaRPr lang="en-US" sz="1400" dirty="0"/>
-          </a:p>
-          <a:p>
-            <a:pPr marL="342900" indent="-342900">
-              <a:spcAft>
-                <a:spcPts val="800"/>
-              </a:spcAft>
-              <a:buSzPct val="100000"/>
-              <a:buFont typeface="+mj-lt"/>
-              <a:buAutoNum type="arabicPeriod" startAt="1"/>
-            </a:pPr>
-            <a:r>
-              <a:rPr lang="en-US" sz="1400" dirty="0">
-                <a:solidFill>
-                  <a:srgbClr val="111827"/>
-                </a:solidFill>
-              </a:rPr>
-              <a:t>Auditoria interna (9.2) e revisão pela gestão (9.3) antes da certificação</a:t>
-            </a:r>
-            <a:endParaRPr lang="en-US" sz="1400" dirty="0"/>
-          </a:p>
-        </p:txBody>
-      </p:sp>
-      <p:sp>
-        <p:nvSpPr>
-          <p:cNvPr id="25" name="Slide Number Placeholder 0"/>
-          <p:cNvSpPr>
-            <a:spLocks noGrp="1"/>
-          </p:cNvSpPr>
-          <p:nvPr>
-            <p:ph type="sldNum" sz="quarter" idx="4294967295"/>
-          </p:nvPr>
-        </p:nvSpPr>
-        <p:spPr>
-          <a:xfrm>
-            <a:off x="548640" y="6309360"/>
-            <a:ext cx="914400" cy="274320"/>
-          </a:xfrm>
-          <a:prstGeom prst="rect">
-            <a:avLst/>
-          </a:prstGeom>
-          <a:extLst>
-            <a:ext uri="{C572A759-6A51-4108-AA02-DFA0A04FC94B}">
-              <ma14:wrappingTextBoxFlag xmlns:ma14="http://schemas.microsoft.com/office/mac/drawingml/2011/main" val="0"/>
-            </a:ext>
-          </a:extLst>
-        </p:spPr>
-        <p:txBody>
-          <a:bodyPr/>
-          <a:lstStyle>
-            <a:lvl1pPr>
-              <a:defRPr sz="1000">
-                <a:solidFill>
-                  <a:srgbClr val="5B6474"/>
-                </a:solidFill>
-              </a:defRPr>
-            </a:lvl1pPr>
-          </a:lstStyle>
-          <a:p>
-            <a:pPr algn="l"/>
-            <a:fld id="{F7021451-1387-4CA6-816F-3879F97B5CBC}" type="slidenum">
-              <a:rPr b="0" lang="en-US"/>
               <a:t>15</a:t>
             </a:fld>
             <a:endParaRPr lang="en-US"/>
@@ -7823,7 +8255,7 @@
                   <a:schemeClr val="tx1"/>
                 </a:solidFill>
               </a:rPr>
-              <a:t>Outros referenciais disponíveis na plataforma</a:t>
+              <a:t>ISO/IEC 27001: um guia com Declaração de Aplicabilidade</a:t>
             </a:r>
             <a:endParaRPr lang="en-US" sz="3200" dirty="0"/>
           </a:p>
@@ -7831,18 +8263,92 @@
       </p:sp>
       <p:sp>
         <p:nvSpPr>
-          <p:cNvPr id="3" name="card-71"/>
+          <p:cNvPr id="3" name="card-76"/>
           <p:cNvSpPr/>
           <p:nvPr/>
         </p:nvSpPr>
         <p:spPr>
           <a:xfrm>
-            <a:off x="548640" y="1417320"/>
-            <a:ext cx="3520440" cy="2011680"/>
+            <a:off x="548640" y="1325880"/>
+            <a:ext cx="11064240" cy="731520"/>
           </a:xfrm>
           <a:prstGeom prst="roundRect">
             <a:avLst>
-              <a:gd name="adj" fmla="val 5455"/>
+              <a:gd name="adj" fmla="val 15000"/>
+            </a:avLst>
+          </a:prstGeom>
+          <a:solidFill>
+            <a:srgbClr val="F7F2E7"/>
+          </a:solidFill>
+          <a:ln w="12700">
+            <a:solidFill>
+              <a:srgbClr val="F7F2E7"/>
+            </a:solidFill>
+            <a:prstDash val="solid"/>
+          </a:ln>
+        </p:spPr>
+      </p:sp>
+      <p:sp>
+        <p:nvSpPr>
+          <p:cNvPr id="4" name="Text 2"/>
+          <p:cNvSpPr txBox="1"/>
+          <p:nvPr/>
+        </p:nvSpPr>
+        <p:spPr>
+          <a:xfrm>
+            <a:off x="822960" y="1417320"/>
+            <a:ext cx="10515600" cy="548640"/>
+          </a:xfrm>
+          <a:prstGeom prst="rect">
+            <a:avLst/>
+          </a:prstGeom>
+          <a:noFill/>
+          <a:ln/>
+        </p:spPr>
+        <p:txBody>
+          <a:bodyPr wrap="square" lIns="0" tIns="0" rIns="0" bIns="0" rtlCol="0" anchor="ctr"/>
+          <a:lstStyle/>
+          <a:p>
+            <a:pPr indent="0" marL="0">
+              <a:buNone/>
+            </a:pPr>
+            <a:r>
+              <a:rPr lang="en-US" sz="1400" b="1" dirty="0">
+                <a:solidFill>
+                  <a:srgbClr val="8A6620"/>
+                </a:solidFill>
+              </a:rPr>
+              <a:t>Guia de preparação: </a:t>
+            </a:r>
+            <a:pPr indent="0" marL="0">
+              <a:buNone/>
+            </a:pPr>
+            <a:r>
+              <a:rPr lang="en-US" sz="1400" dirty="0">
+                <a:solidFill>
+                  <a:srgbClr val="111827"/>
+                </a:solidFill>
+              </a:rPr>
+              <a:t>textos da AnkoraOne, estrutura conferida com o texto oficial (outubro de 2026); a norma não está reproduzida. Para certificação: texto oficial e entidade acreditada.</a:t>
+            </a:r>
+            <a:endParaRPr lang="en-US" sz="1400" dirty="0"/>
+          </a:p>
+        </p:txBody>
+      </p:sp>
+      <p:sp>
+        <p:nvSpPr>
+          <p:cNvPr id="5" name="card-77"/>
+          <p:cNvSpPr/>
+          <p:nvPr/>
+        </p:nvSpPr>
+        <p:spPr>
+          <a:xfrm>
+            <a:off x="548640" y="2286000"/>
+            <a:ext cx="4206240" cy="1051560"/>
+          </a:xfrm>
+          <a:prstGeom prst="roundRect">
+            <a:avLst>
+              <a:gd name="adj" fmla="val 10435"/>
             </a:avLst>
           </a:prstGeom>
           <a:solidFill>
@@ -7858,126 +8364,189 @@
       </p:sp>
       <p:sp>
         <p:nvSpPr>
-          <p:cNvPr id="4" name="Text 2"/>
-          <p:cNvSpPr txBox="1"/>
-          <p:nvPr/>
-        </p:nvSpPr>
-        <p:spPr>
-          <a:xfrm>
-            <a:off x="822960" y="1645920"/>
-            <a:ext cx="3017520" cy="411480"/>
-          </a:xfrm>
-          <a:prstGeom prst="rect">
-            <a:avLst/>
-          </a:prstGeom>
-          <a:noFill/>
-          <a:ln/>
-        </p:spPr>
-        <p:txBody>
-          <a:bodyPr wrap="square" lIns="0" tIns="0" rIns="0" bIns="0" rtlCol="0" anchor="t"/>
+          <p:cNvPr id="6" name="Text 4"/>
+          <p:cNvSpPr txBox="1"/>
+          <p:nvPr/>
+        </p:nvSpPr>
+        <p:spPr>
+          <a:xfrm>
+            <a:off x="777240" y="2395728"/>
+            <a:ext cx="1188720" cy="822960"/>
+          </a:xfrm>
+          <a:prstGeom prst="rect">
+            <a:avLst/>
+          </a:prstGeom>
+          <a:noFill/>
+          <a:ln/>
+        </p:spPr>
+        <p:txBody>
+          <a:bodyPr wrap="square" lIns="0" tIns="0" rIns="0" bIns="0" rtlCol="0" anchor="ctr"/>
           <a:lstStyle/>
           <a:p>
             <a:pPr indent="0" marL="0">
               <a:buNone/>
             </a:pPr>
             <a:r>
-              <a:rPr lang="en-US" sz="1800" b="1" dirty="0">
+              <a:rPr lang="en-US" sz="4400" b="1" dirty="0">
                 <a:solidFill>
                   <a:srgbClr val="070A13"/>
                 </a:solidFill>
               </a:rPr>
-              <a:t>QNRCS</a:t>
-            </a:r>
-            <a:endParaRPr lang="en-US" sz="1800" dirty="0"/>
-          </a:p>
-        </p:txBody>
-      </p:sp>
-      <p:sp>
-        <p:nvSpPr>
-          <p:cNvPr id="5" name="Text 3"/>
-          <p:cNvSpPr txBox="1"/>
-          <p:nvPr/>
-        </p:nvSpPr>
-        <p:spPr>
-          <a:xfrm>
-            <a:off x="822960" y="2075688"/>
-            <a:ext cx="3017520" cy="320040"/>
-          </a:xfrm>
-          <a:prstGeom prst="rect">
-            <a:avLst/>
-          </a:prstGeom>
-          <a:noFill/>
-          <a:ln/>
-        </p:spPr>
-        <p:txBody>
-          <a:bodyPr wrap="square" lIns="0" tIns="0" rIns="0" bIns="0" rtlCol="0" anchor="t"/>
+              <a:t>25</a:t>
+            </a:r>
+            <a:endParaRPr lang="en-US" sz="4400" dirty="0"/>
+          </a:p>
+        </p:txBody>
+      </p:sp>
+      <p:sp>
+        <p:nvSpPr>
+          <p:cNvPr id="7" name="Text 5"/>
+          <p:cNvSpPr txBox="1"/>
+          <p:nvPr/>
+        </p:nvSpPr>
+        <p:spPr>
+          <a:xfrm>
+            <a:off x="1965960" y="2423160"/>
+            <a:ext cx="2651760" cy="777240"/>
+          </a:xfrm>
+          <a:prstGeom prst="rect">
+            <a:avLst/>
+          </a:prstGeom>
+          <a:noFill/>
+          <a:ln/>
+        </p:spPr>
+        <p:txBody>
+          <a:bodyPr wrap="square" lIns="0" tIns="0" rIns="0" bIns="0" rtlCol="0" anchor="ctr"/>
           <a:lstStyle/>
           <a:p>
             <a:pPr indent="0" marL="0">
               <a:buNone/>
             </a:pPr>
             <a:r>
-              <a:rPr lang="en-US" sz="1200" b="1" dirty="0">
-                <a:solidFill>
-                  <a:srgbClr val="17766C"/>
-                </a:solidFill>
-              </a:rPr>
-              <a:t>Reg. 756/2026, Anexo I</a:t>
-            </a:r>
-            <a:endParaRPr lang="en-US" sz="1200" dirty="0"/>
-          </a:p>
-        </p:txBody>
-      </p:sp>
-      <p:sp>
-        <p:nvSpPr>
-          <p:cNvPr id="6" name="Text 4"/>
-          <p:cNvSpPr txBox="1"/>
-          <p:nvPr/>
-        </p:nvSpPr>
-        <p:spPr>
-          <a:xfrm>
-            <a:off x="822960" y="2468880"/>
-            <a:ext cx="3017520" cy="822960"/>
-          </a:xfrm>
-          <a:prstGeom prst="rect">
-            <a:avLst/>
-          </a:prstGeom>
-          <a:noFill/>
-          <a:ln/>
-        </p:spPr>
-        <p:txBody>
-          <a:bodyPr wrap="square" lIns="0" tIns="0" rIns="0" bIns="0" rtlCol="0" anchor="t"/>
-          <a:lstStyle/>
-          <a:p>
-            <a:pPr indent="0" marL="0">
-              <a:buNone/>
-            </a:pPr>
-            <a:r>
-              <a:rPr lang="en-US" sz="1300" dirty="0">
-                <a:solidFill>
-                  <a:srgbClr val="5B6474"/>
-                </a:solidFill>
-              </a:rPr>
-              <a:t>107 controlos em seis objetivos, com medida e verificação por nível</a:t>
-            </a:r>
-            <a:endParaRPr lang="en-US" sz="1300" dirty="0"/>
-          </a:p>
-        </p:txBody>
-      </p:sp>
-      <p:sp>
-        <p:nvSpPr>
-          <p:cNvPr id="7" name="card-72"/>
+              <a:rPr lang="en-US" sz="1400" dirty="0">
+                <a:solidFill>
+                  <a:srgbClr val="111827"/>
+                </a:solidFill>
+              </a:rPr>
+              <a:t>requisitos do sistema de gestão (cláusulas 4 a 10)</a:t>
+            </a:r>
+            <a:endParaRPr lang="en-US" sz="1400" dirty="0"/>
+          </a:p>
+        </p:txBody>
+      </p:sp>
+      <p:sp>
+        <p:nvSpPr>
+          <p:cNvPr id="8" name="card-78"/>
           <p:cNvSpPr/>
           <p:nvPr/>
         </p:nvSpPr>
         <p:spPr>
           <a:xfrm>
-            <a:off x="4297680" y="1417320"/>
-            <a:ext cx="3520440" cy="2011680"/>
+            <a:off x="548640" y="3474720"/>
+            <a:ext cx="4206240" cy="1051560"/>
           </a:xfrm>
           <a:prstGeom prst="roundRect">
             <a:avLst>
-              <a:gd name="adj" fmla="val 5455"/>
+              <a:gd name="adj" fmla="val 10435"/>
+            </a:avLst>
+          </a:prstGeom>
+          <a:solidFill>
+            <a:srgbClr val="070A13"/>
+          </a:solidFill>
+          <a:ln w="12700">
+            <a:solidFill>
+              <a:srgbClr val="070A13"/>
+            </a:solidFill>
+            <a:prstDash val="solid"/>
+          </a:ln>
+        </p:spPr>
+      </p:sp>
+      <p:sp>
+        <p:nvSpPr>
+          <p:cNvPr id="9" name="Text 7"/>
+          <p:cNvSpPr txBox="1"/>
+          <p:nvPr/>
+        </p:nvSpPr>
+        <p:spPr>
+          <a:xfrm>
+            <a:off x="777240" y="3584448"/>
+            <a:ext cx="1188720" cy="822960"/>
+          </a:xfrm>
+          <a:prstGeom prst="rect">
+            <a:avLst/>
+          </a:prstGeom>
+          <a:noFill/>
+          <a:ln/>
+        </p:spPr>
+        <p:txBody>
+          <a:bodyPr wrap="square" lIns="0" tIns="0" rIns="0" bIns="0" rtlCol="0" anchor="ctr"/>
+          <a:lstStyle/>
+          <a:p>
+            <a:pPr indent="0" marL="0">
+              <a:buNone/>
+            </a:pPr>
+            <a:r>
+              <a:rPr lang="en-US" sz="4400" b="1" dirty="0">
+                <a:solidFill>
+                  <a:srgbClr val="CFA04A"/>
+                </a:solidFill>
+              </a:rPr>
+              <a:t>93</a:t>
+            </a:r>
+            <a:endParaRPr lang="en-US" sz="4400" dirty="0"/>
+          </a:p>
+        </p:txBody>
+      </p:sp>
+      <p:sp>
+        <p:nvSpPr>
+          <p:cNvPr id="10" name="Text 8"/>
+          <p:cNvSpPr txBox="1"/>
+          <p:nvPr/>
+        </p:nvSpPr>
+        <p:spPr>
+          <a:xfrm>
+            <a:off x="1965960" y="3611880"/>
+            <a:ext cx="2651760" cy="777240"/>
+          </a:xfrm>
+          <a:prstGeom prst="rect">
+            <a:avLst/>
+          </a:prstGeom>
+          <a:noFill/>
+          <a:ln/>
+        </p:spPr>
+        <p:txBody>
+          <a:bodyPr wrap="square" lIns="0" tIns="0" rIns="0" bIns="0" rtlCol="0" anchor="ctr"/>
+          <a:lstStyle/>
+          <a:p>
+            <a:pPr indent="0" marL="0">
+              <a:buNone/>
+            </a:pPr>
+            <a:r>
+              <a:rPr lang="en-US" sz="1400" dirty="0">
+                <a:solidFill>
+                  <a:srgbClr val="FFFFFF"/>
+                </a:solidFill>
+              </a:rPr>
+              <a:t>controlos do Anexo A, com aplicabilidade e justificação</a:t>
+            </a:r>
+            <a:endParaRPr lang="en-US" sz="1400" dirty="0"/>
+          </a:p>
+        </p:txBody>
+      </p:sp>
+      <p:sp>
+        <p:nvSpPr>
+          <p:cNvPr id="11" name="card-79"/>
+          <p:cNvSpPr/>
+          <p:nvPr/>
+        </p:nvSpPr>
+        <p:spPr>
+          <a:xfrm>
+            <a:off x="548640" y="4663440"/>
+            <a:ext cx="4206240" cy="1051560"/>
+          </a:xfrm>
+          <a:prstGeom prst="roundRect">
+            <a:avLst>
+              <a:gd name="adj" fmla="val 10435"/>
             </a:avLst>
           </a:prstGeom>
           <a:solidFill>
@@ -7993,685 +8562,264 @@
       </p:sp>
       <p:sp>
         <p:nvSpPr>
-          <p:cNvPr id="8" name="Text 6"/>
-          <p:cNvSpPr txBox="1"/>
-          <p:nvPr/>
-        </p:nvSpPr>
-        <p:spPr>
-          <a:xfrm>
-            <a:off x="4572000" y="1645920"/>
-            <a:ext cx="3017520" cy="411480"/>
-          </a:xfrm>
-          <a:prstGeom prst="rect">
-            <a:avLst/>
-          </a:prstGeom>
-          <a:noFill/>
-          <a:ln/>
-        </p:spPr>
-        <p:txBody>
-          <a:bodyPr wrap="square" lIns="0" tIns="0" rIns="0" bIns="0" rtlCol="0" anchor="t"/>
+          <p:cNvPr id="12" name="Text 10"/>
+          <p:cNvSpPr txBox="1"/>
+          <p:nvPr/>
+        </p:nvSpPr>
+        <p:spPr>
+          <a:xfrm>
+            <a:off x="777240" y="4773168"/>
+            <a:ext cx="1188720" cy="822960"/>
+          </a:xfrm>
+          <a:prstGeom prst="rect">
+            <a:avLst/>
+          </a:prstGeom>
+          <a:noFill/>
+          <a:ln/>
+        </p:spPr>
+        <p:txBody>
+          <a:bodyPr wrap="square" lIns="0" tIns="0" rIns="0" bIns="0" rtlCol="0" anchor="ctr"/>
           <a:lstStyle/>
           <a:p>
             <a:pPr indent="0" marL="0">
               <a:buNone/>
             </a:pPr>
             <a:r>
-              <a:rPr lang="en-US" sz="1800" b="1" dirty="0">
+              <a:rPr lang="en-US" sz="4400" b="1" dirty="0">
                 <a:solidFill>
                   <a:srgbClr val="070A13"/>
                 </a:solidFill>
               </a:rPr>
-              <a:t>Requisitos técnicos NIS2</a:t>
-            </a:r>
-            <a:endParaRPr lang="en-US" sz="1800" dirty="0"/>
-          </a:p>
-        </p:txBody>
-      </p:sp>
-      <p:sp>
-        <p:nvSpPr>
-          <p:cNvPr id="9" name="Text 7"/>
-          <p:cNvSpPr txBox="1"/>
-          <p:nvPr/>
-        </p:nvSpPr>
-        <p:spPr>
-          <a:xfrm>
-            <a:off x="4572000" y="2075688"/>
-            <a:ext cx="3017520" cy="320040"/>
-          </a:xfrm>
-          <a:prstGeom prst="rect">
-            <a:avLst/>
-          </a:prstGeom>
-          <a:noFill/>
-          <a:ln/>
-        </p:spPr>
-        <p:txBody>
-          <a:bodyPr wrap="square" lIns="0" tIns="0" rIns="0" bIns="0" rtlCol="0" anchor="t"/>
+              <a:t>92</a:t>
+            </a:r>
+            <a:endParaRPr lang="en-US" sz="4400" dirty="0"/>
+          </a:p>
+        </p:txBody>
+      </p:sp>
+      <p:sp>
+        <p:nvSpPr>
+          <p:cNvPr id="13" name="Text 11"/>
+          <p:cNvSpPr txBox="1"/>
+          <p:nvPr/>
+        </p:nvSpPr>
+        <p:spPr>
+          <a:xfrm>
+            <a:off x="1965960" y="4800600"/>
+            <a:ext cx="2651760" cy="777240"/>
+          </a:xfrm>
+          <a:prstGeom prst="rect">
+            <a:avLst/>
+          </a:prstGeom>
+          <a:noFill/>
+          <a:ln/>
+        </p:spPr>
+        <p:txBody>
+          <a:bodyPr wrap="square" lIns="0" tIns="0" rIns="0" bIns="0" rtlCol="0" anchor="ctr"/>
           <a:lstStyle/>
           <a:p>
             <a:pPr indent="0" marL="0">
               <a:buNone/>
             </a:pPr>
             <a:r>
-              <a:rPr lang="en-US" sz="1200" b="1" dirty="0">
+              <a:rPr lang="en-US" sz="1400" dirty="0">
+                <a:solidFill>
+                  <a:srgbClr val="111827"/>
+                </a:solidFill>
+              </a:rPr>
+              <a:t>controlos ligados ao QNRCS pelo Reg. 756/2026</a:t>
+            </a:r>
+            <a:endParaRPr lang="en-US" sz="1400" dirty="0"/>
+          </a:p>
+        </p:txBody>
+      </p:sp>
+      <p:sp>
+        <p:nvSpPr>
+          <p:cNvPr id="14" name="Text 12"/>
+          <p:cNvSpPr txBox="1"/>
+          <p:nvPr/>
+        </p:nvSpPr>
+        <p:spPr>
+          <a:xfrm>
+            <a:off x="5120640" y="2286000"/>
+            <a:ext cx="6492240" cy="365760"/>
+          </a:xfrm>
+          <a:prstGeom prst="rect">
+            <a:avLst/>
+          </a:prstGeom>
+          <a:noFill/>
+          <a:ln/>
+        </p:spPr>
+        <p:txBody>
+          <a:bodyPr wrap="square" lIns="0" tIns="0" rIns="0" bIns="0" rtlCol="0" anchor="t"/>
+          <a:lstStyle/>
+          <a:p>
+            <a:pPr indent="0" marL="0">
+              <a:buNone/>
+            </a:pPr>
+            <a:r>
+              <a:rPr lang="en-US" sz="1700" b="1" dirty="0">
                 <a:solidFill>
                   <a:srgbClr val="17766C"/>
                 </a:solidFill>
               </a:rPr>
-              <a:t>Reg. de Execução (UE) 2024/2690</a:t>
-            </a:r>
-            <a:endParaRPr lang="en-US" sz="1200" dirty="0"/>
-          </a:p>
-        </p:txBody>
-      </p:sp>
-      <p:sp>
-        <p:nvSpPr>
-          <p:cNvPr id="10" name="Text 8"/>
-          <p:cNvSpPr txBox="1"/>
-          <p:nvPr/>
-        </p:nvSpPr>
-        <p:spPr>
-          <a:xfrm>
-            <a:off x="4572000" y="2468880"/>
-            <a:ext cx="3017520" cy="822960"/>
-          </a:xfrm>
-          <a:prstGeom prst="rect">
-            <a:avLst/>
-          </a:prstGeom>
-          <a:noFill/>
-          <a:ln/>
-        </p:spPr>
-        <p:txBody>
-          <a:bodyPr wrap="square" lIns="0" tIns="0" rIns="0" bIns="0" rtlCol="0" anchor="t"/>
-          <a:lstStyle/>
-          <a:p>
-            <a:pPr indent="0" marL="0">
-              <a:buNone/>
-            </a:pPr>
-            <a:r>
-              <a:rPr lang="en-US" sz="1300" dirty="0">
-                <a:solidFill>
-                  <a:srgbClr val="5B6474"/>
-                </a:solidFill>
-              </a:rPr>
-              <a:t>161 requisitos para serviços digitais</a:t>
-            </a:r>
-            <a:endParaRPr lang="en-US" sz="1300" dirty="0"/>
-          </a:p>
-        </p:txBody>
-      </p:sp>
-      <p:sp>
-        <p:nvSpPr>
-          <p:cNvPr id="11" name="card-73"/>
-          <p:cNvSpPr/>
-          <p:nvPr/>
-        </p:nvSpPr>
-        <p:spPr>
-          <a:xfrm>
-            <a:off x="8046720" y="1417320"/>
-            <a:ext cx="3520440" cy="2011680"/>
-          </a:xfrm>
-          <a:prstGeom prst="roundRect">
-            <a:avLst>
-              <a:gd name="adj" fmla="val 5455"/>
-            </a:avLst>
-          </a:prstGeom>
-          <a:solidFill>
-            <a:srgbClr val="F3F5F8"/>
-          </a:solidFill>
-          <a:ln w="12700">
-            <a:solidFill>
-              <a:srgbClr val="F3F5F8"/>
-            </a:solidFill>
-            <a:prstDash val="solid"/>
-          </a:ln>
-        </p:spPr>
-      </p:sp>
-      <p:sp>
-        <p:nvSpPr>
-          <p:cNvPr id="12" name="Text 10"/>
-          <p:cNvSpPr txBox="1"/>
-          <p:nvPr/>
-        </p:nvSpPr>
-        <p:spPr>
-          <a:xfrm>
-            <a:off x="8321040" y="1645920"/>
-            <a:ext cx="3017520" cy="411480"/>
-          </a:xfrm>
-          <a:prstGeom prst="rect">
-            <a:avLst/>
-          </a:prstGeom>
-          <a:noFill/>
-          <a:ln/>
-        </p:spPr>
-        <p:txBody>
-          <a:bodyPr wrap="square" lIns="0" tIns="0" rIns="0" bIns="0" rtlCol="0" anchor="t"/>
-          <a:lstStyle/>
-          <a:p>
-            <a:pPr indent="0" marL="0">
-              <a:buNone/>
-            </a:pPr>
-            <a:r>
-              <a:rPr lang="en-US" sz="1800" b="1" dirty="0">
-                <a:solidFill>
-                  <a:srgbClr val="070A13"/>
-                </a:solidFill>
-              </a:rPr>
-              <a:t>DORA</a:t>
-            </a:r>
-            <a:endParaRPr lang="en-US" sz="1800" dirty="0"/>
-          </a:p>
-        </p:txBody>
-      </p:sp>
-      <p:sp>
-        <p:nvSpPr>
-          <p:cNvPr id="13" name="Text 11"/>
-          <p:cNvSpPr txBox="1"/>
-          <p:nvPr/>
-        </p:nvSpPr>
-        <p:spPr>
-          <a:xfrm>
-            <a:off x="8321040" y="2075688"/>
-            <a:ext cx="3017520" cy="320040"/>
-          </a:xfrm>
-          <a:prstGeom prst="rect">
-            <a:avLst/>
-          </a:prstGeom>
-          <a:noFill/>
-          <a:ln/>
-        </p:spPr>
-        <p:txBody>
-          <a:bodyPr wrap="square" lIns="0" tIns="0" rIns="0" bIns="0" rtlCol="0" anchor="t"/>
-          <a:lstStyle/>
-          <a:p>
-            <a:pPr indent="0" marL="0">
-              <a:buNone/>
-            </a:pPr>
-            <a:r>
-              <a:rPr lang="en-US" sz="1200" b="1" dirty="0">
-                <a:solidFill>
-                  <a:srgbClr val="17766C"/>
-                </a:solidFill>
-              </a:rPr>
-              <a:t>Reg. (UE) 2022/2554</a:t>
-            </a:r>
-            <a:endParaRPr lang="en-US" sz="1200" dirty="0"/>
-          </a:p>
-        </p:txBody>
-      </p:sp>
-      <p:sp>
-        <p:nvSpPr>
-          <p:cNvPr id="14" name="Text 12"/>
-          <p:cNvSpPr txBox="1"/>
-          <p:nvPr/>
-        </p:nvSpPr>
-        <p:spPr>
-          <a:xfrm>
-            <a:off x="8321040" y="2468880"/>
-            <a:ext cx="3017520" cy="822960"/>
-          </a:xfrm>
-          <a:prstGeom prst="rect">
-            <a:avLst/>
-          </a:prstGeom>
-          <a:noFill/>
-          <a:ln/>
-        </p:spPr>
-        <p:txBody>
-          <a:bodyPr wrap="square" lIns="0" tIns="0" rIns="0" bIns="0" rtlCol="0" anchor="t"/>
-          <a:lstStyle/>
-          <a:p>
-            <a:pPr indent="0" marL="0">
-              <a:buNone/>
-            </a:pPr>
-            <a:r>
-              <a:rPr lang="en-US" sz="1300" dirty="0">
-                <a:solidFill>
-                  <a:srgbClr val="5B6474"/>
-                </a:solidFill>
-              </a:rPr>
-              <a:t>111 obrigações e prazos de incidentes para o setor financeiro</a:t>
-            </a:r>
-            <a:endParaRPr lang="en-US" sz="1300" dirty="0"/>
-          </a:p>
-        </p:txBody>
-      </p:sp>
-      <p:sp>
-        <p:nvSpPr>
-          <p:cNvPr id="15" name="card-74"/>
-          <p:cNvSpPr/>
-          <p:nvPr/>
-        </p:nvSpPr>
-        <p:spPr>
-          <a:xfrm>
-            <a:off x="548640" y="3657600"/>
-            <a:ext cx="3520440" cy="2011680"/>
-          </a:xfrm>
-          <a:prstGeom prst="roundRect">
-            <a:avLst>
-              <a:gd name="adj" fmla="val 5455"/>
-            </a:avLst>
-          </a:prstGeom>
-          <a:solidFill>
-            <a:srgbClr val="F3F5F8"/>
-          </a:solidFill>
-          <a:ln w="12700">
-            <a:solidFill>
-              <a:srgbClr val="F3F5F8"/>
-            </a:solidFill>
-            <a:prstDash val="solid"/>
-          </a:ln>
-        </p:spPr>
-      </p:sp>
-      <p:sp>
-        <p:nvSpPr>
-          <p:cNvPr id="16" name="Text 14"/>
-          <p:cNvSpPr txBox="1"/>
-          <p:nvPr/>
-        </p:nvSpPr>
-        <p:spPr>
-          <a:xfrm>
-            <a:off x="822960" y="3886200"/>
-            <a:ext cx="3017520" cy="411480"/>
-          </a:xfrm>
-          <a:prstGeom prst="rect">
-            <a:avLst/>
-          </a:prstGeom>
-          <a:noFill/>
-          <a:ln/>
-        </p:spPr>
-        <p:txBody>
-          <a:bodyPr wrap="square" lIns="0" tIns="0" rIns="0" bIns="0" rtlCol="0" anchor="t"/>
-          <a:lstStyle/>
-          <a:p>
-            <a:pPr indent="0" marL="0">
-              <a:buNone/>
-            </a:pPr>
-            <a:r>
-              <a:rPr lang="en-US" sz="1800" b="1" dirty="0">
-                <a:solidFill>
-                  <a:srgbClr val="070A13"/>
-                </a:solidFill>
-              </a:rPr>
-              <a:t>TISAX</a:t>
-            </a:r>
-            <a:endParaRPr lang="en-US" sz="1800" dirty="0"/>
-          </a:p>
-        </p:txBody>
-      </p:sp>
-      <p:sp>
-        <p:nvSpPr>
-          <p:cNvPr id="17" name="Text 15"/>
-          <p:cNvSpPr txBox="1"/>
-          <p:nvPr/>
-        </p:nvSpPr>
-        <p:spPr>
-          <a:xfrm>
-            <a:off x="822960" y="4315968"/>
-            <a:ext cx="3017520" cy="320040"/>
-          </a:xfrm>
-          <a:prstGeom prst="rect">
-            <a:avLst/>
-          </a:prstGeom>
-          <a:noFill/>
-          <a:ln/>
-        </p:spPr>
-        <p:txBody>
-          <a:bodyPr wrap="square" lIns="0" tIns="0" rIns="0" bIns="0" rtlCol="0" anchor="t"/>
-          <a:lstStyle/>
-          <a:p>
-            <a:pPr indent="0" marL="0">
-              <a:buNone/>
-            </a:pPr>
-            <a:r>
-              <a:rPr lang="en-US" sz="1200" b="1" dirty="0">
-                <a:solidFill>
-                  <a:srgbClr val="17766C"/>
-                </a:solidFill>
-              </a:rPr>
-              <a:t>VDA ISA 6.0.3 e 2027.1</a:t>
-            </a:r>
-            <a:endParaRPr lang="en-US" sz="1200" dirty="0"/>
-          </a:p>
-        </p:txBody>
-      </p:sp>
-      <p:sp>
-        <p:nvSpPr>
-          <p:cNvPr id="18" name="Text 16"/>
-          <p:cNvSpPr txBox="1"/>
-          <p:nvPr/>
-        </p:nvSpPr>
-        <p:spPr>
-          <a:xfrm>
-            <a:off x="822960" y="4709160"/>
-            <a:ext cx="3017520" cy="822960"/>
-          </a:xfrm>
-          <a:prstGeom prst="rect">
-            <a:avLst/>
-          </a:prstGeom>
-          <a:noFill/>
-          <a:ln/>
-        </p:spPr>
-        <p:txBody>
-          <a:bodyPr wrap="square" lIns="0" tIns="0" rIns="0" bIns="0" rtlCol="0" anchor="t"/>
-          <a:lstStyle/>
-          <a:p>
-            <a:pPr indent="0" marL="0">
-              <a:buNone/>
-            </a:pPr>
-            <a:r>
-              <a:rPr lang="en-US" sz="1300" dirty="0">
-                <a:solidFill>
-                  <a:srgbClr val="5B6474"/>
-                </a:solidFill>
-              </a:rPr>
-              <a:t>80 e 78 controlos para a indústria automóvel</a:t>
-            </a:r>
-            <a:endParaRPr lang="en-US" sz="1300" dirty="0"/>
-          </a:p>
-        </p:txBody>
-      </p:sp>
-      <p:sp>
-        <p:nvSpPr>
-          <p:cNvPr id="19" name="card-75"/>
-          <p:cNvSpPr/>
-          <p:nvPr/>
-        </p:nvSpPr>
-        <p:spPr>
-          <a:xfrm>
-            <a:off x="4297680" y="3657600"/>
-            <a:ext cx="3520440" cy="2011680"/>
-          </a:xfrm>
-          <a:prstGeom prst="roundRect">
-            <a:avLst>
-              <a:gd name="adj" fmla="val 5455"/>
-            </a:avLst>
-          </a:prstGeom>
-          <a:solidFill>
-            <a:srgbClr val="F3F5F8"/>
-          </a:solidFill>
-          <a:ln w="12700">
-            <a:solidFill>
-              <a:srgbClr val="F3F5F8"/>
-            </a:solidFill>
-            <a:prstDash val="solid"/>
-          </a:ln>
-        </p:spPr>
-      </p:sp>
-      <p:sp>
-        <p:nvSpPr>
-          <p:cNvPr id="20" name="Text 18"/>
-          <p:cNvSpPr txBox="1"/>
-          <p:nvPr/>
-        </p:nvSpPr>
-        <p:spPr>
-          <a:xfrm>
-            <a:off x="4572000" y="3886200"/>
-            <a:ext cx="3017520" cy="411480"/>
-          </a:xfrm>
-          <a:prstGeom prst="rect">
-            <a:avLst/>
-          </a:prstGeom>
-          <a:noFill/>
-          <a:ln/>
-        </p:spPr>
-        <p:txBody>
-          <a:bodyPr wrap="square" lIns="0" tIns="0" rIns="0" bIns="0" rtlCol="0" anchor="t"/>
-          <a:lstStyle/>
-          <a:p>
-            <a:pPr indent="0" marL="0">
-              <a:buNone/>
-            </a:pPr>
-            <a:r>
-              <a:rPr lang="en-US" sz="1800" b="1" dirty="0">
-                <a:solidFill>
-                  <a:srgbClr val="070A13"/>
-                </a:solidFill>
-              </a:rPr>
-              <a:t>CIS Controls v8.1</a:t>
-            </a:r>
-            <a:endParaRPr lang="en-US" sz="1800" dirty="0"/>
-          </a:p>
-        </p:txBody>
-      </p:sp>
-      <p:sp>
-        <p:nvSpPr>
-          <p:cNvPr id="21" name="Text 19"/>
-          <p:cNvSpPr txBox="1"/>
-          <p:nvPr/>
-        </p:nvSpPr>
-        <p:spPr>
-          <a:xfrm>
-            <a:off x="4572000" y="4315968"/>
-            <a:ext cx="3017520" cy="320040"/>
-          </a:xfrm>
-          <a:prstGeom prst="rect">
-            <a:avLst/>
-          </a:prstGeom>
-          <a:noFill/>
-          <a:ln/>
-        </p:spPr>
-        <p:txBody>
-          <a:bodyPr wrap="square" lIns="0" tIns="0" rIns="0" bIns="0" rtlCol="0" anchor="t"/>
-          <a:lstStyle/>
-          <a:p>
-            <a:pPr indent="0" marL="0">
-              <a:buNone/>
-            </a:pPr>
-            <a:r>
-              <a:rPr lang="en-US" sz="1200" b="1" dirty="0">
-                <a:solidFill>
-                  <a:srgbClr val="17766C"/>
-                </a:solidFill>
-              </a:rPr>
-              <a:t>CIS</a:t>
-            </a:r>
-            <a:endParaRPr lang="en-US" sz="1200" dirty="0"/>
-          </a:p>
-        </p:txBody>
-      </p:sp>
-      <p:sp>
-        <p:nvSpPr>
-          <p:cNvPr id="22" name="Text 20"/>
-          <p:cNvSpPr txBox="1"/>
-          <p:nvPr/>
-        </p:nvSpPr>
-        <p:spPr>
-          <a:xfrm>
-            <a:off x="4572000" y="4709160"/>
-            <a:ext cx="3017520" cy="822960"/>
-          </a:xfrm>
-          <a:prstGeom prst="rect">
-            <a:avLst/>
-          </a:prstGeom>
-          <a:noFill/>
-          <a:ln/>
-        </p:spPr>
-        <p:txBody>
-          <a:bodyPr wrap="square" lIns="0" tIns="0" rIns="0" bIns="0" rtlCol="0" anchor="t"/>
-          <a:lstStyle/>
-          <a:p>
-            <a:pPr indent="0" marL="0">
-              <a:buNone/>
-            </a:pPr>
-            <a:r>
-              <a:rPr lang="en-US" sz="1300" dirty="0">
-                <a:solidFill>
-                  <a:srgbClr val="5B6474"/>
-                </a:solidFill>
-              </a:rPr>
-              <a:t>Identificadores; o texto entra com o ficheiro oficial da entidade</a:t>
-            </a:r>
-            <a:endParaRPr lang="en-US" sz="1300" dirty="0"/>
-          </a:p>
-        </p:txBody>
-      </p:sp>
-      <p:sp>
-        <p:nvSpPr>
-          <p:cNvPr id="23" name="card-76"/>
-          <p:cNvSpPr/>
-          <p:nvPr/>
-        </p:nvSpPr>
-        <p:spPr>
-          <a:xfrm>
-            <a:off x="8046720" y="3657600"/>
-            <a:ext cx="3520440" cy="2011680"/>
-          </a:xfrm>
-          <a:prstGeom prst="roundRect">
-            <a:avLst>
-              <a:gd name="adj" fmla="val 5455"/>
-            </a:avLst>
-          </a:prstGeom>
-          <a:solidFill>
-            <a:srgbClr val="F3F5F8"/>
-          </a:solidFill>
-          <a:ln w="12700">
-            <a:solidFill>
-              <a:srgbClr val="F3F5F8"/>
-            </a:solidFill>
-            <a:prstDash val="solid"/>
-          </a:ln>
-        </p:spPr>
-      </p:sp>
-      <p:sp>
-        <p:nvSpPr>
-          <p:cNvPr id="24" name="Text 22"/>
-          <p:cNvSpPr txBox="1"/>
-          <p:nvPr/>
-        </p:nvSpPr>
-        <p:spPr>
-          <a:xfrm>
-            <a:off x="8321040" y="3886200"/>
-            <a:ext cx="3017520" cy="411480"/>
-          </a:xfrm>
-          <a:prstGeom prst="rect">
-            <a:avLst/>
-          </a:prstGeom>
-          <a:noFill/>
-          <a:ln/>
-        </p:spPr>
-        <p:txBody>
-          <a:bodyPr wrap="square" lIns="0" tIns="0" rIns="0" bIns="0" rtlCol="0" anchor="t"/>
-          <a:lstStyle/>
-          <a:p>
-            <a:pPr indent="0" marL="0">
-              <a:buNone/>
-            </a:pPr>
-            <a:r>
-              <a:rPr lang="en-US" sz="1800" b="1" dirty="0">
-                <a:solidFill>
-                  <a:srgbClr val="070A13"/>
-                </a:solidFill>
-              </a:rPr>
-              <a:t>NIST CSF 2.0</a:t>
-            </a:r>
-            <a:endParaRPr lang="en-US" sz="1800" dirty="0"/>
-          </a:p>
-        </p:txBody>
-      </p:sp>
-      <p:sp>
-        <p:nvSpPr>
-          <p:cNvPr id="25" name="Text 23"/>
-          <p:cNvSpPr txBox="1"/>
-          <p:nvPr/>
-        </p:nvSpPr>
-        <p:spPr>
-          <a:xfrm>
-            <a:off x="8321040" y="4315968"/>
-            <a:ext cx="3017520" cy="320040"/>
-          </a:xfrm>
-          <a:prstGeom prst="rect">
-            <a:avLst/>
-          </a:prstGeom>
-          <a:noFill/>
-          <a:ln/>
-        </p:spPr>
-        <p:txBody>
-          <a:bodyPr wrap="square" lIns="0" tIns="0" rIns="0" bIns="0" rtlCol="0" anchor="t"/>
-          <a:lstStyle/>
-          <a:p>
-            <a:pPr indent="0" marL="0">
-              <a:buNone/>
-            </a:pPr>
-            <a:r>
-              <a:rPr lang="en-US" sz="1200" b="1" dirty="0">
-                <a:solidFill>
-                  <a:srgbClr val="17766C"/>
-                </a:solidFill>
-              </a:rPr>
-              <a:t>NIST</a:t>
-            </a:r>
-            <a:endParaRPr lang="en-US" sz="1200" dirty="0"/>
-          </a:p>
-        </p:txBody>
-      </p:sp>
-      <p:sp>
-        <p:nvSpPr>
-          <p:cNvPr id="26" name="Text 24"/>
-          <p:cNvSpPr txBox="1"/>
-          <p:nvPr/>
-        </p:nvSpPr>
-        <p:spPr>
-          <a:xfrm>
-            <a:off x="8321040" y="4709160"/>
-            <a:ext cx="3017520" cy="822960"/>
-          </a:xfrm>
-          <a:prstGeom prst="rect">
-            <a:avLst/>
-          </a:prstGeom>
-          <a:noFill/>
-          <a:ln/>
-        </p:spPr>
-        <p:txBody>
-          <a:bodyPr wrap="square" lIns="0" tIns="0" rIns="0" bIns="0" rtlCol="0" anchor="t"/>
-          <a:lstStyle/>
-          <a:p>
-            <a:pPr indent="0" marL="0">
-              <a:buNone/>
-            </a:pPr>
-            <a:r>
-              <a:rPr lang="en-US" sz="1300" dirty="0">
-                <a:solidFill>
-                  <a:srgbClr val="5B6474"/>
-                </a:solidFill>
-              </a:rPr>
-              <a:t>Correspondências a partir do QNRCS</a:t>
-            </a:r>
-            <a:endParaRPr lang="en-US" sz="1300" dirty="0"/>
-          </a:p>
-        </p:txBody>
-      </p:sp>
-      <p:sp>
-        <p:nvSpPr>
-          <p:cNvPr id="27" name="Text 25"/>
-          <p:cNvSpPr txBox="1"/>
-          <p:nvPr/>
-        </p:nvSpPr>
-        <p:spPr>
-          <a:xfrm>
-            <a:off x="548640" y="5943600"/>
-            <a:ext cx="9692640" cy="320040"/>
-          </a:xfrm>
-          <a:prstGeom prst="rect">
-            <a:avLst/>
-          </a:prstGeom>
-          <a:noFill/>
-          <a:ln/>
-        </p:spPr>
-        <p:txBody>
-          <a:bodyPr wrap="square" lIns="0" tIns="0" rIns="0" bIns="0" rtlCol="0" anchor="t"/>
-          <a:lstStyle/>
-          <a:p>
-            <a:pPr indent="0" marL="0">
-              <a:buNone/>
-            </a:pPr>
-            <a:r>
-              <a:rPr lang="en-US" sz="1200" dirty="0">
-                <a:solidFill>
-                  <a:srgbClr val="5B6474"/>
-                </a:solidFill>
-              </a:rPr>
-              <a:t>Biblioteca Legal › Relações entre referenciais mostra as correspondências (1338 ligações) para reaproveitar evidências.</a:t>
-            </a:r>
-            <a:endParaRPr lang="en-US" sz="1200" dirty="0"/>
+              <a:t>Como trabalhar (Biblioteca Legal › ISO/IEC 27001)</a:t>
+            </a:r>
+            <a:endParaRPr lang="en-US" sz="1700" dirty="0"/>
+          </a:p>
+        </p:txBody>
+      </p:sp>
+      <p:sp>
+        <p:nvSpPr>
+          <p:cNvPr id="15" name="Text 13"/>
+          <p:cNvSpPr txBox="1"/>
+          <p:nvPr/>
+        </p:nvSpPr>
+        <p:spPr>
+          <a:xfrm>
+            <a:off x="5120640" y="2743200"/>
+            <a:ext cx="6492240" cy="3291840"/>
+          </a:xfrm>
+          <a:prstGeom prst="rect">
+            <a:avLst/>
+          </a:prstGeom>
+          <a:noFill/>
+          <a:ln/>
+        </p:spPr>
+        <p:txBody>
+          <a:bodyPr wrap="square" lIns="0" tIns="0" rIns="0" bIns="0" rtlCol="0" anchor="t"/>
+          <a:lstStyle/>
+          <a:p>
+            <a:pPr marL="342900" indent="-342900">
+              <a:spcAft>
+                <a:spcPts val="600"/>
+              </a:spcAft>
+              <a:buSzPct val="100000"/>
+              <a:buFont typeface="+mj-lt"/>
+              <a:buAutoNum type="arabicPeriod" startAt="1"/>
+            </a:pPr>
+            <a:r>
+              <a:rPr lang="en-US" sz="1400" dirty="0">
+                <a:solidFill>
+                  <a:srgbClr val="111827"/>
+                </a:solidFill>
+              </a:rPr>
+              <a:t>Cláusulas 4 a 6: âmbito, política, metodologia de riscos e objetivos</a:t>
+            </a:r>
+            <a:endParaRPr lang="en-US" sz="1400" dirty="0"/>
+          </a:p>
+          <a:p>
+            <a:pPr marL="342900" indent="-342900">
+              <a:spcAft>
+                <a:spcPts val="600"/>
+              </a:spcAft>
+              <a:buSzPct val="100000"/>
+              <a:buFont typeface="+mj-lt"/>
+              <a:buAutoNum type="arabicPeriod" startAt="1"/>
+            </a:pPr>
+            <a:r>
+              <a:rPr lang="en-US" sz="1400" dirty="0">
+                <a:solidFill>
+                  <a:srgbClr val="111827"/>
+                </a:solidFill>
+              </a:rPr>
+              <a:t>Avaliação e tratamento de riscos em Gestão de Risco</a:t>
+            </a:r>
+            <a:endParaRPr lang="en-US" sz="1400" dirty="0"/>
+          </a:p>
+          <a:p>
+            <a:pPr marL="342900" indent="-342900">
+              <a:spcAft>
+                <a:spcPts val="600"/>
+              </a:spcAft>
+              <a:buSzPct val="100000"/>
+              <a:buFont typeface="+mj-lt"/>
+              <a:buAutoNum type="arabicPeriod" startAt="1"/>
+            </a:pPr>
+            <a:r>
+              <a:rPr lang="en-US" sz="1400" dirty="0">
+                <a:solidFill>
+                  <a:srgbClr val="111827"/>
+                </a:solidFill>
+              </a:rPr>
+              <a:t>Anexo A: aplicável ou não, justificação e método de implementação</a:t>
+            </a:r>
+            <a:endParaRPr lang="en-US" sz="1400" dirty="0"/>
+          </a:p>
+          <a:p>
+            <a:pPr marL="342900" indent="-342900">
+              <a:spcAft>
+                <a:spcPts val="600"/>
+              </a:spcAft>
+              <a:buSzPct val="100000"/>
+              <a:buFont typeface="+mj-lt"/>
+              <a:buAutoNum type="arabicPeriod" startAt="1"/>
+            </a:pPr>
+            <a:r>
+              <a:rPr lang="en-US" sz="1400" dirty="0">
+                <a:solidFill>
+                  <a:srgbClr val="111827"/>
+                </a:solidFill>
+              </a:rPr>
+              <a:t>Exportar a Declaração de Aplicabilidade e aprová-la em Documentos</a:t>
+            </a:r>
+            <a:endParaRPr lang="en-US" sz="1400" dirty="0"/>
+          </a:p>
+          <a:p>
+            <a:pPr marL="342900" indent="-342900">
+              <a:spcAft>
+                <a:spcPts val="600"/>
+              </a:spcAft>
+              <a:buSzPct val="100000"/>
+              <a:buFont typeface="+mj-lt"/>
+              <a:buAutoNum type="arabicPeriod" startAt="1"/>
+            </a:pPr>
+            <a:r>
+              <a:rPr lang="en-US" sz="1400" dirty="0">
+                <a:solidFill>
+                  <a:srgbClr val="111827"/>
+                </a:solidFill>
+              </a:rPr>
+              <a:t>Evidências por controlo; as do RJC ligadas contam também</a:t>
+            </a:r>
+            <a:endParaRPr lang="en-US" sz="1400" dirty="0"/>
+          </a:p>
+          <a:p>
+            <a:pPr marL="342900" indent="-342900">
+              <a:spcAft>
+                <a:spcPts val="600"/>
+              </a:spcAft>
+              <a:buSzPct val="100000"/>
+              <a:buFont typeface="+mj-lt"/>
+              <a:buAutoNum type="arabicPeriod" startAt="1"/>
+            </a:pPr>
+            <a:r>
+              <a:rPr lang="en-US" sz="1400" dirty="0">
+                <a:solidFill>
+                  <a:srgbClr val="111827"/>
+                </a:solidFill>
+              </a:rPr>
+              <a:t>Análise de lacunas: sistema de gestão e controlos em separado</a:t>
+            </a:r>
+            <a:endParaRPr lang="en-US" sz="1400" dirty="0"/>
+          </a:p>
+          <a:p>
+            <a:pPr marL="342900" indent="-342900">
+              <a:spcAft>
+                <a:spcPts val="600"/>
+              </a:spcAft>
+              <a:buSzPct val="100000"/>
+              <a:buFont typeface="+mj-lt"/>
+              <a:buAutoNum type="arabicPeriod" startAt="1"/>
+            </a:pPr>
+            <a:r>
+              <a:rPr lang="en-US" sz="1400" dirty="0">
+                <a:solidFill>
+                  <a:srgbClr val="111827"/>
+                </a:solidFill>
+              </a:rPr>
+              <a:t>Auditoria interna (9.2) e revisão pela gestão (9.3) antes da certificação</a:t>
+            </a:r>
+            <a:endParaRPr lang="en-US" sz="1400" dirty="0"/>
           </a:p>
         </p:txBody>
       </p:sp>
@@ -8777,7 +8925,7 @@
                   <a:schemeClr val="tx1"/>
                 </a:solidFill>
               </a:rPr>
-              <a:t>Os primeiros 90 dias</a:t>
+              <a:t>ISO/IEC 42001: gerir a inteligência artificial</a:t>
             </a:r>
             <a:endParaRPr lang="en-US" sz="3200" dirty="0"/>
           </a:p>
@@ -8785,22 +8933,62 @@
       </p:sp>
       <p:sp>
         <p:nvSpPr>
-          <p:cNvPr id="3" name="linha-90"/>
+          <p:cNvPr id="3" name="Text 1"/>
+          <p:cNvSpPr txBox="1"/>
+          <p:nvPr/>
+        </p:nvSpPr>
+        <p:spPr>
+          <a:xfrm>
+            <a:off x="548640" y="1234440"/>
+            <a:ext cx="10972800" cy="411480"/>
+          </a:xfrm>
+          <a:prstGeom prst="rect">
+            <a:avLst/>
+          </a:prstGeom>
+          <a:noFill/>
+          <a:ln/>
+        </p:spPr>
+        <p:txBody>
+          <a:bodyPr wrap="square" lIns="0" tIns="0" rIns="0" bIns="0" rtlCol="0" anchor="t"/>
+          <a:lstStyle/>
+          <a:p>
+            <a:pPr indent="0" marL="0">
+              <a:buNone/>
+            </a:pPr>
+            <a:r>
+              <a:rPr lang="en-US" sz="1500" dirty="0">
+                <a:solidFill>
+                  <a:srgbClr val="5B6474"/>
+                </a:solidFill>
+              </a:rPr>
+              <a:t>Para quem desenvolve, fornece ou usa sistemas de IA. Guia em Biblioteca Legal › ISO/IEC 42001, com a mesma abordagem da 27001.</a:t>
+            </a:r>
+            <a:endParaRPr lang="en-US" sz="1500" dirty="0"/>
+          </a:p>
+        </p:txBody>
+      </p:sp>
+      <p:sp>
+        <p:nvSpPr>
+          <p:cNvPr id="4" name="card-80"/>
           <p:cNvSpPr/>
           <p:nvPr/>
         </p:nvSpPr>
         <p:spPr>
           <a:xfrm>
-            <a:off x="822960" y="2057400"/>
-            <a:ext cx="10515600" cy="0"/>
-          </a:xfrm>
-          <a:prstGeom prst="line">
-            <a:avLst/>
-          </a:prstGeom>
-          <a:noFill/>
-          <a:ln w="25400">
+            <a:off x="548640" y="1828800"/>
+            <a:ext cx="4206240" cy="1051560"/>
+          </a:xfrm>
+          <a:prstGeom prst="roundRect">
+            <a:avLst>
+              <a:gd name="adj" fmla="val 10435"/>
+            </a:avLst>
+          </a:prstGeom>
+          <a:solidFill>
+            <a:srgbClr val="F3F5F8"/>
+          </a:solidFill>
+          <a:ln w="12700">
             <a:solidFill>
-              <a:srgbClr val="DDE2EA"/>
+              <a:srgbClr val="F3F5F8"/>
             </a:solidFill>
             <a:prstDash val="solid"/>
           </a:ln>
@@ -8808,24 +8996,98 @@
       </p:sp>
       <p:sp>
         <p:nvSpPr>
-          <p:cNvPr id="4" name="fase-0"/>
+          <p:cNvPr id="5" name="Text 3"/>
+          <p:cNvSpPr txBox="1"/>
+          <p:nvPr/>
+        </p:nvSpPr>
+        <p:spPr>
+          <a:xfrm>
+            <a:off x="777240" y="1938528"/>
+            <a:ext cx="1188720" cy="822960"/>
+          </a:xfrm>
+          <a:prstGeom prst="rect">
+            <a:avLst/>
+          </a:prstGeom>
+          <a:noFill/>
+          <a:ln/>
+        </p:spPr>
+        <p:txBody>
+          <a:bodyPr wrap="square" lIns="0" tIns="0" rIns="0" bIns="0" rtlCol="0" anchor="ctr"/>
+          <a:lstStyle/>
+          <a:p>
+            <a:pPr indent="0" marL="0">
+              <a:buNone/>
+            </a:pPr>
+            <a:r>
+              <a:rPr lang="en-US" sz="4400" b="1" dirty="0">
+                <a:solidFill>
+                  <a:srgbClr val="070A13"/>
+                </a:solidFill>
+              </a:rPr>
+              <a:t>27</a:t>
+            </a:r>
+            <a:endParaRPr lang="en-US" sz="4400" dirty="0"/>
+          </a:p>
+        </p:txBody>
+      </p:sp>
+      <p:sp>
+        <p:nvSpPr>
+          <p:cNvPr id="6" name="Text 4"/>
+          <p:cNvSpPr txBox="1"/>
+          <p:nvPr/>
+        </p:nvSpPr>
+        <p:spPr>
+          <a:xfrm>
+            <a:off x="1965960" y="1965960"/>
+            <a:ext cx="2651760" cy="777240"/>
+          </a:xfrm>
+          <a:prstGeom prst="rect">
+            <a:avLst/>
+          </a:prstGeom>
+          <a:noFill/>
+          <a:ln/>
+        </p:spPr>
+        <p:txBody>
+          <a:bodyPr wrap="square" lIns="0" tIns="0" rIns="0" bIns="0" rtlCol="0" anchor="ctr"/>
+          <a:lstStyle/>
+          <a:p>
+            <a:pPr indent="0" marL="0">
+              <a:buNone/>
+            </a:pPr>
+            <a:r>
+              <a:rPr lang="en-US" sz="1400" dirty="0">
+                <a:solidFill>
+                  <a:srgbClr val="111827"/>
+                </a:solidFill>
+              </a:rPr>
+              <a:t>requisitos (cláusulas 4 a 10), com a avaliação de impacto em 6.1.4 e 8.4</a:t>
+            </a:r>
+            <a:endParaRPr lang="en-US" sz="1400" dirty="0"/>
+          </a:p>
+        </p:txBody>
+      </p:sp>
+      <p:sp>
+        <p:nvSpPr>
+          <p:cNvPr id="7" name="card-81"/>
           <p:cNvSpPr/>
           <p:nvPr/>
         </p:nvSpPr>
         <p:spPr>
           <a:xfrm>
-            <a:off x="640080" y="1828800"/>
-            <a:ext cx="457200" cy="457200"/>
-          </a:xfrm>
-          <a:prstGeom prst="ellipse">
-            <a:avLst/>
+            <a:off x="548640" y="3017520"/>
+            <a:ext cx="4206240" cy="1051560"/>
+          </a:xfrm>
+          <a:prstGeom prst="roundRect">
+            <a:avLst>
+              <a:gd name="adj" fmla="val 10435"/>
+            </a:avLst>
           </a:prstGeom>
           <a:solidFill>
             <a:srgbClr val="070A13"/>
           </a:solidFill>
-          <a:ln w="38100">
+          <a:ln w="12700">
             <a:solidFill>
-              <a:srgbClr val="FFFFFF"/>
+              <a:srgbClr val="070A13"/>
             </a:solidFill>
             <a:prstDash val="solid"/>
           </a:ln>
@@ -8833,59 +9095,59 @@
       </p:sp>
       <p:sp>
         <p:nvSpPr>
-          <p:cNvPr id="5" name="Text 3"/>
-          <p:cNvSpPr txBox="1"/>
-          <p:nvPr/>
-        </p:nvSpPr>
-        <p:spPr>
-          <a:xfrm>
-            <a:off x="548640" y="2514600"/>
-            <a:ext cx="2606040" cy="411480"/>
-          </a:xfrm>
-          <a:prstGeom prst="rect">
-            <a:avLst/>
-          </a:prstGeom>
-          <a:noFill/>
-          <a:ln/>
-        </p:spPr>
-        <p:txBody>
-          <a:bodyPr wrap="square" lIns="0" tIns="0" rIns="0" bIns="0" rtlCol="0" anchor="t"/>
+          <p:cNvPr id="8" name="Text 6"/>
+          <p:cNvSpPr txBox="1"/>
+          <p:nvPr/>
+        </p:nvSpPr>
+        <p:spPr>
+          <a:xfrm>
+            <a:off x="777240" y="3127248"/>
+            <a:ext cx="1188720" cy="822960"/>
+          </a:xfrm>
+          <a:prstGeom prst="rect">
+            <a:avLst/>
+          </a:prstGeom>
+          <a:noFill/>
+          <a:ln/>
+        </p:spPr>
+        <p:txBody>
+          <a:bodyPr wrap="square" lIns="0" tIns="0" rIns="0" bIns="0" rtlCol="0" anchor="ctr"/>
           <a:lstStyle/>
           <a:p>
             <a:pPr indent="0" marL="0">
               <a:buNone/>
             </a:pPr>
             <a:r>
-              <a:rPr lang="en-US" sz="1800" b="1" dirty="0">
-                <a:solidFill>
-                  <a:srgbClr val="070A13"/>
-                </a:solidFill>
-              </a:rPr>
-              <a:t>Semana 1</a:t>
-            </a:r>
-            <a:endParaRPr lang="en-US" sz="1800" dirty="0"/>
-          </a:p>
-        </p:txBody>
-      </p:sp>
-      <p:sp>
-        <p:nvSpPr>
-          <p:cNvPr id="6" name="Text 4"/>
-          <p:cNvSpPr txBox="1"/>
-          <p:nvPr/>
-        </p:nvSpPr>
-        <p:spPr>
-          <a:xfrm>
-            <a:off x="548640" y="2971800"/>
-            <a:ext cx="2514600" cy="1463040"/>
-          </a:xfrm>
-          <a:prstGeom prst="rect">
-            <a:avLst/>
-          </a:prstGeom>
-          <a:noFill/>
-          <a:ln/>
-        </p:spPr>
-        <p:txBody>
-          <a:bodyPr wrap="square" lIns="0" tIns="0" rIns="0" bIns="0" rtlCol="0" anchor="t"/>
+              <a:rPr lang="en-US" sz="4400" b="1" dirty="0">
+                <a:solidFill>
+                  <a:srgbClr val="CFA04A"/>
+                </a:solidFill>
+              </a:rPr>
+              <a:t>38</a:t>
+            </a:r>
+            <a:endParaRPr lang="en-US" sz="4400" dirty="0"/>
+          </a:p>
+        </p:txBody>
+      </p:sp>
+      <p:sp>
+        <p:nvSpPr>
+          <p:cNvPr id="9" name="Text 7"/>
+          <p:cNvSpPr txBox="1"/>
+          <p:nvPr/>
+        </p:nvSpPr>
+        <p:spPr>
+          <a:xfrm>
+            <a:off x="1965960" y="3154680"/>
+            <a:ext cx="2651760" cy="777240"/>
+          </a:xfrm>
+          <a:prstGeom prst="rect">
+            <a:avLst/>
+          </a:prstGeom>
+          <a:noFill/>
+          <a:ln/>
+        </p:spPr>
+        <p:txBody>
+          <a:bodyPr wrap="square" lIns="0" tIns="0" rIns="0" bIns="0" rtlCol="0" anchor="ctr"/>
           <a:lstStyle/>
           <a:p>
             <a:pPr indent="0" marL="0">
@@ -8894,10 +9156,10 @@
             <a:r>
               <a:rPr lang="en-US" sz="1400" dirty="0">
                 <a:solidFill>
-                  <a:srgbClr val="5B6474"/>
-                </a:solidFill>
-              </a:rPr>
-              <a:t>Conta, enquadramento e equipa convidada</a:t>
+                  <a:srgbClr val="FFFFFF"/>
+                </a:solidFill>
+              </a:rPr>
+              <a:t>controlos do Anexo A em 9 domínios</a:t>
             </a:r>
             <a:endParaRPr lang="en-US" sz="1400" dirty="0"/>
           </a:p>
@@ -8905,24 +9167,26 @@
       </p:sp>
       <p:sp>
         <p:nvSpPr>
-          <p:cNvPr id="7" name="fase-1"/>
+          <p:cNvPr id="10" name="card-82"/>
           <p:cNvSpPr/>
           <p:nvPr/>
         </p:nvSpPr>
         <p:spPr>
           <a:xfrm>
-            <a:off x="3429000" y="1828800"/>
-            <a:ext cx="457200" cy="457200"/>
-          </a:xfrm>
-          <a:prstGeom prst="ellipse">
-            <a:avLst/>
+            <a:off x="548640" y="4206240"/>
+            <a:ext cx="4206240" cy="1051560"/>
+          </a:xfrm>
+          <a:prstGeom prst="roundRect">
+            <a:avLst>
+              <a:gd name="adj" fmla="val 10435"/>
+            </a:avLst>
           </a:prstGeom>
           <a:solidFill>
-            <a:srgbClr val="070A13"/>
+            <a:srgbClr val="F3F5F8"/>
           </a:solidFill>
-          <a:ln w="38100">
+          <a:ln w="12700">
             <a:solidFill>
-              <a:srgbClr val="FFFFFF"/>
+              <a:srgbClr val="F3F5F8"/>
             </a:solidFill>
             <a:prstDash val="solid"/>
           </a:ln>
@@ -8930,59 +9194,59 @@
       </p:sp>
       <p:sp>
         <p:nvSpPr>
-          <p:cNvPr id="8" name="Text 6"/>
-          <p:cNvSpPr txBox="1"/>
-          <p:nvPr/>
-        </p:nvSpPr>
-        <p:spPr>
-          <a:xfrm>
-            <a:off x="3337560" y="2514600"/>
-            <a:ext cx="2606040" cy="411480"/>
-          </a:xfrm>
-          <a:prstGeom prst="rect">
-            <a:avLst/>
-          </a:prstGeom>
-          <a:noFill/>
-          <a:ln/>
-        </p:spPr>
-        <p:txBody>
-          <a:bodyPr wrap="square" lIns="0" tIns="0" rIns="0" bIns="0" rtlCol="0" anchor="t"/>
+          <p:cNvPr id="11" name="Text 9"/>
+          <p:cNvSpPr txBox="1"/>
+          <p:nvPr/>
+        </p:nvSpPr>
+        <p:spPr>
+          <a:xfrm>
+            <a:off x="777240" y="4315968"/>
+            <a:ext cx="1188720" cy="822960"/>
+          </a:xfrm>
+          <a:prstGeom prst="rect">
+            <a:avLst/>
+          </a:prstGeom>
+          <a:noFill/>
+          <a:ln/>
+        </p:spPr>
+        <p:txBody>
+          <a:bodyPr wrap="square" lIns="0" tIns="0" rIns="0" bIns="0" rtlCol="0" anchor="ctr"/>
           <a:lstStyle/>
           <a:p>
             <a:pPr indent="0" marL="0">
               <a:buNone/>
             </a:pPr>
             <a:r>
-              <a:rPr lang="en-US" sz="1800" b="1" dirty="0">
+              <a:rPr lang="en-US" sz="4400" b="1" dirty="0">
                 <a:solidFill>
                   <a:srgbClr val="070A13"/>
                 </a:solidFill>
               </a:rPr>
-              <a:t>Semanas 2 a 4</a:t>
-            </a:r>
-            <a:endParaRPr lang="en-US" sz="1800" dirty="0"/>
-          </a:p>
-        </p:txBody>
-      </p:sp>
-      <p:sp>
-        <p:nvSpPr>
-          <p:cNvPr id="9" name="Text 7"/>
-          <p:cNvSpPr txBox="1"/>
-          <p:nvPr/>
-        </p:nvSpPr>
-        <p:spPr>
-          <a:xfrm>
-            <a:off x="3337560" y="2971800"/>
-            <a:ext cx="2514600" cy="1463040"/>
-          </a:xfrm>
-          <a:prstGeom prst="rect">
-            <a:avLst/>
-          </a:prstGeom>
-          <a:noFill/>
-          <a:ln/>
-        </p:spPr>
-        <p:txBody>
-          <a:bodyPr wrap="square" lIns="0" tIns="0" rIns="0" bIns="0" rtlCol="0" anchor="t"/>
+              <a:t>33</a:t>
+            </a:r>
+            <a:endParaRPr lang="en-US" sz="4400" dirty="0"/>
+          </a:p>
+        </p:txBody>
+      </p:sp>
+      <p:sp>
+        <p:nvSpPr>
+          <p:cNvPr id="12" name="Text 10"/>
+          <p:cNvSpPr txBox="1"/>
+          <p:nvPr/>
+        </p:nvSpPr>
+        <p:spPr>
+          <a:xfrm>
+            <a:off x="1965960" y="4343400"/>
+            <a:ext cx="2651760" cy="777240"/>
+          </a:xfrm>
+          <a:prstGeom prst="rect">
+            <a:avLst/>
+          </a:prstGeom>
+          <a:noFill/>
+          <a:ln/>
+        </p:spPr>
+        <p:txBody>
+          <a:bodyPr wrap="square" lIns="0" tIns="0" rIns="0" bIns="0" rtlCol="0" anchor="ctr"/>
           <a:lstStyle/>
           <a:p>
             <a:pPr indent="0" marL="0">
@@ -8991,10 +9255,10 @@
             <a:r>
               <a:rPr lang="en-US" sz="1400" dirty="0">
                 <a:solidFill>
-                  <a:srgbClr val="5B6474"/>
-                </a:solidFill>
-              </a:rPr>
-              <a:t>Responsável e ponto de contacto; autoidentificação; primeira avaliação NIS2 e ISO</a:t>
+                  <a:srgbClr val="111827"/>
+                </a:solidFill>
+              </a:rPr>
+              <a:t>apoiam-se em requisitos da 27001; 5 são próprios da IA</a:t>
             </a:r>
             <a:endParaRPr lang="en-US" sz="1400" dirty="0"/>
           </a:p>
@@ -9002,24 +9266,26 @@
       </p:sp>
       <p:sp>
         <p:nvSpPr>
-          <p:cNvPr id="10" name="fase-2"/>
+          <p:cNvPr id="13" name="card-83"/>
           <p:cNvSpPr/>
           <p:nvPr/>
         </p:nvSpPr>
         <p:spPr>
           <a:xfrm>
-            <a:off x="6217920" y="1828800"/>
-            <a:ext cx="457200" cy="457200"/>
-          </a:xfrm>
-          <a:prstGeom prst="ellipse">
-            <a:avLst/>
+            <a:off x="548640" y="5440680"/>
+            <a:ext cx="4206240" cy="548640"/>
+          </a:xfrm>
+          <a:prstGeom prst="roundRect">
+            <a:avLst>
+              <a:gd name="adj" fmla="val 20000"/>
+            </a:avLst>
           </a:prstGeom>
           <a:solidFill>
-            <a:srgbClr val="070A13"/>
+            <a:srgbClr val="F7F2E7"/>
           </a:solidFill>
-          <a:ln w="38100">
+          <a:ln w="12700">
             <a:solidFill>
-              <a:srgbClr val="FFFFFF"/>
+              <a:srgbClr val="F7F2E7"/>
             </a:solidFill>
             <a:prstDash val="solid"/>
           </a:ln>
@@ -9027,96 +9293,62 @@
       </p:sp>
       <p:sp>
         <p:nvSpPr>
-          <p:cNvPr id="11" name="Text 9"/>
-          <p:cNvSpPr txBox="1"/>
-          <p:nvPr/>
-        </p:nvSpPr>
-        <p:spPr>
-          <a:xfrm>
-            <a:off x="6126480" y="2514600"/>
-            <a:ext cx="2606040" cy="411480"/>
-          </a:xfrm>
-          <a:prstGeom prst="rect">
-            <a:avLst/>
-          </a:prstGeom>
-          <a:noFill/>
-          <a:ln/>
-        </p:spPr>
-        <p:txBody>
-          <a:bodyPr wrap="square" lIns="0" tIns="0" rIns="0" bIns="0" rtlCol="0" anchor="t"/>
+          <p:cNvPr id="14" name="Text 12"/>
+          <p:cNvSpPr txBox="1"/>
+          <p:nvPr/>
+        </p:nvSpPr>
+        <p:spPr>
+          <a:xfrm>
+            <a:off x="731520" y="5440680"/>
+            <a:ext cx="3931920" cy="548640"/>
+          </a:xfrm>
+          <a:prstGeom prst="rect">
+            <a:avLst/>
+          </a:prstGeom>
+          <a:noFill/>
+          <a:ln/>
+        </p:spPr>
+        <p:txBody>
+          <a:bodyPr wrap="square" lIns="0" tIns="0" rIns="0" bIns="0" rtlCol="0" anchor="ctr"/>
           <a:lstStyle/>
           <a:p>
             <a:pPr indent="0" marL="0">
               <a:buNone/>
             </a:pPr>
             <a:r>
-              <a:rPr lang="en-US" sz="1800" b="1" dirty="0">
-                <a:solidFill>
-                  <a:srgbClr val="070A13"/>
-                </a:solidFill>
-              </a:rPr>
-              <a:t>Mês 2</a:t>
-            </a:r>
-            <a:endParaRPr lang="en-US" sz="1800" dirty="0"/>
-          </a:p>
-        </p:txBody>
-      </p:sp>
-      <p:sp>
-        <p:nvSpPr>
-          <p:cNvPr id="12" name="Text 10"/>
-          <p:cNvSpPr txBox="1"/>
-          <p:nvPr/>
-        </p:nvSpPr>
-        <p:spPr>
-          <a:xfrm>
-            <a:off x="6126480" y="2971800"/>
-            <a:ext cx="2514600" cy="1463040"/>
-          </a:xfrm>
-          <a:prstGeom prst="rect">
-            <a:avLst/>
-          </a:prstGeom>
-          <a:noFill/>
-          <a:ln/>
-        </p:spPr>
-        <p:txBody>
-          <a:bodyPr wrap="square" lIns="0" tIns="0" rIns="0" bIns="0" rtlCol="0" anchor="t"/>
-          <a:lstStyle/>
-          <a:p>
-            <a:pPr indent="0" marL="0">
-              <a:buNone/>
-            </a:pPr>
-            <a:r>
-              <a:rPr lang="en-US" sz="1400" dirty="0">
-                <a:solidFill>
-                  <a:srgbClr val="5B6474"/>
-                </a:solidFill>
-              </a:rPr>
-              <a:t>Políticas aprovadas; inventário de ativos; fornecedores críticos</a:t>
-            </a:r>
-            <a:endParaRPr lang="en-US" sz="1400" dirty="0"/>
-          </a:p>
-        </p:txBody>
-      </p:sp>
-      <p:sp>
-        <p:nvSpPr>
-          <p:cNvPr id="13" name="fase-3"/>
+              <a:rPr lang="en-US" sz="1300" b="1" dirty="0">
+                <a:solidFill>
+                  <a:srgbClr val="8A6620"/>
+                </a:solidFill>
+              </a:rPr>
+              <a:t>Não substitui o Regulamento (UE) 2024/1689.</a:t>
+            </a:r>
+            <a:endParaRPr lang="en-US" sz="1300" dirty="0"/>
+          </a:p>
+        </p:txBody>
+      </p:sp>
+      <p:sp>
+        <p:nvSpPr>
+          <p:cNvPr id="15" name="card-84"/>
           <p:cNvSpPr/>
           <p:nvPr/>
         </p:nvSpPr>
         <p:spPr>
           <a:xfrm>
-            <a:off x="9006840" y="1828800"/>
-            <a:ext cx="457200" cy="457200"/>
-          </a:xfrm>
-          <a:prstGeom prst="ellipse">
-            <a:avLst/>
+            <a:off x="5120640" y="1828800"/>
+            <a:ext cx="6492240" cy="4160520"/>
+          </a:xfrm>
+          <a:prstGeom prst="roundRect">
+            <a:avLst>
+              <a:gd name="adj" fmla="val 2637"/>
+            </a:avLst>
           </a:prstGeom>
           <a:solidFill>
-            <a:srgbClr val="CFA04A"/>
+            <a:srgbClr val="F3F5F8"/>
           </a:solidFill>
-          <a:ln w="38100">
+          <a:ln w="12700">
             <a:solidFill>
-              <a:srgbClr val="FFFFFF"/>
+              <a:srgbClr val="F3F5F8"/>
             </a:solidFill>
             <a:prstDash val="solid"/>
           </a:ln>
@@ -9124,113 +9356,63 @@
       </p:sp>
       <p:sp>
         <p:nvSpPr>
-          <p:cNvPr id="14" name="Text 12"/>
-          <p:cNvSpPr txBox="1"/>
-          <p:nvPr/>
-        </p:nvSpPr>
-        <p:spPr>
-          <a:xfrm>
-            <a:off x="8915400" y="2514600"/>
-            <a:ext cx="2606040" cy="411480"/>
-          </a:xfrm>
-          <a:prstGeom prst="rect">
-            <a:avLst/>
-          </a:prstGeom>
-          <a:noFill/>
-          <a:ln/>
-        </p:spPr>
-        <p:txBody>
-          <a:bodyPr wrap="square" lIns="0" tIns="0" rIns="0" bIns="0" rtlCol="0" anchor="t"/>
-          <a:lstStyle/>
-          <a:p>
-            <a:pPr indent="0" marL="0">
-              <a:buNone/>
-            </a:pPr>
-            <a:r>
-              <a:rPr lang="en-US" sz="1800" b="1" dirty="0">
-                <a:solidFill>
-                  <a:srgbClr val="070A13"/>
-                </a:solidFill>
-              </a:rPr>
-              <a:t>Mês 3</a:t>
-            </a:r>
-            <a:endParaRPr lang="en-US" sz="1800" dirty="0"/>
-          </a:p>
-        </p:txBody>
-      </p:sp>
-      <p:sp>
-        <p:nvSpPr>
-          <p:cNvPr id="15" name="Text 13"/>
-          <p:cNvSpPr txBox="1"/>
-          <p:nvPr/>
-        </p:nvSpPr>
-        <p:spPr>
-          <a:xfrm>
-            <a:off x="8915400" y="2971800"/>
-            <a:ext cx="2514600" cy="1463040"/>
-          </a:xfrm>
-          <a:prstGeom prst="rect">
-            <a:avLst/>
-          </a:prstGeom>
-          <a:noFill/>
-          <a:ln/>
-        </p:spPr>
-        <p:txBody>
-          <a:bodyPr wrap="square" lIns="0" tIns="0" rIns="0" bIns="0" rtlCol="0" anchor="t"/>
-          <a:lstStyle/>
-          <a:p>
-            <a:pPr indent="0" marL="0">
-              <a:buNone/>
-            </a:pPr>
-            <a:r>
-              <a:rPr lang="en-US" sz="1400" dirty="0">
-                <a:solidFill>
-                  <a:srgbClr val="5B6474"/>
-                </a:solidFill>
-              </a:rPr>
-              <a:t>Medidas com evidências; procedimento de incidentes testado; plano revisto</a:t>
-            </a:r>
-            <a:endParaRPr lang="en-US" sz="1400" dirty="0"/>
-          </a:p>
-        </p:txBody>
-      </p:sp>
-      <p:sp>
-        <p:nvSpPr>
-          <p:cNvPr id="16" name="card-77"/>
+          <p:cNvPr id="16" name="icon-bg-85"/>
           <p:cNvSpPr/>
           <p:nvPr/>
         </p:nvSpPr>
         <p:spPr>
           <a:xfrm>
-            <a:off x="548640" y="4663440"/>
-            <a:ext cx="11064240" cy="1325880"/>
-          </a:xfrm>
-          <a:prstGeom prst="roundRect">
-            <a:avLst>
-              <a:gd name="adj" fmla="val 8276"/>
-            </a:avLst>
+            <a:off x="5394960" y="2057400"/>
+            <a:ext cx="594360" cy="594360"/>
+          </a:xfrm>
+          <a:prstGeom prst="ellipse">
+            <a:avLst/>
           </a:prstGeom>
           <a:solidFill>
-            <a:srgbClr val="E6F5F3"/>
+            <a:schemeClr val="tx1"/>
           </a:solidFill>
           <a:ln w="12700">
             <a:solidFill>
-              <a:srgbClr val="E6F5F3"/>
+              <a:schemeClr val="tx1"/>
             </a:solidFill>
             <a:prstDash val="solid"/>
           </a:ln>
         </p:spPr>
       </p:sp>
-      <p:sp>
-        <p:nvSpPr>
-          <p:cNvPr id="17" name="Text 15"/>
-          <p:cNvSpPr txBox="1"/>
-          <p:nvPr/>
-        </p:nvSpPr>
-        <p:spPr>
-          <a:xfrm>
-            <a:off x="822960" y="4800600"/>
-            <a:ext cx="4572000" cy="365760"/>
+      <p:pic>
+        <p:nvPicPr>
+          <p:cNvPr id="17" name="icon-85" descr="preencoded.png">    </p:cNvPr>
+          <p:cNvPicPr>
+            <a:picLocks noChangeAspect="1"/>
+          </p:cNvPicPr>
+          <p:nvPr/>
+        </p:nvPicPr>
+        <p:blipFill>
+          <a:blip r:embed="rId1"/>
+          <a:stretch>
+            <a:fillRect/>
+          </a:stretch>
+        </p:blipFill>
+        <p:spPr>
+          <a:xfrm>
+            <a:off x="5525719" y="2188159"/>
+            <a:ext cx="332842" cy="332842"/>
+          </a:xfrm>
+          <a:prstGeom prst="rect">
+            <a:avLst/>
+          </a:prstGeom>
+        </p:spPr>
+      </p:pic>
+      <p:sp>
+        <p:nvSpPr>
+          <p:cNvPr id="18" name="Text 15"/>
+          <p:cNvSpPr txBox="1"/>
+          <p:nvPr/>
+        </p:nvSpPr>
+        <p:spPr>
+          <a:xfrm>
+            <a:off x="6172200" y="2148840"/>
+            <a:ext cx="5303520" cy="457200"/>
           </a:xfrm>
           <a:prstGeom prst="rect">
             <a:avLst/>
@@ -9246,40 +9428,44 @@
               <a:buNone/>
             </a:pPr>
             <a:r>
-              <a:rPr lang="en-US" sz="1600" b="1" dirty="0">
-                <a:solidFill>
-                  <a:srgbClr val="17766C"/>
-                </a:solidFill>
-              </a:rPr>
-              <a:t>Depois do arranque</a:t>
-            </a:r>
-            <a:endParaRPr lang="en-US" sz="1600" dirty="0"/>
-          </a:p>
-        </p:txBody>
-      </p:sp>
-      <p:sp>
-        <p:nvSpPr>
-          <p:cNvPr id="18" name="Text 16"/>
-          <p:cNvSpPr txBox="1"/>
-          <p:nvPr/>
-        </p:nvSpPr>
-        <p:spPr>
-          <a:xfrm>
-            <a:off x="822960" y="5212080"/>
-            <a:ext cx="10515600" cy="640080"/>
-          </a:xfrm>
-          <a:prstGeom prst="rect">
-            <a:avLst/>
-          </a:prstGeom>
-          <a:noFill/>
-          <a:ln/>
-        </p:spPr>
-        <p:txBody>
-          <a:bodyPr wrap="square" lIns="0" tIns="0" rIns="0" bIns="0" rtlCol="0" anchor="t"/>
-          <a:lstStyle/>
-          <a:p>
-            <a:pPr indent="0" marL="0">
-              <a:buNone/>
+              <a:rPr lang="en-US" sz="1800" b="1" dirty="0">
+                <a:solidFill>
+                  <a:srgbClr val="070A13"/>
+                </a:solidFill>
+              </a:rPr>
+              <a:t>Um só sistema de gestão com a 27001</a:t>
+            </a:r>
+            <a:endParaRPr lang="en-US" sz="1800" dirty="0"/>
+          </a:p>
+        </p:txBody>
+      </p:sp>
+      <p:sp>
+        <p:nvSpPr>
+          <p:cNvPr id="19" name="Text 16"/>
+          <p:cNvSpPr txBox="1"/>
+          <p:nvPr/>
+        </p:nvSpPr>
+        <p:spPr>
+          <a:xfrm>
+            <a:off x="5394960" y="2834640"/>
+            <a:ext cx="5943600" cy="3017520"/>
+          </a:xfrm>
+          <a:prstGeom prst="rect">
+            <a:avLst/>
+          </a:prstGeom>
+          <a:noFill/>
+          <a:ln/>
+        </p:spPr>
+        <p:txBody>
+          <a:bodyPr wrap="square" lIns="0" tIns="0" rIns="0" bIns="0" rtlCol="0" anchor="t"/>
+          <a:lstStyle/>
+          <a:p>
+            <a:pPr marL="342900" indent="-342900">
+              <a:spcAft>
+                <a:spcPts val="800"/>
+              </a:spcAft>
+              <a:buSzPct val="100000"/>
+              <a:buChar char="•"/>
             </a:pPr>
             <a:r>
               <a:rPr lang="en-US" sz="1400" dirty="0">
@@ -9287,7 +9473,79 @@
                   <a:srgbClr val="111827"/>
                 </a:solidFill>
               </a:rPr>
-              <a:t>Revisão trimestral da maturidade, análise anual dos riscos, lembretes de revisão de documentos e preparação do relatório anual.</a:t>
+              <a:t>Mesma análise de contexto, controlo documental, auditoria interna e revisão pela gestão</a:t>
+            </a:r>
+            <a:endParaRPr lang="en-US" sz="1400" dirty="0"/>
+          </a:p>
+          <a:p>
+            <a:pPr marL="342900" indent="-342900">
+              <a:spcAft>
+                <a:spcPts val="800"/>
+              </a:spcAft>
+              <a:buSzPct val="100000"/>
+              <a:buChar char="•"/>
+            </a:pPr>
+            <a:r>
+              <a:rPr lang="en-US" sz="1400" dirty="0">
+                <a:solidFill>
+                  <a:srgbClr val="111827"/>
+                </a:solidFill>
+              </a:rPr>
+              <a:t>Cada controlo mostra os requisitos da 27001 de base e conta as evidências que já lá estão</a:t>
+            </a:r>
+            <a:endParaRPr lang="en-US" sz="1400" dirty="0"/>
+          </a:p>
+          <a:p>
+            <a:pPr marL="342900" indent="-342900">
+              <a:spcAft>
+                <a:spcPts val="800"/>
+              </a:spcAft>
+              <a:buSzPct val="100000"/>
+              <a:buChar char="•"/>
+            </a:pPr>
+            <a:r>
+              <a:rPr lang="en-US" sz="1400" dirty="0">
+                <a:solidFill>
+                  <a:srgbClr val="111827"/>
+                </a:solidFill>
+              </a:rPr>
+              <a:t>Avaliação de impacto em pessoas e na sociedade: nova, sem equivalente na 27001</a:t>
+            </a:r>
+            <a:endParaRPr lang="en-US" sz="1400" dirty="0"/>
+          </a:p>
+          <a:p>
+            <a:pPr marL="342900" indent="-342900">
+              <a:spcAft>
+                <a:spcPts val="800"/>
+              </a:spcAft>
+              <a:buSzPct val="100000"/>
+              <a:buChar char="•"/>
+            </a:pPr>
+            <a:r>
+              <a:rPr lang="en-US" sz="1400" dirty="0">
+                <a:solidFill>
+                  <a:srgbClr val="111827"/>
+                </a:solidFill>
+              </a:rPr>
+              <a:t>Declaração de Aplicabilidade separada para cada norma</a:t>
+            </a:r>
+            <a:endParaRPr lang="en-US" sz="1400" dirty="0"/>
+          </a:p>
+          <a:p>
+            <a:pPr marL="342900" indent="-342900">
+              <a:spcAft>
+                <a:spcPts val="800"/>
+              </a:spcAft>
+              <a:buSzPct val="100000"/>
+              <a:buChar char="•"/>
+            </a:pPr>
+            <a:r>
+              <a:rPr lang="en-US" sz="1400" dirty="0">
+                <a:solidFill>
+                  <a:srgbClr val="111827"/>
+                </a:solidFill>
+              </a:rPr>
+              <a:t>Objetivos e fontes de risco do Anexo C como lista de apoio</a:t>
             </a:r>
             <a:endParaRPr lang="en-US" sz="1400" dirty="0"/>
           </a:p>
@@ -9368,51 +9626,967 @@
           <p:cNvPr id="2" name="Text 0"/>
           <p:cNvSpPr/>
           <p:nvPr>
-            <p:ph idx="101" type="body" hasCustomPrompt="1"/>
+            <p:ph idx="101" type="title" hasCustomPrompt="1"/>
           </p:nvPr>
         </p:nvSpPr>
         <p:spPr>
           <a:xfrm>
-            <a:off x="731520" y="2468880"/>
-            <a:ext cx="10058400" cy="365760"/>
-          </a:xfrm>
-          <a:prstGeom prst="rect">
-            <a:avLst/>
-          </a:prstGeom>
-          <a:noFill/>
-          <a:ln/>
-        </p:spPr>
-        <p:txBody>
-          <a:bodyPr wrap="square" lIns="0" tIns="0" rIns="0" bIns="0" rtlCol="0"/>
+            <a:off x="548640" y="411480"/>
+            <a:ext cx="11064240" cy="822960"/>
+          </a:xfrm>
+          <a:prstGeom prst="rect">
+            <a:avLst/>
+          </a:prstGeom>
+          <a:noFill/>
+          <a:ln/>
+        </p:spPr>
+        <p:txBody>
+          <a:bodyPr wrap="square" lIns="0" tIns="0" rIns="0" bIns="0" rtlCol="0" anchor="t"/>
+          <a:lstStyle/>
+          <a:p>
+            <a:pPr algn="l" indent="0" marL="0">
+              <a:buNone/>
+            </a:pPr>
+            <a:r>
+              <a:rPr lang="en-US" sz="3200" b="1" dirty="0">
+                <a:solidFill>
+                  <a:schemeClr val="tx1"/>
+                </a:solidFill>
+              </a:rPr>
+              <a:t>Outros referenciais disponíveis na plataforma</a:t>
+            </a:r>
+            <a:endParaRPr lang="en-US" sz="3200" dirty="0"/>
+          </a:p>
+        </p:txBody>
+      </p:sp>
+      <p:sp>
+        <p:nvSpPr>
+          <p:cNvPr id="3" name="card-86"/>
+          <p:cNvSpPr/>
+          <p:nvPr/>
+        </p:nvSpPr>
+        <p:spPr>
+          <a:xfrm>
+            <a:off x="548640" y="1417320"/>
+            <a:ext cx="3520440" cy="2011680"/>
+          </a:xfrm>
+          <a:prstGeom prst="roundRect">
+            <a:avLst>
+              <a:gd name="adj" fmla="val 5455"/>
+            </a:avLst>
+          </a:prstGeom>
+          <a:solidFill>
+            <a:srgbClr val="F3F5F8"/>
+          </a:solidFill>
+          <a:ln w="12700">
+            <a:solidFill>
+              <a:srgbClr val="F3F5F8"/>
+            </a:solidFill>
+            <a:prstDash val="solid"/>
+          </a:ln>
+        </p:spPr>
+      </p:sp>
+      <p:sp>
+        <p:nvSpPr>
+          <p:cNvPr id="4" name="Text 2"/>
+          <p:cNvSpPr txBox="1"/>
+          <p:nvPr/>
+        </p:nvSpPr>
+        <p:spPr>
+          <a:xfrm>
+            <a:off x="822960" y="1645920"/>
+            <a:ext cx="3017520" cy="411480"/>
+          </a:xfrm>
+          <a:prstGeom prst="rect">
+            <a:avLst/>
+          </a:prstGeom>
+          <a:noFill/>
+          <a:ln/>
+        </p:spPr>
+        <p:txBody>
+          <a:bodyPr wrap="square" lIns="0" tIns="0" rIns="0" bIns="0" rtlCol="0" anchor="t"/>
           <a:lstStyle/>
           <a:p>
             <a:pPr indent="0" marL="0">
               <a:buNone/>
             </a:pPr>
             <a:r>
-              <a:rPr lang="en-US" sz="1400" b="1" spc="400" kern="0" dirty="0">
-                <a:solidFill>
-                  <a:schemeClr val="accent1"/>
-                </a:solidFill>
-              </a:rPr>
-              <a:t>PRÓXIMO PASSO</a:t>
-            </a:r>
-            <a:endParaRPr lang="en-US" sz="1400" dirty="0"/>
-          </a:p>
-        </p:txBody>
-      </p:sp>
-      <p:sp>
-        <p:nvSpPr>
-          <p:cNvPr id="3" name="Text 0"/>
+              <a:rPr lang="en-US" sz="1800" b="1" dirty="0">
+                <a:solidFill>
+                  <a:srgbClr val="070A13"/>
+                </a:solidFill>
+              </a:rPr>
+              <a:t>QNRCS</a:t>
+            </a:r>
+            <a:endParaRPr lang="en-US" sz="1800" dirty="0"/>
+          </a:p>
+        </p:txBody>
+      </p:sp>
+      <p:sp>
+        <p:nvSpPr>
+          <p:cNvPr id="5" name="Text 3"/>
+          <p:cNvSpPr txBox="1"/>
+          <p:nvPr/>
+        </p:nvSpPr>
+        <p:spPr>
+          <a:xfrm>
+            <a:off x="822960" y="2075688"/>
+            <a:ext cx="3017520" cy="320040"/>
+          </a:xfrm>
+          <a:prstGeom prst="rect">
+            <a:avLst/>
+          </a:prstGeom>
+          <a:noFill/>
+          <a:ln/>
+        </p:spPr>
+        <p:txBody>
+          <a:bodyPr wrap="square" lIns="0" tIns="0" rIns="0" bIns="0" rtlCol="0" anchor="t"/>
+          <a:lstStyle/>
+          <a:p>
+            <a:pPr indent="0" marL="0">
+              <a:buNone/>
+            </a:pPr>
+            <a:r>
+              <a:rPr lang="en-US" sz="1200" b="1" dirty="0">
+                <a:solidFill>
+                  <a:srgbClr val="17766C"/>
+                </a:solidFill>
+              </a:rPr>
+              <a:t>Reg. 756/2026, Anexo I</a:t>
+            </a:r>
+            <a:endParaRPr lang="en-US" sz="1200" dirty="0"/>
+          </a:p>
+        </p:txBody>
+      </p:sp>
+      <p:sp>
+        <p:nvSpPr>
+          <p:cNvPr id="6" name="Text 4"/>
+          <p:cNvSpPr txBox="1"/>
+          <p:nvPr/>
+        </p:nvSpPr>
+        <p:spPr>
+          <a:xfrm>
+            <a:off x="822960" y="2468880"/>
+            <a:ext cx="3017520" cy="822960"/>
+          </a:xfrm>
+          <a:prstGeom prst="rect">
+            <a:avLst/>
+          </a:prstGeom>
+          <a:noFill/>
+          <a:ln/>
+        </p:spPr>
+        <p:txBody>
+          <a:bodyPr wrap="square" lIns="0" tIns="0" rIns="0" bIns="0" rtlCol="0" anchor="t"/>
+          <a:lstStyle/>
+          <a:p>
+            <a:pPr indent="0" marL="0">
+              <a:buNone/>
+            </a:pPr>
+            <a:r>
+              <a:rPr lang="en-US" sz="1300" dirty="0">
+                <a:solidFill>
+                  <a:srgbClr val="5B6474"/>
+                </a:solidFill>
+              </a:rPr>
+              <a:t>107 controlos em seis objetivos, com medida e verificação por nível</a:t>
+            </a:r>
+            <a:endParaRPr lang="en-US" sz="1300" dirty="0"/>
+          </a:p>
+        </p:txBody>
+      </p:sp>
+      <p:sp>
+        <p:nvSpPr>
+          <p:cNvPr id="7" name="card-87"/>
+          <p:cNvSpPr/>
+          <p:nvPr/>
+        </p:nvSpPr>
+        <p:spPr>
+          <a:xfrm>
+            <a:off x="4297680" y="1417320"/>
+            <a:ext cx="3520440" cy="2011680"/>
+          </a:xfrm>
+          <a:prstGeom prst="roundRect">
+            <a:avLst>
+              <a:gd name="adj" fmla="val 5455"/>
+            </a:avLst>
+          </a:prstGeom>
+          <a:solidFill>
+            <a:srgbClr val="F3F5F8"/>
+          </a:solidFill>
+          <a:ln w="12700">
+            <a:solidFill>
+              <a:srgbClr val="F3F5F8"/>
+            </a:solidFill>
+            <a:prstDash val="solid"/>
+          </a:ln>
+        </p:spPr>
+      </p:sp>
+      <p:sp>
+        <p:nvSpPr>
+          <p:cNvPr id="8" name="Text 6"/>
+          <p:cNvSpPr txBox="1"/>
+          <p:nvPr/>
+        </p:nvSpPr>
+        <p:spPr>
+          <a:xfrm>
+            <a:off x="4572000" y="1645920"/>
+            <a:ext cx="3017520" cy="411480"/>
+          </a:xfrm>
+          <a:prstGeom prst="rect">
+            <a:avLst/>
+          </a:prstGeom>
+          <a:noFill/>
+          <a:ln/>
+        </p:spPr>
+        <p:txBody>
+          <a:bodyPr wrap="square" lIns="0" tIns="0" rIns="0" bIns="0" rtlCol="0" anchor="t"/>
+          <a:lstStyle/>
+          <a:p>
+            <a:pPr indent="0" marL="0">
+              <a:buNone/>
+            </a:pPr>
+            <a:r>
+              <a:rPr lang="en-US" sz="1800" b="1" dirty="0">
+                <a:solidFill>
+                  <a:srgbClr val="070A13"/>
+                </a:solidFill>
+              </a:rPr>
+              <a:t>Requisitos técnicos NIS2</a:t>
+            </a:r>
+            <a:endParaRPr lang="en-US" sz="1800" dirty="0"/>
+          </a:p>
+        </p:txBody>
+      </p:sp>
+      <p:sp>
+        <p:nvSpPr>
+          <p:cNvPr id="9" name="Text 7"/>
+          <p:cNvSpPr txBox="1"/>
+          <p:nvPr/>
+        </p:nvSpPr>
+        <p:spPr>
+          <a:xfrm>
+            <a:off x="4572000" y="2075688"/>
+            <a:ext cx="3017520" cy="320040"/>
+          </a:xfrm>
+          <a:prstGeom prst="rect">
+            <a:avLst/>
+          </a:prstGeom>
+          <a:noFill/>
+          <a:ln/>
+        </p:spPr>
+        <p:txBody>
+          <a:bodyPr wrap="square" lIns="0" tIns="0" rIns="0" bIns="0" rtlCol="0" anchor="t"/>
+          <a:lstStyle/>
+          <a:p>
+            <a:pPr indent="0" marL="0">
+              <a:buNone/>
+            </a:pPr>
+            <a:r>
+              <a:rPr lang="en-US" sz="1200" b="1" dirty="0">
+                <a:solidFill>
+                  <a:srgbClr val="17766C"/>
+                </a:solidFill>
+              </a:rPr>
+              <a:t>Reg. de Execução (UE) 2024/2690</a:t>
+            </a:r>
+            <a:endParaRPr lang="en-US" sz="1200" dirty="0"/>
+          </a:p>
+        </p:txBody>
+      </p:sp>
+      <p:sp>
+        <p:nvSpPr>
+          <p:cNvPr id="10" name="Text 8"/>
+          <p:cNvSpPr txBox="1"/>
+          <p:nvPr/>
+        </p:nvSpPr>
+        <p:spPr>
+          <a:xfrm>
+            <a:off x="4572000" y="2468880"/>
+            <a:ext cx="3017520" cy="822960"/>
+          </a:xfrm>
+          <a:prstGeom prst="rect">
+            <a:avLst/>
+          </a:prstGeom>
+          <a:noFill/>
+          <a:ln/>
+        </p:spPr>
+        <p:txBody>
+          <a:bodyPr wrap="square" lIns="0" tIns="0" rIns="0" bIns="0" rtlCol="0" anchor="t"/>
+          <a:lstStyle/>
+          <a:p>
+            <a:pPr indent="0" marL="0">
+              <a:buNone/>
+            </a:pPr>
+            <a:r>
+              <a:rPr lang="en-US" sz="1300" dirty="0">
+                <a:solidFill>
+                  <a:srgbClr val="5B6474"/>
+                </a:solidFill>
+              </a:rPr>
+              <a:t>161 requisitos para serviços digitais</a:t>
+            </a:r>
+            <a:endParaRPr lang="en-US" sz="1300" dirty="0"/>
+          </a:p>
+        </p:txBody>
+      </p:sp>
+      <p:sp>
+        <p:nvSpPr>
+          <p:cNvPr id="11" name="card-88"/>
+          <p:cNvSpPr/>
+          <p:nvPr/>
+        </p:nvSpPr>
+        <p:spPr>
+          <a:xfrm>
+            <a:off x="8046720" y="1417320"/>
+            <a:ext cx="3520440" cy="2011680"/>
+          </a:xfrm>
+          <a:prstGeom prst="roundRect">
+            <a:avLst>
+              <a:gd name="adj" fmla="val 5455"/>
+            </a:avLst>
+          </a:prstGeom>
+          <a:solidFill>
+            <a:srgbClr val="F3F5F8"/>
+          </a:solidFill>
+          <a:ln w="12700">
+            <a:solidFill>
+              <a:srgbClr val="F3F5F8"/>
+            </a:solidFill>
+            <a:prstDash val="solid"/>
+          </a:ln>
+        </p:spPr>
+      </p:sp>
+      <p:sp>
+        <p:nvSpPr>
+          <p:cNvPr id="12" name="Text 10"/>
+          <p:cNvSpPr txBox="1"/>
+          <p:nvPr/>
+        </p:nvSpPr>
+        <p:spPr>
+          <a:xfrm>
+            <a:off x="8321040" y="1645920"/>
+            <a:ext cx="3017520" cy="411480"/>
+          </a:xfrm>
+          <a:prstGeom prst="rect">
+            <a:avLst/>
+          </a:prstGeom>
+          <a:noFill/>
+          <a:ln/>
+        </p:spPr>
+        <p:txBody>
+          <a:bodyPr wrap="square" lIns="0" tIns="0" rIns="0" bIns="0" rtlCol="0" anchor="t"/>
+          <a:lstStyle/>
+          <a:p>
+            <a:pPr indent="0" marL="0">
+              <a:buNone/>
+            </a:pPr>
+            <a:r>
+              <a:rPr lang="en-US" sz="1800" b="1" dirty="0">
+                <a:solidFill>
+                  <a:srgbClr val="070A13"/>
+                </a:solidFill>
+              </a:rPr>
+              <a:t>DORA</a:t>
+            </a:r>
+            <a:endParaRPr lang="en-US" sz="1800" dirty="0"/>
+          </a:p>
+        </p:txBody>
+      </p:sp>
+      <p:sp>
+        <p:nvSpPr>
+          <p:cNvPr id="13" name="Text 11"/>
+          <p:cNvSpPr txBox="1"/>
+          <p:nvPr/>
+        </p:nvSpPr>
+        <p:spPr>
+          <a:xfrm>
+            <a:off x="8321040" y="2075688"/>
+            <a:ext cx="3017520" cy="320040"/>
+          </a:xfrm>
+          <a:prstGeom prst="rect">
+            <a:avLst/>
+          </a:prstGeom>
+          <a:noFill/>
+          <a:ln/>
+        </p:spPr>
+        <p:txBody>
+          <a:bodyPr wrap="square" lIns="0" tIns="0" rIns="0" bIns="0" rtlCol="0" anchor="t"/>
+          <a:lstStyle/>
+          <a:p>
+            <a:pPr indent="0" marL="0">
+              <a:buNone/>
+            </a:pPr>
+            <a:r>
+              <a:rPr lang="en-US" sz="1200" b="1" dirty="0">
+                <a:solidFill>
+                  <a:srgbClr val="17766C"/>
+                </a:solidFill>
+              </a:rPr>
+              <a:t>Reg. (UE) 2022/2554</a:t>
+            </a:r>
+            <a:endParaRPr lang="en-US" sz="1200" dirty="0"/>
+          </a:p>
+        </p:txBody>
+      </p:sp>
+      <p:sp>
+        <p:nvSpPr>
+          <p:cNvPr id="14" name="Text 12"/>
+          <p:cNvSpPr txBox="1"/>
+          <p:nvPr/>
+        </p:nvSpPr>
+        <p:spPr>
+          <a:xfrm>
+            <a:off x="8321040" y="2468880"/>
+            <a:ext cx="3017520" cy="822960"/>
+          </a:xfrm>
+          <a:prstGeom prst="rect">
+            <a:avLst/>
+          </a:prstGeom>
+          <a:noFill/>
+          <a:ln/>
+        </p:spPr>
+        <p:txBody>
+          <a:bodyPr wrap="square" lIns="0" tIns="0" rIns="0" bIns="0" rtlCol="0" anchor="t"/>
+          <a:lstStyle/>
+          <a:p>
+            <a:pPr indent="0" marL="0">
+              <a:buNone/>
+            </a:pPr>
+            <a:r>
+              <a:rPr lang="en-US" sz="1300" dirty="0">
+                <a:solidFill>
+                  <a:srgbClr val="5B6474"/>
+                </a:solidFill>
+              </a:rPr>
+              <a:t>111 obrigações e prazos de incidentes para o setor financeiro</a:t>
+            </a:r>
+            <a:endParaRPr lang="en-US" sz="1300" dirty="0"/>
+          </a:p>
+        </p:txBody>
+      </p:sp>
+      <p:sp>
+        <p:nvSpPr>
+          <p:cNvPr id="15" name="card-89"/>
+          <p:cNvSpPr/>
+          <p:nvPr/>
+        </p:nvSpPr>
+        <p:spPr>
+          <a:xfrm>
+            <a:off x="548640" y="3657600"/>
+            <a:ext cx="3520440" cy="2011680"/>
+          </a:xfrm>
+          <a:prstGeom prst="roundRect">
+            <a:avLst>
+              <a:gd name="adj" fmla="val 5455"/>
+            </a:avLst>
+          </a:prstGeom>
+          <a:solidFill>
+            <a:srgbClr val="F3F5F8"/>
+          </a:solidFill>
+          <a:ln w="12700">
+            <a:solidFill>
+              <a:srgbClr val="F3F5F8"/>
+            </a:solidFill>
+            <a:prstDash val="solid"/>
+          </a:ln>
+        </p:spPr>
+      </p:sp>
+      <p:sp>
+        <p:nvSpPr>
+          <p:cNvPr id="16" name="Text 14"/>
+          <p:cNvSpPr txBox="1"/>
+          <p:nvPr/>
+        </p:nvSpPr>
+        <p:spPr>
+          <a:xfrm>
+            <a:off x="822960" y="3886200"/>
+            <a:ext cx="3017520" cy="411480"/>
+          </a:xfrm>
+          <a:prstGeom prst="rect">
+            <a:avLst/>
+          </a:prstGeom>
+          <a:noFill/>
+          <a:ln/>
+        </p:spPr>
+        <p:txBody>
+          <a:bodyPr wrap="square" lIns="0" tIns="0" rIns="0" bIns="0" rtlCol="0" anchor="t"/>
+          <a:lstStyle/>
+          <a:p>
+            <a:pPr indent="0" marL="0">
+              <a:buNone/>
+            </a:pPr>
+            <a:r>
+              <a:rPr lang="en-US" sz="1800" b="1" dirty="0">
+                <a:solidFill>
+                  <a:srgbClr val="070A13"/>
+                </a:solidFill>
+              </a:rPr>
+              <a:t>TISAX</a:t>
+            </a:r>
+            <a:endParaRPr lang="en-US" sz="1800" dirty="0"/>
+          </a:p>
+        </p:txBody>
+      </p:sp>
+      <p:sp>
+        <p:nvSpPr>
+          <p:cNvPr id="17" name="Text 15"/>
+          <p:cNvSpPr txBox="1"/>
+          <p:nvPr/>
+        </p:nvSpPr>
+        <p:spPr>
+          <a:xfrm>
+            <a:off x="822960" y="4315968"/>
+            <a:ext cx="3017520" cy="320040"/>
+          </a:xfrm>
+          <a:prstGeom prst="rect">
+            <a:avLst/>
+          </a:prstGeom>
+          <a:noFill/>
+          <a:ln/>
+        </p:spPr>
+        <p:txBody>
+          <a:bodyPr wrap="square" lIns="0" tIns="0" rIns="0" bIns="0" rtlCol="0" anchor="t"/>
+          <a:lstStyle/>
+          <a:p>
+            <a:pPr indent="0" marL="0">
+              <a:buNone/>
+            </a:pPr>
+            <a:r>
+              <a:rPr lang="en-US" sz="1200" b="1" dirty="0">
+                <a:solidFill>
+                  <a:srgbClr val="17766C"/>
+                </a:solidFill>
+              </a:rPr>
+              <a:t>VDA ISA 6.0.3 e 2027.1</a:t>
+            </a:r>
+            <a:endParaRPr lang="en-US" sz="1200" dirty="0"/>
+          </a:p>
+        </p:txBody>
+      </p:sp>
+      <p:sp>
+        <p:nvSpPr>
+          <p:cNvPr id="18" name="Text 16"/>
+          <p:cNvSpPr txBox="1"/>
+          <p:nvPr/>
+        </p:nvSpPr>
+        <p:spPr>
+          <a:xfrm>
+            <a:off x="822960" y="4709160"/>
+            <a:ext cx="3017520" cy="822960"/>
+          </a:xfrm>
+          <a:prstGeom prst="rect">
+            <a:avLst/>
+          </a:prstGeom>
+          <a:noFill/>
+          <a:ln/>
+        </p:spPr>
+        <p:txBody>
+          <a:bodyPr wrap="square" lIns="0" tIns="0" rIns="0" bIns="0" rtlCol="0" anchor="t"/>
+          <a:lstStyle/>
+          <a:p>
+            <a:pPr indent="0" marL="0">
+              <a:buNone/>
+            </a:pPr>
+            <a:r>
+              <a:rPr lang="en-US" sz="1300" dirty="0">
+                <a:solidFill>
+                  <a:srgbClr val="5B6474"/>
+                </a:solidFill>
+              </a:rPr>
+              <a:t>80 e 78 controlos para a indústria automóvel</a:t>
+            </a:r>
+            <a:endParaRPr lang="en-US" sz="1300" dirty="0"/>
+          </a:p>
+        </p:txBody>
+      </p:sp>
+      <p:sp>
+        <p:nvSpPr>
+          <p:cNvPr id="19" name="card-90"/>
+          <p:cNvSpPr/>
+          <p:nvPr/>
+        </p:nvSpPr>
+        <p:spPr>
+          <a:xfrm>
+            <a:off x="4297680" y="3657600"/>
+            <a:ext cx="3520440" cy="2011680"/>
+          </a:xfrm>
+          <a:prstGeom prst="roundRect">
+            <a:avLst>
+              <a:gd name="adj" fmla="val 5455"/>
+            </a:avLst>
+          </a:prstGeom>
+          <a:solidFill>
+            <a:srgbClr val="F3F5F8"/>
+          </a:solidFill>
+          <a:ln w="12700">
+            <a:solidFill>
+              <a:srgbClr val="F3F5F8"/>
+            </a:solidFill>
+            <a:prstDash val="solid"/>
+          </a:ln>
+        </p:spPr>
+      </p:sp>
+      <p:sp>
+        <p:nvSpPr>
+          <p:cNvPr id="20" name="Text 18"/>
+          <p:cNvSpPr txBox="1"/>
+          <p:nvPr/>
+        </p:nvSpPr>
+        <p:spPr>
+          <a:xfrm>
+            <a:off x="4572000" y="3886200"/>
+            <a:ext cx="3017520" cy="411480"/>
+          </a:xfrm>
+          <a:prstGeom prst="rect">
+            <a:avLst/>
+          </a:prstGeom>
+          <a:noFill/>
+          <a:ln/>
+        </p:spPr>
+        <p:txBody>
+          <a:bodyPr wrap="square" lIns="0" tIns="0" rIns="0" bIns="0" rtlCol="0" anchor="t"/>
+          <a:lstStyle/>
+          <a:p>
+            <a:pPr indent="0" marL="0">
+              <a:buNone/>
+            </a:pPr>
+            <a:r>
+              <a:rPr lang="en-US" sz="1800" b="1" dirty="0">
+                <a:solidFill>
+                  <a:srgbClr val="070A13"/>
+                </a:solidFill>
+              </a:rPr>
+              <a:t>CIS Controls v8.1</a:t>
+            </a:r>
+            <a:endParaRPr lang="en-US" sz="1800" dirty="0"/>
+          </a:p>
+        </p:txBody>
+      </p:sp>
+      <p:sp>
+        <p:nvSpPr>
+          <p:cNvPr id="21" name="Text 19"/>
+          <p:cNvSpPr txBox="1"/>
+          <p:nvPr/>
+        </p:nvSpPr>
+        <p:spPr>
+          <a:xfrm>
+            <a:off x="4572000" y="4315968"/>
+            <a:ext cx="3017520" cy="320040"/>
+          </a:xfrm>
+          <a:prstGeom prst="rect">
+            <a:avLst/>
+          </a:prstGeom>
+          <a:noFill/>
+          <a:ln/>
+        </p:spPr>
+        <p:txBody>
+          <a:bodyPr wrap="square" lIns="0" tIns="0" rIns="0" bIns="0" rtlCol="0" anchor="t"/>
+          <a:lstStyle/>
+          <a:p>
+            <a:pPr indent="0" marL="0">
+              <a:buNone/>
+            </a:pPr>
+            <a:r>
+              <a:rPr lang="en-US" sz="1200" b="1" dirty="0">
+                <a:solidFill>
+                  <a:srgbClr val="17766C"/>
+                </a:solidFill>
+              </a:rPr>
+              <a:t>CIS</a:t>
+            </a:r>
+            <a:endParaRPr lang="en-US" sz="1200" dirty="0"/>
+          </a:p>
+        </p:txBody>
+      </p:sp>
+      <p:sp>
+        <p:nvSpPr>
+          <p:cNvPr id="22" name="Text 20"/>
+          <p:cNvSpPr txBox="1"/>
+          <p:nvPr/>
+        </p:nvSpPr>
+        <p:spPr>
+          <a:xfrm>
+            <a:off x="4572000" y="4709160"/>
+            <a:ext cx="3017520" cy="822960"/>
+          </a:xfrm>
+          <a:prstGeom prst="rect">
+            <a:avLst/>
+          </a:prstGeom>
+          <a:noFill/>
+          <a:ln/>
+        </p:spPr>
+        <p:txBody>
+          <a:bodyPr wrap="square" lIns="0" tIns="0" rIns="0" bIns="0" rtlCol="0" anchor="t"/>
+          <a:lstStyle/>
+          <a:p>
+            <a:pPr indent="0" marL="0">
+              <a:buNone/>
+            </a:pPr>
+            <a:r>
+              <a:rPr lang="en-US" sz="1300" dirty="0">
+                <a:solidFill>
+                  <a:srgbClr val="5B6474"/>
+                </a:solidFill>
+              </a:rPr>
+              <a:t>Identificadores; o texto entra com o ficheiro oficial da entidade</a:t>
+            </a:r>
+            <a:endParaRPr lang="en-US" sz="1300" dirty="0"/>
+          </a:p>
+        </p:txBody>
+      </p:sp>
+      <p:sp>
+        <p:nvSpPr>
+          <p:cNvPr id="23" name="card-91"/>
+          <p:cNvSpPr/>
+          <p:nvPr/>
+        </p:nvSpPr>
+        <p:spPr>
+          <a:xfrm>
+            <a:off x="8046720" y="3657600"/>
+            <a:ext cx="3520440" cy="2011680"/>
+          </a:xfrm>
+          <a:prstGeom prst="roundRect">
+            <a:avLst>
+              <a:gd name="adj" fmla="val 5455"/>
+            </a:avLst>
+          </a:prstGeom>
+          <a:solidFill>
+            <a:srgbClr val="F3F5F8"/>
+          </a:solidFill>
+          <a:ln w="12700">
+            <a:solidFill>
+              <a:srgbClr val="F3F5F8"/>
+            </a:solidFill>
+            <a:prstDash val="solid"/>
+          </a:ln>
+        </p:spPr>
+      </p:sp>
+      <p:sp>
+        <p:nvSpPr>
+          <p:cNvPr id="24" name="Text 22"/>
+          <p:cNvSpPr txBox="1"/>
+          <p:nvPr/>
+        </p:nvSpPr>
+        <p:spPr>
+          <a:xfrm>
+            <a:off x="8321040" y="3886200"/>
+            <a:ext cx="3017520" cy="411480"/>
+          </a:xfrm>
+          <a:prstGeom prst="rect">
+            <a:avLst/>
+          </a:prstGeom>
+          <a:noFill/>
+          <a:ln/>
+        </p:spPr>
+        <p:txBody>
+          <a:bodyPr wrap="square" lIns="0" tIns="0" rIns="0" bIns="0" rtlCol="0" anchor="t"/>
+          <a:lstStyle/>
+          <a:p>
+            <a:pPr indent="0" marL="0">
+              <a:buNone/>
+            </a:pPr>
+            <a:r>
+              <a:rPr lang="en-US" sz="1800" b="1" dirty="0">
+                <a:solidFill>
+                  <a:srgbClr val="070A13"/>
+                </a:solidFill>
+              </a:rPr>
+              <a:t>NIST CSF 2.0</a:t>
+            </a:r>
+            <a:endParaRPr lang="en-US" sz="1800" dirty="0"/>
+          </a:p>
+        </p:txBody>
+      </p:sp>
+      <p:sp>
+        <p:nvSpPr>
+          <p:cNvPr id="25" name="Text 23"/>
+          <p:cNvSpPr txBox="1"/>
+          <p:nvPr/>
+        </p:nvSpPr>
+        <p:spPr>
+          <a:xfrm>
+            <a:off x="8321040" y="4315968"/>
+            <a:ext cx="3017520" cy="320040"/>
+          </a:xfrm>
+          <a:prstGeom prst="rect">
+            <a:avLst/>
+          </a:prstGeom>
+          <a:noFill/>
+          <a:ln/>
+        </p:spPr>
+        <p:txBody>
+          <a:bodyPr wrap="square" lIns="0" tIns="0" rIns="0" bIns="0" rtlCol="0" anchor="t"/>
+          <a:lstStyle/>
+          <a:p>
+            <a:pPr indent="0" marL="0">
+              <a:buNone/>
+            </a:pPr>
+            <a:r>
+              <a:rPr lang="en-US" sz="1200" b="1" dirty="0">
+                <a:solidFill>
+                  <a:srgbClr val="17766C"/>
+                </a:solidFill>
+              </a:rPr>
+              <a:t>NIST</a:t>
+            </a:r>
+            <a:endParaRPr lang="en-US" sz="1200" dirty="0"/>
+          </a:p>
+        </p:txBody>
+      </p:sp>
+      <p:sp>
+        <p:nvSpPr>
+          <p:cNvPr id="26" name="Text 24"/>
+          <p:cNvSpPr txBox="1"/>
+          <p:nvPr/>
+        </p:nvSpPr>
+        <p:spPr>
+          <a:xfrm>
+            <a:off x="8321040" y="4709160"/>
+            <a:ext cx="3017520" cy="822960"/>
+          </a:xfrm>
+          <a:prstGeom prst="rect">
+            <a:avLst/>
+          </a:prstGeom>
+          <a:noFill/>
+          <a:ln/>
+        </p:spPr>
+        <p:txBody>
+          <a:bodyPr wrap="square" lIns="0" tIns="0" rIns="0" bIns="0" rtlCol="0" anchor="t"/>
+          <a:lstStyle/>
+          <a:p>
+            <a:pPr indent="0" marL="0">
+              <a:buNone/>
+            </a:pPr>
+            <a:r>
+              <a:rPr lang="en-US" sz="1300" dirty="0">
+                <a:solidFill>
+                  <a:srgbClr val="5B6474"/>
+                </a:solidFill>
+              </a:rPr>
+              <a:t>Correspondências a partir do QNRCS</a:t>
+            </a:r>
+            <a:endParaRPr lang="en-US" sz="1300" dirty="0"/>
+          </a:p>
+        </p:txBody>
+      </p:sp>
+      <p:sp>
+        <p:nvSpPr>
+          <p:cNvPr id="27" name="Text 25"/>
+          <p:cNvSpPr txBox="1"/>
+          <p:nvPr/>
+        </p:nvSpPr>
+        <p:spPr>
+          <a:xfrm>
+            <a:off x="548640" y="5943600"/>
+            <a:ext cx="9692640" cy="320040"/>
+          </a:xfrm>
+          <a:prstGeom prst="rect">
+            <a:avLst/>
+          </a:prstGeom>
+          <a:noFill/>
+          <a:ln/>
+        </p:spPr>
+        <p:txBody>
+          <a:bodyPr wrap="square" lIns="0" tIns="0" rIns="0" bIns="0" rtlCol="0" anchor="t"/>
+          <a:lstStyle/>
+          <a:p>
+            <a:pPr indent="0" marL="0">
+              <a:buNone/>
+            </a:pPr>
+            <a:r>
+              <a:rPr lang="en-US" sz="1200" dirty="0">
+                <a:solidFill>
+                  <a:srgbClr val="5B6474"/>
+                </a:solidFill>
+              </a:rPr>
+              <a:t>Biblioteca Legal › Relações entre referenciais mostra as correspondências (1338 ligações) para reaproveitar evidências.</a:t>
+            </a:r>
+            <a:endParaRPr lang="en-US" sz="1200" dirty="0"/>
+          </a:p>
+        </p:txBody>
+      </p:sp>
+      <p:sp>
+        <p:nvSpPr>
+          <p:cNvPr id="25" name="Slide Number Placeholder 0"/>
+          <p:cNvSpPr>
+            <a:spLocks noGrp="1"/>
+          </p:cNvSpPr>
+          <p:nvPr>
+            <p:ph type="sldNum" sz="quarter" idx="4294967295"/>
+          </p:nvPr>
+        </p:nvSpPr>
+        <p:spPr>
+          <a:xfrm>
+            <a:off x="548640" y="6309360"/>
+            <a:ext cx="914400" cy="274320"/>
+          </a:xfrm>
+          <a:prstGeom prst="rect">
+            <a:avLst/>
+          </a:prstGeom>
+          <a:extLst>
+            <a:ext uri="{C572A759-6A51-4108-AA02-DFA0A04FC94B}">
+              <ma14:wrappingTextBoxFlag xmlns:ma14="http://schemas.microsoft.com/office/mac/drawingml/2011/main" val="0"/>
+            </a:ext>
+          </a:extLst>
+        </p:spPr>
+        <p:txBody>
+          <a:bodyPr/>
+          <a:lstStyle>
+            <a:lvl1pPr>
+              <a:defRPr sz="1000">
+                <a:solidFill>
+                  <a:srgbClr val="5B6474"/>
+                </a:solidFill>
+              </a:defRPr>
+            </a:lvl1pPr>
+          </a:lstStyle>
+          <a:p>
+            <a:pPr algn="l"/>
+            <a:fld id="{F7021451-1387-4CA6-816F-3879F97B5CBC}" type="slidenum">
+              <a:rPr b="0" lang="en-US"/>
+              <a:t>18</a:t>
+            </a:fld>
+            <a:endParaRPr lang="en-US"/>
+          </a:p>
+        </p:txBody>
+      </p:sp>
+    </p:spTree>
+  </p:cSld>
+  <p:clrMapOvr>
+    <a:masterClrMapping/>
+  </p:clrMapOvr>
+</p:sld>
+</file>
+
+<file path=ppt/slides/slide19.xml><?xml version="1.0" encoding="utf-8"?>
+<p:sld xmlns:a="http://schemas.openxmlformats.org/drawingml/2006/main" xmlns:r="http://schemas.openxmlformats.org/officeDocument/2006/relationships" xmlns:p="http://schemas.openxmlformats.org/presentationml/2006/main">
+  <p:cSld name="Slide 19">
+    <p:spTree>
+      <p:nvGrpSpPr>
+        <p:cNvPr id="1" name=""/>
+        <p:cNvGrpSpPr/>
+        <p:nvPr/>
+      </p:nvGrpSpPr>
+      <p:grpSpPr>
+        <a:xfrm>
+          <a:off x="0" y="0"/>
+          <a:ext cx="0" cy="0"/>
+          <a:chOff x="0" y="0"/>
+          <a:chExt cx="0" cy="0"/>
+        </a:xfrm>
+      </p:grpSpPr>
+      <p:sp>
+        <p:nvSpPr>
+          <p:cNvPr id="2" name="Text 0"/>
           <p:cNvSpPr/>
           <p:nvPr>
-            <p:ph idx="102" type="title" hasCustomPrompt="1"/>
+            <p:ph idx="101" type="title" hasCustomPrompt="1"/>
           </p:nvPr>
         </p:nvSpPr>
         <p:spPr>
           <a:xfrm>
-            <a:off x="731520" y="2880360"/>
-            <a:ext cx="10515600" cy="1188720"/>
+            <a:off x="548640" y="411480"/>
+            <a:ext cx="11064240" cy="822960"/>
           </a:xfrm>
           <a:prstGeom prst="rect">
             <a:avLst/>
@@ -9428,66 +10602,569 @@
               <a:buNone/>
             </a:pPr>
             <a:r>
-              <a:rPr lang="en-US" sz="4400" b="1" dirty="0">
-                <a:solidFill>
-                  <a:schemeClr val="bg1"/>
-                </a:solidFill>
-              </a:rPr>
-              <a:t>Marcar a reunião de criação da conta</a:t>
-            </a:r>
-            <a:endParaRPr lang="en-US" sz="4400" dirty="0"/>
-          </a:p>
-        </p:txBody>
-      </p:sp>
-      <p:sp>
-        <p:nvSpPr>
-          <p:cNvPr id="4" name="Text 0"/>
+              <a:rPr lang="en-US" sz="3200" b="1" dirty="0">
+                <a:solidFill>
+                  <a:schemeClr val="tx1"/>
+                </a:solidFill>
+              </a:rPr>
+              <a:t>Os primeiros 90 dias</a:t>
+            </a:r>
+            <a:endParaRPr lang="en-US" sz="3200" dirty="0"/>
+          </a:p>
+        </p:txBody>
+      </p:sp>
+      <p:sp>
+        <p:nvSpPr>
+          <p:cNvPr id="3" name="linha-90"/>
           <p:cNvSpPr/>
+          <p:nvPr/>
+        </p:nvSpPr>
+        <p:spPr>
+          <a:xfrm>
+            <a:off x="822960" y="2057400"/>
+            <a:ext cx="10515600" cy="0"/>
+          </a:xfrm>
+          <a:prstGeom prst="line">
+            <a:avLst/>
+          </a:prstGeom>
+          <a:noFill/>
+          <a:ln w="25400">
+            <a:solidFill>
+              <a:srgbClr val="DDE2EA"/>
+            </a:solidFill>
+            <a:prstDash val="solid"/>
+          </a:ln>
+        </p:spPr>
+      </p:sp>
+      <p:sp>
+        <p:nvSpPr>
+          <p:cNvPr id="4" name="fase-0"/>
+          <p:cNvSpPr/>
+          <p:nvPr/>
+        </p:nvSpPr>
+        <p:spPr>
+          <a:xfrm>
+            <a:off x="640080" y="1828800"/>
+            <a:ext cx="457200" cy="457200"/>
+          </a:xfrm>
+          <a:prstGeom prst="ellipse">
+            <a:avLst/>
+          </a:prstGeom>
+          <a:solidFill>
+            <a:srgbClr val="070A13"/>
+          </a:solidFill>
+          <a:ln w="38100">
+            <a:solidFill>
+              <a:srgbClr val="FFFFFF"/>
+            </a:solidFill>
+            <a:prstDash val="solid"/>
+          </a:ln>
+        </p:spPr>
+      </p:sp>
+      <p:sp>
+        <p:nvSpPr>
+          <p:cNvPr id="5" name="Text 3"/>
+          <p:cNvSpPr txBox="1"/>
+          <p:nvPr/>
+        </p:nvSpPr>
+        <p:spPr>
+          <a:xfrm>
+            <a:off x="548640" y="2514600"/>
+            <a:ext cx="2606040" cy="411480"/>
+          </a:xfrm>
+          <a:prstGeom prst="rect">
+            <a:avLst/>
+          </a:prstGeom>
+          <a:noFill/>
+          <a:ln/>
+        </p:spPr>
+        <p:txBody>
+          <a:bodyPr wrap="square" lIns="0" tIns="0" rIns="0" bIns="0" rtlCol="0" anchor="t"/>
+          <a:lstStyle/>
+          <a:p>
+            <a:pPr indent="0" marL="0">
+              <a:buNone/>
+            </a:pPr>
+            <a:r>
+              <a:rPr lang="en-US" sz="1800" b="1" dirty="0">
+                <a:solidFill>
+                  <a:srgbClr val="070A13"/>
+                </a:solidFill>
+              </a:rPr>
+              <a:t>Semana 1</a:t>
+            </a:r>
+            <a:endParaRPr lang="en-US" sz="1800" dirty="0"/>
+          </a:p>
+        </p:txBody>
+      </p:sp>
+      <p:sp>
+        <p:nvSpPr>
+          <p:cNvPr id="6" name="Text 4"/>
+          <p:cNvSpPr txBox="1"/>
+          <p:nvPr/>
+        </p:nvSpPr>
+        <p:spPr>
+          <a:xfrm>
+            <a:off x="548640" y="2971800"/>
+            <a:ext cx="2514600" cy="1463040"/>
+          </a:xfrm>
+          <a:prstGeom prst="rect">
+            <a:avLst/>
+          </a:prstGeom>
+          <a:noFill/>
+          <a:ln/>
+        </p:spPr>
+        <p:txBody>
+          <a:bodyPr wrap="square" lIns="0" tIns="0" rIns="0" bIns="0" rtlCol="0" anchor="t"/>
+          <a:lstStyle/>
+          <a:p>
+            <a:pPr indent="0" marL="0">
+              <a:buNone/>
+            </a:pPr>
+            <a:r>
+              <a:rPr lang="en-US" sz="1400" dirty="0">
+                <a:solidFill>
+                  <a:srgbClr val="5B6474"/>
+                </a:solidFill>
+              </a:rPr>
+              <a:t>Conta, enquadramento e equipa convidada</a:t>
+            </a:r>
+            <a:endParaRPr lang="en-US" sz="1400" dirty="0"/>
+          </a:p>
+        </p:txBody>
+      </p:sp>
+      <p:sp>
+        <p:nvSpPr>
+          <p:cNvPr id="7" name="fase-1"/>
+          <p:cNvSpPr/>
+          <p:nvPr/>
+        </p:nvSpPr>
+        <p:spPr>
+          <a:xfrm>
+            <a:off x="3429000" y="1828800"/>
+            <a:ext cx="457200" cy="457200"/>
+          </a:xfrm>
+          <a:prstGeom prst="ellipse">
+            <a:avLst/>
+          </a:prstGeom>
+          <a:solidFill>
+            <a:srgbClr val="070A13"/>
+          </a:solidFill>
+          <a:ln w="38100">
+            <a:solidFill>
+              <a:srgbClr val="FFFFFF"/>
+            </a:solidFill>
+            <a:prstDash val="solid"/>
+          </a:ln>
+        </p:spPr>
+      </p:sp>
+      <p:sp>
+        <p:nvSpPr>
+          <p:cNvPr id="8" name="Text 6"/>
+          <p:cNvSpPr txBox="1"/>
+          <p:nvPr/>
+        </p:nvSpPr>
+        <p:spPr>
+          <a:xfrm>
+            <a:off x="3337560" y="2514600"/>
+            <a:ext cx="2606040" cy="411480"/>
+          </a:xfrm>
+          <a:prstGeom prst="rect">
+            <a:avLst/>
+          </a:prstGeom>
+          <a:noFill/>
+          <a:ln/>
+        </p:spPr>
+        <p:txBody>
+          <a:bodyPr wrap="square" lIns="0" tIns="0" rIns="0" bIns="0" rtlCol="0" anchor="t"/>
+          <a:lstStyle/>
+          <a:p>
+            <a:pPr indent="0" marL="0">
+              <a:buNone/>
+            </a:pPr>
+            <a:r>
+              <a:rPr lang="en-US" sz="1800" b="1" dirty="0">
+                <a:solidFill>
+                  <a:srgbClr val="070A13"/>
+                </a:solidFill>
+              </a:rPr>
+              <a:t>Semanas 2 a 4</a:t>
+            </a:r>
+            <a:endParaRPr lang="en-US" sz="1800" dirty="0"/>
+          </a:p>
+        </p:txBody>
+      </p:sp>
+      <p:sp>
+        <p:nvSpPr>
+          <p:cNvPr id="9" name="Text 7"/>
+          <p:cNvSpPr txBox="1"/>
+          <p:nvPr/>
+        </p:nvSpPr>
+        <p:spPr>
+          <a:xfrm>
+            <a:off x="3337560" y="2971800"/>
+            <a:ext cx="2514600" cy="1463040"/>
+          </a:xfrm>
+          <a:prstGeom prst="rect">
+            <a:avLst/>
+          </a:prstGeom>
+          <a:noFill/>
+          <a:ln/>
+        </p:spPr>
+        <p:txBody>
+          <a:bodyPr wrap="square" lIns="0" tIns="0" rIns="0" bIns="0" rtlCol="0" anchor="t"/>
+          <a:lstStyle/>
+          <a:p>
+            <a:pPr indent="0" marL="0">
+              <a:buNone/>
+            </a:pPr>
+            <a:r>
+              <a:rPr lang="en-US" sz="1400" dirty="0">
+                <a:solidFill>
+                  <a:srgbClr val="5B6474"/>
+                </a:solidFill>
+              </a:rPr>
+              <a:t>Responsável e ponto de contacto; autoidentificação; primeira avaliação NIS2 e ISO</a:t>
+            </a:r>
+            <a:endParaRPr lang="en-US" sz="1400" dirty="0"/>
+          </a:p>
+        </p:txBody>
+      </p:sp>
+      <p:sp>
+        <p:nvSpPr>
+          <p:cNvPr id="10" name="fase-2"/>
+          <p:cNvSpPr/>
+          <p:nvPr/>
+        </p:nvSpPr>
+        <p:spPr>
+          <a:xfrm>
+            <a:off x="6217920" y="1828800"/>
+            <a:ext cx="457200" cy="457200"/>
+          </a:xfrm>
+          <a:prstGeom prst="ellipse">
+            <a:avLst/>
+          </a:prstGeom>
+          <a:solidFill>
+            <a:srgbClr val="070A13"/>
+          </a:solidFill>
+          <a:ln w="38100">
+            <a:solidFill>
+              <a:srgbClr val="FFFFFF"/>
+            </a:solidFill>
+            <a:prstDash val="solid"/>
+          </a:ln>
+        </p:spPr>
+      </p:sp>
+      <p:sp>
+        <p:nvSpPr>
+          <p:cNvPr id="11" name="Text 9"/>
+          <p:cNvSpPr txBox="1"/>
+          <p:nvPr/>
+        </p:nvSpPr>
+        <p:spPr>
+          <a:xfrm>
+            <a:off x="6126480" y="2514600"/>
+            <a:ext cx="2606040" cy="411480"/>
+          </a:xfrm>
+          <a:prstGeom prst="rect">
+            <a:avLst/>
+          </a:prstGeom>
+          <a:noFill/>
+          <a:ln/>
+        </p:spPr>
+        <p:txBody>
+          <a:bodyPr wrap="square" lIns="0" tIns="0" rIns="0" bIns="0" rtlCol="0" anchor="t"/>
+          <a:lstStyle/>
+          <a:p>
+            <a:pPr indent="0" marL="0">
+              <a:buNone/>
+            </a:pPr>
+            <a:r>
+              <a:rPr lang="en-US" sz="1800" b="1" dirty="0">
+                <a:solidFill>
+                  <a:srgbClr val="070A13"/>
+                </a:solidFill>
+              </a:rPr>
+              <a:t>Mês 2</a:t>
+            </a:r>
+            <a:endParaRPr lang="en-US" sz="1800" dirty="0"/>
+          </a:p>
+        </p:txBody>
+      </p:sp>
+      <p:sp>
+        <p:nvSpPr>
+          <p:cNvPr id="12" name="Text 10"/>
+          <p:cNvSpPr txBox="1"/>
+          <p:nvPr/>
+        </p:nvSpPr>
+        <p:spPr>
+          <a:xfrm>
+            <a:off x="6126480" y="2971800"/>
+            <a:ext cx="2514600" cy="1463040"/>
+          </a:xfrm>
+          <a:prstGeom prst="rect">
+            <a:avLst/>
+          </a:prstGeom>
+          <a:noFill/>
+          <a:ln/>
+        </p:spPr>
+        <p:txBody>
+          <a:bodyPr wrap="square" lIns="0" tIns="0" rIns="0" bIns="0" rtlCol="0" anchor="t"/>
+          <a:lstStyle/>
+          <a:p>
+            <a:pPr indent="0" marL="0">
+              <a:buNone/>
+            </a:pPr>
+            <a:r>
+              <a:rPr lang="en-US" sz="1400" dirty="0">
+                <a:solidFill>
+                  <a:srgbClr val="5B6474"/>
+                </a:solidFill>
+              </a:rPr>
+              <a:t>Políticas aprovadas; inventário de ativos e de sistemas de IA; documentos carregados em Por classificar</a:t>
+            </a:r>
+            <a:endParaRPr lang="en-US" sz="1400" dirty="0"/>
+          </a:p>
+        </p:txBody>
+      </p:sp>
+      <p:sp>
+        <p:nvSpPr>
+          <p:cNvPr id="13" name="fase-3"/>
+          <p:cNvSpPr/>
+          <p:nvPr/>
+        </p:nvSpPr>
+        <p:spPr>
+          <a:xfrm>
+            <a:off x="9006840" y="1828800"/>
+            <a:ext cx="457200" cy="457200"/>
+          </a:xfrm>
+          <a:prstGeom prst="ellipse">
+            <a:avLst/>
+          </a:prstGeom>
+          <a:solidFill>
+            <a:srgbClr val="CFA04A"/>
+          </a:solidFill>
+          <a:ln w="38100">
+            <a:solidFill>
+              <a:srgbClr val="FFFFFF"/>
+            </a:solidFill>
+            <a:prstDash val="solid"/>
+          </a:ln>
+        </p:spPr>
+      </p:sp>
+      <p:sp>
+        <p:nvSpPr>
+          <p:cNvPr id="14" name="Text 12"/>
+          <p:cNvSpPr txBox="1"/>
+          <p:nvPr/>
+        </p:nvSpPr>
+        <p:spPr>
+          <a:xfrm>
+            <a:off x="8915400" y="2514600"/>
+            <a:ext cx="2606040" cy="411480"/>
+          </a:xfrm>
+          <a:prstGeom prst="rect">
+            <a:avLst/>
+          </a:prstGeom>
+          <a:noFill/>
+          <a:ln/>
+        </p:spPr>
+        <p:txBody>
+          <a:bodyPr wrap="square" lIns="0" tIns="0" rIns="0" bIns="0" rtlCol="0" anchor="t"/>
+          <a:lstStyle/>
+          <a:p>
+            <a:pPr indent="0" marL="0">
+              <a:buNone/>
+            </a:pPr>
+            <a:r>
+              <a:rPr lang="en-US" sz="1800" b="1" dirty="0">
+                <a:solidFill>
+                  <a:srgbClr val="070A13"/>
+                </a:solidFill>
+              </a:rPr>
+              <a:t>Mês 3</a:t>
+            </a:r>
+            <a:endParaRPr lang="en-US" sz="1800" dirty="0"/>
+          </a:p>
+        </p:txBody>
+      </p:sp>
+      <p:sp>
+        <p:nvSpPr>
+          <p:cNvPr id="15" name="Text 13"/>
+          <p:cNvSpPr txBox="1"/>
+          <p:nvPr/>
+        </p:nvSpPr>
+        <p:spPr>
+          <a:xfrm>
+            <a:off x="8915400" y="2971800"/>
+            <a:ext cx="2514600" cy="1463040"/>
+          </a:xfrm>
+          <a:prstGeom prst="rect">
+            <a:avLst/>
+          </a:prstGeom>
+          <a:noFill/>
+          <a:ln/>
+        </p:spPr>
+        <p:txBody>
+          <a:bodyPr wrap="square" lIns="0" tIns="0" rIns="0" bIns="0" rtlCol="0" anchor="t"/>
+          <a:lstStyle/>
+          <a:p>
+            <a:pPr indent="0" marL="0">
+              <a:buNone/>
+            </a:pPr>
+            <a:r>
+              <a:rPr lang="en-US" sz="1400" dirty="0">
+                <a:solidFill>
+                  <a:srgbClr val="5B6474"/>
+                </a:solidFill>
+              </a:rPr>
+              <a:t>Medidas com evidências; Declarações de Aplicabilidade; incidentes testados; plano revisto</a:t>
+            </a:r>
+            <a:endParaRPr lang="en-US" sz="1400" dirty="0"/>
+          </a:p>
+        </p:txBody>
+      </p:sp>
+      <p:sp>
+        <p:nvSpPr>
+          <p:cNvPr id="16" name="card-92"/>
+          <p:cNvSpPr/>
+          <p:nvPr/>
+        </p:nvSpPr>
+        <p:spPr>
+          <a:xfrm>
+            <a:off x="548640" y="4663440"/>
+            <a:ext cx="11064240" cy="1325880"/>
+          </a:xfrm>
+          <a:prstGeom prst="roundRect">
+            <a:avLst>
+              <a:gd name="adj" fmla="val 8276"/>
+            </a:avLst>
+          </a:prstGeom>
+          <a:solidFill>
+            <a:srgbClr val="E6F5F3"/>
+          </a:solidFill>
+          <a:ln w="12700">
+            <a:solidFill>
+              <a:srgbClr val="E6F5F3"/>
+            </a:solidFill>
+            <a:prstDash val="solid"/>
+          </a:ln>
+        </p:spPr>
+      </p:sp>
+      <p:sp>
+        <p:nvSpPr>
+          <p:cNvPr id="17" name="Text 15"/>
+          <p:cNvSpPr txBox="1"/>
+          <p:nvPr/>
+        </p:nvSpPr>
+        <p:spPr>
+          <a:xfrm>
+            <a:off x="822960" y="4800600"/>
+            <a:ext cx="4572000" cy="365760"/>
+          </a:xfrm>
+          <a:prstGeom prst="rect">
+            <a:avLst/>
+          </a:prstGeom>
+          <a:noFill/>
+          <a:ln/>
+        </p:spPr>
+        <p:txBody>
+          <a:bodyPr wrap="square" lIns="0" tIns="0" rIns="0" bIns="0" rtlCol="0" anchor="t"/>
+          <a:lstStyle/>
+          <a:p>
+            <a:pPr indent="0" marL="0">
+              <a:buNone/>
+            </a:pPr>
+            <a:r>
+              <a:rPr lang="en-US" sz="1600" b="1" dirty="0">
+                <a:solidFill>
+                  <a:srgbClr val="17766C"/>
+                </a:solidFill>
+              </a:rPr>
+              <a:t>Depois do arranque</a:t>
+            </a:r>
+            <a:endParaRPr lang="en-US" sz="1600" dirty="0"/>
+          </a:p>
+        </p:txBody>
+      </p:sp>
+      <p:sp>
+        <p:nvSpPr>
+          <p:cNvPr id="18" name="Text 16"/>
+          <p:cNvSpPr txBox="1"/>
+          <p:nvPr/>
+        </p:nvSpPr>
+        <p:spPr>
+          <a:xfrm>
+            <a:off x="822960" y="5212080"/>
+            <a:ext cx="10515600" cy="640080"/>
+          </a:xfrm>
+          <a:prstGeom prst="rect">
+            <a:avLst/>
+          </a:prstGeom>
+          <a:noFill/>
+          <a:ln/>
+        </p:spPr>
+        <p:txBody>
+          <a:bodyPr wrap="square" lIns="0" tIns="0" rIns="0" bIns="0" rtlCol="0" anchor="t"/>
+          <a:lstStyle/>
+          <a:p>
+            <a:pPr indent="0" marL="0">
+              <a:buNone/>
+            </a:pPr>
+            <a:r>
+              <a:rPr lang="en-US" sz="1400" dirty="0">
+                <a:solidFill>
+                  <a:srgbClr val="111827"/>
+                </a:solidFill>
+              </a:rPr>
+              <a:t>Revisão trimestral da maturidade, análise anual dos riscos, lembretes de revisão de documentos e preparação do relatório anual.</a:t>
+            </a:r>
+            <a:endParaRPr lang="en-US" sz="1400" dirty="0"/>
+          </a:p>
+        </p:txBody>
+      </p:sp>
+      <p:sp>
+        <p:nvSpPr>
+          <p:cNvPr id="25" name="Slide Number Placeholder 0"/>
+          <p:cNvSpPr>
+            <a:spLocks noGrp="1"/>
+          </p:cNvSpPr>
           <p:nvPr>
-            <p:ph idx="103" type="body" hasCustomPrompt="1"/>
+            <p:ph type="sldNum" sz="quarter" idx="4294967295"/>
           </p:nvPr>
         </p:nvSpPr>
         <p:spPr>
           <a:xfrm>
-            <a:off x="731520" y="4160520"/>
-            <a:ext cx="8686800" cy="1097280"/>
-          </a:xfrm>
-          <a:prstGeom prst="rect">
-            <a:avLst/>
-          </a:prstGeom>
-          <a:noFill/>
-          <a:ln/>
-        </p:spPr>
-        <p:txBody>
-          <a:bodyPr wrap="square" lIns="0" tIns="0" rIns="0" bIns="0" rtlCol="0" anchor="t"/>
-          <a:lstStyle/>
-          <a:p>
-            <a:pPr indent="0" marL="0">
-              <a:buNone/>
-            </a:pPr>
-            <a:r>
-              <a:rPr lang="en-US" sz="1800" dirty="0">
-                <a:solidFill>
-                  <a:srgbClr val="C9CFDA"/>
-                </a:solidFill>
-              </a:rPr>
-              <a:t>Traga a informação da secção 2 do manual de onboarding.</a:t>
-            </a:r>
-            <a:endParaRPr lang="en-US" sz="1800" dirty="0"/>
-          </a:p>
-          <a:p>
-            <a:pPr indent="0" marL="0">
-              <a:buNone/>
-            </a:pPr>
-            <a:r>
-              <a:rPr lang="en-US" sz="1800" dirty="0">
-                <a:solidFill>
-                  <a:srgbClr val="C9CFDA"/>
-                </a:solidFill>
-              </a:rPr>
-              <a:t>app.ankoraone.com  ·  daniel.carvalho@ankoraone.com</a:t>
-            </a:r>
-            <a:endParaRPr lang="en-US" sz="1800" dirty="0"/>
+            <a:off x="548640" y="6309360"/>
+            <a:ext cx="914400" cy="274320"/>
+          </a:xfrm>
+          <a:prstGeom prst="rect">
+            <a:avLst/>
+          </a:prstGeom>
+          <a:extLst>
+            <a:ext uri="{C572A759-6A51-4108-AA02-DFA0A04FC94B}">
+              <ma14:wrappingTextBoxFlag xmlns:ma14="http://schemas.microsoft.com/office/mac/drawingml/2011/main" val="0"/>
+            </a:ext>
+          </a:extLst>
+        </p:spPr>
+        <p:txBody>
+          <a:bodyPr/>
+          <a:lstStyle>
+            <a:lvl1pPr>
+              <a:defRPr sz="1000">
+                <a:solidFill>
+                  <a:srgbClr val="5B6474"/>
+                </a:solidFill>
+              </a:defRPr>
+            </a:lvl1pPr>
+          </a:lstStyle>
+          <a:p>
+            <a:pPr algn="l"/>
+            <a:fld id="{F7021451-1387-4CA6-816F-3879F97B5CBC}" type="slidenum">
+              <a:rPr b="0" lang="en-US"/>
+              <a:t>19</a:t>
+            </a:fld>
+            <a:endParaRPr lang="en-US"/>
           </a:p>
         </p:txBody>
       </p:sp>
@@ -10531,6 +12208,159 @@
 </p:sld>
 </file>
 
+<file path=ppt/slides/slide20.xml><?xml version="1.0" encoding="utf-8"?>
+<p:sld xmlns:a="http://schemas.openxmlformats.org/drawingml/2006/main" xmlns:r="http://schemas.openxmlformats.org/officeDocument/2006/relationships" xmlns:p="http://schemas.openxmlformats.org/presentationml/2006/main">
+  <p:cSld name="Slide 20">
+    <p:spTree>
+      <p:nvGrpSpPr>
+        <p:cNvPr id="1" name=""/>
+        <p:cNvGrpSpPr/>
+        <p:nvPr/>
+      </p:nvGrpSpPr>
+      <p:grpSpPr>
+        <a:xfrm>
+          <a:off x="0" y="0"/>
+          <a:ext cx="0" cy="0"/>
+          <a:chOff x="0" y="0"/>
+          <a:chExt cx="0" cy="0"/>
+        </a:xfrm>
+      </p:grpSpPr>
+      <p:sp>
+        <p:nvSpPr>
+          <p:cNvPr id="2" name="Text 0"/>
+          <p:cNvSpPr/>
+          <p:nvPr>
+            <p:ph idx="101" type="body" hasCustomPrompt="1"/>
+          </p:nvPr>
+        </p:nvSpPr>
+        <p:spPr>
+          <a:xfrm>
+            <a:off x="731520" y="2468880"/>
+            <a:ext cx="10058400" cy="365760"/>
+          </a:xfrm>
+          <a:prstGeom prst="rect">
+            <a:avLst/>
+          </a:prstGeom>
+          <a:noFill/>
+          <a:ln/>
+        </p:spPr>
+        <p:txBody>
+          <a:bodyPr wrap="square" lIns="0" tIns="0" rIns="0" bIns="0" rtlCol="0"/>
+          <a:lstStyle/>
+          <a:p>
+            <a:pPr indent="0" marL="0">
+              <a:buNone/>
+            </a:pPr>
+            <a:r>
+              <a:rPr lang="en-US" sz="1400" b="1" spc="400" kern="0" dirty="0">
+                <a:solidFill>
+                  <a:schemeClr val="accent1"/>
+                </a:solidFill>
+              </a:rPr>
+              <a:t>PRÓXIMO PASSO</a:t>
+            </a:r>
+            <a:endParaRPr lang="en-US" sz="1400" dirty="0"/>
+          </a:p>
+        </p:txBody>
+      </p:sp>
+      <p:sp>
+        <p:nvSpPr>
+          <p:cNvPr id="3" name="Text 0"/>
+          <p:cNvSpPr/>
+          <p:nvPr>
+            <p:ph idx="102" type="title" hasCustomPrompt="1"/>
+          </p:nvPr>
+        </p:nvSpPr>
+        <p:spPr>
+          <a:xfrm>
+            <a:off x="731520" y="2880360"/>
+            <a:ext cx="10515600" cy="1188720"/>
+          </a:xfrm>
+          <a:prstGeom prst="rect">
+            <a:avLst/>
+          </a:prstGeom>
+          <a:noFill/>
+          <a:ln/>
+        </p:spPr>
+        <p:txBody>
+          <a:bodyPr wrap="square" lIns="0" tIns="0" rIns="0" bIns="0" rtlCol="0" anchor="t"/>
+          <a:lstStyle/>
+          <a:p>
+            <a:pPr algn="l" indent="0" marL="0">
+              <a:buNone/>
+            </a:pPr>
+            <a:r>
+              <a:rPr lang="en-US" sz="4400" b="1" dirty="0">
+                <a:solidFill>
+                  <a:schemeClr val="bg1"/>
+                </a:solidFill>
+              </a:rPr>
+              <a:t>Marcar a reunião de criação da conta</a:t>
+            </a:r>
+            <a:endParaRPr lang="en-US" sz="4400" dirty="0"/>
+          </a:p>
+        </p:txBody>
+      </p:sp>
+      <p:sp>
+        <p:nvSpPr>
+          <p:cNvPr id="4" name="Text 0"/>
+          <p:cNvSpPr/>
+          <p:nvPr>
+            <p:ph idx="103" type="body" hasCustomPrompt="1"/>
+          </p:nvPr>
+        </p:nvSpPr>
+        <p:spPr>
+          <a:xfrm>
+            <a:off x="731520" y="4160520"/>
+            <a:ext cx="8686800" cy="1097280"/>
+          </a:xfrm>
+          <a:prstGeom prst="rect">
+            <a:avLst/>
+          </a:prstGeom>
+          <a:noFill/>
+          <a:ln/>
+        </p:spPr>
+        <p:txBody>
+          <a:bodyPr wrap="square" lIns="0" tIns="0" rIns="0" bIns="0" rtlCol="0" anchor="t"/>
+          <a:lstStyle/>
+          <a:p>
+            <a:pPr indent="0" marL="0">
+              <a:buNone/>
+            </a:pPr>
+            <a:r>
+              <a:rPr lang="en-US" sz="1800" dirty="0">
+                <a:solidFill>
+                  <a:srgbClr val="C9CFDA"/>
+                </a:solidFill>
+              </a:rPr>
+              <a:t>Traga a informação da secção 2 do manual de onboarding. Guias de implementação: NIS2, ISO/IEC 27001 e ISO/IEC 42001.</a:t>
+            </a:r>
+            <a:endParaRPr lang="en-US" sz="1800" dirty="0"/>
+          </a:p>
+          <a:p>
+            <a:pPr indent="0" marL="0">
+              <a:buNone/>
+            </a:pPr>
+            <a:r>
+              <a:rPr lang="en-US" sz="1800" dirty="0">
+                <a:solidFill>
+                  <a:srgbClr val="C9CFDA"/>
+                </a:solidFill>
+              </a:rPr>
+              <a:t>app.ankoraone.com  ·  daniel.carvalho@ankoraone.com</a:t>
+            </a:r>
+            <a:endParaRPr lang="en-US" sz="1800" dirty="0"/>
+          </a:p>
+        </p:txBody>
+      </p:sp>
+    </p:spTree>
+  </p:cSld>
+  <p:clrMapOvr>
+    <a:masterClrMapping/>
+  </p:clrMapOvr>
+</p:sld>
+</file>
+
 <file path=ppt/slides/slide3.xml><?xml version="1.0" encoding="utf-8"?>
 <p:sld xmlns:a="http://schemas.openxmlformats.org/drawingml/2006/main" xmlns:r="http://schemas.openxmlformats.org/officeDocument/2006/relationships" xmlns:p="http://schemas.openxmlformats.org/presentationml/2006/main">
   <p:cSld name="Slide 3">
@@ -14289,7 +16119,7 @@
                   <a:srgbClr val="5B6474"/>
                 </a:solidFill>
               </a:rPr>
-              <a:t>A licença define também os referenciais disponíveis e o número de utilizadores (mínimo de 5). O menu só mostra o que está incluído.</a:t>
+              <a:t>A licença define também os referenciais (NIS2, QNRCS, ISO/IEC 27001, ISO/IEC 42001, DORA…) e o número de utilizadores (mínimo de 5). O menu só mostra o que está incluído.</a:t>
             </a:r>
             <a:endParaRPr lang="en-US" sz="1400" dirty="0"/>
           </a:p>
@@ -15209,7 +17039,7 @@
                   <a:srgbClr val="5B6474"/>
                 </a:solidFill>
               </a:rPr>
-              <a:t>Documentos · Auditoria de Documentos · Cadeia de Abastecimento · Fornecedores</a:t>
+              <a:t>Documentos · Repositório documental · Auditoria · Cadeia de Abastecimento · Fornecedores</a:t>
             </a:r>
             <a:endParaRPr lang="en-US" sz="1300" dirty="0"/>
           </a:p>

--- a/docs/onboarding/AnkoraOne-Apresentacao-Onboarding.pptx
+++ b/docs/onboarding/AnkoraOne-Apresentacao-Onboarding.pptx
@@ -126,7 +126,7 @@
   <p:extLst>
     <p:ext uri="{521415D9-36F7-43E2-AB2F-B90AF26B5E84}">
       <p14:sectionLst xmlns:p14="http://schemas.microsoft.com/office/powerpoint/2010/main">
-        <p14:section name="Abertura" id="{56759ea1-9d6e-0cf8-341e-464f77914f3c}">
+        <p14:section name="Abertura" id="{7799d756-8d4d-6123-205e-8b284313985f}">
           <p14:sldIdLst>
             <p14:sldId id="256"/>
             <p14:sldId id="257"/>
@@ -136,7 +136,7 @@
             <p14:sldId id="261"/>
           </p14:sldIdLst>
         </p14:section>
-        <p14:section name="Navegar e trabalhar" id="{70dc23ed-05cb-6673-c2d0-c6f78af92a72}">
+        <p14:section name="Navegar e trabalhar" id="{5965bf51-68b1-7bb9-8d5e-9bfe19719ba5}">
           <p14:sldIdLst>
             <p14:sldId id="262"/>
             <p14:sldId id="263"/>
@@ -147,7 +147,7 @@
             <p14:sldId id="268"/>
           </p14:sldIdLst>
         </p14:section>
-        <p14:section name="Guia por referencial" id="{cc85fff8-17fc-597f-eea7-85c6726640fd}">
+        <p14:section name="Guia por referencial" id="{9e1ca1e4-23cd-b549-267a-28c28de2b812}">
           <p14:sldIdLst>
             <p14:sldId id="269"/>
             <p14:sldId id="270"/>
@@ -156,7 +156,7 @@
             <p14:sldId id="273"/>
           </p14:sldIdLst>
         </p14:section>
-        <p14:section name="Fecho" id="{670e9f66-a7e8-afea-d7c6-e465fea43333}">
+        <p14:section name="Fecho" id="{836ef8ac-61ba-46e9-5de1-b1223c54bc9c}">
           <p14:sldIdLst>
             <p14:sldId id="274"/>
             <p14:sldId id="275"/>
@@ -8064,7 +8064,7 @@
                           <a:ea typeface="Calibri" pitchFamily="34" charset="-122"/>
                           <a:cs typeface="Calibri" pitchFamily="34" charset="-120"/>
                         </a:rPr>
-                        <a:t>Último dia útil de janeiro, a partir de 2028</a:t>
+                        <a:t>Último dia útil de janeiro; o primeiro em janeiro de 2029, relativo a 2028</a:t>
                       </a:r>
                       <a:endParaRPr lang="en-US" sz="1300" dirty="0">
                         <a:latin typeface="Calibri" charset="0"/>
@@ -14524,7 +14524,7 @@
                   <a:srgbClr val="111827"/>
                 </a:solidFill>
               </a:rPr>
-              <a:t>Tipo de entidade (art. 4.º)</a:t>
+              <a:t>Estabelecimento (art. 4.º)</a:t>
             </a:r>
             <a:endParaRPr lang="en-US" sz="1500" dirty="0"/>
           </a:p>

--- a/docs/onboarding/AnkoraOne-Apresentacao-Onboarding.pptx
+++ b/docs/onboarding/AnkoraOne-Apresentacao-Onboarding.pptx
@@ -23,9 +23,11 @@
     <p:sldId id="271" r:id="rId17"/>
     <p:sldId id="272" r:id="rId18"/>
     <p:sldId id="273" r:id="rId19"/>
+    <p:sldId id="274" r:id="rId20"/>
+    <p:sldId id="275" r:id="rId21"/>
   </p:sldIdLst>
   <p:notesMasterIdLst>
-    <p:notesMasterId r:id="rId20"/>
+    <p:notesMasterId r:id="rId22"/>
   </p:notesMasterIdLst>
   <p:sldSz cx="12192000" cy="6858000"/>
   <p:notesSz cx="6858000" cy="12192000"/>
@@ -124,7 +126,7 @@
   <p:extLst>
     <p:ext uri="{521415D9-36F7-43E2-AB2F-B90AF26B5E84}">
       <p14:sectionLst xmlns:p14="http://schemas.microsoft.com/office/powerpoint/2010/main">
-        <p14:section name="Abertura" id="{344d1515-85e6-022b-ab0c-0ce68a2ce623}">
+        <p14:section name="Abertura" id="{7799d756-8d4d-6123-205e-8b284313985f}">
           <p14:sldIdLst>
             <p14:sldId id="256"/>
             <p14:sldId id="257"/>
@@ -134,7 +136,7 @@
             <p14:sldId id="261"/>
           </p14:sldIdLst>
         </p14:section>
-        <p14:section name="Navegar e trabalhar" id="{919981b8-7b8f-12bd-03cd-795fb62e3488}">
+        <p14:section name="Navegar e trabalhar" id="{5965bf51-68b1-7bb9-8d5e-9bfe19719ba5}">
           <p14:sldIdLst>
             <p14:sldId id="262"/>
             <p14:sldId id="263"/>
@@ -142,20 +144,22 @@
             <p14:sldId id="265"/>
             <p14:sldId id="266"/>
             <p14:sldId id="267"/>
+            <p14:sldId id="268"/>
           </p14:sldIdLst>
         </p14:section>
-        <p14:section name="Guia por referencial" id="{0119038f-8be0-8602-9201-fa603ceb1702}">
+        <p14:section name="Guia por referencial" id="{9e1ca1e4-23cd-b549-267a-28c28de2b812}">
           <p14:sldIdLst>
-            <p14:sldId id="268"/>
             <p14:sldId id="269"/>
             <p14:sldId id="270"/>
             <p14:sldId id="271"/>
+            <p14:sldId id="272"/>
+            <p14:sldId id="273"/>
           </p14:sldIdLst>
         </p14:section>
-        <p14:section name="Fecho" id="{bde07117-bcb4-69e7-35e3-9ca7527e6dee}">
+        <p14:section name="Fecho" id="{836ef8ac-61ba-46e9-5de1-b1223c54bc9c}">
           <p14:sldIdLst>
-            <p14:sldId id="272"/>
-            <p14:sldId id="273"/>
+            <p14:sldId id="274"/>
+            <p14:sldId id="275"/>
           </p14:sldIdLst>
         </p14:section>
       </p14:sectionLst>
@@ -1396,6 +1400,94 @@
 </p:notes>
 </file>
 
+<file path=ppt/notesSlides/notesSlide19.xml><?xml version="1.0" encoding="utf-8"?>
+<p:notes xmlns:a="http://schemas.openxmlformats.org/drawingml/2006/main" xmlns:r="http://schemas.openxmlformats.org/officeDocument/2006/relationships" xmlns:p="http://schemas.openxmlformats.org/presentationml/2006/main">
+  <p:cSld>
+    <p:spTree>
+      <p:nvGrpSpPr>
+        <p:cNvPr id="1" name=""/>
+        <p:cNvGrpSpPr/>
+        <p:nvPr/>
+      </p:nvGrpSpPr>
+      <p:grpSpPr>
+        <a:xfrm>
+          <a:off x="0" y="0"/>
+          <a:ext cx="0" cy="0"/>
+          <a:chOff x="0" y="0"/>
+          <a:chExt cx="0" cy="0"/>
+        </a:xfrm>
+      </p:grpSpPr>
+      <p:sp>
+        <p:nvSpPr>
+          <p:cNvPr id="2" name="Slide Image Placeholder 1"/>
+          <p:cNvSpPr>
+            <a:spLocks noGrp="1" noRot="1" noChangeAspect="1"/>
+          </p:cNvSpPr>
+          <p:nvPr>
+            <p:ph type="sldImg"/>
+          </p:nvPr>
+        </p:nvSpPr>
+        <p:spPr/>
+      </p:sp>
+      <p:sp>
+        <p:nvSpPr>
+          <p:cNvPr id="3" name="Notes Placeholder 2"/>
+          <p:cNvSpPr>
+            <a:spLocks noGrp="1"/>
+          </p:cNvSpPr>
+          <p:nvPr>
+            <p:ph type="body" idx="1"/>
+          </p:nvPr>
+        </p:nvSpPr>
+        <p:spPr/>
+        <p:txBody>
+          <a:bodyPr/>
+          <a:lstStyle/>
+          <a:p>
+            <a:r>
+              <a:rPr lang="en-US" dirty="0"/>
+              <a:t/>
+            </a:r>
+            <a:endParaRPr lang="en-US" dirty="0"/>
+          </a:p>
+        </p:txBody>
+      </p:sp>
+      <p:sp>
+        <p:nvSpPr>
+          <p:cNvPr id="4" name="Slide Number Placeholder 3"/>
+          <p:cNvSpPr>
+            <a:spLocks noGrp="1"/>
+          </p:cNvSpPr>
+          <p:nvPr>
+            <p:ph type="sldNum" sz="quarter" idx="10"/>
+          </p:nvPr>
+        </p:nvSpPr>
+        <p:spPr/>
+        <p:txBody>
+          <a:bodyPr/>
+          <a:lstStyle/>
+          <a:p>
+            <a:fld id="{F7021451-1387-4CA6-816F-3879F97B5CBC}" type="slidenum">
+              <a:rPr lang="en-US"/>
+              <a:t>19</a:t>
+            </a:fld>
+            <a:endParaRPr lang="en-US"/>
+          </a:p>
+        </p:txBody>
+      </p:sp>
+    </p:spTree>
+    <p:extLst>
+      <p:ext uri="{BB962C8B-B14F-4D97-AF65-F5344CB8AC3E}">
+        <p14:creationId xmlns:p14="http://schemas.microsoft.com/office/powerpoint/2010/main" val="1024086991"/>
+      </p:ext>
+    </p:extLst>
+  </p:cSld>
+  <p:clrMapOvr>
+    <a:masterClrMapping/>
+  </p:clrMapOvr>
+</p:notes>
+</file>
+
 <file path=ppt/notesSlides/notesSlide2.xml><?xml version="1.0" encoding="utf-8"?>
 <p:notes xmlns:a="http://schemas.openxmlformats.org/drawingml/2006/main" xmlns:r="http://schemas.openxmlformats.org/officeDocument/2006/relationships" xmlns:p="http://schemas.openxmlformats.org/presentationml/2006/main">
   <p:cSld>
@@ -1466,6 +1558,94 @@
             <a:fld id="{F7021451-1387-4CA6-816F-3879F97B5CBC}" type="slidenum">
               <a:rPr lang="en-US"/>
               <a:t>2</a:t>
+            </a:fld>
+            <a:endParaRPr lang="en-US"/>
+          </a:p>
+        </p:txBody>
+      </p:sp>
+    </p:spTree>
+    <p:extLst>
+      <p:ext uri="{BB962C8B-B14F-4D97-AF65-F5344CB8AC3E}">
+        <p14:creationId xmlns:p14="http://schemas.microsoft.com/office/powerpoint/2010/main" val="1024086991"/>
+      </p:ext>
+    </p:extLst>
+  </p:cSld>
+  <p:clrMapOvr>
+    <a:masterClrMapping/>
+  </p:clrMapOvr>
+</p:notes>
+</file>
+
+<file path=ppt/notesSlides/notesSlide20.xml><?xml version="1.0" encoding="utf-8"?>
+<p:notes xmlns:a="http://schemas.openxmlformats.org/drawingml/2006/main" xmlns:r="http://schemas.openxmlformats.org/officeDocument/2006/relationships" xmlns:p="http://schemas.openxmlformats.org/presentationml/2006/main">
+  <p:cSld>
+    <p:spTree>
+      <p:nvGrpSpPr>
+        <p:cNvPr id="1" name=""/>
+        <p:cNvGrpSpPr/>
+        <p:nvPr/>
+      </p:nvGrpSpPr>
+      <p:grpSpPr>
+        <a:xfrm>
+          <a:off x="0" y="0"/>
+          <a:ext cx="0" cy="0"/>
+          <a:chOff x="0" y="0"/>
+          <a:chExt cx="0" cy="0"/>
+        </a:xfrm>
+      </p:grpSpPr>
+      <p:sp>
+        <p:nvSpPr>
+          <p:cNvPr id="2" name="Slide Image Placeholder 1"/>
+          <p:cNvSpPr>
+            <a:spLocks noGrp="1" noRot="1" noChangeAspect="1"/>
+          </p:cNvSpPr>
+          <p:nvPr>
+            <p:ph type="sldImg"/>
+          </p:nvPr>
+        </p:nvSpPr>
+        <p:spPr/>
+      </p:sp>
+      <p:sp>
+        <p:nvSpPr>
+          <p:cNvPr id="3" name="Notes Placeholder 2"/>
+          <p:cNvSpPr>
+            <a:spLocks noGrp="1"/>
+          </p:cNvSpPr>
+          <p:nvPr>
+            <p:ph type="body" idx="1"/>
+          </p:nvPr>
+        </p:nvSpPr>
+        <p:spPr/>
+        <p:txBody>
+          <a:bodyPr/>
+          <a:lstStyle/>
+          <a:p>
+            <a:r>
+              <a:rPr lang="en-US" dirty="0"/>
+              <a:t/>
+            </a:r>
+            <a:endParaRPr lang="en-US" dirty="0"/>
+          </a:p>
+        </p:txBody>
+      </p:sp>
+      <p:sp>
+        <p:nvSpPr>
+          <p:cNvPr id="4" name="Slide Number Placeholder 3"/>
+          <p:cNvSpPr>
+            <a:spLocks noGrp="1"/>
+          </p:cNvSpPr>
+          <p:nvPr>
+            <p:ph type="sldNum" sz="quarter" idx="10"/>
+          </p:nvPr>
+        </p:nvSpPr>
+        <p:spPr/>
+        <p:txBody>
+          <a:bodyPr/>
+          <a:lstStyle/>
+          <a:p>
+            <a:fld id="{F7021451-1387-4CA6-816F-3879F97B5CBC}" type="slidenum">
+              <a:rPr lang="en-US"/>
+              <a:t>20</a:t>
             </a:fld>
             <a:endParaRPr lang="en-US"/>
           </a:p>
@@ -3111,7 +3291,7 @@
                   <a:srgbClr val="C9CFDA"/>
                 </a:solidFill>
               </a:rPr>
-              <a:t>Regime Jurídico da Cibersegurança (NIS2) e ISO/IEC 27001: criação da conta, navegação, uso diário e guia por referencial</a:t>
+              <a:t>Regime Jurídico da Cibersegurança (NIS2), ISO/IEC 27001 e ISO/IEC 42001: criação da conta, navegação, uso diário e guia por referencial</a:t>
             </a:r>
             <a:endParaRPr lang="en-US" sz="1800" dirty="0"/>
           </a:p>
@@ -3147,7 +3327,7 @@
                   <a:srgbClr val="CFA04A"/>
                 </a:solidFill>
               </a:rPr>
-              <a:t>app.ankoraone.com  ·  outubro de 2026</a:t>
+              <a:t>app.ankoraone.com  ·  versão 1.2  ·  outubro de 2026</a:t>
             </a:r>
             <a:endParaRPr lang="en-US" sz="1200" dirty="0"/>
           </a:p>
@@ -4015,7 +4195,7 @@
                   <a:schemeClr val="tx1"/>
                 </a:solidFill>
               </a:rPr>
-              <a:t>Avaliar a maturidade de 0 a 5 e transformar lacunas em tarefas</a:t>
+              <a:t>Carregue o que já tem: a plataforma propõe onde pertence</a:t>
             </a:r>
             <a:endParaRPr lang="en-US" sz="3200" dirty="0"/>
           </a:p>
@@ -4023,26 +4203,62 @@
       </p:sp>
       <p:sp>
         <p:nvSpPr>
-          <p:cNvPr id="3" name="card-51"/>
+          <p:cNvPr id="3" name="Text 1"/>
+          <p:cNvSpPr txBox="1"/>
+          <p:nvPr/>
+        </p:nvSpPr>
+        <p:spPr>
+          <a:xfrm>
+            <a:off x="548640" y="1234440"/>
+            <a:ext cx="10972800" cy="411480"/>
+          </a:xfrm>
+          <a:prstGeom prst="rect">
+            <a:avLst/>
+          </a:prstGeom>
+          <a:noFill/>
+          <a:ln/>
+        </p:spPr>
+        <p:txBody>
+          <a:bodyPr wrap="square" lIns="0" tIns="0" rIns="0" bIns="0" rtlCol="0" anchor="t"/>
+          <a:lstStyle/>
+          <a:p>
+            <a:pPr indent="0" marL="0">
+              <a:buNone/>
+            </a:pPr>
+            <a:r>
+              <a:rPr lang="en-US" sz="1500" dirty="0">
+                <a:solidFill>
+                  <a:srgbClr val="5B6474"/>
+                </a:solidFill>
+              </a:rPr>
+              <a:t>Governar › Repositório documental: todos os ficheiros do cliente nas mesmas 13 pastas, no repositório escolhido (plataforma, Google Drive, OneDrive ou NAS).</a:t>
+            </a:r>
+            <a:endParaRPr lang="en-US" sz="1500" dirty="0"/>
+          </a:p>
+        </p:txBody>
+      </p:sp>
+      <p:sp>
+        <p:nvSpPr>
+          <p:cNvPr id="4" name="card-51"/>
           <p:cNvSpPr/>
           <p:nvPr/>
         </p:nvSpPr>
         <p:spPr>
           <a:xfrm>
-            <a:off x="548640" y="1508760"/>
-            <a:ext cx="1737360" cy="1417320"/>
+            <a:off x="548640" y="1874520"/>
+            <a:ext cx="2606040" cy="2423160"/>
           </a:xfrm>
           <a:prstGeom prst="roundRect">
             <a:avLst>
-              <a:gd name="adj" fmla="val 7742"/>
+              <a:gd name="adj" fmla="val 4528"/>
             </a:avLst>
           </a:prstGeom>
           <a:solidFill>
-            <a:srgbClr val="E9EDF2"/>
+            <a:srgbClr val="F3F5F8"/>
           </a:solidFill>
           <a:ln w="12700">
             <a:solidFill>
-              <a:srgbClr val="E9EDF2"/>
+              <a:srgbClr val="F3F5F8"/>
             </a:solidFill>
             <a:prstDash val="solid"/>
           </a:ln>
@@ -4050,170 +4266,120 @@
       </p:sp>
       <p:sp>
         <p:nvSpPr>
-          <p:cNvPr id="4" name="Text 2"/>
-          <p:cNvSpPr txBox="1"/>
-          <p:nvPr/>
-        </p:nvSpPr>
-        <p:spPr>
-          <a:xfrm>
-            <a:off x="548640" y="1600200"/>
-            <a:ext cx="1737360" cy="685800"/>
-          </a:xfrm>
-          <a:prstGeom prst="rect">
-            <a:avLst/>
-          </a:prstGeom>
-          <a:noFill/>
-          <a:ln/>
-        </p:spPr>
-        <p:txBody>
-          <a:bodyPr wrap="square" lIns="0" tIns="0" rIns="0" bIns="0" rtlCol="0" anchor="t"/>
-          <a:lstStyle/>
-          <a:p>
-            <a:pPr algn="ctr" indent="0" marL="0">
-              <a:buNone/>
-            </a:pPr>
-            <a:r>
-              <a:rPr lang="en-US" sz="3600" b="1" dirty="0">
-                <a:solidFill>
-                  <a:srgbClr val="070A13"/>
-                </a:solidFill>
-              </a:rPr>
-              <a:t>0</a:t>
-            </a:r>
-            <a:endParaRPr lang="en-US" sz="3600" dirty="0"/>
-          </a:p>
-        </p:txBody>
-      </p:sp>
-      <p:sp>
-        <p:nvSpPr>
-          <p:cNvPr id="5" name="Text 3"/>
-          <p:cNvSpPr txBox="1"/>
-          <p:nvPr/>
-        </p:nvSpPr>
-        <p:spPr>
-          <a:xfrm>
-            <a:off x="640080" y="2331720"/>
-            <a:ext cx="1554480" cy="502920"/>
-          </a:xfrm>
-          <a:prstGeom prst="rect">
-            <a:avLst/>
-          </a:prstGeom>
-          <a:noFill/>
-          <a:ln/>
-        </p:spPr>
-        <p:txBody>
-          <a:bodyPr wrap="square" lIns="0" tIns="0" rIns="0" bIns="0" rtlCol="0" anchor="t"/>
-          <a:lstStyle/>
-          <a:p>
-            <a:pPr algn="ctr" indent="0" marL="0">
-              <a:buNone/>
-            </a:pPr>
-            <a:r>
-              <a:rPr lang="en-US" sz="1300" b="1" dirty="0">
-                <a:solidFill>
-                  <a:srgbClr val="111827"/>
-                </a:solidFill>
-              </a:rPr>
-              <a:t>Inexistente</a:t>
-            </a:r>
-            <a:endParaRPr lang="en-US" sz="1300" dirty="0"/>
-          </a:p>
-        </p:txBody>
-      </p:sp>
-      <p:sp>
-        <p:nvSpPr>
-          <p:cNvPr id="6" name="card-52"/>
+          <p:cNvPr id="5" name="icon-bg-52"/>
           <p:cNvSpPr/>
           <p:nvPr/>
         </p:nvSpPr>
         <p:spPr>
           <a:xfrm>
-            <a:off x="2404872" y="1508760"/>
-            <a:ext cx="1737360" cy="1417320"/>
-          </a:xfrm>
-          <a:prstGeom prst="roundRect">
-            <a:avLst>
-              <a:gd name="adj" fmla="val 7742"/>
-            </a:avLst>
+            <a:off x="777240" y="2103120"/>
+            <a:ext cx="640080" cy="640080"/>
+          </a:xfrm>
+          <a:prstGeom prst="ellipse">
+            <a:avLst/>
           </a:prstGeom>
           <a:solidFill>
-            <a:srgbClr val="DCE2EA"/>
+            <a:srgbClr val="070A13"/>
           </a:solidFill>
           <a:ln w="12700">
             <a:solidFill>
-              <a:srgbClr val="DCE2EA"/>
+              <a:srgbClr val="070A13"/>
             </a:solidFill>
             <a:prstDash val="solid"/>
           </a:ln>
         </p:spPr>
       </p:sp>
-      <p:sp>
-        <p:nvSpPr>
-          <p:cNvPr id="7" name="Text 5"/>
-          <p:cNvSpPr txBox="1"/>
-          <p:nvPr/>
-        </p:nvSpPr>
-        <p:spPr>
-          <a:xfrm>
-            <a:off x="2404872" y="1600200"/>
-            <a:ext cx="1737360" cy="685800"/>
-          </a:xfrm>
-          <a:prstGeom prst="rect">
-            <a:avLst/>
-          </a:prstGeom>
-          <a:noFill/>
-          <a:ln/>
-        </p:spPr>
-        <p:txBody>
-          <a:bodyPr wrap="square" lIns="0" tIns="0" rIns="0" bIns="0" rtlCol="0" anchor="t"/>
-          <a:lstStyle/>
-          <a:p>
-            <a:pPr algn="ctr" indent="0" marL="0">
-              <a:buNone/>
-            </a:pPr>
-            <a:r>
-              <a:rPr lang="en-US" sz="3600" b="1" dirty="0">
-                <a:solidFill>
-                  <a:srgbClr val="070A13"/>
-                </a:solidFill>
-              </a:rPr>
-              <a:t>1</a:t>
-            </a:r>
-            <a:endParaRPr lang="en-US" sz="3600" dirty="0"/>
-          </a:p>
-        </p:txBody>
-      </p:sp>
-      <p:sp>
-        <p:nvSpPr>
-          <p:cNvPr id="8" name="Text 6"/>
-          <p:cNvSpPr txBox="1"/>
-          <p:nvPr/>
-        </p:nvSpPr>
-        <p:spPr>
-          <a:xfrm>
-            <a:off x="2496312" y="2331720"/>
-            <a:ext cx="1554480" cy="502920"/>
-          </a:xfrm>
-          <a:prstGeom prst="rect">
-            <a:avLst/>
-          </a:prstGeom>
-          <a:noFill/>
-          <a:ln/>
-        </p:spPr>
-        <p:txBody>
-          <a:bodyPr wrap="square" lIns="0" tIns="0" rIns="0" bIns="0" rtlCol="0" anchor="t"/>
-          <a:lstStyle/>
-          <a:p>
-            <a:pPr algn="ctr" indent="0" marL="0">
-              <a:buNone/>
-            </a:pPr>
-            <a:r>
-              <a:rPr lang="en-US" sz="1300" b="1" dirty="0">
+      <p:pic>
+        <p:nvPicPr>
+          <p:cNvPr id="6" name="icon-52" descr="preencoded.png">    </p:cNvPr>
+          <p:cNvPicPr>
+            <a:picLocks noChangeAspect="1"/>
+          </p:cNvPicPr>
+          <p:nvPr/>
+        </p:nvPicPr>
+        <p:blipFill>
+          <a:blip r:embed="rId1"/>
+          <a:stretch>
+            <a:fillRect/>
+          </a:stretch>
+        </p:blipFill>
+        <p:spPr>
+          <a:xfrm>
+            <a:off x="918058" y="2243938"/>
+            <a:ext cx="358445" cy="358445"/>
+          </a:xfrm>
+          <a:prstGeom prst="rect">
+            <a:avLst/>
+          </a:prstGeom>
+        </p:spPr>
+      </p:pic>
+      <p:sp>
+        <p:nvSpPr>
+          <p:cNvPr id="7" name="Text 4"/>
+          <p:cNvSpPr txBox="1"/>
+          <p:nvPr/>
+        </p:nvSpPr>
+        <p:spPr>
+          <a:xfrm>
+            <a:off x="777240" y="2880360"/>
+            <a:ext cx="2194560" cy="411480"/>
+          </a:xfrm>
+          <a:prstGeom prst="rect">
+            <a:avLst/>
+          </a:prstGeom>
+          <a:noFill/>
+          <a:ln/>
+        </p:spPr>
+        <p:txBody>
+          <a:bodyPr wrap="square" lIns="0" tIns="0" rIns="0" bIns="0" rtlCol="0" anchor="t"/>
+          <a:lstStyle/>
+          <a:p>
+            <a:pPr indent="0" marL="0">
+              <a:buNone/>
+            </a:pPr>
+            <a:r>
+              <a:rPr lang="en-US" sz="1700" b="1" dirty="0">
                 <a:solidFill>
                   <a:srgbClr val="111827"/>
                 </a:solidFill>
               </a:rPr>
-              <a:t>Inicial</a:t>
+              <a:t>Carregar</a:t>
+            </a:r>
+            <a:endParaRPr lang="en-US" sz="1700" dirty="0"/>
+          </a:p>
+        </p:txBody>
+      </p:sp>
+      <p:sp>
+        <p:nvSpPr>
+          <p:cNvPr id="8" name="Text 5"/>
+          <p:cNvSpPr txBox="1"/>
+          <p:nvPr/>
+        </p:nvSpPr>
+        <p:spPr>
+          <a:xfrm>
+            <a:off x="777240" y="3337560"/>
+            <a:ext cx="2194560" cy="1188720"/>
+          </a:xfrm>
+          <a:prstGeom prst="rect">
+            <a:avLst/>
+          </a:prstGeom>
+          <a:noFill/>
+          <a:ln/>
+        </p:spPr>
+        <p:txBody>
+          <a:bodyPr wrap="square" lIns="0" tIns="0" rIns="0" bIns="0" rtlCol="0" anchor="t"/>
+          <a:lstStyle/>
+          <a:p>
+            <a:pPr indent="0" marL="0">
+              <a:buNone/>
+            </a:pPr>
+            <a:r>
+              <a:rPr lang="en-US" sz="1300" dirty="0">
+                <a:solidFill>
+                  <a:srgbClr val="5B6474"/>
+                </a:solidFill>
+              </a:rPr>
+              <a:t>Na área Por classificar, ou diretamente na pasta «00 Por classificar» e Procurar na pasta</a:t>
             </a:r>
             <a:endParaRPr lang="en-US" sz="1300" dirty="0"/>
           </a:p>
@@ -4221,217 +4387,17 @@
       </p:sp>
       <p:sp>
         <p:nvSpPr>
-          <p:cNvPr id="9" name="card-53"/>
+          <p:cNvPr id="9" name="seta-rep-0"/>
           <p:cNvSpPr/>
           <p:nvPr/>
         </p:nvSpPr>
         <p:spPr>
           <a:xfrm>
-            <a:off x="4261104" y="1508760"/>
-            <a:ext cx="1737360" cy="1417320"/>
-          </a:xfrm>
-          <a:prstGeom prst="roundRect">
-            <a:avLst>
-              <a:gd name="adj" fmla="val 7742"/>
-            </a:avLst>
-          </a:prstGeom>
-          <a:solidFill>
-            <a:srgbClr val="C6CFDB"/>
-          </a:solidFill>
-          <a:ln w="12700">
-            <a:solidFill>
-              <a:srgbClr val="C6CFDB"/>
-            </a:solidFill>
-            <a:prstDash val="solid"/>
-          </a:ln>
-        </p:spPr>
-      </p:sp>
-      <p:sp>
-        <p:nvSpPr>
-          <p:cNvPr id="10" name="Text 8"/>
-          <p:cNvSpPr txBox="1"/>
-          <p:nvPr/>
-        </p:nvSpPr>
-        <p:spPr>
-          <a:xfrm>
-            <a:off x="4261104" y="1600200"/>
-            <a:ext cx="1737360" cy="685800"/>
-          </a:xfrm>
-          <a:prstGeom prst="rect">
-            <a:avLst/>
-          </a:prstGeom>
-          <a:noFill/>
-          <a:ln/>
-        </p:spPr>
-        <p:txBody>
-          <a:bodyPr wrap="square" lIns="0" tIns="0" rIns="0" bIns="0" rtlCol="0" anchor="t"/>
-          <a:lstStyle/>
-          <a:p>
-            <a:pPr algn="ctr" indent="0" marL="0">
-              <a:buNone/>
-            </a:pPr>
-            <a:r>
-              <a:rPr lang="en-US" sz="3600" b="1" dirty="0">
-                <a:solidFill>
-                  <a:srgbClr val="070A13"/>
-                </a:solidFill>
-              </a:rPr>
-              <a:t>2</a:t>
-            </a:r>
-            <a:endParaRPr lang="en-US" sz="3600" dirty="0"/>
-          </a:p>
-        </p:txBody>
-      </p:sp>
-      <p:sp>
-        <p:nvSpPr>
-          <p:cNvPr id="11" name="Text 9"/>
-          <p:cNvSpPr txBox="1"/>
-          <p:nvPr/>
-        </p:nvSpPr>
-        <p:spPr>
-          <a:xfrm>
-            <a:off x="4352544" y="2331720"/>
-            <a:ext cx="1554480" cy="502920"/>
-          </a:xfrm>
-          <a:prstGeom prst="rect">
-            <a:avLst/>
-          </a:prstGeom>
-          <a:noFill/>
-          <a:ln/>
-        </p:spPr>
-        <p:txBody>
-          <a:bodyPr wrap="square" lIns="0" tIns="0" rIns="0" bIns="0" rtlCol="0" anchor="t"/>
-          <a:lstStyle/>
-          <a:p>
-            <a:pPr algn="ctr" indent="0" marL="0">
-              <a:buNone/>
-            </a:pPr>
-            <a:r>
-              <a:rPr lang="en-US" sz="1300" b="1" dirty="0">
-                <a:solidFill>
-                  <a:srgbClr val="111827"/>
-                </a:solidFill>
-              </a:rPr>
-              <a:t>Em desenvolvimento</a:t>
-            </a:r>
-            <a:endParaRPr lang="en-US" sz="1300" dirty="0"/>
-          </a:p>
-        </p:txBody>
-      </p:sp>
-      <p:sp>
-        <p:nvSpPr>
-          <p:cNvPr id="12" name="card-54"/>
-          <p:cNvSpPr/>
-          <p:nvPr/>
-        </p:nvSpPr>
-        <p:spPr>
-          <a:xfrm>
-            <a:off x="6117336" y="1508760"/>
-            <a:ext cx="1737360" cy="1417320"/>
-          </a:xfrm>
-          <a:prstGeom prst="roundRect">
-            <a:avLst>
-              <a:gd name="adj" fmla="val 7742"/>
-            </a:avLst>
-          </a:prstGeom>
-          <a:solidFill>
-            <a:srgbClr val="9AA7BA"/>
-          </a:solidFill>
-          <a:ln w="12700">
-            <a:solidFill>
-              <a:srgbClr val="9AA7BA"/>
-            </a:solidFill>
-            <a:prstDash val="solid"/>
-          </a:ln>
-        </p:spPr>
-      </p:sp>
-      <p:sp>
-        <p:nvSpPr>
-          <p:cNvPr id="13" name="Text 11"/>
-          <p:cNvSpPr txBox="1"/>
-          <p:nvPr/>
-        </p:nvSpPr>
-        <p:spPr>
-          <a:xfrm>
-            <a:off x="6117336" y="1600200"/>
-            <a:ext cx="1737360" cy="685800"/>
-          </a:xfrm>
-          <a:prstGeom prst="rect">
-            <a:avLst/>
-          </a:prstGeom>
-          <a:noFill/>
-          <a:ln/>
-        </p:spPr>
-        <p:txBody>
-          <a:bodyPr wrap="square" lIns="0" tIns="0" rIns="0" bIns="0" rtlCol="0" anchor="t"/>
-          <a:lstStyle/>
-          <a:p>
-            <a:pPr algn="ctr" indent="0" marL="0">
-              <a:buNone/>
-            </a:pPr>
-            <a:r>
-              <a:rPr lang="en-US" sz="3600" b="1" dirty="0">
-                <a:solidFill>
-                  <a:srgbClr val="070A13"/>
-                </a:solidFill>
-              </a:rPr>
-              <a:t>3</a:t>
-            </a:r>
-            <a:endParaRPr lang="en-US" sz="3600" dirty="0"/>
-          </a:p>
-        </p:txBody>
-      </p:sp>
-      <p:sp>
-        <p:nvSpPr>
-          <p:cNvPr id="14" name="Text 12"/>
-          <p:cNvSpPr txBox="1"/>
-          <p:nvPr/>
-        </p:nvSpPr>
-        <p:spPr>
-          <a:xfrm>
-            <a:off x="6208776" y="2331720"/>
-            <a:ext cx="1554480" cy="502920"/>
-          </a:xfrm>
-          <a:prstGeom prst="rect">
-            <a:avLst/>
-          </a:prstGeom>
-          <a:noFill/>
-          <a:ln/>
-        </p:spPr>
-        <p:txBody>
-          <a:bodyPr wrap="square" lIns="0" tIns="0" rIns="0" bIns="0" rtlCol="0" anchor="t"/>
-          <a:lstStyle/>
-          <a:p>
-            <a:pPr algn="ctr" indent="0" marL="0">
-              <a:buNone/>
-            </a:pPr>
-            <a:r>
-              <a:rPr lang="en-US" sz="1300" b="1" dirty="0">
-                <a:solidFill>
-                  <a:srgbClr val="111827"/>
-                </a:solidFill>
-              </a:rPr>
-              <a:t>Definido</a:t>
-            </a:r>
-            <a:endParaRPr lang="en-US" sz="1300" dirty="0"/>
-          </a:p>
-        </p:txBody>
-      </p:sp>
-      <p:sp>
-        <p:nvSpPr>
-          <p:cNvPr id="15" name="card-55"/>
-          <p:cNvSpPr/>
-          <p:nvPr/>
-        </p:nvSpPr>
-        <p:spPr>
-          <a:xfrm>
-            <a:off x="7973568" y="1508760"/>
-            <a:ext cx="1737360" cy="1417320"/>
-          </a:xfrm>
-          <a:prstGeom prst="roundRect">
-            <a:avLst>
-              <a:gd name="adj" fmla="val 7742"/>
-            </a:avLst>
+            <a:off x="3182112" y="3108960"/>
+            <a:ext cx="128016" cy="320040"/>
+          </a:xfrm>
+          <a:prstGeom prst="chevron">
+            <a:avLst/>
           </a:prstGeom>
           <a:solidFill>
             <a:srgbClr val="CFA04A"/>
@@ -4446,91 +4412,44 @@
       </p:sp>
       <p:sp>
         <p:nvSpPr>
-          <p:cNvPr id="16" name="Text 14"/>
-          <p:cNvSpPr txBox="1"/>
-          <p:nvPr/>
-        </p:nvSpPr>
-        <p:spPr>
-          <a:xfrm>
-            <a:off x="7973568" y="1600200"/>
-            <a:ext cx="1737360" cy="685800"/>
-          </a:xfrm>
-          <a:prstGeom prst="rect">
-            <a:avLst/>
-          </a:prstGeom>
-          <a:noFill/>
-          <a:ln/>
-        </p:spPr>
-        <p:txBody>
-          <a:bodyPr wrap="square" lIns="0" tIns="0" rIns="0" bIns="0" rtlCol="0" anchor="t"/>
-          <a:lstStyle/>
-          <a:p>
-            <a:pPr algn="ctr" indent="0" marL="0">
-              <a:buNone/>
-            </a:pPr>
-            <a:r>
-              <a:rPr lang="en-US" sz="3600" b="1" dirty="0">
-                <a:solidFill>
-                  <a:srgbClr val="070A13"/>
-                </a:solidFill>
-              </a:rPr>
-              <a:t>4</a:t>
-            </a:r>
-            <a:endParaRPr lang="en-US" sz="3600" dirty="0"/>
-          </a:p>
-        </p:txBody>
-      </p:sp>
-      <p:sp>
-        <p:nvSpPr>
-          <p:cNvPr id="17" name="Text 15"/>
-          <p:cNvSpPr txBox="1"/>
-          <p:nvPr/>
-        </p:nvSpPr>
-        <p:spPr>
-          <a:xfrm>
-            <a:off x="8065008" y="2331720"/>
-            <a:ext cx="1554480" cy="502920"/>
-          </a:xfrm>
-          <a:prstGeom prst="rect">
-            <a:avLst/>
-          </a:prstGeom>
-          <a:noFill/>
-          <a:ln/>
-        </p:spPr>
-        <p:txBody>
-          <a:bodyPr wrap="square" lIns="0" tIns="0" rIns="0" bIns="0" rtlCol="0" anchor="t"/>
-          <a:lstStyle/>
-          <a:p>
-            <a:pPr algn="ctr" indent="0" marL="0">
-              <a:buNone/>
-            </a:pPr>
-            <a:r>
-              <a:rPr lang="en-US" sz="1300" b="1" dirty="0">
-                <a:solidFill>
-                  <a:srgbClr val="111827"/>
-                </a:solidFill>
-              </a:rPr>
-              <a:t>Gerido</a:t>
-            </a:r>
-            <a:endParaRPr lang="en-US" sz="1300" dirty="0"/>
-          </a:p>
-        </p:txBody>
-      </p:sp>
-      <p:sp>
-        <p:nvSpPr>
-          <p:cNvPr id="18" name="card-56"/>
+          <p:cNvPr id="10" name="card-53"/>
           <p:cNvSpPr/>
           <p:nvPr/>
         </p:nvSpPr>
         <p:spPr>
           <a:xfrm>
-            <a:off x="9829800" y="1508760"/>
-            <a:ext cx="1737360" cy="1417320"/>
+            <a:off x="3337560" y="1874520"/>
+            <a:ext cx="2606040" cy="2423160"/>
           </a:xfrm>
           <a:prstGeom prst="roundRect">
             <a:avLst>
-              <a:gd name="adj" fmla="val 7742"/>
+              <a:gd name="adj" fmla="val 4528"/>
             </a:avLst>
+          </a:prstGeom>
+          <a:solidFill>
+            <a:srgbClr val="F3F5F8"/>
+          </a:solidFill>
+          <a:ln w="12700">
+            <a:solidFill>
+              <a:srgbClr val="F3F5F8"/>
+            </a:solidFill>
+            <a:prstDash val="solid"/>
+          </a:ln>
+        </p:spPr>
+      </p:sp>
+      <p:sp>
+        <p:nvSpPr>
+          <p:cNvPr id="11" name="icon-bg-54"/>
+          <p:cNvSpPr/>
+          <p:nvPr/>
+        </p:nvSpPr>
+        <p:spPr>
+          <a:xfrm>
+            <a:off x="3566160" y="2103120"/>
+            <a:ext cx="640080" cy="640080"/>
+          </a:xfrm>
+          <a:prstGeom prst="ellipse">
+            <a:avLst/>
           </a:prstGeom>
           <a:solidFill>
             <a:srgbClr val="070A13"/>
@@ -4543,73 +4462,270 @@
           </a:ln>
         </p:spPr>
       </p:sp>
-      <p:sp>
-        <p:nvSpPr>
-          <p:cNvPr id="19" name="Text 17"/>
-          <p:cNvSpPr txBox="1"/>
-          <p:nvPr/>
-        </p:nvSpPr>
-        <p:spPr>
-          <a:xfrm>
-            <a:off x="9829800" y="1600200"/>
-            <a:ext cx="1737360" cy="685800"/>
-          </a:xfrm>
-          <a:prstGeom prst="rect">
-            <a:avLst/>
-          </a:prstGeom>
-          <a:noFill/>
-          <a:ln/>
-        </p:spPr>
-        <p:txBody>
-          <a:bodyPr wrap="square" lIns="0" tIns="0" rIns="0" bIns="0" rtlCol="0" anchor="t"/>
-          <a:lstStyle/>
-          <a:p>
-            <a:pPr algn="ctr" indent="0" marL="0">
-              <a:buNone/>
-            </a:pPr>
-            <a:r>
-              <a:rPr lang="en-US" sz="3600" b="1" dirty="0">
-                <a:solidFill>
-                  <a:srgbClr val="CFA04A"/>
-                </a:solidFill>
-              </a:rPr>
-              <a:t>5</a:t>
-            </a:r>
-            <a:endParaRPr lang="en-US" sz="3600" dirty="0"/>
-          </a:p>
-        </p:txBody>
-      </p:sp>
-      <p:sp>
-        <p:nvSpPr>
-          <p:cNvPr id="20" name="Text 18"/>
-          <p:cNvSpPr txBox="1"/>
-          <p:nvPr/>
-        </p:nvSpPr>
-        <p:spPr>
-          <a:xfrm>
-            <a:off x="9921240" y="2331720"/>
-            <a:ext cx="1554480" cy="502920"/>
-          </a:xfrm>
-          <a:prstGeom prst="rect">
-            <a:avLst/>
-          </a:prstGeom>
-          <a:noFill/>
-          <a:ln/>
-        </p:spPr>
-        <p:txBody>
-          <a:bodyPr wrap="square" lIns="0" tIns="0" rIns="0" bIns="0" rtlCol="0" anchor="t"/>
-          <a:lstStyle/>
-          <a:p>
-            <a:pPr algn="ctr" indent="0" marL="0">
-              <a:buNone/>
-            </a:pPr>
-            <a:r>
-              <a:rPr lang="en-US" sz="1300" b="1" dirty="0">
+      <p:pic>
+        <p:nvPicPr>
+          <p:cNvPr id="12" name="icon-54" descr="preencoded.png">    </p:cNvPr>
+          <p:cNvPicPr>
+            <a:picLocks noChangeAspect="1"/>
+          </p:cNvPicPr>
+          <p:nvPr/>
+        </p:nvPicPr>
+        <p:blipFill>
+          <a:blip r:embed="rId2"/>
+          <a:stretch>
+            <a:fillRect/>
+          </a:stretch>
+        </p:blipFill>
+        <p:spPr>
+          <a:xfrm>
+            <a:off x="3706978" y="2243938"/>
+            <a:ext cx="358445" cy="358445"/>
+          </a:xfrm>
+          <a:prstGeom prst="rect">
+            <a:avLst/>
+          </a:prstGeom>
+        </p:spPr>
+      </p:pic>
+      <p:sp>
+        <p:nvSpPr>
+          <p:cNvPr id="13" name="Text 9"/>
+          <p:cNvSpPr txBox="1"/>
+          <p:nvPr/>
+        </p:nvSpPr>
+        <p:spPr>
+          <a:xfrm>
+            <a:off x="3566160" y="2880360"/>
+            <a:ext cx="2194560" cy="411480"/>
+          </a:xfrm>
+          <a:prstGeom prst="rect">
+            <a:avLst/>
+          </a:prstGeom>
+          <a:noFill/>
+          <a:ln/>
+        </p:spPr>
+        <p:txBody>
+          <a:bodyPr wrap="square" lIns="0" tIns="0" rIns="0" bIns="0" rtlCol="0" anchor="t"/>
+          <a:lstStyle/>
+          <a:p>
+            <a:pPr indent="0" marL="0">
+              <a:buNone/>
+            </a:pPr>
+            <a:r>
+              <a:rPr lang="en-US" sz="1700" b="1" dirty="0">
+                <a:solidFill>
+                  <a:srgbClr val="111827"/>
+                </a:solidFill>
+              </a:rPr>
+              <a:t>Pré-selecionar</a:t>
+            </a:r>
+            <a:endParaRPr lang="en-US" sz="1700" dirty="0"/>
+          </a:p>
+        </p:txBody>
+      </p:sp>
+      <p:sp>
+        <p:nvSpPr>
+          <p:cNvPr id="14" name="Text 10"/>
+          <p:cNvSpPr txBox="1"/>
+          <p:nvPr/>
+        </p:nvSpPr>
+        <p:spPr>
+          <a:xfrm>
+            <a:off x="3566160" y="3337560"/>
+            <a:ext cx="2194560" cy="1188720"/>
+          </a:xfrm>
+          <a:prstGeom prst="rect">
+            <a:avLst/>
+          </a:prstGeom>
+          <a:noFill/>
+          <a:ln/>
+        </p:spPr>
+        <p:txBody>
+          <a:bodyPr wrap="square" lIns="0" tIns="0" rIns="0" bIns="0" rtlCol="0" anchor="t"/>
+          <a:lstStyle/>
+          <a:p>
+            <a:pPr indent="0" marL="0">
+              <a:buNone/>
+            </a:pPr>
+            <a:r>
+              <a:rPr lang="en-US" sz="1300" dirty="0">
+                <a:solidFill>
+                  <a:srgbClr val="5B6474"/>
+                </a:solidFill>
+              </a:rPr>
+              <a:t>Sem IA: medidas, tarefas e controlos ISO com texto parecido</a:t>
+            </a:r>
+            <a:endParaRPr lang="en-US" sz="1300" dirty="0"/>
+          </a:p>
+        </p:txBody>
+      </p:sp>
+      <p:sp>
+        <p:nvSpPr>
+          <p:cNvPr id="15" name="seta-rep-1"/>
+          <p:cNvSpPr/>
+          <p:nvPr/>
+        </p:nvSpPr>
+        <p:spPr>
+          <a:xfrm>
+            <a:off x="5971032" y="3108960"/>
+            <a:ext cx="128016" cy="320040"/>
+          </a:xfrm>
+          <a:prstGeom prst="chevron">
+            <a:avLst/>
+          </a:prstGeom>
+          <a:solidFill>
+            <a:srgbClr val="CFA04A"/>
+          </a:solidFill>
+          <a:ln w="12700">
+            <a:solidFill>
+              <a:srgbClr val="CFA04A"/>
+            </a:solidFill>
+            <a:prstDash val="solid"/>
+          </a:ln>
+        </p:spPr>
+      </p:sp>
+      <p:sp>
+        <p:nvSpPr>
+          <p:cNvPr id="16" name="card-55"/>
+          <p:cNvSpPr/>
+          <p:nvPr/>
+        </p:nvSpPr>
+        <p:spPr>
+          <a:xfrm>
+            <a:off x="6126480" y="1874520"/>
+            <a:ext cx="2606040" cy="2423160"/>
+          </a:xfrm>
+          <a:prstGeom prst="roundRect">
+            <a:avLst>
+              <a:gd name="adj" fmla="val 4528"/>
+            </a:avLst>
+          </a:prstGeom>
+          <a:solidFill>
+            <a:srgbClr val="070A13"/>
+          </a:solidFill>
+          <a:ln w="12700">
+            <a:solidFill>
+              <a:srgbClr val="070A13"/>
+            </a:solidFill>
+            <a:prstDash val="solid"/>
+          </a:ln>
+        </p:spPr>
+      </p:sp>
+      <p:sp>
+        <p:nvSpPr>
+          <p:cNvPr id="17" name="icon-bg-56"/>
+          <p:cNvSpPr/>
+          <p:nvPr/>
+        </p:nvSpPr>
+        <p:spPr>
+          <a:xfrm>
+            <a:off x="6355080" y="2103120"/>
+            <a:ext cx="640080" cy="640080"/>
+          </a:xfrm>
+          <a:prstGeom prst="ellipse">
+            <a:avLst/>
+          </a:prstGeom>
+          <a:solidFill>
+            <a:srgbClr val="CFA04A"/>
+          </a:solidFill>
+          <a:ln w="12700">
+            <a:solidFill>
+              <a:srgbClr val="CFA04A"/>
+            </a:solidFill>
+            <a:prstDash val="solid"/>
+          </a:ln>
+        </p:spPr>
+      </p:sp>
+      <p:pic>
+        <p:nvPicPr>
+          <p:cNvPr id="18" name="icon-56" descr="preencoded.png">    </p:cNvPr>
+          <p:cNvPicPr>
+            <a:picLocks noChangeAspect="1"/>
+          </p:cNvPicPr>
+          <p:nvPr/>
+        </p:nvPicPr>
+        <p:blipFill>
+          <a:blip r:embed="rId3"/>
+          <a:stretch>
+            <a:fillRect/>
+          </a:stretch>
+        </p:blipFill>
+        <p:spPr>
+          <a:xfrm>
+            <a:off x="6495898" y="2243938"/>
+            <a:ext cx="358445" cy="358445"/>
+          </a:xfrm>
+          <a:prstGeom prst="rect">
+            <a:avLst/>
+          </a:prstGeom>
+        </p:spPr>
+      </p:pic>
+      <p:sp>
+        <p:nvSpPr>
+          <p:cNvPr id="19" name="Text 14"/>
+          <p:cNvSpPr txBox="1"/>
+          <p:nvPr/>
+        </p:nvSpPr>
+        <p:spPr>
+          <a:xfrm>
+            <a:off x="6355080" y="2880360"/>
+            <a:ext cx="2194560" cy="411480"/>
+          </a:xfrm>
+          <a:prstGeom prst="rect">
+            <a:avLst/>
+          </a:prstGeom>
+          <a:noFill/>
+          <a:ln/>
+        </p:spPr>
+        <p:txBody>
+          <a:bodyPr wrap="square" lIns="0" tIns="0" rIns="0" bIns="0" rtlCol="0" anchor="t"/>
+          <a:lstStyle/>
+          <a:p>
+            <a:pPr indent="0" marL="0">
+              <a:buNone/>
+            </a:pPr>
+            <a:r>
+              <a:rPr lang="en-US" sz="1700" b="1" dirty="0">
                 <a:solidFill>
                   <a:srgbClr val="FFFFFF"/>
                 </a:solidFill>
               </a:rPr>
-              <a:t>Otimizado</a:t>
+              <a:t>Classificar</a:t>
+            </a:r>
+            <a:endParaRPr lang="en-US" sz="1700" dirty="0"/>
+          </a:p>
+        </p:txBody>
+      </p:sp>
+      <p:sp>
+        <p:nvSpPr>
+          <p:cNvPr id="20" name="Text 15"/>
+          <p:cNvSpPr txBox="1"/>
+          <p:nvPr/>
+        </p:nvSpPr>
+        <p:spPr>
+          <a:xfrm>
+            <a:off x="6355080" y="3337560"/>
+            <a:ext cx="2194560" cy="1188720"/>
+          </a:xfrm>
+          <a:prstGeom prst="rect">
+            <a:avLst/>
+          </a:prstGeom>
+          <a:noFill/>
+          <a:ln/>
+        </p:spPr>
+        <p:txBody>
+          <a:bodyPr wrap="square" lIns="0" tIns="0" rIns="0" bIns="0" rtlCol="0" anchor="t"/>
+          <a:lstStyle/>
+          <a:p>
+            <a:pPr indent="0" marL="0">
+              <a:buNone/>
+            </a:pPr>
+            <a:r>
+              <a:rPr lang="en-US" sz="1300" dirty="0">
+                <a:solidFill>
+                  <a:srgbClr val="E6E9EF"/>
+                </a:solidFill>
+              </a:rPr>
+              <a:t>A IA propõe o tipo e até 8 ligações, cada uma com excerto e confiança; até 25 de cada vez</a:t>
             </a:r>
             <a:endParaRPr lang="en-US" sz="1300" dirty="0"/>
           </a:p>
@@ -4617,39 +4733,28 @@
       </p:sp>
       <p:sp>
         <p:nvSpPr>
-          <p:cNvPr id="21" name="Text 19"/>
-          <p:cNvSpPr txBox="1"/>
-          <p:nvPr/>
-        </p:nvSpPr>
-        <p:spPr>
-          <a:xfrm>
-            <a:off x="7955280" y="3017520"/>
-            <a:ext cx="3657600" cy="320040"/>
-          </a:xfrm>
-          <a:prstGeom prst="rect">
-            <a:avLst/>
-          </a:prstGeom>
-          <a:noFill/>
-          <a:ln/>
-        </p:spPr>
-        <p:txBody>
-          <a:bodyPr wrap="square" lIns="0" tIns="0" rIns="0" bIns="0" rtlCol="0" anchor="t"/>
-          <a:lstStyle/>
-          <a:p>
-            <a:pPr algn="r" indent="0" marL="0">
-              <a:buNone/>
-            </a:pPr>
-            <a:r>
-              <a:rPr lang="en-US" sz="1200" b="1" dirty="0">
-                <a:solidFill>
-                  <a:srgbClr val="8A6620"/>
-                </a:solidFill>
-              </a:rPr>
-              <a:t>Nível-alvo por omissão: 4 (Gerido)</a:t>
-            </a:r>
-            <a:endParaRPr lang="en-US" sz="1200" dirty="0"/>
-          </a:p>
-        </p:txBody>
+          <p:cNvPr id="21" name="seta-rep-2"/>
+          <p:cNvSpPr/>
+          <p:nvPr/>
+        </p:nvSpPr>
+        <p:spPr>
+          <a:xfrm>
+            <a:off x="8759952" y="3108960"/>
+            <a:ext cx="128016" cy="320040"/>
+          </a:xfrm>
+          <a:prstGeom prst="chevron">
+            <a:avLst/>
+          </a:prstGeom>
+          <a:solidFill>
+            <a:srgbClr val="CFA04A"/>
+          </a:solidFill>
+          <a:ln w="12700">
+            <a:solidFill>
+              <a:srgbClr val="CFA04A"/>
+            </a:solidFill>
+            <a:prstDash val="solid"/>
+          </a:ln>
+        </p:spPr>
       </p:sp>
       <p:sp>
         <p:nvSpPr>
@@ -4659,12 +4764,12 @@
         </p:nvSpPr>
         <p:spPr>
           <a:xfrm>
-            <a:off x="548640" y="3657600"/>
-            <a:ext cx="2606040" cy="2103120"/>
+            <a:off x="8915400" y="1874520"/>
+            <a:ext cx="2606040" cy="2423160"/>
           </a:xfrm>
           <a:prstGeom prst="roundRect">
             <a:avLst>
-              <a:gd name="adj" fmla="val 5217"/>
+              <a:gd name="adj" fmla="val 4528"/>
             </a:avLst>
           </a:prstGeom>
           <a:solidFill>
@@ -4680,363 +4785,139 @@
       </p:sp>
       <p:sp>
         <p:nvSpPr>
-          <p:cNvPr id="23" name="Text 21"/>
-          <p:cNvSpPr txBox="1"/>
-          <p:nvPr/>
-        </p:nvSpPr>
-        <p:spPr>
-          <a:xfrm>
-            <a:off x="777240" y="3840480"/>
-            <a:ext cx="2194560" cy="411480"/>
-          </a:xfrm>
-          <a:prstGeom prst="rect">
-            <a:avLst/>
-          </a:prstGeom>
-          <a:noFill/>
-          <a:ln/>
-        </p:spPr>
-        <p:txBody>
-          <a:bodyPr wrap="square" lIns="0" tIns="0" rIns="0" bIns="0" rtlCol="0" anchor="t"/>
-          <a:lstStyle/>
-          <a:p>
-            <a:pPr indent="0" marL="0">
-              <a:buNone/>
-            </a:pPr>
-            <a:r>
-              <a:rPr lang="en-US" sz="1700" b="1" dirty="0">
-                <a:solidFill>
-                  <a:srgbClr val="070A13"/>
-                </a:solidFill>
-              </a:rPr>
-              <a:t>Avaliação</a:t>
-            </a:r>
-            <a:endParaRPr lang="en-US" sz="1700" dirty="0"/>
-          </a:p>
-        </p:txBody>
-      </p:sp>
-      <p:sp>
-        <p:nvSpPr>
-          <p:cNvPr id="24" name="Text 22"/>
-          <p:cNvSpPr txBox="1"/>
-          <p:nvPr/>
-        </p:nvSpPr>
-        <p:spPr>
-          <a:xfrm>
-            <a:off x="777240" y="4343400"/>
-            <a:ext cx="2194560" cy="1280160"/>
-          </a:xfrm>
-          <a:prstGeom prst="rect">
-            <a:avLst/>
-          </a:prstGeom>
-          <a:noFill/>
-          <a:ln/>
-        </p:spPr>
-        <p:txBody>
-          <a:bodyPr wrap="square" lIns="0" tIns="0" rIns="0" bIns="0" rtlCol="0" anchor="t"/>
-          <a:lstStyle/>
-          <a:p>
-            <a:pPr indent="0" marL="0">
-              <a:buNone/>
-            </a:pPr>
-            <a:r>
-              <a:rPr lang="en-US" sz="1300" dirty="0">
-                <a:solidFill>
-                  <a:srgbClr val="5B6474"/>
-                </a:solidFill>
-              </a:rPr>
-              <a:t>O consultor cria-a com os referenciais (ex.: NIS2 e ISO/IEC 27001)</a:t>
-            </a:r>
-            <a:endParaRPr lang="en-US" sz="1300" dirty="0"/>
-          </a:p>
-        </p:txBody>
-      </p:sp>
-      <p:sp>
-        <p:nvSpPr>
-          <p:cNvPr id="25" name="seta-0"/>
+          <p:cNvPr id="23" name="icon-bg-58"/>
           <p:cNvSpPr/>
           <p:nvPr/>
         </p:nvSpPr>
         <p:spPr>
           <a:xfrm>
-            <a:off x="3182112" y="4526280"/>
-            <a:ext cx="128016" cy="320040"/>
-          </a:xfrm>
-          <a:prstGeom prst="chevron">
+            <a:off x="9144000" y="2103120"/>
+            <a:ext cx="640080" cy="640080"/>
+          </a:xfrm>
+          <a:prstGeom prst="ellipse">
             <a:avLst/>
           </a:prstGeom>
           <a:solidFill>
-            <a:srgbClr val="CFA04A"/>
+            <a:srgbClr val="070A13"/>
           </a:solidFill>
           <a:ln w="12700">
             <a:solidFill>
-              <a:srgbClr val="CFA04A"/>
+              <a:srgbClr val="070A13"/>
             </a:solidFill>
             <a:prstDash val="solid"/>
           </a:ln>
         </p:spPr>
       </p:sp>
-      <p:sp>
-        <p:nvSpPr>
-          <p:cNvPr id="26" name="card-58"/>
+      <p:pic>
+        <p:nvPicPr>
+          <p:cNvPr id="24" name="icon-58" descr="preencoded.png">    </p:cNvPr>
+          <p:cNvPicPr>
+            <a:picLocks noChangeAspect="1"/>
+          </p:cNvPicPr>
+          <p:nvPr/>
+        </p:nvPicPr>
+        <p:blipFill>
+          <a:blip r:embed="rId4"/>
+          <a:stretch>
+            <a:fillRect/>
+          </a:stretch>
+        </p:blipFill>
+        <p:spPr>
+          <a:xfrm>
+            <a:off x="9284818" y="2243938"/>
+            <a:ext cx="358445" cy="358445"/>
+          </a:xfrm>
+          <a:prstGeom prst="rect">
+            <a:avLst/>
+          </a:prstGeom>
+        </p:spPr>
+      </p:pic>
+      <p:sp>
+        <p:nvSpPr>
+          <p:cNvPr id="25" name="Text 19"/>
+          <p:cNvSpPr txBox="1"/>
+          <p:nvPr/>
+        </p:nvSpPr>
+        <p:spPr>
+          <a:xfrm>
+            <a:off x="9144000" y="2880360"/>
+            <a:ext cx="2194560" cy="411480"/>
+          </a:xfrm>
+          <a:prstGeom prst="rect">
+            <a:avLst/>
+          </a:prstGeom>
+          <a:noFill/>
+          <a:ln/>
+        </p:spPr>
+        <p:txBody>
+          <a:bodyPr wrap="square" lIns="0" tIns="0" rIns="0" bIns="0" rtlCol="0" anchor="t"/>
+          <a:lstStyle/>
+          <a:p>
+            <a:pPr indent="0" marL="0">
+              <a:buNone/>
+            </a:pPr>
+            <a:r>
+              <a:rPr lang="en-US" sz="1700" b="1" dirty="0">
+                <a:solidFill>
+                  <a:srgbClr val="111827"/>
+                </a:solidFill>
+              </a:rPr>
+              <a:t>Rever e indexar</a:t>
+            </a:r>
+            <a:endParaRPr lang="en-US" sz="1700" dirty="0"/>
+          </a:p>
+        </p:txBody>
+      </p:sp>
+      <p:sp>
+        <p:nvSpPr>
+          <p:cNvPr id="26" name="Text 20"/>
+          <p:cNvSpPr txBox="1"/>
+          <p:nvPr/>
+        </p:nvSpPr>
+        <p:spPr>
+          <a:xfrm>
+            <a:off x="9144000" y="3337560"/>
+            <a:ext cx="2194560" cy="1188720"/>
+          </a:xfrm>
+          <a:prstGeom prst="rect">
+            <a:avLst/>
+          </a:prstGeom>
+          <a:noFill/>
+          <a:ln/>
+        </p:spPr>
+        <p:txBody>
+          <a:bodyPr wrap="square" lIns="0" tIns="0" rIns="0" bIns="0" rtlCol="0" anchor="t"/>
+          <a:lstStyle/>
+          <a:p>
+            <a:pPr indent="0" marL="0">
+              <a:buNone/>
+            </a:pPr>
+            <a:r>
+              <a:rPr lang="en-US" sz="1300" dirty="0">
+                <a:solidFill>
+                  <a:srgbClr val="5B6474"/>
+                </a:solidFill>
+              </a:rPr>
+              <a:t>Uma pessoa confirma; nasce uma evidência Por rever; nada muda de estado sozinho</a:t>
+            </a:r>
+            <a:endParaRPr lang="en-US" sz="1300" dirty="0"/>
+          </a:p>
+        </p:txBody>
+      </p:sp>
+      <p:sp>
+        <p:nvSpPr>
+          <p:cNvPr id="27" name="card-59"/>
           <p:cNvSpPr/>
           <p:nvPr/>
         </p:nvSpPr>
         <p:spPr>
           <a:xfrm>
-            <a:off x="3337560" y="3657600"/>
-            <a:ext cx="2606040" cy="2103120"/>
+            <a:off x="548640" y="4572000"/>
+            <a:ext cx="11064240" cy="1097280"/>
           </a:xfrm>
           <a:prstGeom prst="roundRect">
             <a:avLst>
-              <a:gd name="adj" fmla="val 5217"/>
-            </a:avLst>
-          </a:prstGeom>
-          <a:solidFill>
-            <a:srgbClr val="F3F5F8"/>
-          </a:solidFill>
-          <a:ln w="12700">
-            <a:solidFill>
-              <a:srgbClr val="F3F5F8"/>
-            </a:solidFill>
-            <a:prstDash val="solid"/>
-          </a:ln>
-        </p:spPr>
-      </p:sp>
-      <p:sp>
-        <p:nvSpPr>
-          <p:cNvPr id="27" name="Text 25"/>
-          <p:cNvSpPr txBox="1"/>
-          <p:nvPr/>
-        </p:nvSpPr>
-        <p:spPr>
-          <a:xfrm>
-            <a:off x="3566160" y="3840480"/>
-            <a:ext cx="2194560" cy="411480"/>
-          </a:xfrm>
-          <a:prstGeom prst="rect">
-            <a:avLst/>
-          </a:prstGeom>
-          <a:noFill/>
-          <a:ln/>
-        </p:spPr>
-        <p:txBody>
-          <a:bodyPr wrap="square" lIns="0" tIns="0" rIns="0" bIns="0" rtlCol="0" anchor="t"/>
-          <a:lstStyle/>
-          <a:p>
-            <a:pPr indent="0" marL="0">
-              <a:buNone/>
-            </a:pPr>
-            <a:r>
-              <a:rPr lang="en-US" sz="1700" b="1" dirty="0">
-                <a:solidFill>
-                  <a:srgbClr val="070A13"/>
-                </a:solidFill>
-              </a:rPr>
-              <a:t>Respostas</a:t>
-            </a:r>
-            <a:endParaRPr lang="en-US" sz="1700" dirty="0"/>
-          </a:p>
-        </p:txBody>
-      </p:sp>
-      <p:sp>
-        <p:nvSpPr>
-          <p:cNvPr id="28" name="Text 26"/>
-          <p:cNvSpPr txBox="1"/>
-          <p:nvPr/>
-        </p:nvSpPr>
-        <p:spPr>
-          <a:xfrm>
-            <a:off x="3566160" y="4343400"/>
-            <a:ext cx="2194560" cy="1280160"/>
-          </a:xfrm>
-          <a:prstGeom prst="rect">
-            <a:avLst/>
-          </a:prstGeom>
-          <a:noFill/>
-          <a:ln/>
-        </p:spPr>
-        <p:txBody>
-          <a:bodyPr wrap="square" lIns="0" tIns="0" rIns="0" bIns="0" rtlCol="0" anchor="t"/>
-          <a:lstStyle/>
-          <a:p>
-            <a:pPr indent="0" marL="0">
-              <a:buNone/>
-            </a:pPr>
-            <a:r>
-              <a:rPr lang="en-US" sz="1300" dirty="0">
-                <a:solidFill>
-                  <a:srgbClr val="5B6474"/>
-                </a:solidFill>
-              </a:rPr>
-              <a:t>A equipa responde e liga evidências a cada pergunta</a:t>
-            </a:r>
-            <a:endParaRPr lang="en-US" sz="1300" dirty="0"/>
-          </a:p>
-        </p:txBody>
-      </p:sp>
-      <p:sp>
-        <p:nvSpPr>
-          <p:cNvPr id="29" name="seta-1"/>
-          <p:cNvSpPr/>
-          <p:nvPr/>
-        </p:nvSpPr>
-        <p:spPr>
-          <a:xfrm>
-            <a:off x="5971032" y="4526280"/>
-            <a:ext cx="128016" cy="320040"/>
-          </a:xfrm>
-          <a:prstGeom prst="chevron">
-            <a:avLst/>
-          </a:prstGeom>
-          <a:solidFill>
-            <a:srgbClr val="CFA04A"/>
-          </a:solidFill>
-          <a:ln w="12700">
-            <a:solidFill>
-              <a:srgbClr val="CFA04A"/>
-            </a:solidFill>
-            <a:prstDash val="solid"/>
-          </a:ln>
-        </p:spPr>
-      </p:sp>
-      <p:sp>
-        <p:nvSpPr>
-          <p:cNvPr id="30" name="card-59"/>
-          <p:cNvSpPr/>
-          <p:nvPr/>
-        </p:nvSpPr>
-        <p:spPr>
-          <a:xfrm>
-            <a:off x="6126480" y="3657600"/>
-            <a:ext cx="2606040" cy="2103120"/>
-          </a:xfrm>
-          <a:prstGeom prst="roundRect">
-            <a:avLst>
-              <a:gd name="adj" fmla="val 5217"/>
-            </a:avLst>
-          </a:prstGeom>
-          <a:solidFill>
-            <a:srgbClr val="F3F5F8"/>
-          </a:solidFill>
-          <a:ln w="12700">
-            <a:solidFill>
-              <a:srgbClr val="F3F5F8"/>
-            </a:solidFill>
-            <a:prstDash val="solid"/>
-          </a:ln>
-        </p:spPr>
-      </p:sp>
-      <p:sp>
-        <p:nvSpPr>
-          <p:cNvPr id="31" name="Text 29"/>
-          <p:cNvSpPr txBox="1"/>
-          <p:nvPr/>
-        </p:nvSpPr>
-        <p:spPr>
-          <a:xfrm>
-            <a:off x="6355080" y="3840480"/>
-            <a:ext cx="2194560" cy="411480"/>
-          </a:xfrm>
-          <a:prstGeom prst="rect">
-            <a:avLst/>
-          </a:prstGeom>
-          <a:noFill/>
-          <a:ln/>
-        </p:spPr>
-        <p:txBody>
-          <a:bodyPr wrap="square" lIns="0" tIns="0" rIns="0" bIns="0" rtlCol="0" anchor="t"/>
-          <a:lstStyle/>
-          <a:p>
-            <a:pPr indent="0" marL="0">
-              <a:buNone/>
-            </a:pPr>
-            <a:r>
-              <a:rPr lang="en-US" sz="1700" b="1" dirty="0">
-                <a:solidFill>
-                  <a:srgbClr val="070A13"/>
-                </a:solidFill>
-              </a:rPr>
-              <a:t>Pontuação</a:t>
-            </a:r>
-            <a:endParaRPr lang="en-US" sz="1700" dirty="0"/>
-          </a:p>
-        </p:txBody>
-      </p:sp>
-      <p:sp>
-        <p:nvSpPr>
-          <p:cNvPr id="32" name="Text 30"/>
-          <p:cNvSpPr txBox="1"/>
-          <p:nvPr/>
-        </p:nvSpPr>
-        <p:spPr>
-          <a:xfrm>
-            <a:off x="6355080" y="4343400"/>
-            <a:ext cx="2194560" cy="1280160"/>
-          </a:xfrm>
-          <a:prstGeom prst="rect">
-            <a:avLst/>
-          </a:prstGeom>
-          <a:noFill/>
-          <a:ln/>
-        </p:spPr>
-        <p:txBody>
-          <a:bodyPr wrap="square" lIns="0" tIns="0" rIns="0" bIns="0" rtlCol="0" anchor="t"/>
-          <a:lstStyle/>
-          <a:p>
-            <a:pPr indent="0" marL="0">
-              <a:buNone/>
-            </a:pPr>
-            <a:r>
-              <a:rPr lang="en-US" sz="1300" dirty="0">
-                <a:solidFill>
-                  <a:srgbClr val="5B6474"/>
-                </a:solidFill>
-              </a:rPr>
-              <a:t>Por domínio, por referencial e global</a:t>
-            </a:r>
-            <a:endParaRPr lang="en-US" sz="1300" dirty="0"/>
-          </a:p>
-        </p:txBody>
-      </p:sp>
-      <p:sp>
-        <p:nvSpPr>
-          <p:cNvPr id="33" name="seta-2"/>
-          <p:cNvSpPr/>
-          <p:nvPr/>
-        </p:nvSpPr>
-        <p:spPr>
-          <a:xfrm>
-            <a:off x="8759952" y="4526280"/>
-            <a:ext cx="128016" cy="320040"/>
-          </a:xfrm>
-          <a:prstGeom prst="chevron">
-            <a:avLst/>
-          </a:prstGeom>
-          <a:solidFill>
-            <a:srgbClr val="CFA04A"/>
-          </a:solidFill>
-          <a:ln w="12700">
-            <a:solidFill>
-              <a:srgbClr val="CFA04A"/>
-            </a:solidFill>
-            <a:prstDash val="solid"/>
-          </a:ln>
-        </p:spPr>
-      </p:sp>
-      <p:sp>
-        <p:nvSpPr>
-          <p:cNvPr id="34" name="card-60"/>
-          <p:cNvSpPr/>
-          <p:nvPr/>
-        </p:nvSpPr>
-        <p:spPr>
-          <a:xfrm>
-            <a:off x="8915400" y="3657600"/>
-            <a:ext cx="2606040" cy="2103120"/>
-          </a:xfrm>
-          <a:prstGeom prst="roundRect">
-            <a:avLst>
-              <a:gd name="adj" fmla="val 5217"/>
+              <a:gd name="adj" fmla="val 10000"/>
             </a:avLst>
           </a:prstGeom>
           <a:solidFill>
@@ -5052,73 +4933,48 @@
       </p:sp>
       <p:sp>
         <p:nvSpPr>
-          <p:cNvPr id="35" name="Text 33"/>
-          <p:cNvSpPr txBox="1"/>
-          <p:nvPr/>
-        </p:nvSpPr>
-        <p:spPr>
-          <a:xfrm>
-            <a:off x="9144000" y="3840480"/>
-            <a:ext cx="2194560" cy="411480"/>
-          </a:xfrm>
-          <a:prstGeom prst="rect">
-            <a:avLst/>
-          </a:prstGeom>
-          <a:noFill/>
-          <a:ln/>
-        </p:spPr>
-        <p:txBody>
-          <a:bodyPr wrap="square" lIns="0" tIns="0" rIns="0" bIns="0" rtlCol="0" anchor="t"/>
+          <p:cNvPr id="28" name="Text 22"/>
+          <p:cNvSpPr txBox="1"/>
+          <p:nvPr/>
+        </p:nvSpPr>
+        <p:spPr>
+          <a:xfrm>
+            <a:off x="822960" y="4709160"/>
+            <a:ext cx="10515600" cy="822960"/>
+          </a:xfrm>
+          <a:prstGeom prst="rect">
+            <a:avLst/>
+          </a:prstGeom>
+          <a:noFill/>
+          <a:ln/>
+        </p:spPr>
+        <p:txBody>
+          <a:bodyPr wrap="square" lIns="0" tIns="0" rIns="0" bIns="0" rtlCol="0" anchor="ctr"/>
           <a:lstStyle/>
           <a:p>
             <a:pPr indent="0" marL="0">
               <a:buNone/>
             </a:pPr>
             <a:r>
-              <a:rPr lang="en-US" sz="1700" b="1" dirty="0">
+              <a:rPr lang="en-US" sz="1400" b="1" dirty="0">
                 <a:solidFill>
                   <a:srgbClr val="17766C"/>
                 </a:solidFill>
               </a:rPr>
-              <a:t>Plano de ação</a:t>
-            </a:r>
-            <a:endParaRPr lang="en-US" sz="1700" dirty="0"/>
-          </a:p>
-        </p:txBody>
-      </p:sp>
-      <p:sp>
-        <p:nvSpPr>
-          <p:cNvPr id="36" name="Text 34"/>
-          <p:cNvSpPr txBox="1"/>
-          <p:nvPr/>
-        </p:nvSpPr>
-        <p:spPr>
-          <a:xfrm>
-            <a:off x="9144000" y="4343400"/>
-            <a:ext cx="2194560" cy="1280160"/>
-          </a:xfrm>
-          <a:prstGeom prst="rect">
-            <a:avLst/>
-          </a:prstGeom>
-          <a:noFill/>
-          <a:ln/>
-        </p:spPr>
-        <p:txBody>
-          <a:bodyPr wrap="square" lIns="0" tIns="0" rIns="0" bIns="0" rtlCol="0" anchor="t"/>
-          <a:lstStyle/>
-          <a:p>
+              <a:t>Qualidade das propostas: </a:t>
+            </a:r>
             <a:pPr indent="0" marL="0">
               <a:buNone/>
             </a:pPr>
             <a:r>
-              <a:rPr lang="en-US" sz="1300" dirty="0">
-                <a:solidFill>
-                  <a:srgbClr val="5B6474"/>
-                </a:solidFill>
-              </a:rPr>
-              <a:t>Recomendações com prioridade, esforço e prazo, que viram tarefas</a:t>
-            </a:r>
-            <a:endParaRPr lang="en-US" sz="1300" dirty="0"/>
+              <a:rPr lang="en-US" sz="1400" dirty="0">
+                <a:solidFill>
+                  <a:srgbClr val="111827"/>
+                </a:solidFill>
+              </a:rPr>
+              <a:t>quantas ligações propostas as pessoas mantêm, por nível de confiança. Documentos com endereços de ativos expostos à Internet nunca seguem para a IA.</a:t>
+            </a:r>
+            <a:endParaRPr lang="en-US" sz="1400" dirty="0"/>
           </a:p>
         </p:txBody>
       </p:sp>
@@ -5224,7 +5080,7 @@
                   <a:schemeClr val="tx1"/>
                 </a:solidFill>
               </a:rPr>
-              <a:t>O assistente de IA prepara rascunhos, não decide</a:t>
+              <a:t>Avaliar a maturidade de 0 a 5 e transformar lacunas em tarefas</a:t>
             </a:r>
             <a:endParaRPr lang="en-US" sz="3200" dirty="0"/>
           </a:p>
@@ -5232,215 +5088,513 @@
       </p:sp>
       <p:sp>
         <p:nvSpPr>
-          <p:cNvPr id="3" name="icon-bg-61"/>
+          <p:cNvPr id="3" name="card-60"/>
           <p:cNvSpPr/>
           <p:nvPr/>
         </p:nvSpPr>
         <p:spPr>
           <a:xfrm>
-            <a:off x="548640" y="1417320"/>
-            <a:ext cx="731520" cy="731520"/>
-          </a:xfrm>
-          <a:prstGeom prst="ellipse">
-            <a:avLst/>
+            <a:off x="548640" y="1508760"/>
+            <a:ext cx="1737360" cy="1417320"/>
+          </a:xfrm>
+          <a:prstGeom prst="roundRect">
+            <a:avLst>
+              <a:gd name="adj" fmla="val 7742"/>
+            </a:avLst>
           </a:prstGeom>
           <a:solidFill>
-            <a:schemeClr val="tx1"/>
+            <a:srgbClr val="E9EDF2"/>
           </a:solidFill>
           <a:ln w="12700">
             <a:solidFill>
-              <a:schemeClr val="tx1"/>
+              <a:srgbClr val="E9EDF2"/>
             </a:solidFill>
             <a:prstDash val="solid"/>
           </a:ln>
         </p:spPr>
       </p:sp>
-      <p:pic>
-        <p:nvPicPr>
-          <p:cNvPr id="4" name="icon-61" descr="preencoded.png">    </p:cNvPr>
-          <p:cNvPicPr>
-            <a:picLocks noChangeAspect="1"/>
-          </p:cNvPicPr>
-          <p:nvPr/>
-        </p:nvPicPr>
-        <p:blipFill>
-          <a:blip r:embed="rId1"/>
-          <a:stretch>
-            <a:fillRect/>
-          </a:stretch>
-        </p:blipFill>
-        <p:spPr>
-          <a:xfrm>
-            <a:off x="709574" y="1578254"/>
-            <a:ext cx="409651" cy="409651"/>
-          </a:xfrm>
-          <a:prstGeom prst="rect">
-            <a:avLst/>
-          </a:prstGeom>
-        </p:spPr>
-      </p:pic>
-      <p:sp>
-        <p:nvSpPr>
-          <p:cNvPr id="5" name="Text 2"/>
-          <p:cNvSpPr txBox="1"/>
-          <p:nvPr/>
-        </p:nvSpPr>
-        <p:spPr>
-          <a:xfrm>
-            <a:off x="1463040" y="1508760"/>
-            <a:ext cx="4572000" cy="594360"/>
-          </a:xfrm>
-          <a:prstGeom prst="rect">
-            <a:avLst/>
-          </a:prstGeom>
-          <a:noFill/>
-          <a:ln/>
-        </p:spPr>
-        <p:txBody>
-          <a:bodyPr wrap="square" lIns="0" tIns="0" rIns="0" bIns="0" rtlCol="0" anchor="t"/>
-          <a:lstStyle/>
-          <a:p>
-            <a:pPr indent="0" marL="0">
-              <a:buNone/>
-            </a:pPr>
-            <a:r>
-              <a:rPr lang="en-US" sz="1700" b="1" dirty="0">
+      <p:sp>
+        <p:nvSpPr>
+          <p:cNvPr id="4" name="Text 2"/>
+          <p:cNvSpPr txBox="1"/>
+          <p:nvPr/>
+        </p:nvSpPr>
+        <p:spPr>
+          <a:xfrm>
+            <a:off x="548640" y="1600200"/>
+            <a:ext cx="1737360" cy="685800"/>
+          </a:xfrm>
+          <a:prstGeom prst="rect">
+            <a:avLst/>
+          </a:prstGeom>
+          <a:noFill/>
+          <a:ln/>
+        </p:spPr>
+        <p:txBody>
+          <a:bodyPr wrap="square" lIns="0" tIns="0" rIns="0" bIns="0" rtlCol="0" anchor="t"/>
+          <a:lstStyle/>
+          <a:p>
+            <a:pPr algn="ctr" indent="0" marL="0">
+              <a:buNone/>
+            </a:pPr>
+            <a:r>
+              <a:rPr lang="en-US" sz="3600" b="1" dirty="0">
+                <a:solidFill>
+                  <a:srgbClr val="070A13"/>
+                </a:solidFill>
+              </a:rPr>
+              <a:t>0</a:t>
+            </a:r>
+            <a:endParaRPr lang="en-US" sz="3600" dirty="0"/>
+          </a:p>
+        </p:txBody>
+      </p:sp>
+      <p:sp>
+        <p:nvSpPr>
+          <p:cNvPr id="5" name="Text 3"/>
+          <p:cNvSpPr txBox="1"/>
+          <p:nvPr/>
+        </p:nvSpPr>
+        <p:spPr>
+          <a:xfrm>
+            <a:off x="640080" y="2331720"/>
+            <a:ext cx="1554480" cy="502920"/>
+          </a:xfrm>
+          <a:prstGeom prst="rect">
+            <a:avLst/>
+          </a:prstGeom>
+          <a:noFill/>
+          <a:ln/>
+        </p:spPr>
+        <p:txBody>
+          <a:bodyPr wrap="square" lIns="0" tIns="0" rIns="0" bIns="0" rtlCol="0" anchor="t"/>
+          <a:lstStyle/>
+          <a:p>
+            <a:pPr algn="ctr" indent="0" marL="0">
+              <a:buNone/>
+            </a:pPr>
+            <a:r>
+              <a:rPr lang="en-US" sz="1300" b="1" dirty="0">
                 <a:solidFill>
                   <a:srgbClr val="111827"/>
                 </a:solidFill>
               </a:rPr>
-              <a:t>Ativo só onde há documentos para construir ou analisar</a:t>
-            </a:r>
-            <a:endParaRPr lang="en-US" sz="1700" dirty="0"/>
-          </a:p>
-        </p:txBody>
-      </p:sp>
-      <p:sp>
-        <p:nvSpPr>
-          <p:cNvPr id="6" name="Text 3"/>
-          <p:cNvSpPr txBox="1"/>
-          <p:nvPr/>
-        </p:nvSpPr>
-        <p:spPr>
-          <a:xfrm>
-            <a:off x="548640" y="2377440"/>
-            <a:ext cx="5486400" cy="2743200"/>
-          </a:xfrm>
-          <a:prstGeom prst="rect">
-            <a:avLst/>
-          </a:prstGeom>
-          <a:noFill/>
-          <a:ln/>
-        </p:spPr>
-        <p:txBody>
-          <a:bodyPr wrap="square" lIns="0" tIns="0" rIns="0" bIns="0" rtlCol="0" anchor="t"/>
-          <a:lstStyle/>
-          <a:p>
-            <a:pPr marL="342900" indent="-342900">
-              <a:spcAft>
-                <a:spcPts val="800"/>
-              </a:spcAft>
-              <a:buSzPct val="100000"/>
-              <a:buChar char="•"/>
-            </a:pPr>
-            <a:r>
-              <a:rPr lang="en-US" sz="1500" dirty="0">
-                <a:solidFill>
-                  <a:srgbClr val="111827"/>
-                </a:solidFill>
-              </a:rPr>
-              <a:t>Políticas, procedimentos e planos de evidências por medida</a:t>
-            </a:r>
-            <a:endParaRPr lang="en-US" sz="1500" dirty="0"/>
-          </a:p>
-          <a:p>
-            <a:pPr marL="342900" indent="-342900">
-              <a:spcAft>
-                <a:spcPts val="800"/>
-              </a:spcAft>
-              <a:buSzPct val="100000"/>
-              <a:buChar char="•"/>
-            </a:pPr>
-            <a:r>
-              <a:rPr lang="en-US" sz="1500" dirty="0">
-                <a:solidFill>
-                  <a:srgbClr val="111827"/>
-                </a:solidFill>
-              </a:rPr>
-              <a:t>Análise de evidências face ao critério oficial</a:t>
-            </a:r>
-            <a:endParaRPr lang="en-US" sz="1500" dirty="0"/>
-          </a:p>
-          <a:p>
-            <a:pPr marL="342900" indent="-342900">
-              <a:spcAft>
-                <a:spcPts val="800"/>
-              </a:spcAft>
-              <a:buSzPct val="100000"/>
-              <a:buChar char="•"/>
-            </a:pPr>
-            <a:r>
-              <a:rPr lang="en-US" sz="1500" dirty="0">
-                <a:solidFill>
-                  <a:srgbClr val="111827"/>
-                </a:solidFill>
-              </a:rPr>
-              <a:t>Notificações de incidentes e relatório anual</a:t>
-            </a:r>
-            <a:endParaRPr lang="en-US" sz="1500" dirty="0"/>
-          </a:p>
-          <a:p>
-            <a:pPr marL="342900" indent="-342900">
-              <a:spcAft>
-                <a:spcPts val="800"/>
-              </a:spcAft>
-              <a:buSzPct val="100000"/>
-              <a:buChar char="•"/>
-            </a:pPr>
-            <a:r>
-              <a:rPr lang="en-US" sz="1500" dirty="0">
-                <a:solidFill>
-                  <a:srgbClr val="111827"/>
-                </a:solidFill>
-              </a:rPr>
-              <a:t>Questionários a fornecedores e leitura de respostas</a:t>
-            </a:r>
-            <a:endParaRPr lang="en-US" sz="1500" dirty="0"/>
-          </a:p>
-          <a:p>
-            <a:pPr marL="342900" indent="-342900">
-              <a:spcAft>
-                <a:spcPts val="800"/>
-              </a:spcAft>
-              <a:buSzPct val="100000"/>
-              <a:buChar char="•"/>
-            </a:pPr>
-            <a:r>
-              <a:rPr lang="en-US" sz="1500" dirty="0">
-                <a:solidFill>
-                  <a:srgbClr val="111827"/>
-                </a:solidFill>
-              </a:rPr>
-              <a:t>Recomendações para o plano de ação</a:t>
-            </a:r>
-            <a:endParaRPr lang="en-US" sz="1500" dirty="0"/>
-          </a:p>
-        </p:txBody>
-      </p:sp>
-      <p:sp>
-        <p:nvSpPr>
-          <p:cNvPr id="7" name="card-62"/>
+              <a:t>Inexistente</a:t>
+            </a:r>
+            <a:endParaRPr lang="en-US" sz="1300" dirty="0"/>
+          </a:p>
+        </p:txBody>
+      </p:sp>
+      <p:sp>
+        <p:nvSpPr>
+          <p:cNvPr id="6" name="card-61"/>
           <p:cNvSpPr/>
           <p:nvPr/>
         </p:nvSpPr>
         <p:spPr>
           <a:xfrm>
-            <a:off x="6583680" y="1417320"/>
-            <a:ext cx="5029200" cy="4526280"/>
+            <a:off x="2404872" y="1508760"/>
+            <a:ext cx="1737360" cy="1417320"/>
           </a:xfrm>
           <a:prstGeom prst="roundRect">
             <a:avLst>
-              <a:gd name="adj" fmla="val 2424"/>
+              <a:gd name="adj" fmla="val 7742"/>
+            </a:avLst>
+          </a:prstGeom>
+          <a:solidFill>
+            <a:srgbClr val="DCE2EA"/>
+          </a:solidFill>
+          <a:ln w="12700">
+            <a:solidFill>
+              <a:srgbClr val="DCE2EA"/>
+            </a:solidFill>
+            <a:prstDash val="solid"/>
+          </a:ln>
+        </p:spPr>
+      </p:sp>
+      <p:sp>
+        <p:nvSpPr>
+          <p:cNvPr id="7" name="Text 5"/>
+          <p:cNvSpPr txBox="1"/>
+          <p:nvPr/>
+        </p:nvSpPr>
+        <p:spPr>
+          <a:xfrm>
+            <a:off x="2404872" y="1600200"/>
+            <a:ext cx="1737360" cy="685800"/>
+          </a:xfrm>
+          <a:prstGeom prst="rect">
+            <a:avLst/>
+          </a:prstGeom>
+          <a:noFill/>
+          <a:ln/>
+        </p:spPr>
+        <p:txBody>
+          <a:bodyPr wrap="square" lIns="0" tIns="0" rIns="0" bIns="0" rtlCol="0" anchor="t"/>
+          <a:lstStyle/>
+          <a:p>
+            <a:pPr algn="ctr" indent="0" marL="0">
+              <a:buNone/>
+            </a:pPr>
+            <a:r>
+              <a:rPr lang="en-US" sz="3600" b="1" dirty="0">
+                <a:solidFill>
+                  <a:srgbClr val="070A13"/>
+                </a:solidFill>
+              </a:rPr>
+              <a:t>1</a:t>
+            </a:r>
+            <a:endParaRPr lang="en-US" sz="3600" dirty="0"/>
+          </a:p>
+        </p:txBody>
+      </p:sp>
+      <p:sp>
+        <p:nvSpPr>
+          <p:cNvPr id="8" name="Text 6"/>
+          <p:cNvSpPr txBox="1"/>
+          <p:nvPr/>
+        </p:nvSpPr>
+        <p:spPr>
+          <a:xfrm>
+            <a:off x="2496312" y="2331720"/>
+            <a:ext cx="1554480" cy="502920"/>
+          </a:xfrm>
+          <a:prstGeom prst="rect">
+            <a:avLst/>
+          </a:prstGeom>
+          <a:noFill/>
+          <a:ln/>
+        </p:spPr>
+        <p:txBody>
+          <a:bodyPr wrap="square" lIns="0" tIns="0" rIns="0" bIns="0" rtlCol="0" anchor="t"/>
+          <a:lstStyle/>
+          <a:p>
+            <a:pPr algn="ctr" indent="0" marL="0">
+              <a:buNone/>
+            </a:pPr>
+            <a:r>
+              <a:rPr lang="en-US" sz="1300" b="1" dirty="0">
+                <a:solidFill>
+                  <a:srgbClr val="111827"/>
+                </a:solidFill>
+              </a:rPr>
+              <a:t>Inicial</a:t>
+            </a:r>
+            <a:endParaRPr lang="en-US" sz="1300" dirty="0"/>
+          </a:p>
+        </p:txBody>
+      </p:sp>
+      <p:sp>
+        <p:nvSpPr>
+          <p:cNvPr id="9" name="card-62"/>
+          <p:cNvSpPr/>
+          <p:nvPr/>
+        </p:nvSpPr>
+        <p:spPr>
+          <a:xfrm>
+            <a:off x="4261104" y="1508760"/>
+            <a:ext cx="1737360" cy="1417320"/>
+          </a:xfrm>
+          <a:prstGeom prst="roundRect">
+            <a:avLst>
+              <a:gd name="adj" fmla="val 7742"/>
+            </a:avLst>
+          </a:prstGeom>
+          <a:solidFill>
+            <a:srgbClr val="C6CFDB"/>
+          </a:solidFill>
+          <a:ln w="12700">
+            <a:solidFill>
+              <a:srgbClr val="C6CFDB"/>
+            </a:solidFill>
+            <a:prstDash val="solid"/>
+          </a:ln>
+        </p:spPr>
+      </p:sp>
+      <p:sp>
+        <p:nvSpPr>
+          <p:cNvPr id="10" name="Text 8"/>
+          <p:cNvSpPr txBox="1"/>
+          <p:nvPr/>
+        </p:nvSpPr>
+        <p:spPr>
+          <a:xfrm>
+            <a:off x="4261104" y="1600200"/>
+            <a:ext cx="1737360" cy="685800"/>
+          </a:xfrm>
+          <a:prstGeom prst="rect">
+            <a:avLst/>
+          </a:prstGeom>
+          <a:noFill/>
+          <a:ln/>
+        </p:spPr>
+        <p:txBody>
+          <a:bodyPr wrap="square" lIns="0" tIns="0" rIns="0" bIns="0" rtlCol="0" anchor="t"/>
+          <a:lstStyle/>
+          <a:p>
+            <a:pPr algn="ctr" indent="0" marL="0">
+              <a:buNone/>
+            </a:pPr>
+            <a:r>
+              <a:rPr lang="en-US" sz="3600" b="1" dirty="0">
+                <a:solidFill>
+                  <a:srgbClr val="070A13"/>
+                </a:solidFill>
+              </a:rPr>
+              <a:t>2</a:t>
+            </a:r>
+            <a:endParaRPr lang="en-US" sz="3600" dirty="0"/>
+          </a:p>
+        </p:txBody>
+      </p:sp>
+      <p:sp>
+        <p:nvSpPr>
+          <p:cNvPr id="11" name="Text 9"/>
+          <p:cNvSpPr txBox="1"/>
+          <p:nvPr/>
+        </p:nvSpPr>
+        <p:spPr>
+          <a:xfrm>
+            <a:off x="4352544" y="2331720"/>
+            <a:ext cx="1554480" cy="502920"/>
+          </a:xfrm>
+          <a:prstGeom prst="rect">
+            <a:avLst/>
+          </a:prstGeom>
+          <a:noFill/>
+          <a:ln/>
+        </p:spPr>
+        <p:txBody>
+          <a:bodyPr wrap="square" lIns="0" tIns="0" rIns="0" bIns="0" rtlCol="0" anchor="t"/>
+          <a:lstStyle/>
+          <a:p>
+            <a:pPr algn="ctr" indent="0" marL="0">
+              <a:buNone/>
+            </a:pPr>
+            <a:r>
+              <a:rPr lang="en-US" sz="1300" b="1" dirty="0">
+                <a:solidFill>
+                  <a:srgbClr val="111827"/>
+                </a:solidFill>
+              </a:rPr>
+              <a:t>Em desenvolvimento</a:t>
+            </a:r>
+            <a:endParaRPr lang="en-US" sz="1300" dirty="0"/>
+          </a:p>
+        </p:txBody>
+      </p:sp>
+      <p:sp>
+        <p:nvSpPr>
+          <p:cNvPr id="12" name="card-63"/>
+          <p:cNvSpPr/>
+          <p:nvPr/>
+        </p:nvSpPr>
+        <p:spPr>
+          <a:xfrm>
+            <a:off x="6117336" y="1508760"/>
+            <a:ext cx="1737360" cy="1417320"/>
+          </a:xfrm>
+          <a:prstGeom prst="roundRect">
+            <a:avLst>
+              <a:gd name="adj" fmla="val 7742"/>
+            </a:avLst>
+          </a:prstGeom>
+          <a:solidFill>
+            <a:srgbClr val="9AA7BA"/>
+          </a:solidFill>
+          <a:ln w="12700">
+            <a:solidFill>
+              <a:srgbClr val="9AA7BA"/>
+            </a:solidFill>
+            <a:prstDash val="solid"/>
+          </a:ln>
+        </p:spPr>
+      </p:sp>
+      <p:sp>
+        <p:nvSpPr>
+          <p:cNvPr id="13" name="Text 11"/>
+          <p:cNvSpPr txBox="1"/>
+          <p:nvPr/>
+        </p:nvSpPr>
+        <p:spPr>
+          <a:xfrm>
+            <a:off x="6117336" y="1600200"/>
+            <a:ext cx="1737360" cy="685800"/>
+          </a:xfrm>
+          <a:prstGeom prst="rect">
+            <a:avLst/>
+          </a:prstGeom>
+          <a:noFill/>
+          <a:ln/>
+        </p:spPr>
+        <p:txBody>
+          <a:bodyPr wrap="square" lIns="0" tIns="0" rIns="0" bIns="0" rtlCol="0" anchor="t"/>
+          <a:lstStyle/>
+          <a:p>
+            <a:pPr algn="ctr" indent="0" marL="0">
+              <a:buNone/>
+            </a:pPr>
+            <a:r>
+              <a:rPr lang="en-US" sz="3600" b="1" dirty="0">
+                <a:solidFill>
+                  <a:srgbClr val="070A13"/>
+                </a:solidFill>
+              </a:rPr>
+              <a:t>3</a:t>
+            </a:r>
+            <a:endParaRPr lang="en-US" sz="3600" dirty="0"/>
+          </a:p>
+        </p:txBody>
+      </p:sp>
+      <p:sp>
+        <p:nvSpPr>
+          <p:cNvPr id="14" name="Text 12"/>
+          <p:cNvSpPr txBox="1"/>
+          <p:nvPr/>
+        </p:nvSpPr>
+        <p:spPr>
+          <a:xfrm>
+            <a:off x="6208776" y="2331720"/>
+            <a:ext cx="1554480" cy="502920"/>
+          </a:xfrm>
+          <a:prstGeom prst="rect">
+            <a:avLst/>
+          </a:prstGeom>
+          <a:noFill/>
+          <a:ln/>
+        </p:spPr>
+        <p:txBody>
+          <a:bodyPr wrap="square" lIns="0" tIns="0" rIns="0" bIns="0" rtlCol="0" anchor="t"/>
+          <a:lstStyle/>
+          <a:p>
+            <a:pPr algn="ctr" indent="0" marL="0">
+              <a:buNone/>
+            </a:pPr>
+            <a:r>
+              <a:rPr lang="en-US" sz="1300" b="1" dirty="0">
+                <a:solidFill>
+                  <a:srgbClr val="111827"/>
+                </a:solidFill>
+              </a:rPr>
+              <a:t>Definido</a:t>
+            </a:r>
+            <a:endParaRPr lang="en-US" sz="1300" dirty="0"/>
+          </a:p>
+        </p:txBody>
+      </p:sp>
+      <p:sp>
+        <p:nvSpPr>
+          <p:cNvPr id="15" name="card-64"/>
+          <p:cNvSpPr/>
+          <p:nvPr/>
+        </p:nvSpPr>
+        <p:spPr>
+          <a:xfrm>
+            <a:off x="7973568" y="1508760"/>
+            <a:ext cx="1737360" cy="1417320"/>
+          </a:xfrm>
+          <a:prstGeom prst="roundRect">
+            <a:avLst>
+              <a:gd name="adj" fmla="val 7742"/>
+            </a:avLst>
+          </a:prstGeom>
+          <a:solidFill>
+            <a:srgbClr val="CFA04A"/>
+          </a:solidFill>
+          <a:ln w="12700">
+            <a:solidFill>
+              <a:srgbClr val="CFA04A"/>
+            </a:solidFill>
+            <a:prstDash val="solid"/>
+          </a:ln>
+        </p:spPr>
+      </p:sp>
+      <p:sp>
+        <p:nvSpPr>
+          <p:cNvPr id="16" name="Text 14"/>
+          <p:cNvSpPr txBox="1"/>
+          <p:nvPr/>
+        </p:nvSpPr>
+        <p:spPr>
+          <a:xfrm>
+            <a:off x="7973568" y="1600200"/>
+            <a:ext cx="1737360" cy="685800"/>
+          </a:xfrm>
+          <a:prstGeom prst="rect">
+            <a:avLst/>
+          </a:prstGeom>
+          <a:noFill/>
+          <a:ln/>
+        </p:spPr>
+        <p:txBody>
+          <a:bodyPr wrap="square" lIns="0" tIns="0" rIns="0" bIns="0" rtlCol="0" anchor="t"/>
+          <a:lstStyle/>
+          <a:p>
+            <a:pPr algn="ctr" indent="0" marL="0">
+              <a:buNone/>
+            </a:pPr>
+            <a:r>
+              <a:rPr lang="en-US" sz="3600" b="1" dirty="0">
+                <a:solidFill>
+                  <a:srgbClr val="070A13"/>
+                </a:solidFill>
+              </a:rPr>
+              <a:t>4</a:t>
+            </a:r>
+            <a:endParaRPr lang="en-US" sz="3600" dirty="0"/>
+          </a:p>
+        </p:txBody>
+      </p:sp>
+      <p:sp>
+        <p:nvSpPr>
+          <p:cNvPr id="17" name="Text 15"/>
+          <p:cNvSpPr txBox="1"/>
+          <p:nvPr/>
+        </p:nvSpPr>
+        <p:spPr>
+          <a:xfrm>
+            <a:off x="8065008" y="2331720"/>
+            <a:ext cx="1554480" cy="502920"/>
+          </a:xfrm>
+          <a:prstGeom prst="rect">
+            <a:avLst/>
+          </a:prstGeom>
+          <a:noFill/>
+          <a:ln/>
+        </p:spPr>
+        <p:txBody>
+          <a:bodyPr wrap="square" lIns="0" tIns="0" rIns="0" bIns="0" rtlCol="0" anchor="t"/>
+          <a:lstStyle/>
+          <a:p>
+            <a:pPr algn="ctr" indent="0" marL="0">
+              <a:buNone/>
+            </a:pPr>
+            <a:r>
+              <a:rPr lang="en-US" sz="1300" b="1" dirty="0">
+                <a:solidFill>
+                  <a:srgbClr val="111827"/>
+                </a:solidFill>
+              </a:rPr>
+              <a:t>Gerido</a:t>
+            </a:r>
+            <a:endParaRPr lang="en-US" sz="1300" dirty="0"/>
+          </a:p>
+        </p:txBody>
+      </p:sp>
+      <p:sp>
+        <p:nvSpPr>
+          <p:cNvPr id="18" name="card-65"/>
+          <p:cNvSpPr/>
+          <p:nvPr/>
+        </p:nvSpPr>
+        <p:spPr>
+          <a:xfrm>
+            <a:off x="9829800" y="1508760"/>
+            <a:ext cx="1737360" cy="1417320"/>
+          </a:xfrm>
+          <a:prstGeom prst="roundRect">
+            <a:avLst>
+              <a:gd name="adj" fmla="val 7742"/>
             </a:avLst>
           </a:prstGeom>
           <a:solidFill>
@@ -5456,14 +5610,149 @@
       </p:sp>
       <p:sp>
         <p:nvSpPr>
-          <p:cNvPr id="8" name="Text 5"/>
-          <p:cNvSpPr txBox="1"/>
-          <p:nvPr/>
-        </p:nvSpPr>
-        <p:spPr>
-          <a:xfrm>
-            <a:off x="6903720" y="1691640"/>
-            <a:ext cx="4389120" cy="320040"/>
+          <p:cNvPr id="19" name="Text 17"/>
+          <p:cNvSpPr txBox="1"/>
+          <p:nvPr/>
+        </p:nvSpPr>
+        <p:spPr>
+          <a:xfrm>
+            <a:off x="9829800" y="1600200"/>
+            <a:ext cx="1737360" cy="685800"/>
+          </a:xfrm>
+          <a:prstGeom prst="rect">
+            <a:avLst/>
+          </a:prstGeom>
+          <a:noFill/>
+          <a:ln/>
+        </p:spPr>
+        <p:txBody>
+          <a:bodyPr wrap="square" lIns="0" tIns="0" rIns="0" bIns="0" rtlCol="0" anchor="t"/>
+          <a:lstStyle/>
+          <a:p>
+            <a:pPr algn="ctr" indent="0" marL="0">
+              <a:buNone/>
+            </a:pPr>
+            <a:r>
+              <a:rPr lang="en-US" sz="3600" b="1" dirty="0">
+                <a:solidFill>
+                  <a:srgbClr val="CFA04A"/>
+                </a:solidFill>
+              </a:rPr>
+              <a:t>5</a:t>
+            </a:r>
+            <a:endParaRPr lang="en-US" sz="3600" dirty="0"/>
+          </a:p>
+        </p:txBody>
+      </p:sp>
+      <p:sp>
+        <p:nvSpPr>
+          <p:cNvPr id="20" name="Text 18"/>
+          <p:cNvSpPr txBox="1"/>
+          <p:nvPr/>
+        </p:nvSpPr>
+        <p:spPr>
+          <a:xfrm>
+            <a:off x="9921240" y="2331720"/>
+            <a:ext cx="1554480" cy="502920"/>
+          </a:xfrm>
+          <a:prstGeom prst="rect">
+            <a:avLst/>
+          </a:prstGeom>
+          <a:noFill/>
+          <a:ln/>
+        </p:spPr>
+        <p:txBody>
+          <a:bodyPr wrap="square" lIns="0" tIns="0" rIns="0" bIns="0" rtlCol="0" anchor="t"/>
+          <a:lstStyle/>
+          <a:p>
+            <a:pPr algn="ctr" indent="0" marL="0">
+              <a:buNone/>
+            </a:pPr>
+            <a:r>
+              <a:rPr lang="en-US" sz="1300" b="1" dirty="0">
+                <a:solidFill>
+                  <a:srgbClr val="FFFFFF"/>
+                </a:solidFill>
+              </a:rPr>
+              <a:t>Otimizado</a:t>
+            </a:r>
+            <a:endParaRPr lang="en-US" sz="1300" dirty="0"/>
+          </a:p>
+        </p:txBody>
+      </p:sp>
+      <p:sp>
+        <p:nvSpPr>
+          <p:cNvPr id="21" name="Text 19"/>
+          <p:cNvSpPr txBox="1"/>
+          <p:nvPr/>
+        </p:nvSpPr>
+        <p:spPr>
+          <a:xfrm>
+            <a:off x="7955280" y="3017520"/>
+            <a:ext cx="3657600" cy="320040"/>
+          </a:xfrm>
+          <a:prstGeom prst="rect">
+            <a:avLst/>
+          </a:prstGeom>
+          <a:noFill/>
+          <a:ln/>
+        </p:spPr>
+        <p:txBody>
+          <a:bodyPr wrap="square" lIns="0" tIns="0" rIns="0" bIns="0" rtlCol="0" anchor="t"/>
+          <a:lstStyle/>
+          <a:p>
+            <a:pPr algn="r" indent="0" marL="0">
+              <a:buNone/>
+            </a:pPr>
+            <a:r>
+              <a:rPr lang="en-US" sz="1200" b="1" dirty="0">
+                <a:solidFill>
+                  <a:srgbClr val="8A6620"/>
+                </a:solidFill>
+              </a:rPr>
+              <a:t>Nível-alvo por omissão: 4 (Gerido)</a:t>
+            </a:r>
+            <a:endParaRPr lang="en-US" sz="1200" dirty="0"/>
+          </a:p>
+        </p:txBody>
+      </p:sp>
+      <p:sp>
+        <p:nvSpPr>
+          <p:cNvPr id="22" name="card-66"/>
+          <p:cNvSpPr/>
+          <p:nvPr/>
+        </p:nvSpPr>
+        <p:spPr>
+          <a:xfrm>
+            <a:off x="548640" y="3657600"/>
+            <a:ext cx="2606040" cy="2103120"/>
+          </a:xfrm>
+          <a:prstGeom prst="roundRect">
+            <a:avLst>
+              <a:gd name="adj" fmla="val 5217"/>
+            </a:avLst>
+          </a:prstGeom>
+          <a:solidFill>
+            <a:srgbClr val="F3F5F8"/>
+          </a:solidFill>
+          <a:ln w="12700">
+            <a:solidFill>
+              <a:srgbClr val="F3F5F8"/>
+            </a:solidFill>
+            <a:prstDash val="solid"/>
+          </a:ln>
+        </p:spPr>
+      </p:sp>
+      <p:sp>
+        <p:nvSpPr>
+          <p:cNvPr id="23" name="Text 21"/>
+          <p:cNvSpPr txBox="1"/>
+          <p:nvPr/>
+        </p:nvSpPr>
+        <p:spPr>
+          <a:xfrm>
+            <a:off x="777240" y="3840480"/>
+            <a:ext cx="2194560" cy="411480"/>
           </a:xfrm>
           <a:prstGeom prst="rect">
             <a:avLst/>
@@ -5479,139 +5768,27 @@
               <a:buNone/>
             </a:pPr>
             <a:r>
-              <a:rPr lang="en-US" sz="1200" b="1" spc="300" kern="0" dirty="0">
-                <a:solidFill>
-                  <a:srgbClr val="CFA04A"/>
-                </a:solidFill>
-              </a:rPr>
-              <a:t>REGRAS</a:t>
-            </a:r>
-            <a:endParaRPr lang="en-US" sz="1200" dirty="0"/>
-          </a:p>
-        </p:txBody>
-      </p:sp>
-      <p:sp>
-        <p:nvSpPr>
-          <p:cNvPr id="9" name="Text 6"/>
-          <p:cNvSpPr txBox="1"/>
-          <p:nvPr/>
-        </p:nvSpPr>
-        <p:spPr>
-          <a:xfrm>
-            <a:off x="6903720" y="2148840"/>
-            <a:ext cx="4434840" cy="3566160"/>
-          </a:xfrm>
-          <a:prstGeom prst="rect">
-            <a:avLst/>
-          </a:prstGeom>
-          <a:noFill/>
-          <a:ln/>
-        </p:spPr>
-        <p:txBody>
-          <a:bodyPr wrap="square" lIns="0" tIns="0" rIns="0" bIns="0" rtlCol="0" anchor="t"/>
-          <a:lstStyle/>
-          <a:p>
-            <a:pPr marL="342900" indent="-342900">
-              <a:spcAft>
-                <a:spcPts val="1000"/>
-              </a:spcAft>
-              <a:buSzPct val="100000"/>
-              <a:buChar char="•"/>
-            </a:pPr>
-            <a:r>
-              <a:rPr lang="en-US" sz="1500" dirty="0">
-                <a:solidFill>
-                  <a:srgbClr val="E6E9EF"/>
-                </a:solidFill>
-              </a:rPr>
-              <a:t>Usa só os textos oficiais da Biblioteca Legal</a:t>
-            </a:r>
-            <a:endParaRPr lang="en-US" sz="1500" dirty="0"/>
-          </a:p>
-          <a:p>
-            <a:pPr marL="342900" indent="-342900">
-              <a:spcAft>
-                <a:spcPts val="1000"/>
-              </a:spcAft>
-              <a:buSzPct val="100000"/>
-              <a:buChar char="•"/>
-            </a:pPr>
-            <a:r>
-              <a:rPr lang="en-US" sz="1500" dirty="0">
-                <a:solidFill>
-                  <a:srgbClr val="E6E9EF"/>
-                </a:solidFill>
-              </a:rPr>
-              <a:t>O resultado é sempre um rascunho a aprovar por uma pessoa</a:t>
-            </a:r>
-            <a:endParaRPr lang="en-US" sz="1500" dirty="0"/>
-          </a:p>
-          <a:p>
-            <a:pPr marL="342900" indent="-342900">
-              <a:spcAft>
-                <a:spcPts val="1000"/>
-              </a:spcAft>
-              <a:buSzPct val="100000"/>
-              <a:buChar char="•"/>
-            </a:pPr>
-            <a:r>
-              <a:rPr lang="en-US" sz="1500" dirty="0">
-                <a:solidFill>
-                  <a:srgbClr val="E6E9EF"/>
-                </a:solidFill>
-              </a:rPr>
-              <a:t>Não recebe contactos, inventário de ativos nem evidências restritas</a:t>
-            </a:r>
-            <a:endParaRPr lang="en-US" sz="1500" dirty="0"/>
-          </a:p>
-          <a:p>
-            <a:pPr marL="342900" indent="-342900">
-              <a:spcAft>
-                <a:spcPts val="1000"/>
-              </a:spcAft>
-              <a:buSzPct val="100000"/>
-              <a:buChar char="•"/>
-            </a:pPr>
-            <a:r>
-              <a:rPr lang="en-US" sz="1500" dirty="0">
-                <a:solidFill>
-                  <a:srgbClr val="E6E9EF"/>
-                </a:solidFill>
-              </a:rPr>
-              <a:t>Cada pedido fica na auditoria e conta para a quota</a:t>
-            </a:r>
-            <a:endParaRPr lang="en-US" sz="1500" dirty="0"/>
-          </a:p>
-          <a:p>
-            <a:pPr marL="342900" indent="-342900">
-              <a:spcAft>
-                <a:spcPts val="1000"/>
-              </a:spcAft>
-              <a:buSzPct val="100000"/>
-              <a:buChar char="•"/>
-            </a:pPr>
-            <a:r>
-              <a:rPr lang="en-US" sz="1500" dirty="0">
-                <a:solidFill>
-                  <a:srgbClr val="E6E9EF"/>
-                </a:solidFill>
-              </a:rPr>
-              <a:t>Motor escolhido pelo administrador: Claude ou Base44</a:t>
-            </a:r>
-            <a:endParaRPr lang="en-US" sz="1500" dirty="0"/>
-          </a:p>
-        </p:txBody>
-      </p:sp>
-      <p:sp>
-        <p:nvSpPr>
-          <p:cNvPr id="10" name="Text 7"/>
-          <p:cNvSpPr txBox="1"/>
-          <p:nvPr/>
-        </p:nvSpPr>
-        <p:spPr>
-          <a:xfrm>
-            <a:off x="548640" y="5486400"/>
-            <a:ext cx="5486400" cy="320040"/>
+              <a:rPr lang="en-US" sz="1700" b="1" dirty="0">
+                <a:solidFill>
+                  <a:srgbClr val="070A13"/>
+                </a:solidFill>
+              </a:rPr>
+              <a:t>Avaliação</a:t>
+            </a:r>
+            <a:endParaRPr lang="en-US" sz="1700" dirty="0"/>
+          </a:p>
+        </p:txBody>
+      </p:sp>
+      <p:sp>
+        <p:nvSpPr>
+          <p:cNvPr id="24" name="Text 22"/>
+          <p:cNvSpPr txBox="1"/>
+          <p:nvPr/>
+        </p:nvSpPr>
+        <p:spPr>
+          <a:xfrm>
+            <a:off x="777240" y="4343400"/>
+            <a:ext cx="2194560" cy="1280160"/>
           </a:xfrm>
           <a:prstGeom prst="rect">
             <a:avLst/>
@@ -5627,14 +5804,386 @@
               <a:buNone/>
             </a:pPr>
             <a:r>
-              <a:rPr lang="en-US" sz="1200" dirty="0">
+              <a:rPr lang="en-US" sz="1300" dirty="0">
                 <a:solidFill>
                   <a:srgbClr val="5B6474"/>
                 </a:solidFill>
               </a:rPr>
-              <a:t>Incluído na licença Enterprise.</a:t>
-            </a:r>
-            <a:endParaRPr lang="en-US" sz="1200" dirty="0"/>
+              <a:t>O consultor cria-a com os referenciais (ex.: NIS2 e ISO/IEC 27001)</a:t>
+            </a:r>
+            <a:endParaRPr lang="en-US" sz="1300" dirty="0"/>
+          </a:p>
+        </p:txBody>
+      </p:sp>
+      <p:sp>
+        <p:nvSpPr>
+          <p:cNvPr id="25" name="seta-0"/>
+          <p:cNvSpPr/>
+          <p:nvPr/>
+        </p:nvSpPr>
+        <p:spPr>
+          <a:xfrm>
+            <a:off x="3182112" y="4526280"/>
+            <a:ext cx="128016" cy="320040"/>
+          </a:xfrm>
+          <a:prstGeom prst="chevron">
+            <a:avLst/>
+          </a:prstGeom>
+          <a:solidFill>
+            <a:srgbClr val="CFA04A"/>
+          </a:solidFill>
+          <a:ln w="12700">
+            <a:solidFill>
+              <a:srgbClr val="CFA04A"/>
+            </a:solidFill>
+            <a:prstDash val="solid"/>
+          </a:ln>
+        </p:spPr>
+      </p:sp>
+      <p:sp>
+        <p:nvSpPr>
+          <p:cNvPr id="26" name="card-67"/>
+          <p:cNvSpPr/>
+          <p:nvPr/>
+        </p:nvSpPr>
+        <p:spPr>
+          <a:xfrm>
+            <a:off x="3337560" y="3657600"/>
+            <a:ext cx="2606040" cy="2103120"/>
+          </a:xfrm>
+          <a:prstGeom prst="roundRect">
+            <a:avLst>
+              <a:gd name="adj" fmla="val 5217"/>
+            </a:avLst>
+          </a:prstGeom>
+          <a:solidFill>
+            <a:srgbClr val="F3F5F8"/>
+          </a:solidFill>
+          <a:ln w="12700">
+            <a:solidFill>
+              <a:srgbClr val="F3F5F8"/>
+            </a:solidFill>
+            <a:prstDash val="solid"/>
+          </a:ln>
+        </p:spPr>
+      </p:sp>
+      <p:sp>
+        <p:nvSpPr>
+          <p:cNvPr id="27" name="Text 25"/>
+          <p:cNvSpPr txBox="1"/>
+          <p:nvPr/>
+        </p:nvSpPr>
+        <p:spPr>
+          <a:xfrm>
+            <a:off x="3566160" y="3840480"/>
+            <a:ext cx="2194560" cy="411480"/>
+          </a:xfrm>
+          <a:prstGeom prst="rect">
+            <a:avLst/>
+          </a:prstGeom>
+          <a:noFill/>
+          <a:ln/>
+        </p:spPr>
+        <p:txBody>
+          <a:bodyPr wrap="square" lIns="0" tIns="0" rIns="0" bIns="0" rtlCol="0" anchor="t"/>
+          <a:lstStyle/>
+          <a:p>
+            <a:pPr indent="0" marL="0">
+              <a:buNone/>
+            </a:pPr>
+            <a:r>
+              <a:rPr lang="en-US" sz="1700" b="1" dirty="0">
+                <a:solidFill>
+                  <a:srgbClr val="070A13"/>
+                </a:solidFill>
+              </a:rPr>
+              <a:t>Respostas</a:t>
+            </a:r>
+            <a:endParaRPr lang="en-US" sz="1700" dirty="0"/>
+          </a:p>
+        </p:txBody>
+      </p:sp>
+      <p:sp>
+        <p:nvSpPr>
+          <p:cNvPr id="28" name="Text 26"/>
+          <p:cNvSpPr txBox="1"/>
+          <p:nvPr/>
+        </p:nvSpPr>
+        <p:spPr>
+          <a:xfrm>
+            <a:off x="3566160" y="4343400"/>
+            <a:ext cx="2194560" cy="1280160"/>
+          </a:xfrm>
+          <a:prstGeom prst="rect">
+            <a:avLst/>
+          </a:prstGeom>
+          <a:noFill/>
+          <a:ln/>
+        </p:spPr>
+        <p:txBody>
+          <a:bodyPr wrap="square" lIns="0" tIns="0" rIns="0" bIns="0" rtlCol="0" anchor="t"/>
+          <a:lstStyle/>
+          <a:p>
+            <a:pPr indent="0" marL="0">
+              <a:buNone/>
+            </a:pPr>
+            <a:r>
+              <a:rPr lang="en-US" sz="1300" dirty="0">
+                <a:solidFill>
+                  <a:srgbClr val="5B6474"/>
+                </a:solidFill>
+              </a:rPr>
+              <a:t>A equipa responde e liga evidências a cada pergunta</a:t>
+            </a:r>
+            <a:endParaRPr lang="en-US" sz="1300" dirty="0"/>
+          </a:p>
+        </p:txBody>
+      </p:sp>
+      <p:sp>
+        <p:nvSpPr>
+          <p:cNvPr id="29" name="seta-1"/>
+          <p:cNvSpPr/>
+          <p:nvPr/>
+        </p:nvSpPr>
+        <p:spPr>
+          <a:xfrm>
+            <a:off x="5971032" y="4526280"/>
+            <a:ext cx="128016" cy="320040"/>
+          </a:xfrm>
+          <a:prstGeom prst="chevron">
+            <a:avLst/>
+          </a:prstGeom>
+          <a:solidFill>
+            <a:srgbClr val="CFA04A"/>
+          </a:solidFill>
+          <a:ln w="12700">
+            <a:solidFill>
+              <a:srgbClr val="CFA04A"/>
+            </a:solidFill>
+            <a:prstDash val="solid"/>
+          </a:ln>
+        </p:spPr>
+      </p:sp>
+      <p:sp>
+        <p:nvSpPr>
+          <p:cNvPr id="30" name="card-68"/>
+          <p:cNvSpPr/>
+          <p:nvPr/>
+        </p:nvSpPr>
+        <p:spPr>
+          <a:xfrm>
+            <a:off x="6126480" y="3657600"/>
+            <a:ext cx="2606040" cy="2103120"/>
+          </a:xfrm>
+          <a:prstGeom prst="roundRect">
+            <a:avLst>
+              <a:gd name="adj" fmla="val 5217"/>
+            </a:avLst>
+          </a:prstGeom>
+          <a:solidFill>
+            <a:srgbClr val="F3F5F8"/>
+          </a:solidFill>
+          <a:ln w="12700">
+            <a:solidFill>
+              <a:srgbClr val="F3F5F8"/>
+            </a:solidFill>
+            <a:prstDash val="solid"/>
+          </a:ln>
+        </p:spPr>
+      </p:sp>
+      <p:sp>
+        <p:nvSpPr>
+          <p:cNvPr id="31" name="Text 29"/>
+          <p:cNvSpPr txBox="1"/>
+          <p:nvPr/>
+        </p:nvSpPr>
+        <p:spPr>
+          <a:xfrm>
+            <a:off x="6355080" y="3840480"/>
+            <a:ext cx="2194560" cy="411480"/>
+          </a:xfrm>
+          <a:prstGeom prst="rect">
+            <a:avLst/>
+          </a:prstGeom>
+          <a:noFill/>
+          <a:ln/>
+        </p:spPr>
+        <p:txBody>
+          <a:bodyPr wrap="square" lIns="0" tIns="0" rIns="0" bIns="0" rtlCol="0" anchor="t"/>
+          <a:lstStyle/>
+          <a:p>
+            <a:pPr indent="0" marL="0">
+              <a:buNone/>
+            </a:pPr>
+            <a:r>
+              <a:rPr lang="en-US" sz="1700" b="1" dirty="0">
+                <a:solidFill>
+                  <a:srgbClr val="070A13"/>
+                </a:solidFill>
+              </a:rPr>
+              <a:t>Pontuação</a:t>
+            </a:r>
+            <a:endParaRPr lang="en-US" sz="1700" dirty="0"/>
+          </a:p>
+        </p:txBody>
+      </p:sp>
+      <p:sp>
+        <p:nvSpPr>
+          <p:cNvPr id="32" name="Text 30"/>
+          <p:cNvSpPr txBox="1"/>
+          <p:nvPr/>
+        </p:nvSpPr>
+        <p:spPr>
+          <a:xfrm>
+            <a:off x="6355080" y="4343400"/>
+            <a:ext cx="2194560" cy="1280160"/>
+          </a:xfrm>
+          <a:prstGeom prst="rect">
+            <a:avLst/>
+          </a:prstGeom>
+          <a:noFill/>
+          <a:ln/>
+        </p:spPr>
+        <p:txBody>
+          <a:bodyPr wrap="square" lIns="0" tIns="0" rIns="0" bIns="0" rtlCol="0" anchor="t"/>
+          <a:lstStyle/>
+          <a:p>
+            <a:pPr indent="0" marL="0">
+              <a:buNone/>
+            </a:pPr>
+            <a:r>
+              <a:rPr lang="en-US" sz="1300" dirty="0">
+                <a:solidFill>
+                  <a:srgbClr val="5B6474"/>
+                </a:solidFill>
+              </a:rPr>
+              <a:t>Por domínio, por referencial e global</a:t>
+            </a:r>
+            <a:endParaRPr lang="en-US" sz="1300" dirty="0"/>
+          </a:p>
+        </p:txBody>
+      </p:sp>
+      <p:sp>
+        <p:nvSpPr>
+          <p:cNvPr id="33" name="seta-2"/>
+          <p:cNvSpPr/>
+          <p:nvPr/>
+        </p:nvSpPr>
+        <p:spPr>
+          <a:xfrm>
+            <a:off x="8759952" y="4526280"/>
+            <a:ext cx="128016" cy="320040"/>
+          </a:xfrm>
+          <a:prstGeom prst="chevron">
+            <a:avLst/>
+          </a:prstGeom>
+          <a:solidFill>
+            <a:srgbClr val="CFA04A"/>
+          </a:solidFill>
+          <a:ln w="12700">
+            <a:solidFill>
+              <a:srgbClr val="CFA04A"/>
+            </a:solidFill>
+            <a:prstDash val="solid"/>
+          </a:ln>
+        </p:spPr>
+      </p:sp>
+      <p:sp>
+        <p:nvSpPr>
+          <p:cNvPr id="34" name="card-69"/>
+          <p:cNvSpPr/>
+          <p:nvPr/>
+        </p:nvSpPr>
+        <p:spPr>
+          <a:xfrm>
+            <a:off x="8915400" y="3657600"/>
+            <a:ext cx="2606040" cy="2103120"/>
+          </a:xfrm>
+          <a:prstGeom prst="roundRect">
+            <a:avLst>
+              <a:gd name="adj" fmla="val 5217"/>
+            </a:avLst>
+          </a:prstGeom>
+          <a:solidFill>
+            <a:srgbClr val="E6F5F3"/>
+          </a:solidFill>
+          <a:ln w="12700">
+            <a:solidFill>
+              <a:srgbClr val="E6F5F3"/>
+            </a:solidFill>
+            <a:prstDash val="solid"/>
+          </a:ln>
+        </p:spPr>
+      </p:sp>
+      <p:sp>
+        <p:nvSpPr>
+          <p:cNvPr id="35" name="Text 33"/>
+          <p:cNvSpPr txBox="1"/>
+          <p:nvPr/>
+        </p:nvSpPr>
+        <p:spPr>
+          <a:xfrm>
+            <a:off x="9144000" y="3840480"/>
+            <a:ext cx="2194560" cy="411480"/>
+          </a:xfrm>
+          <a:prstGeom prst="rect">
+            <a:avLst/>
+          </a:prstGeom>
+          <a:noFill/>
+          <a:ln/>
+        </p:spPr>
+        <p:txBody>
+          <a:bodyPr wrap="square" lIns="0" tIns="0" rIns="0" bIns="0" rtlCol="0" anchor="t"/>
+          <a:lstStyle/>
+          <a:p>
+            <a:pPr indent="0" marL="0">
+              <a:buNone/>
+            </a:pPr>
+            <a:r>
+              <a:rPr lang="en-US" sz="1700" b="1" dirty="0">
+                <a:solidFill>
+                  <a:srgbClr val="17766C"/>
+                </a:solidFill>
+              </a:rPr>
+              <a:t>Plano de ação</a:t>
+            </a:r>
+            <a:endParaRPr lang="en-US" sz="1700" dirty="0"/>
+          </a:p>
+        </p:txBody>
+      </p:sp>
+      <p:sp>
+        <p:nvSpPr>
+          <p:cNvPr id="36" name="Text 34"/>
+          <p:cNvSpPr txBox="1"/>
+          <p:nvPr/>
+        </p:nvSpPr>
+        <p:spPr>
+          <a:xfrm>
+            <a:off x="9144000" y="4343400"/>
+            <a:ext cx="2194560" cy="1280160"/>
+          </a:xfrm>
+          <a:prstGeom prst="rect">
+            <a:avLst/>
+          </a:prstGeom>
+          <a:noFill/>
+          <a:ln/>
+        </p:spPr>
+        <p:txBody>
+          <a:bodyPr wrap="square" lIns="0" tIns="0" rIns="0" bIns="0" rtlCol="0" anchor="t"/>
+          <a:lstStyle/>
+          <a:p>
+            <a:pPr indent="0" marL="0">
+              <a:buNone/>
+            </a:pPr>
+            <a:r>
+              <a:rPr lang="en-US" sz="1300" dirty="0">
+                <a:solidFill>
+                  <a:srgbClr val="5B6474"/>
+                </a:solidFill>
+              </a:rPr>
+              <a:t>Recomendações com prioridade, esforço e prazo, que viram tarefas</a:t>
+            </a:r>
+            <a:endParaRPr lang="en-US" sz="1300" dirty="0"/>
           </a:p>
         </p:txBody>
       </p:sp>
@@ -5713,89 +6262,291 @@
           <p:cNvPr id="2" name="Text 0"/>
           <p:cNvSpPr/>
           <p:nvPr>
-            <p:ph idx="101" type="body" hasCustomPrompt="1"/>
+            <p:ph idx="101" type="title" hasCustomPrompt="1"/>
           </p:nvPr>
         </p:nvSpPr>
         <p:spPr>
           <a:xfrm>
-            <a:off x="731520" y="2377440"/>
-            <a:ext cx="10058400" cy="365760"/>
-          </a:xfrm>
-          <a:prstGeom prst="rect">
-            <a:avLst/>
-          </a:prstGeom>
-          <a:noFill/>
-          <a:ln/>
-        </p:spPr>
-        <p:txBody>
-          <a:bodyPr wrap="square" lIns="0" tIns="0" rIns="0" bIns="0" rtlCol="0"/>
+            <a:off x="548640" y="411480"/>
+            <a:ext cx="11064240" cy="822960"/>
+          </a:xfrm>
+          <a:prstGeom prst="rect">
+            <a:avLst/>
+          </a:prstGeom>
+          <a:noFill/>
+          <a:ln/>
+        </p:spPr>
+        <p:txBody>
+          <a:bodyPr wrap="square" lIns="0" tIns="0" rIns="0" bIns="0" rtlCol="0" anchor="t"/>
+          <a:lstStyle/>
+          <a:p>
+            <a:pPr algn="l" indent="0" marL="0">
+              <a:buNone/>
+            </a:pPr>
+            <a:r>
+              <a:rPr lang="en-US" sz="3200" b="1" dirty="0">
+                <a:solidFill>
+                  <a:schemeClr val="tx1"/>
+                </a:solidFill>
+              </a:rPr>
+              <a:t>O assistente de IA prepara rascunhos, não decide</a:t>
+            </a:r>
+            <a:endParaRPr lang="en-US" sz="3200" dirty="0"/>
+          </a:p>
+        </p:txBody>
+      </p:sp>
+      <p:sp>
+        <p:nvSpPr>
+          <p:cNvPr id="3" name="icon-bg-70"/>
+          <p:cNvSpPr/>
+          <p:nvPr/>
+        </p:nvSpPr>
+        <p:spPr>
+          <a:xfrm>
+            <a:off x="548640" y="1417320"/>
+            <a:ext cx="731520" cy="731520"/>
+          </a:xfrm>
+          <a:prstGeom prst="ellipse">
+            <a:avLst/>
+          </a:prstGeom>
+          <a:solidFill>
+            <a:schemeClr val="tx1"/>
+          </a:solidFill>
+          <a:ln w="12700">
+            <a:solidFill>
+              <a:schemeClr val="tx1"/>
+            </a:solidFill>
+            <a:prstDash val="solid"/>
+          </a:ln>
+        </p:spPr>
+      </p:sp>
+      <p:pic>
+        <p:nvPicPr>
+          <p:cNvPr id="4" name="icon-70" descr="preencoded.png">    </p:cNvPr>
+          <p:cNvPicPr>
+            <a:picLocks noChangeAspect="1"/>
+          </p:cNvPicPr>
+          <p:nvPr/>
+        </p:nvPicPr>
+        <p:blipFill>
+          <a:blip r:embed="rId1"/>
+          <a:stretch>
+            <a:fillRect/>
+          </a:stretch>
+        </p:blipFill>
+        <p:spPr>
+          <a:xfrm>
+            <a:off x="709574" y="1578254"/>
+            <a:ext cx="409651" cy="409651"/>
+          </a:xfrm>
+          <a:prstGeom prst="rect">
+            <a:avLst/>
+          </a:prstGeom>
+        </p:spPr>
+      </p:pic>
+      <p:sp>
+        <p:nvSpPr>
+          <p:cNvPr id="5" name="Text 2"/>
+          <p:cNvSpPr txBox="1"/>
+          <p:nvPr/>
+        </p:nvSpPr>
+        <p:spPr>
+          <a:xfrm>
+            <a:off x="1463040" y="1508760"/>
+            <a:ext cx="4572000" cy="594360"/>
+          </a:xfrm>
+          <a:prstGeom prst="rect">
+            <a:avLst/>
+          </a:prstGeom>
+          <a:noFill/>
+          <a:ln/>
+        </p:spPr>
+        <p:txBody>
+          <a:bodyPr wrap="square" lIns="0" tIns="0" rIns="0" bIns="0" rtlCol="0" anchor="t"/>
           <a:lstStyle/>
           <a:p>
             <a:pPr indent="0" marL="0">
               <a:buNone/>
             </a:pPr>
             <a:r>
-              <a:rPr lang="en-US" sz="1400" b="1" spc="400" kern="0" dirty="0">
-                <a:solidFill>
-                  <a:schemeClr val="accent1"/>
-                </a:solidFill>
-              </a:rPr>
-              <a:t>PARTE 3</a:t>
-            </a:r>
-            <a:endParaRPr lang="en-US" sz="1400" dirty="0"/>
-          </a:p>
-        </p:txBody>
-      </p:sp>
-      <p:sp>
-        <p:nvSpPr>
-          <p:cNvPr id="3" name="Text 0"/>
+              <a:rPr lang="en-US" sz="1700" b="1" dirty="0">
+                <a:solidFill>
+                  <a:srgbClr val="111827"/>
+                </a:solidFill>
+              </a:rPr>
+              <a:t>Ativo só onde há documentos para construir ou analisar</a:t>
+            </a:r>
+            <a:endParaRPr lang="en-US" sz="1700" dirty="0"/>
+          </a:p>
+        </p:txBody>
+      </p:sp>
+      <p:sp>
+        <p:nvSpPr>
+          <p:cNvPr id="6" name="Text 3"/>
+          <p:cNvSpPr txBox="1"/>
+          <p:nvPr/>
+        </p:nvSpPr>
+        <p:spPr>
+          <a:xfrm>
+            <a:off x="548640" y="2377440"/>
+            <a:ext cx="5486400" cy="2743200"/>
+          </a:xfrm>
+          <a:prstGeom prst="rect">
+            <a:avLst/>
+          </a:prstGeom>
+          <a:noFill/>
+          <a:ln/>
+        </p:spPr>
+        <p:txBody>
+          <a:bodyPr wrap="square" lIns="0" tIns="0" rIns="0" bIns="0" rtlCol="0" anchor="t"/>
+          <a:lstStyle/>
+          <a:p>
+            <a:pPr marL="342900" indent="-342900">
+              <a:spcAft>
+                <a:spcPts val="800"/>
+              </a:spcAft>
+              <a:buSzPct val="100000"/>
+              <a:buChar char="•"/>
+            </a:pPr>
+            <a:r>
+              <a:rPr lang="en-US" sz="1500" dirty="0">
+                <a:solidFill>
+                  <a:srgbClr val="111827"/>
+                </a:solidFill>
+              </a:rPr>
+              <a:t>Políticas, procedimentos e planos de evidências por medida</a:t>
+            </a:r>
+            <a:endParaRPr lang="en-US" sz="1500" dirty="0"/>
+          </a:p>
+          <a:p>
+            <a:pPr marL="342900" indent="-342900">
+              <a:spcAft>
+                <a:spcPts val="800"/>
+              </a:spcAft>
+              <a:buSzPct val="100000"/>
+              <a:buChar char="•"/>
+            </a:pPr>
+            <a:r>
+              <a:rPr lang="en-US" sz="1500" dirty="0">
+                <a:solidFill>
+                  <a:srgbClr val="111827"/>
+                </a:solidFill>
+              </a:rPr>
+              <a:t>Análise de evidências face ao critério oficial</a:t>
+            </a:r>
+            <a:endParaRPr lang="en-US" sz="1500" dirty="0"/>
+          </a:p>
+          <a:p>
+            <a:pPr marL="342900" indent="-342900">
+              <a:spcAft>
+                <a:spcPts val="800"/>
+              </a:spcAft>
+              <a:buSzPct val="100000"/>
+              <a:buChar char="•"/>
+            </a:pPr>
+            <a:r>
+              <a:rPr lang="en-US" sz="1500" dirty="0">
+                <a:solidFill>
+                  <a:srgbClr val="111827"/>
+                </a:solidFill>
+              </a:rPr>
+              <a:t>Classificação de documentos carregados</a:t>
+            </a:r>
+            <a:endParaRPr lang="en-US" sz="1500" dirty="0"/>
+          </a:p>
+          <a:p>
+            <a:pPr marL="342900" indent="-342900">
+              <a:spcAft>
+                <a:spcPts val="800"/>
+              </a:spcAft>
+              <a:buSzPct val="100000"/>
+              <a:buChar char="•"/>
+            </a:pPr>
+            <a:r>
+              <a:rPr lang="en-US" sz="1500" dirty="0">
+                <a:solidFill>
+                  <a:srgbClr val="111827"/>
+                </a:solidFill>
+              </a:rPr>
+              <a:t>Notificações de incidentes e relatório anual</a:t>
+            </a:r>
+            <a:endParaRPr lang="en-US" sz="1500" dirty="0"/>
+          </a:p>
+          <a:p>
+            <a:pPr marL="342900" indent="-342900">
+              <a:spcAft>
+                <a:spcPts val="800"/>
+              </a:spcAft>
+              <a:buSzPct val="100000"/>
+              <a:buChar char="•"/>
+            </a:pPr>
+            <a:r>
+              <a:rPr lang="en-US" sz="1500" dirty="0">
+                <a:solidFill>
+                  <a:srgbClr val="111827"/>
+                </a:solidFill>
+              </a:rPr>
+              <a:t>Questionários a fornecedores e leitura de respostas</a:t>
+            </a:r>
+            <a:endParaRPr lang="en-US" sz="1500" dirty="0"/>
+          </a:p>
+          <a:p>
+            <a:pPr marL="342900" indent="-342900">
+              <a:spcAft>
+                <a:spcPts val="800"/>
+              </a:spcAft>
+              <a:buSzPct val="100000"/>
+              <a:buChar char="•"/>
+            </a:pPr>
+            <a:r>
+              <a:rPr lang="en-US" sz="1500" dirty="0">
+                <a:solidFill>
+                  <a:srgbClr val="111827"/>
+                </a:solidFill>
+              </a:rPr>
+              <a:t>Recomendações para o plano de ação</a:t>
+            </a:r>
+            <a:endParaRPr lang="en-US" sz="1500" dirty="0"/>
+          </a:p>
+        </p:txBody>
+      </p:sp>
+      <p:sp>
+        <p:nvSpPr>
+          <p:cNvPr id="7" name="card-71"/>
           <p:cNvSpPr/>
-          <p:nvPr>
-            <p:ph idx="102" type="title" hasCustomPrompt="1"/>
-          </p:nvPr>
-        </p:nvSpPr>
-        <p:spPr>
-          <a:xfrm>
-            <a:off x="731520" y="2788920"/>
-            <a:ext cx="10515600" cy="1097280"/>
-          </a:xfrm>
-          <a:prstGeom prst="rect">
-            <a:avLst/>
-          </a:prstGeom>
-          <a:noFill/>
-          <a:ln/>
-        </p:spPr>
-        <p:txBody>
-          <a:bodyPr wrap="square" lIns="0" tIns="0" rIns="0" bIns="0" rtlCol="0" anchor="t"/>
-          <a:lstStyle/>
-          <a:p>
-            <a:pPr algn="l" indent="0" marL="0">
-              <a:buNone/>
-            </a:pPr>
-            <a:r>
-              <a:rPr lang="en-US" sz="4000" b="1" dirty="0">
-                <a:solidFill>
-                  <a:schemeClr val="bg1"/>
-                </a:solidFill>
-              </a:rPr>
-              <a:t>Guia por referencial</a:t>
-            </a:r>
-            <a:endParaRPr lang="en-US" sz="4000" dirty="0"/>
-          </a:p>
-        </p:txBody>
-      </p:sp>
-      <p:sp>
-        <p:nvSpPr>
-          <p:cNvPr id="4" name="Text 0"/>
-          <p:cNvSpPr/>
-          <p:nvPr>
-            <p:ph idx="103" type="body" hasCustomPrompt="1"/>
-          </p:nvPr>
-        </p:nvSpPr>
-        <p:spPr>
-          <a:xfrm>
-            <a:off x="731520" y="3931920"/>
-            <a:ext cx="9144000" cy="822960"/>
+          <p:nvPr/>
+        </p:nvSpPr>
+        <p:spPr>
+          <a:xfrm>
+            <a:off x="6583680" y="1417320"/>
+            <a:ext cx="5029200" cy="4526280"/>
+          </a:xfrm>
+          <a:prstGeom prst="roundRect">
+            <a:avLst>
+              <a:gd name="adj" fmla="val 2424"/>
+            </a:avLst>
+          </a:prstGeom>
+          <a:solidFill>
+            <a:srgbClr val="070A13"/>
+          </a:solidFill>
+          <a:ln w="12700">
+            <a:solidFill>
+              <a:srgbClr val="070A13"/>
+            </a:solidFill>
+            <a:prstDash val="solid"/>
+          </a:ln>
+        </p:spPr>
+      </p:sp>
+      <p:sp>
+        <p:nvSpPr>
+          <p:cNvPr id="8" name="Text 5"/>
+          <p:cNvSpPr txBox="1"/>
+          <p:nvPr/>
+        </p:nvSpPr>
+        <p:spPr>
+          <a:xfrm>
+            <a:off x="6903720" y="1691640"/>
+            <a:ext cx="4389120" cy="320040"/>
           </a:xfrm>
           <a:prstGeom prst="rect">
             <a:avLst/>
@@ -5811,14 +6562,162 @@
               <a:buNone/>
             </a:pPr>
             <a:r>
-              <a:rPr lang="en-US" sz="1800" dirty="0">
-                <a:solidFill>
-                  <a:srgbClr val="C9CFDA"/>
-                </a:solidFill>
-              </a:rPr>
-              <a:t>RJC e NIS2, ISO/IEC 27001 e os restantes referenciais da plataforma</a:t>
-            </a:r>
-            <a:endParaRPr lang="en-US" sz="1800" dirty="0"/>
+              <a:rPr lang="en-US" sz="1200" b="1" spc="300" kern="0" dirty="0">
+                <a:solidFill>
+                  <a:srgbClr val="CFA04A"/>
+                </a:solidFill>
+              </a:rPr>
+              <a:t>REGRAS</a:t>
+            </a:r>
+            <a:endParaRPr lang="en-US" sz="1200" dirty="0"/>
+          </a:p>
+        </p:txBody>
+      </p:sp>
+      <p:sp>
+        <p:nvSpPr>
+          <p:cNvPr id="9" name="Text 6"/>
+          <p:cNvSpPr txBox="1"/>
+          <p:nvPr/>
+        </p:nvSpPr>
+        <p:spPr>
+          <a:xfrm>
+            <a:off x="6903720" y="2148840"/>
+            <a:ext cx="4434840" cy="3566160"/>
+          </a:xfrm>
+          <a:prstGeom prst="rect">
+            <a:avLst/>
+          </a:prstGeom>
+          <a:noFill/>
+          <a:ln/>
+        </p:spPr>
+        <p:txBody>
+          <a:bodyPr wrap="square" lIns="0" tIns="0" rIns="0" bIns="0" rtlCol="0" anchor="t"/>
+          <a:lstStyle/>
+          <a:p>
+            <a:pPr marL="342900" indent="-342900">
+              <a:spcAft>
+                <a:spcPts val="1000"/>
+              </a:spcAft>
+              <a:buSzPct val="100000"/>
+              <a:buChar char="•"/>
+            </a:pPr>
+            <a:r>
+              <a:rPr lang="en-US" sz="1500" dirty="0">
+                <a:solidFill>
+                  <a:srgbClr val="E6E9EF"/>
+                </a:solidFill>
+              </a:rPr>
+              <a:t>Usa só os textos oficiais da Biblioteca Legal</a:t>
+            </a:r>
+            <a:endParaRPr lang="en-US" sz="1500" dirty="0"/>
+          </a:p>
+          <a:p>
+            <a:pPr marL="342900" indent="-342900">
+              <a:spcAft>
+                <a:spcPts val="1000"/>
+              </a:spcAft>
+              <a:buSzPct val="100000"/>
+              <a:buChar char="•"/>
+            </a:pPr>
+            <a:r>
+              <a:rPr lang="en-US" sz="1500" dirty="0">
+                <a:solidFill>
+                  <a:srgbClr val="E6E9EF"/>
+                </a:solidFill>
+              </a:rPr>
+              <a:t>O resultado é sempre um rascunho a aprovar por uma pessoa</a:t>
+            </a:r>
+            <a:endParaRPr lang="en-US" sz="1500" dirty="0"/>
+          </a:p>
+          <a:p>
+            <a:pPr marL="342900" indent="-342900">
+              <a:spcAft>
+                <a:spcPts val="1000"/>
+              </a:spcAft>
+              <a:buSzPct val="100000"/>
+              <a:buChar char="•"/>
+            </a:pPr>
+            <a:r>
+              <a:rPr lang="en-US" sz="1500" dirty="0">
+                <a:solidFill>
+                  <a:srgbClr val="E6E9EF"/>
+                </a:solidFill>
+              </a:rPr>
+              <a:t>Não recebe contactos, inventário de ativos nem evidências restritas</a:t>
+            </a:r>
+            <a:endParaRPr lang="en-US" sz="1500" dirty="0"/>
+          </a:p>
+          <a:p>
+            <a:pPr marL="342900" indent="-342900">
+              <a:spcAft>
+                <a:spcPts val="1000"/>
+              </a:spcAft>
+              <a:buSzPct val="100000"/>
+              <a:buChar char="•"/>
+            </a:pPr>
+            <a:r>
+              <a:rPr lang="en-US" sz="1500" dirty="0">
+                <a:solidFill>
+                  <a:srgbClr val="E6E9EF"/>
+                </a:solidFill>
+              </a:rPr>
+              <a:t>Cada pedido fica na auditoria e conta para a quota (máximo de 30 por minuto)</a:t>
+            </a:r>
+            <a:endParaRPr lang="en-US" sz="1500" dirty="0"/>
+          </a:p>
+          <a:p>
+            <a:pPr marL="342900" indent="-342900">
+              <a:spcAft>
+                <a:spcPts val="1000"/>
+              </a:spcAft>
+              <a:buSzPct val="100000"/>
+              <a:buChar char="•"/>
+            </a:pPr>
+            <a:r>
+              <a:rPr lang="en-US" sz="1500" dirty="0">
+                <a:solidFill>
+                  <a:srgbClr val="E6E9EF"/>
+                </a:solidFill>
+              </a:rPr>
+              <a:t>Motor escolhido pelo administrador: Claude ou Base44</a:t>
+            </a:r>
+            <a:endParaRPr lang="en-US" sz="1500" dirty="0"/>
+          </a:p>
+        </p:txBody>
+      </p:sp>
+      <p:sp>
+        <p:nvSpPr>
+          <p:cNvPr id="10" name="Text 7"/>
+          <p:cNvSpPr txBox="1"/>
+          <p:nvPr/>
+        </p:nvSpPr>
+        <p:spPr>
+          <a:xfrm>
+            <a:off x="548640" y="5486400"/>
+            <a:ext cx="5486400" cy="320040"/>
+          </a:xfrm>
+          <a:prstGeom prst="rect">
+            <a:avLst/>
+          </a:prstGeom>
+          <a:noFill/>
+          <a:ln/>
+        </p:spPr>
+        <p:txBody>
+          <a:bodyPr wrap="square" lIns="0" tIns="0" rIns="0" bIns="0" rtlCol="0" anchor="t"/>
+          <a:lstStyle/>
+          <a:p>
+            <a:pPr indent="0" marL="0">
+              <a:buNone/>
+            </a:pPr>
+            <a:r>
+              <a:rPr lang="en-US" sz="1200" dirty="0">
+                <a:solidFill>
+                  <a:srgbClr val="5B6474"/>
+                </a:solidFill>
+              </a:rPr>
+              <a:t>Incluído na licença Enterprise.</a:t>
+            </a:r>
+            <a:endParaRPr lang="en-US" sz="1200" dirty="0"/>
           </a:p>
         </p:txBody>
       </p:sp>
@@ -5834,7 +6733,7 @@
         </p:nvSpPr>
         <p:spPr>
           <a:xfrm>
-            <a:off x="731520" y="6263640"/>
+            <a:off x="548640" y="6309360"/>
             <a:ext cx="914400" cy="274320"/>
           </a:xfrm>
           <a:prstGeom prst="rect">
@@ -5852,7 +6751,7 @@
             <a:lvl1pPr>
               <a:defRPr sz="1000">
                 <a:solidFill>
-                  <a:srgbClr val="8892A6"/>
+                  <a:srgbClr val="5B6474"/>
                 </a:solidFill>
               </a:defRPr>
             </a:lvl1pPr>
@@ -5897,6 +6796,190 @@
           <p:cNvPr id="2" name="Text 0"/>
           <p:cNvSpPr/>
           <p:nvPr>
+            <p:ph idx="101" type="body" hasCustomPrompt="1"/>
+          </p:nvPr>
+        </p:nvSpPr>
+        <p:spPr>
+          <a:xfrm>
+            <a:off x="731520" y="2377440"/>
+            <a:ext cx="10058400" cy="365760"/>
+          </a:xfrm>
+          <a:prstGeom prst="rect">
+            <a:avLst/>
+          </a:prstGeom>
+          <a:noFill/>
+          <a:ln/>
+        </p:spPr>
+        <p:txBody>
+          <a:bodyPr wrap="square" lIns="0" tIns="0" rIns="0" bIns="0" rtlCol="0"/>
+          <a:lstStyle/>
+          <a:p>
+            <a:pPr indent="0" marL="0">
+              <a:buNone/>
+            </a:pPr>
+            <a:r>
+              <a:rPr lang="en-US" sz="1400" b="1" spc="400" kern="0" dirty="0">
+                <a:solidFill>
+                  <a:schemeClr val="accent1"/>
+                </a:solidFill>
+              </a:rPr>
+              <a:t>PARTE 3</a:t>
+            </a:r>
+            <a:endParaRPr lang="en-US" sz="1400" dirty="0"/>
+          </a:p>
+        </p:txBody>
+      </p:sp>
+      <p:sp>
+        <p:nvSpPr>
+          <p:cNvPr id="3" name="Text 0"/>
+          <p:cNvSpPr/>
+          <p:nvPr>
+            <p:ph idx="102" type="title" hasCustomPrompt="1"/>
+          </p:nvPr>
+        </p:nvSpPr>
+        <p:spPr>
+          <a:xfrm>
+            <a:off x="731520" y="2788920"/>
+            <a:ext cx="10515600" cy="1097280"/>
+          </a:xfrm>
+          <a:prstGeom prst="rect">
+            <a:avLst/>
+          </a:prstGeom>
+          <a:noFill/>
+          <a:ln/>
+        </p:spPr>
+        <p:txBody>
+          <a:bodyPr wrap="square" lIns="0" tIns="0" rIns="0" bIns="0" rtlCol="0" anchor="t"/>
+          <a:lstStyle/>
+          <a:p>
+            <a:pPr algn="l" indent="0" marL="0">
+              <a:buNone/>
+            </a:pPr>
+            <a:r>
+              <a:rPr lang="en-US" sz="4000" b="1" dirty="0">
+                <a:solidFill>
+                  <a:schemeClr val="bg1"/>
+                </a:solidFill>
+              </a:rPr>
+              <a:t>Guia por referencial</a:t>
+            </a:r>
+            <a:endParaRPr lang="en-US" sz="4000" dirty="0"/>
+          </a:p>
+        </p:txBody>
+      </p:sp>
+      <p:sp>
+        <p:nvSpPr>
+          <p:cNvPr id="4" name="Text 0"/>
+          <p:cNvSpPr/>
+          <p:nvPr>
+            <p:ph idx="103" type="body" hasCustomPrompt="1"/>
+          </p:nvPr>
+        </p:nvSpPr>
+        <p:spPr>
+          <a:xfrm>
+            <a:off x="731520" y="3931920"/>
+            <a:ext cx="9144000" cy="822960"/>
+          </a:xfrm>
+          <a:prstGeom prst="rect">
+            <a:avLst/>
+          </a:prstGeom>
+          <a:noFill/>
+          <a:ln/>
+        </p:spPr>
+        <p:txBody>
+          <a:bodyPr wrap="square" lIns="0" tIns="0" rIns="0" bIns="0" rtlCol="0" anchor="t"/>
+          <a:lstStyle/>
+          <a:p>
+            <a:pPr indent="0" marL="0">
+              <a:buNone/>
+            </a:pPr>
+            <a:r>
+              <a:rPr lang="en-US" sz="1800" dirty="0">
+                <a:solidFill>
+                  <a:srgbClr val="C9CFDA"/>
+                </a:solidFill>
+              </a:rPr>
+              <a:t>RJC e NIS2, ISO/IEC 27001, ISO/IEC 42001 e os restantes referenciais (com um guia de implementação para cada um dos três primeiros)</a:t>
+            </a:r>
+            <a:endParaRPr lang="en-US" sz="1800" dirty="0"/>
+          </a:p>
+        </p:txBody>
+      </p:sp>
+      <p:sp>
+        <p:nvSpPr>
+          <p:cNvPr id="25" name="Slide Number Placeholder 0"/>
+          <p:cNvSpPr>
+            <a:spLocks noGrp="1"/>
+          </p:cNvSpPr>
+          <p:nvPr>
+            <p:ph type="sldNum" sz="quarter" idx="4294967295"/>
+          </p:nvPr>
+        </p:nvSpPr>
+        <p:spPr>
+          <a:xfrm>
+            <a:off x="731520" y="6263640"/>
+            <a:ext cx="914400" cy="274320"/>
+          </a:xfrm>
+          <a:prstGeom prst="rect">
+            <a:avLst/>
+          </a:prstGeom>
+          <a:extLst>
+            <a:ext uri="{C572A759-6A51-4108-AA02-DFA0A04FC94B}">
+              <ma14:wrappingTextBoxFlag xmlns:ma14="http://schemas.microsoft.com/office/mac/drawingml/2011/main" val="0"/>
+            </a:ext>
+          </a:extLst>
+        </p:spPr>
+        <p:txBody>
+          <a:bodyPr/>
+          <a:lstStyle>
+            <a:lvl1pPr>
+              <a:defRPr sz="1000">
+                <a:solidFill>
+                  <a:srgbClr val="8892A6"/>
+                </a:solidFill>
+              </a:defRPr>
+            </a:lvl1pPr>
+          </a:lstStyle>
+          <a:p>
+            <a:pPr algn="l"/>
+            <a:fld id="{F7021451-1387-4CA6-816F-3879F97B5CBC}" type="slidenum">
+              <a:rPr b="0" lang="en-US"/>
+              <a:t>14</a:t>
+            </a:fld>
+            <a:endParaRPr lang="en-US"/>
+          </a:p>
+        </p:txBody>
+      </p:sp>
+    </p:spTree>
+  </p:cSld>
+  <p:clrMapOvr>
+    <a:masterClrMapping/>
+  </p:clrMapOvr>
+</p:sld>
+</file>
+
+<file path=ppt/slides/slide15.xml><?xml version="1.0" encoding="utf-8"?>
+<p:sld xmlns:a="http://schemas.openxmlformats.org/drawingml/2006/main" xmlns:r="http://schemas.openxmlformats.org/officeDocument/2006/relationships" xmlns:p="http://schemas.openxmlformats.org/presentationml/2006/main">
+  <p:cSld name="Slide 15">
+    <p:spTree>
+      <p:nvGrpSpPr>
+        <p:cNvPr id="1" name=""/>
+        <p:cNvGrpSpPr/>
+        <p:nvPr/>
+      </p:nvGrpSpPr>
+      <p:grpSpPr>
+        <a:xfrm>
+          <a:off x="0" y="0"/>
+          <a:ext cx="0" cy="0"/>
+          <a:chOff x="0" y="0"/>
+          <a:chExt cx="0" cy="0"/>
+        </a:xfrm>
+      </p:grpSpPr>
+      <p:sp>
+        <p:nvSpPr>
+          <p:cNvPr id="2" name="Text 0"/>
+          <p:cNvSpPr/>
+          <p:nvPr>
             <p:ph idx="101" type="title" hasCustomPrompt="1"/>
           </p:nvPr>
         </p:nvSpPr>
@@ -5932,7 +7015,7 @@
       </p:sp>
       <p:sp>
         <p:nvSpPr>
-          <p:cNvPr id="3" name="card-63"/>
+          <p:cNvPr id="3" name="card-72"/>
           <p:cNvSpPr/>
           <p:nvPr/>
         </p:nvSpPr>
@@ -6067,7 +7150,7 @@
       </p:sp>
       <p:sp>
         <p:nvSpPr>
-          <p:cNvPr id="7" name="card-64"/>
+          <p:cNvPr id="7" name="card-73"/>
           <p:cNvSpPr/>
           <p:nvPr/>
         </p:nvSpPr>
@@ -6202,7 +7285,7 @@
       </p:sp>
       <p:sp>
         <p:nvSpPr>
-          <p:cNvPr id="11" name="card-65"/>
+          <p:cNvPr id="11" name="card-74"/>
           <p:cNvSpPr/>
           <p:nvPr/>
         </p:nvSpPr>
@@ -6337,7 +7420,7 @@
       </p:sp>
       <p:sp>
         <p:nvSpPr>
-          <p:cNvPr id="15" name="card-66"/>
+          <p:cNvPr id="15" name="card-75"/>
           <p:cNvSpPr/>
           <p:nvPr/>
         </p:nvSpPr>
@@ -6472,7 +7555,7 @@
       </p:sp>
       <p:graphicFrame>
         <p:nvGraphicFramePr>
-          <p:cNvPr id="15" name="Table 0"/>
+          <p:cNvPr id="16" name="Table 0"/>
           <p:cNvGraphicFramePr>
             <a:graphicFrameLocks noGrp="1"/>
           </p:cNvGraphicFramePr>
@@ -6981,7 +8064,7 @@
                           <a:ea typeface="Calibri" pitchFamily="34" charset="-122"/>
                           <a:cs typeface="Calibri" pitchFamily="34" charset="-120"/>
                         </a:rPr>
-                        <a:t>Último dia útil de janeiro, a partir de 2028</a:t>
+                        <a:t>Último dia útil de janeiro; o primeiro em janeiro de 2029, relativo a 2028</a:t>
                       </a:r>
                       <a:endParaRPr lang="en-US" sz="1300" dirty="0">
                         <a:latin typeface="Calibri" charset="0"/>
@@ -7109,657 +8192,6 @@
             <a:pPr algn="l"/>
             <a:fld id="{F7021451-1387-4CA6-816F-3879F97B5CBC}" type="slidenum">
               <a:rPr b="0" lang="en-US"/>
-              <a:t>14</a:t>
-            </a:fld>
-            <a:endParaRPr lang="en-US"/>
-          </a:p>
-        </p:txBody>
-      </p:sp>
-    </p:spTree>
-  </p:cSld>
-  <p:clrMapOvr>
-    <a:masterClrMapping/>
-  </p:clrMapOvr>
-</p:sld>
-</file>
-
-<file path=ppt/slides/slide15.xml><?xml version="1.0" encoding="utf-8"?>
-<p:sld xmlns:a="http://schemas.openxmlformats.org/drawingml/2006/main" xmlns:r="http://schemas.openxmlformats.org/officeDocument/2006/relationships" xmlns:p="http://schemas.openxmlformats.org/presentationml/2006/main">
-  <p:cSld name="Slide 15">
-    <p:spTree>
-      <p:nvGrpSpPr>
-        <p:cNvPr id="1" name=""/>
-        <p:cNvGrpSpPr/>
-        <p:nvPr/>
-      </p:nvGrpSpPr>
-      <p:grpSpPr>
-        <a:xfrm>
-          <a:off x="0" y="0"/>
-          <a:ext cx="0" cy="0"/>
-          <a:chOff x="0" y="0"/>
-          <a:chExt cx="0" cy="0"/>
-        </a:xfrm>
-      </p:grpSpPr>
-      <p:sp>
-        <p:nvSpPr>
-          <p:cNvPr id="2" name="Text 0"/>
-          <p:cNvSpPr/>
-          <p:nvPr>
-            <p:ph idx="101" type="title" hasCustomPrompt="1"/>
-          </p:nvPr>
-        </p:nvSpPr>
-        <p:spPr>
-          <a:xfrm>
-            <a:off x="548640" y="411480"/>
-            <a:ext cx="11064240" cy="822960"/>
-          </a:xfrm>
-          <a:prstGeom prst="rect">
-            <a:avLst/>
-          </a:prstGeom>
-          <a:noFill/>
-          <a:ln/>
-        </p:spPr>
-        <p:txBody>
-          <a:bodyPr wrap="square" lIns="0" tIns="0" rIns="0" bIns="0" rtlCol="0" anchor="t"/>
-          <a:lstStyle/>
-          <a:p>
-            <a:pPr algn="l" indent="0" marL="0">
-              <a:buNone/>
-            </a:pPr>
-            <a:r>
-              <a:rPr lang="en-US" sz="3200" b="1" dirty="0">
-                <a:solidFill>
-                  <a:schemeClr val="tx1"/>
-                </a:solidFill>
-              </a:rPr>
-              <a:t>ISO/IEC 27001: um guia com Declaração de Aplicabilidade</a:t>
-            </a:r>
-            <a:endParaRPr lang="en-US" sz="3200" dirty="0"/>
-          </a:p>
-        </p:txBody>
-      </p:sp>
-      <p:sp>
-        <p:nvSpPr>
-          <p:cNvPr id="3" name="card-67"/>
-          <p:cNvSpPr/>
-          <p:nvPr/>
-        </p:nvSpPr>
-        <p:spPr>
-          <a:xfrm>
-            <a:off x="548640" y="1325880"/>
-            <a:ext cx="11064240" cy="731520"/>
-          </a:xfrm>
-          <a:prstGeom prst="roundRect">
-            <a:avLst>
-              <a:gd name="adj" fmla="val 15000"/>
-            </a:avLst>
-          </a:prstGeom>
-          <a:solidFill>
-            <a:srgbClr val="F7F2E7"/>
-          </a:solidFill>
-          <a:ln w="12700">
-            <a:solidFill>
-              <a:srgbClr val="F7F2E7"/>
-            </a:solidFill>
-            <a:prstDash val="solid"/>
-          </a:ln>
-        </p:spPr>
-      </p:sp>
-      <p:sp>
-        <p:nvSpPr>
-          <p:cNvPr id="4" name="Text 2"/>
-          <p:cNvSpPr txBox="1"/>
-          <p:nvPr/>
-        </p:nvSpPr>
-        <p:spPr>
-          <a:xfrm>
-            <a:off x="822960" y="1417320"/>
-            <a:ext cx="10515600" cy="548640"/>
-          </a:xfrm>
-          <a:prstGeom prst="rect">
-            <a:avLst/>
-          </a:prstGeom>
-          <a:noFill/>
-          <a:ln/>
-        </p:spPr>
-        <p:txBody>
-          <a:bodyPr wrap="square" lIns="0" tIns="0" rIns="0" bIns="0" rtlCol="0" anchor="ctr"/>
-          <a:lstStyle/>
-          <a:p>
-            <a:pPr indent="0" marL="0">
-              <a:buNone/>
-            </a:pPr>
-            <a:r>
-              <a:rPr lang="en-US" sz="1400" b="1" dirty="0">
-                <a:solidFill>
-                  <a:srgbClr val="8A6620"/>
-                </a:solidFill>
-              </a:rPr>
-              <a:t>Guia de preparação: </a:t>
-            </a:r>
-            <a:pPr indent="0" marL="0">
-              <a:buNone/>
-            </a:pPr>
-            <a:r>
-              <a:rPr lang="en-US" sz="1400" dirty="0">
-                <a:solidFill>
-                  <a:srgbClr val="111827"/>
-                </a:solidFill>
-              </a:rPr>
-              <a:t>a norma não está reproduzida (textos da AnkoraOne, validação com a norma em curso). Para certificação: texto oficial e entidade acreditada.</a:t>
-            </a:r>
-            <a:endParaRPr lang="en-US" sz="1400" dirty="0"/>
-          </a:p>
-        </p:txBody>
-      </p:sp>
-      <p:sp>
-        <p:nvSpPr>
-          <p:cNvPr id="5" name="card-68"/>
-          <p:cNvSpPr/>
-          <p:nvPr/>
-        </p:nvSpPr>
-        <p:spPr>
-          <a:xfrm>
-            <a:off x="548640" y="2286000"/>
-            <a:ext cx="4206240" cy="1051560"/>
-          </a:xfrm>
-          <a:prstGeom prst="roundRect">
-            <a:avLst>
-              <a:gd name="adj" fmla="val 10435"/>
-            </a:avLst>
-          </a:prstGeom>
-          <a:solidFill>
-            <a:srgbClr val="F3F5F8"/>
-          </a:solidFill>
-          <a:ln w="12700">
-            <a:solidFill>
-              <a:srgbClr val="F3F5F8"/>
-            </a:solidFill>
-            <a:prstDash val="solid"/>
-          </a:ln>
-        </p:spPr>
-      </p:sp>
-      <p:sp>
-        <p:nvSpPr>
-          <p:cNvPr id="6" name="Text 4"/>
-          <p:cNvSpPr txBox="1"/>
-          <p:nvPr/>
-        </p:nvSpPr>
-        <p:spPr>
-          <a:xfrm>
-            <a:off x="777240" y="2395728"/>
-            <a:ext cx="1188720" cy="822960"/>
-          </a:xfrm>
-          <a:prstGeom prst="rect">
-            <a:avLst/>
-          </a:prstGeom>
-          <a:noFill/>
-          <a:ln/>
-        </p:spPr>
-        <p:txBody>
-          <a:bodyPr wrap="square" lIns="0" tIns="0" rIns="0" bIns="0" rtlCol="0" anchor="ctr"/>
-          <a:lstStyle/>
-          <a:p>
-            <a:pPr indent="0" marL="0">
-              <a:buNone/>
-            </a:pPr>
-            <a:r>
-              <a:rPr lang="en-US" sz="4400" b="1" dirty="0">
-                <a:solidFill>
-                  <a:srgbClr val="070A13"/>
-                </a:solidFill>
-              </a:rPr>
-              <a:t>25</a:t>
-            </a:r>
-            <a:endParaRPr lang="en-US" sz="4400" dirty="0"/>
-          </a:p>
-        </p:txBody>
-      </p:sp>
-      <p:sp>
-        <p:nvSpPr>
-          <p:cNvPr id="7" name="Text 5"/>
-          <p:cNvSpPr txBox="1"/>
-          <p:nvPr/>
-        </p:nvSpPr>
-        <p:spPr>
-          <a:xfrm>
-            <a:off x="1965960" y="2423160"/>
-            <a:ext cx="2651760" cy="777240"/>
-          </a:xfrm>
-          <a:prstGeom prst="rect">
-            <a:avLst/>
-          </a:prstGeom>
-          <a:noFill/>
-          <a:ln/>
-        </p:spPr>
-        <p:txBody>
-          <a:bodyPr wrap="square" lIns="0" tIns="0" rIns="0" bIns="0" rtlCol="0" anchor="ctr"/>
-          <a:lstStyle/>
-          <a:p>
-            <a:pPr indent="0" marL="0">
-              <a:buNone/>
-            </a:pPr>
-            <a:r>
-              <a:rPr lang="en-US" sz="1400" dirty="0">
-                <a:solidFill>
-                  <a:srgbClr val="111827"/>
-                </a:solidFill>
-              </a:rPr>
-              <a:t>requisitos do sistema de gestão (cláusulas 4 a 10)</a:t>
-            </a:r>
-            <a:endParaRPr lang="en-US" sz="1400" dirty="0"/>
-          </a:p>
-        </p:txBody>
-      </p:sp>
-      <p:sp>
-        <p:nvSpPr>
-          <p:cNvPr id="8" name="card-69"/>
-          <p:cNvSpPr/>
-          <p:nvPr/>
-        </p:nvSpPr>
-        <p:spPr>
-          <a:xfrm>
-            <a:off x="548640" y="3474720"/>
-            <a:ext cx="4206240" cy="1051560"/>
-          </a:xfrm>
-          <a:prstGeom prst="roundRect">
-            <a:avLst>
-              <a:gd name="adj" fmla="val 10435"/>
-            </a:avLst>
-          </a:prstGeom>
-          <a:solidFill>
-            <a:srgbClr val="070A13"/>
-          </a:solidFill>
-          <a:ln w="12700">
-            <a:solidFill>
-              <a:srgbClr val="070A13"/>
-            </a:solidFill>
-            <a:prstDash val="solid"/>
-          </a:ln>
-        </p:spPr>
-      </p:sp>
-      <p:sp>
-        <p:nvSpPr>
-          <p:cNvPr id="9" name="Text 7"/>
-          <p:cNvSpPr txBox="1"/>
-          <p:nvPr/>
-        </p:nvSpPr>
-        <p:spPr>
-          <a:xfrm>
-            <a:off x="777240" y="3584448"/>
-            <a:ext cx="1188720" cy="822960"/>
-          </a:xfrm>
-          <a:prstGeom prst="rect">
-            <a:avLst/>
-          </a:prstGeom>
-          <a:noFill/>
-          <a:ln/>
-        </p:spPr>
-        <p:txBody>
-          <a:bodyPr wrap="square" lIns="0" tIns="0" rIns="0" bIns="0" rtlCol="0" anchor="ctr"/>
-          <a:lstStyle/>
-          <a:p>
-            <a:pPr indent="0" marL="0">
-              <a:buNone/>
-            </a:pPr>
-            <a:r>
-              <a:rPr lang="en-US" sz="4400" b="1" dirty="0">
-                <a:solidFill>
-                  <a:srgbClr val="CFA04A"/>
-                </a:solidFill>
-              </a:rPr>
-              <a:t>93</a:t>
-            </a:r>
-            <a:endParaRPr lang="en-US" sz="4400" dirty="0"/>
-          </a:p>
-        </p:txBody>
-      </p:sp>
-      <p:sp>
-        <p:nvSpPr>
-          <p:cNvPr id="10" name="Text 8"/>
-          <p:cNvSpPr txBox="1"/>
-          <p:nvPr/>
-        </p:nvSpPr>
-        <p:spPr>
-          <a:xfrm>
-            <a:off x="1965960" y="3611880"/>
-            <a:ext cx="2651760" cy="777240"/>
-          </a:xfrm>
-          <a:prstGeom prst="rect">
-            <a:avLst/>
-          </a:prstGeom>
-          <a:noFill/>
-          <a:ln/>
-        </p:spPr>
-        <p:txBody>
-          <a:bodyPr wrap="square" lIns="0" tIns="0" rIns="0" bIns="0" rtlCol="0" anchor="ctr"/>
-          <a:lstStyle/>
-          <a:p>
-            <a:pPr indent="0" marL="0">
-              <a:buNone/>
-            </a:pPr>
-            <a:r>
-              <a:rPr lang="en-US" sz="1400" dirty="0">
-                <a:solidFill>
-                  <a:srgbClr val="FFFFFF"/>
-                </a:solidFill>
-              </a:rPr>
-              <a:t>controlos do Anexo A, com aplicabilidade e justificação</a:t>
-            </a:r>
-            <a:endParaRPr lang="en-US" sz="1400" dirty="0"/>
-          </a:p>
-        </p:txBody>
-      </p:sp>
-      <p:sp>
-        <p:nvSpPr>
-          <p:cNvPr id="11" name="card-70"/>
-          <p:cNvSpPr/>
-          <p:nvPr/>
-        </p:nvSpPr>
-        <p:spPr>
-          <a:xfrm>
-            <a:off x="548640" y="4663440"/>
-            <a:ext cx="4206240" cy="1051560"/>
-          </a:xfrm>
-          <a:prstGeom prst="roundRect">
-            <a:avLst>
-              <a:gd name="adj" fmla="val 10435"/>
-            </a:avLst>
-          </a:prstGeom>
-          <a:solidFill>
-            <a:srgbClr val="F3F5F8"/>
-          </a:solidFill>
-          <a:ln w="12700">
-            <a:solidFill>
-              <a:srgbClr val="F3F5F8"/>
-            </a:solidFill>
-            <a:prstDash val="solid"/>
-          </a:ln>
-        </p:spPr>
-      </p:sp>
-      <p:sp>
-        <p:nvSpPr>
-          <p:cNvPr id="12" name="Text 10"/>
-          <p:cNvSpPr txBox="1"/>
-          <p:nvPr/>
-        </p:nvSpPr>
-        <p:spPr>
-          <a:xfrm>
-            <a:off x="777240" y="4773168"/>
-            <a:ext cx="1188720" cy="822960"/>
-          </a:xfrm>
-          <a:prstGeom prst="rect">
-            <a:avLst/>
-          </a:prstGeom>
-          <a:noFill/>
-          <a:ln/>
-        </p:spPr>
-        <p:txBody>
-          <a:bodyPr wrap="square" lIns="0" tIns="0" rIns="0" bIns="0" rtlCol="0" anchor="ctr"/>
-          <a:lstStyle/>
-          <a:p>
-            <a:pPr indent="0" marL="0">
-              <a:buNone/>
-            </a:pPr>
-            <a:r>
-              <a:rPr lang="en-US" sz="4400" b="1" dirty="0">
-                <a:solidFill>
-                  <a:srgbClr val="070A13"/>
-                </a:solidFill>
-              </a:rPr>
-              <a:t>92</a:t>
-            </a:r>
-            <a:endParaRPr lang="en-US" sz="4400" dirty="0"/>
-          </a:p>
-        </p:txBody>
-      </p:sp>
-      <p:sp>
-        <p:nvSpPr>
-          <p:cNvPr id="13" name="Text 11"/>
-          <p:cNvSpPr txBox="1"/>
-          <p:nvPr/>
-        </p:nvSpPr>
-        <p:spPr>
-          <a:xfrm>
-            <a:off x="1965960" y="4800600"/>
-            <a:ext cx="2651760" cy="777240"/>
-          </a:xfrm>
-          <a:prstGeom prst="rect">
-            <a:avLst/>
-          </a:prstGeom>
-          <a:noFill/>
-          <a:ln/>
-        </p:spPr>
-        <p:txBody>
-          <a:bodyPr wrap="square" lIns="0" tIns="0" rIns="0" bIns="0" rtlCol="0" anchor="ctr"/>
-          <a:lstStyle/>
-          <a:p>
-            <a:pPr indent="0" marL="0">
-              <a:buNone/>
-            </a:pPr>
-            <a:r>
-              <a:rPr lang="en-US" sz="1400" dirty="0">
-                <a:solidFill>
-                  <a:srgbClr val="111827"/>
-                </a:solidFill>
-              </a:rPr>
-              <a:t>controlos ligados ao QNRCS pelo Reg. 756/2026</a:t>
-            </a:r>
-            <a:endParaRPr lang="en-US" sz="1400" dirty="0"/>
-          </a:p>
-        </p:txBody>
-      </p:sp>
-      <p:sp>
-        <p:nvSpPr>
-          <p:cNvPr id="14" name="Text 12"/>
-          <p:cNvSpPr txBox="1"/>
-          <p:nvPr/>
-        </p:nvSpPr>
-        <p:spPr>
-          <a:xfrm>
-            <a:off x="5120640" y="2286000"/>
-            <a:ext cx="6492240" cy="365760"/>
-          </a:xfrm>
-          <a:prstGeom prst="rect">
-            <a:avLst/>
-          </a:prstGeom>
-          <a:noFill/>
-          <a:ln/>
-        </p:spPr>
-        <p:txBody>
-          <a:bodyPr wrap="square" lIns="0" tIns="0" rIns="0" bIns="0" rtlCol="0" anchor="t"/>
-          <a:lstStyle/>
-          <a:p>
-            <a:pPr indent="0" marL="0">
-              <a:buNone/>
-            </a:pPr>
-            <a:r>
-              <a:rPr lang="en-US" sz="1700" b="1" dirty="0">
-                <a:solidFill>
-                  <a:srgbClr val="17766C"/>
-                </a:solidFill>
-              </a:rPr>
-              <a:t>Como trabalhar (Biblioteca Legal › ISO/IEC 27001)</a:t>
-            </a:r>
-            <a:endParaRPr lang="en-US" sz="1700" dirty="0"/>
-          </a:p>
-        </p:txBody>
-      </p:sp>
-      <p:sp>
-        <p:nvSpPr>
-          <p:cNvPr id="15" name="Text 13"/>
-          <p:cNvSpPr txBox="1"/>
-          <p:nvPr/>
-        </p:nvSpPr>
-        <p:spPr>
-          <a:xfrm>
-            <a:off x="5120640" y="2743200"/>
-            <a:ext cx="6492240" cy="3108960"/>
-          </a:xfrm>
-          <a:prstGeom prst="rect">
-            <a:avLst/>
-          </a:prstGeom>
-          <a:noFill/>
-          <a:ln/>
-        </p:spPr>
-        <p:txBody>
-          <a:bodyPr wrap="square" lIns="0" tIns="0" rIns="0" bIns="0" rtlCol="0" anchor="t"/>
-          <a:lstStyle/>
-          <a:p>
-            <a:pPr marL="342900" indent="-342900">
-              <a:spcAft>
-                <a:spcPts val="800"/>
-              </a:spcAft>
-              <a:buSzPct val="100000"/>
-              <a:buFont typeface="+mj-lt"/>
-              <a:buAutoNum type="arabicPeriod" startAt="1"/>
-            </a:pPr>
-            <a:r>
-              <a:rPr lang="en-US" sz="1400" dirty="0">
-                <a:solidFill>
-                  <a:srgbClr val="111827"/>
-                </a:solidFill>
-              </a:rPr>
-              <a:t>Cláusulas 4 a 6: âmbito, política, metodologia de riscos e objetivos</a:t>
-            </a:r>
-            <a:endParaRPr lang="en-US" sz="1400" dirty="0"/>
-          </a:p>
-          <a:p>
-            <a:pPr marL="342900" indent="-342900">
-              <a:spcAft>
-                <a:spcPts val="800"/>
-              </a:spcAft>
-              <a:buSzPct val="100000"/>
-              <a:buFont typeface="+mj-lt"/>
-              <a:buAutoNum type="arabicPeriod" startAt="1"/>
-            </a:pPr>
-            <a:r>
-              <a:rPr lang="en-US" sz="1400" dirty="0">
-                <a:solidFill>
-                  <a:srgbClr val="111827"/>
-                </a:solidFill>
-              </a:rPr>
-              <a:t>Avaliação e tratamento de riscos em Gestão de Risco</a:t>
-            </a:r>
-            <a:endParaRPr lang="en-US" sz="1400" dirty="0"/>
-          </a:p>
-          <a:p>
-            <a:pPr marL="342900" indent="-342900">
-              <a:spcAft>
-                <a:spcPts val="800"/>
-              </a:spcAft>
-              <a:buSzPct val="100000"/>
-              <a:buFont typeface="+mj-lt"/>
-              <a:buAutoNum type="arabicPeriod" startAt="1"/>
-            </a:pPr>
-            <a:r>
-              <a:rPr lang="en-US" sz="1400" dirty="0">
-                <a:solidFill>
-                  <a:srgbClr val="111827"/>
-                </a:solidFill>
-              </a:rPr>
-              <a:t>Anexo A: aplicável ou não, com justificação, para cada controlo</a:t>
-            </a:r>
-            <a:endParaRPr lang="en-US" sz="1400" dirty="0"/>
-          </a:p>
-          <a:p>
-            <a:pPr marL="342900" indent="-342900">
-              <a:spcAft>
-                <a:spcPts val="800"/>
-              </a:spcAft>
-              <a:buSzPct val="100000"/>
-              <a:buFont typeface="+mj-lt"/>
-              <a:buAutoNum type="arabicPeriod" startAt="1"/>
-            </a:pPr>
-            <a:r>
-              <a:rPr lang="en-US" sz="1400" dirty="0">
-                <a:solidFill>
-                  <a:srgbClr val="111827"/>
-                </a:solidFill>
-              </a:rPr>
-              <a:t>Exportar a Declaração de Aplicabilidade e aprová-la em Documentos</a:t>
-            </a:r>
-            <a:endParaRPr lang="en-US" sz="1400" dirty="0"/>
-          </a:p>
-          <a:p>
-            <a:pPr marL="342900" indent="-342900">
-              <a:spcAft>
-                <a:spcPts val="800"/>
-              </a:spcAft>
-              <a:buSzPct val="100000"/>
-              <a:buFont typeface="+mj-lt"/>
-              <a:buAutoNum type="arabicPeriod" startAt="1"/>
-            </a:pPr>
-            <a:r>
-              <a:rPr lang="en-US" sz="1400" dirty="0">
-                <a:solidFill>
-                  <a:srgbClr val="111827"/>
-                </a:solidFill>
-              </a:rPr>
-              <a:t>Evidências por controlo; as do RJC ligadas contam também</a:t>
-            </a:r>
-            <a:endParaRPr lang="en-US" sz="1400" dirty="0"/>
-          </a:p>
-          <a:p>
-            <a:pPr marL="342900" indent="-342900">
-              <a:spcAft>
-                <a:spcPts val="800"/>
-              </a:spcAft>
-              <a:buSzPct val="100000"/>
-              <a:buFont typeface="+mj-lt"/>
-              <a:buAutoNum type="arabicPeriod" startAt="1"/>
-            </a:pPr>
-            <a:r>
-              <a:rPr lang="en-US" sz="1400" dirty="0">
-                <a:solidFill>
-                  <a:srgbClr val="111827"/>
-                </a:solidFill>
-              </a:rPr>
-              <a:t>Auditoria interna (9.2) e revisão pela gestão (9.3) antes da certificação</a:t>
-            </a:r>
-            <a:endParaRPr lang="en-US" sz="1400" dirty="0"/>
-          </a:p>
-        </p:txBody>
-      </p:sp>
-      <p:sp>
-        <p:nvSpPr>
-          <p:cNvPr id="25" name="Slide Number Placeholder 0"/>
-          <p:cNvSpPr>
-            <a:spLocks noGrp="1"/>
-          </p:cNvSpPr>
-          <p:nvPr>
-            <p:ph type="sldNum" sz="quarter" idx="4294967295"/>
-          </p:nvPr>
-        </p:nvSpPr>
-        <p:spPr>
-          <a:xfrm>
-            <a:off x="548640" y="6309360"/>
-            <a:ext cx="914400" cy="274320"/>
-          </a:xfrm>
-          <a:prstGeom prst="rect">
-            <a:avLst/>
-          </a:prstGeom>
-          <a:extLst>
-            <a:ext uri="{C572A759-6A51-4108-AA02-DFA0A04FC94B}">
-              <ma14:wrappingTextBoxFlag xmlns:ma14="http://schemas.microsoft.com/office/mac/drawingml/2011/main" val="0"/>
-            </a:ext>
-          </a:extLst>
-        </p:spPr>
-        <p:txBody>
-          <a:bodyPr/>
-          <a:lstStyle>
-            <a:lvl1pPr>
-              <a:defRPr sz="1000">
-                <a:solidFill>
-                  <a:srgbClr val="5B6474"/>
-                </a:solidFill>
-              </a:defRPr>
-            </a:lvl1pPr>
-          </a:lstStyle>
-          <a:p>
-            <a:pPr algn="l"/>
-            <a:fld id="{F7021451-1387-4CA6-816F-3879F97B5CBC}" type="slidenum">
-              <a:rPr b="0" lang="en-US"/>
               <a:t>15</a:t>
             </a:fld>
             <a:endParaRPr lang="en-US"/>
@@ -7823,7 +8255,7 @@
                   <a:schemeClr val="tx1"/>
                 </a:solidFill>
               </a:rPr>
-              <a:t>Outros referenciais disponíveis na plataforma</a:t>
+              <a:t>ISO/IEC 27001: um guia com Declaração de Aplicabilidade</a:t>
             </a:r>
             <a:endParaRPr lang="en-US" sz="3200" dirty="0"/>
           </a:p>
@@ -7831,18 +8263,92 @@
       </p:sp>
       <p:sp>
         <p:nvSpPr>
-          <p:cNvPr id="3" name="card-71"/>
+          <p:cNvPr id="3" name="card-76"/>
           <p:cNvSpPr/>
           <p:nvPr/>
         </p:nvSpPr>
         <p:spPr>
           <a:xfrm>
-            <a:off x="548640" y="1417320"/>
-            <a:ext cx="3520440" cy="2011680"/>
+            <a:off x="548640" y="1325880"/>
+            <a:ext cx="11064240" cy="731520"/>
           </a:xfrm>
           <a:prstGeom prst="roundRect">
             <a:avLst>
-              <a:gd name="adj" fmla="val 5455"/>
+              <a:gd name="adj" fmla="val 15000"/>
+            </a:avLst>
+          </a:prstGeom>
+          <a:solidFill>
+            <a:srgbClr val="F7F2E7"/>
+          </a:solidFill>
+          <a:ln w="12700">
+            <a:solidFill>
+              <a:srgbClr val="F7F2E7"/>
+            </a:solidFill>
+            <a:prstDash val="solid"/>
+          </a:ln>
+        </p:spPr>
+      </p:sp>
+      <p:sp>
+        <p:nvSpPr>
+          <p:cNvPr id="4" name="Text 2"/>
+          <p:cNvSpPr txBox="1"/>
+          <p:nvPr/>
+        </p:nvSpPr>
+        <p:spPr>
+          <a:xfrm>
+            <a:off x="822960" y="1417320"/>
+            <a:ext cx="10515600" cy="548640"/>
+          </a:xfrm>
+          <a:prstGeom prst="rect">
+            <a:avLst/>
+          </a:prstGeom>
+          <a:noFill/>
+          <a:ln/>
+        </p:spPr>
+        <p:txBody>
+          <a:bodyPr wrap="square" lIns="0" tIns="0" rIns="0" bIns="0" rtlCol="0" anchor="ctr"/>
+          <a:lstStyle/>
+          <a:p>
+            <a:pPr indent="0" marL="0">
+              <a:buNone/>
+            </a:pPr>
+            <a:r>
+              <a:rPr lang="en-US" sz="1400" b="1" dirty="0">
+                <a:solidFill>
+                  <a:srgbClr val="8A6620"/>
+                </a:solidFill>
+              </a:rPr>
+              <a:t>Guia de preparação: </a:t>
+            </a:r>
+            <a:pPr indent="0" marL="0">
+              <a:buNone/>
+            </a:pPr>
+            <a:r>
+              <a:rPr lang="en-US" sz="1400" dirty="0">
+                <a:solidFill>
+                  <a:srgbClr val="111827"/>
+                </a:solidFill>
+              </a:rPr>
+              <a:t>textos da AnkoraOne, estrutura conferida com o texto oficial (outubro de 2026); a norma não está reproduzida. Para certificação: texto oficial e entidade acreditada.</a:t>
+            </a:r>
+            <a:endParaRPr lang="en-US" sz="1400" dirty="0"/>
+          </a:p>
+        </p:txBody>
+      </p:sp>
+      <p:sp>
+        <p:nvSpPr>
+          <p:cNvPr id="5" name="card-77"/>
+          <p:cNvSpPr/>
+          <p:nvPr/>
+        </p:nvSpPr>
+        <p:spPr>
+          <a:xfrm>
+            <a:off x="548640" y="2286000"/>
+            <a:ext cx="4206240" cy="1051560"/>
+          </a:xfrm>
+          <a:prstGeom prst="roundRect">
+            <a:avLst>
+              <a:gd name="adj" fmla="val 10435"/>
             </a:avLst>
           </a:prstGeom>
           <a:solidFill>
@@ -7858,126 +8364,189 @@
       </p:sp>
       <p:sp>
         <p:nvSpPr>
-          <p:cNvPr id="4" name="Text 2"/>
-          <p:cNvSpPr txBox="1"/>
-          <p:nvPr/>
-        </p:nvSpPr>
-        <p:spPr>
-          <a:xfrm>
-            <a:off x="822960" y="1645920"/>
-            <a:ext cx="3017520" cy="411480"/>
-          </a:xfrm>
-          <a:prstGeom prst="rect">
-            <a:avLst/>
-          </a:prstGeom>
-          <a:noFill/>
-          <a:ln/>
-        </p:spPr>
-        <p:txBody>
-          <a:bodyPr wrap="square" lIns="0" tIns="0" rIns="0" bIns="0" rtlCol="0" anchor="t"/>
+          <p:cNvPr id="6" name="Text 4"/>
+          <p:cNvSpPr txBox="1"/>
+          <p:nvPr/>
+        </p:nvSpPr>
+        <p:spPr>
+          <a:xfrm>
+            <a:off x="777240" y="2395728"/>
+            <a:ext cx="1188720" cy="822960"/>
+          </a:xfrm>
+          <a:prstGeom prst="rect">
+            <a:avLst/>
+          </a:prstGeom>
+          <a:noFill/>
+          <a:ln/>
+        </p:spPr>
+        <p:txBody>
+          <a:bodyPr wrap="square" lIns="0" tIns="0" rIns="0" bIns="0" rtlCol="0" anchor="ctr"/>
           <a:lstStyle/>
           <a:p>
             <a:pPr indent="0" marL="0">
               <a:buNone/>
             </a:pPr>
             <a:r>
-              <a:rPr lang="en-US" sz="1800" b="1" dirty="0">
+              <a:rPr lang="en-US" sz="4400" b="1" dirty="0">
                 <a:solidFill>
                   <a:srgbClr val="070A13"/>
                 </a:solidFill>
               </a:rPr>
-              <a:t>QNRCS</a:t>
-            </a:r>
-            <a:endParaRPr lang="en-US" sz="1800" dirty="0"/>
-          </a:p>
-        </p:txBody>
-      </p:sp>
-      <p:sp>
-        <p:nvSpPr>
-          <p:cNvPr id="5" name="Text 3"/>
-          <p:cNvSpPr txBox="1"/>
-          <p:nvPr/>
-        </p:nvSpPr>
-        <p:spPr>
-          <a:xfrm>
-            <a:off x="822960" y="2075688"/>
-            <a:ext cx="3017520" cy="320040"/>
-          </a:xfrm>
-          <a:prstGeom prst="rect">
-            <a:avLst/>
-          </a:prstGeom>
-          <a:noFill/>
-          <a:ln/>
-        </p:spPr>
-        <p:txBody>
-          <a:bodyPr wrap="square" lIns="0" tIns="0" rIns="0" bIns="0" rtlCol="0" anchor="t"/>
+              <a:t>25</a:t>
+            </a:r>
+            <a:endParaRPr lang="en-US" sz="4400" dirty="0"/>
+          </a:p>
+        </p:txBody>
+      </p:sp>
+      <p:sp>
+        <p:nvSpPr>
+          <p:cNvPr id="7" name="Text 5"/>
+          <p:cNvSpPr txBox="1"/>
+          <p:nvPr/>
+        </p:nvSpPr>
+        <p:spPr>
+          <a:xfrm>
+            <a:off x="1965960" y="2423160"/>
+            <a:ext cx="2651760" cy="777240"/>
+          </a:xfrm>
+          <a:prstGeom prst="rect">
+            <a:avLst/>
+          </a:prstGeom>
+          <a:noFill/>
+          <a:ln/>
+        </p:spPr>
+        <p:txBody>
+          <a:bodyPr wrap="square" lIns="0" tIns="0" rIns="0" bIns="0" rtlCol="0" anchor="ctr"/>
           <a:lstStyle/>
           <a:p>
             <a:pPr indent="0" marL="0">
               <a:buNone/>
             </a:pPr>
             <a:r>
-              <a:rPr lang="en-US" sz="1200" b="1" dirty="0">
-                <a:solidFill>
-                  <a:srgbClr val="17766C"/>
-                </a:solidFill>
-              </a:rPr>
-              <a:t>Reg. 756/2026, Anexo I</a:t>
-            </a:r>
-            <a:endParaRPr lang="en-US" sz="1200" dirty="0"/>
-          </a:p>
-        </p:txBody>
-      </p:sp>
-      <p:sp>
-        <p:nvSpPr>
-          <p:cNvPr id="6" name="Text 4"/>
-          <p:cNvSpPr txBox="1"/>
-          <p:nvPr/>
-        </p:nvSpPr>
-        <p:spPr>
-          <a:xfrm>
-            <a:off x="822960" y="2468880"/>
-            <a:ext cx="3017520" cy="822960"/>
-          </a:xfrm>
-          <a:prstGeom prst="rect">
-            <a:avLst/>
-          </a:prstGeom>
-          <a:noFill/>
-          <a:ln/>
-        </p:spPr>
-        <p:txBody>
-          <a:bodyPr wrap="square" lIns="0" tIns="0" rIns="0" bIns="0" rtlCol="0" anchor="t"/>
-          <a:lstStyle/>
-          <a:p>
-            <a:pPr indent="0" marL="0">
-              <a:buNone/>
-            </a:pPr>
-            <a:r>
-              <a:rPr lang="en-US" sz="1300" dirty="0">
-                <a:solidFill>
-                  <a:srgbClr val="5B6474"/>
-                </a:solidFill>
-              </a:rPr>
-              <a:t>107 controlos em seis objetivos, com medida e verificação por nível</a:t>
-            </a:r>
-            <a:endParaRPr lang="en-US" sz="1300" dirty="0"/>
-          </a:p>
-        </p:txBody>
-      </p:sp>
-      <p:sp>
-        <p:nvSpPr>
-          <p:cNvPr id="7" name="card-72"/>
+              <a:rPr lang="en-US" sz="1400" dirty="0">
+                <a:solidFill>
+                  <a:srgbClr val="111827"/>
+                </a:solidFill>
+              </a:rPr>
+              <a:t>requisitos do sistema de gestão (cláusulas 4 a 10)</a:t>
+            </a:r>
+            <a:endParaRPr lang="en-US" sz="1400" dirty="0"/>
+          </a:p>
+        </p:txBody>
+      </p:sp>
+      <p:sp>
+        <p:nvSpPr>
+          <p:cNvPr id="8" name="card-78"/>
           <p:cNvSpPr/>
           <p:nvPr/>
         </p:nvSpPr>
         <p:spPr>
           <a:xfrm>
-            <a:off x="4297680" y="1417320"/>
-            <a:ext cx="3520440" cy="2011680"/>
+            <a:off x="548640" y="3474720"/>
+            <a:ext cx="4206240" cy="1051560"/>
           </a:xfrm>
           <a:prstGeom prst="roundRect">
             <a:avLst>
-              <a:gd name="adj" fmla="val 5455"/>
+              <a:gd name="adj" fmla="val 10435"/>
+            </a:avLst>
+          </a:prstGeom>
+          <a:solidFill>
+            <a:srgbClr val="070A13"/>
+          </a:solidFill>
+          <a:ln w="12700">
+            <a:solidFill>
+              <a:srgbClr val="070A13"/>
+            </a:solidFill>
+            <a:prstDash val="solid"/>
+          </a:ln>
+        </p:spPr>
+      </p:sp>
+      <p:sp>
+        <p:nvSpPr>
+          <p:cNvPr id="9" name="Text 7"/>
+          <p:cNvSpPr txBox="1"/>
+          <p:nvPr/>
+        </p:nvSpPr>
+        <p:spPr>
+          <a:xfrm>
+            <a:off x="777240" y="3584448"/>
+            <a:ext cx="1188720" cy="822960"/>
+          </a:xfrm>
+          <a:prstGeom prst="rect">
+            <a:avLst/>
+          </a:prstGeom>
+          <a:noFill/>
+          <a:ln/>
+        </p:spPr>
+        <p:txBody>
+          <a:bodyPr wrap="square" lIns="0" tIns="0" rIns="0" bIns="0" rtlCol="0" anchor="ctr"/>
+          <a:lstStyle/>
+          <a:p>
+            <a:pPr indent="0" marL="0">
+              <a:buNone/>
+            </a:pPr>
+            <a:r>
+              <a:rPr lang="en-US" sz="4400" b="1" dirty="0">
+                <a:solidFill>
+                  <a:srgbClr val="CFA04A"/>
+                </a:solidFill>
+              </a:rPr>
+              <a:t>93</a:t>
+            </a:r>
+            <a:endParaRPr lang="en-US" sz="4400" dirty="0"/>
+          </a:p>
+        </p:txBody>
+      </p:sp>
+      <p:sp>
+        <p:nvSpPr>
+          <p:cNvPr id="10" name="Text 8"/>
+          <p:cNvSpPr txBox="1"/>
+          <p:nvPr/>
+        </p:nvSpPr>
+        <p:spPr>
+          <a:xfrm>
+            <a:off x="1965960" y="3611880"/>
+            <a:ext cx="2651760" cy="777240"/>
+          </a:xfrm>
+          <a:prstGeom prst="rect">
+            <a:avLst/>
+          </a:prstGeom>
+          <a:noFill/>
+          <a:ln/>
+        </p:spPr>
+        <p:txBody>
+          <a:bodyPr wrap="square" lIns="0" tIns="0" rIns="0" bIns="0" rtlCol="0" anchor="ctr"/>
+          <a:lstStyle/>
+          <a:p>
+            <a:pPr indent="0" marL="0">
+              <a:buNone/>
+            </a:pPr>
+            <a:r>
+              <a:rPr lang="en-US" sz="1400" dirty="0">
+                <a:solidFill>
+                  <a:srgbClr val="FFFFFF"/>
+                </a:solidFill>
+              </a:rPr>
+              <a:t>controlos do Anexo A, com aplicabilidade e justificação</a:t>
+            </a:r>
+            <a:endParaRPr lang="en-US" sz="1400" dirty="0"/>
+          </a:p>
+        </p:txBody>
+      </p:sp>
+      <p:sp>
+        <p:nvSpPr>
+          <p:cNvPr id="11" name="card-79"/>
+          <p:cNvSpPr/>
+          <p:nvPr/>
+        </p:nvSpPr>
+        <p:spPr>
+          <a:xfrm>
+            <a:off x="548640" y="4663440"/>
+            <a:ext cx="4206240" cy="1051560"/>
+          </a:xfrm>
+          <a:prstGeom prst="roundRect">
+            <a:avLst>
+              <a:gd name="adj" fmla="val 10435"/>
             </a:avLst>
           </a:prstGeom>
           <a:solidFill>
@@ -7993,685 +8562,264 @@
       </p:sp>
       <p:sp>
         <p:nvSpPr>
-          <p:cNvPr id="8" name="Text 6"/>
-          <p:cNvSpPr txBox="1"/>
-          <p:nvPr/>
-        </p:nvSpPr>
-        <p:spPr>
-          <a:xfrm>
-            <a:off x="4572000" y="1645920"/>
-            <a:ext cx="3017520" cy="411480"/>
-          </a:xfrm>
-          <a:prstGeom prst="rect">
-            <a:avLst/>
-          </a:prstGeom>
-          <a:noFill/>
-          <a:ln/>
-        </p:spPr>
-        <p:txBody>
-          <a:bodyPr wrap="square" lIns="0" tIns="0" rIns="0" bIns="0" rtlCol="0" anchor="t"/>
+          <p:cNvPr id="12" name="Text 10"/>
+          <p:cNvSpPr txBox="1"/>
+          <p:nvPr/>
+        </p:nvSpPr>
+        <p:spPr>
+          <a:xfrm>
+            <a:off x="777240" y="4773168"/>
+            <a:ext cx="1188720" cy="822960"/>
+          </a:xfrm>
+          <a:prstGeom prst="rect">
+            <a:avLst/>
+          </a:prstGeom>
+          <a:noFill/>
+          <a:ln/>
+        </p:spPr>
+        <p:txBody>
+          <a:bodyPr wrap="square" lIns="0" tIns="0" rIns="0" bIns="0" rtlCol="0" anchor="ctr"/>
           <a:lstStyle/>
           <a:p>
             <a:pPr indent="0" marL="0">
               <a:buNone/>
             </a:pPr>
             <a:r>
-              <a:rPr lang="en-US" sz="1800" b="1" dirty="0">
+              <a:rPr lang="en-US" sz="4400" b="1" dirty="0">
                 <a:solidFill>
                   <a:srgbClr val="070A13"/>
                 </a:solidFill>
               </a:rPr>
-              <a:t>Requisitos técnicos NIS2</a:t>
-            </a:r>
-            <a:endParaRPr lang="en-US" sz="1800" dirty="0"/>
-          </a:p>
-        </p:txBody>
-      </p:sp>
-      <p:sp>
-        <p:nvSpPr>
-          <p:cNvPr id="9" name="Text 7"/>
-          <p:cNvSpPr txBox="1"/>
-          <p:nvPr/>
-        </p:nvSpPr>
-        <p:spPr>
-          <a:xfrm>
-            <a:off x="4572000" y="2075688"/>
-            <a:ext cx="3017520" cy="320040"/>
-          </a:xfrm>
-          <a:prstGeom prst="rect">
-            <a:avLst/>
-          </a:prstGeom>
-          <a:noFill/>
-          <a:ln/>
-        </p:spPr>
-        <p:txBody>
-          <a:bodyPr wrap="square" lIns="0" tIns="0" rIns="0" bIns="0" rtlCol="0" anchor="t"/>
+              <a:t>92</a:t>
+            </a:r>
+            <a:endParaRPr lang="en-US" sz="4400" dirty="0"/>
+          </a:p>
+        </p:txBody>
+      </p:sp>
+      <p:sp>
+        <p:nvSpPr>
+          <p:cNvPr id="13" name="Text 11"/>
+          <p:cNvSpPr txBox="1"/>
+          <p:nvPr/>
+        </p:nvSpPr>
+        <p:spPr>
+          <a:xfrm>
+            <a:off x="1965960" y="4800600"/>
+            <a:ext cx="2651760" cy="777240"/>
+          </a:xfrm>
+          <a:prstGeom prst="rect">
+            <a:avLst/>
+          </a:prstGeom>
+          <a:noFill/>
+          <a:ln/>
+        </p:spPr>
+        <p:txBody>
+          <a:bodyPr wrap="square" lIns="0" tIns="0" rIns="0" bIns="0" rtlCol="0" anchor="ctr"/>
           <a:lstStyle/>
           <a:p>
             <a:pPr indent="0" marL="0">
               <a:buNone/>
             </a:pPr>
             <a:r>
-              <a:rPr lang="en-US" sz="1200" b="1" dirty="0">
+              <a:rPr lang="en-US" sz="1400" dirty="0">
+                <a:solidFill>
+                  <a:srgbClr val="111827"/>
+                </a:solidFill>
+              </a:rPr>
+              <a:t>controlos ligados ao QNRCS pelo Reg. 756/2026</a:t>
+            </a:r>
+            <a:endParaRPr lang="en-US" sz="1400" dirty="0"/>
+          </a:p>
+        </p:txBody>
+      </p:sp>
+      <p:sp>
+        <p:nvSpPr>
+          <p:cNvPr id="14" name="Text 12"/>
+          <p:cNvSpPr txBox="1"/>
+          <p:nvPr/>
+        </p:nvSpPr>
+        <p:spPr>
+          <a:xfrm>
+            <a:off x="5120640" y="2286000"/>
+            <a:ext cx="6492240" cy="365760"/>
+          </a:xfrm>
+          <a:prstGeom prst="rect">
+            <a:avLst/>
+          </a:prstGeom>
+          <a:noFill/>
+          <a:ln/>
+        </p:spPr>
+        <p:txBody>
+          <a:bodyPr wrap="square" lIns="0" tIns="0" rIns="0" bIns="0" rtlCol="0" anchor="t"/>
+          <a:lstStyle/>
+          <a:p>
+            <a:pPr indent="0" marL="0">
+              <a:buNone/>
+            </a:pPr>
+            <a:r>
+              <a:rPr lang="en-US" sz="1700" b="1" dirty="0">
                 <a:solidFill>
                   <a:srgbClr val="17766C"/>
                 </a:solidFill>
               </a:rPr>
-              <a:t>Reg. de Execução (UE) 2024/2690</a:t>
-            </a:r>
-            <a:endParaRPr lang="en-US" sz="1200" dirty="0"/>
-          </a:p>
-        </p:txBody>
-      </p:sp>
-      <p:sp>
-        <p:nvSpPr>
-          <p:cNvPr id="10" name="Text 8"/>
-          <p:cNvSpPr txBox="1"/>
-          <p:nvPr/>
-        </p:nvSpPr>
-        <p:spPr>
-          <a:xfrm>
-            <a:off x="4572000" y="2468880"/>
-            <a:ext cx="3017520" cy="822960"/>
-          </a:xfrm>
-          <a:prstGeom prst="rect">
-            <a:avLst/>
-          </a:prstGeom>
-          <a:noFill/>
-          <a:ln/>
-        </p:spPr>
-        <p:txBody>
-          <a:bodyPr wrap="square" lIns="0" tIns="0" rIns="0" bIns="0" rtlCol="0" anchor="t"/>
-          <a:lstStyle/>
-          <a:p>
-            <a:pPr indent="0" marL="0">
-              <a:buNone/>
-            </a:pPr>
-            <a:r>
-              <a:rPr lang="en-US" sz="1300" dirty="0">
-                <a:solidFill>
-                  <a:srgbClr val="5B6474"/>
-                </a:solidFill>
-              </a:rPr>
-              <a:t>161 requisitos para serviços digitais</a:t>
-            </a:r>
-            <a:endParaRPr lang="en-US" sz="1300" dirty="0"/>
-          </a:p>
-        </p:txBody>
-      </p:sp>
-      <p:sp>
-        <p:nvSpPr>
-          <p:cNvPr id="11" name="card-73"/>
-          <p:cNvSpPr/>
-          <p:nvPr/>
-        </p:nvSpPr>
-        <p:spPr>
-          <a:xfrm>
-            <a:off x="8046720" y="1417320"/>
-            <a:ext cx="3520440" cy="2011680"/>
-          </a:xfrm>
-          <a:prstGeom prst="roundRect">
-            <a:avLst>
-              <a:gd name="adj" fmla="val 5455"/>
-            </a:avLst>
-          </a:prstGeom>
-          <a:solidFill>
-            <a:srgbClr val="F3F5F8"/>
-          </a:solidFill>
-          <a:ln w="12700">
-            <a:solidFill>
-              <a:srgbClr val="F3F5F8"/>
-            </a:solidFill>
-            <a:prstDash val="solid"/>
-          </a:ln>
-        </p:spPr>
-      </p:sp>
-      <p:sp>
-        <p:nvSpPr>
-          <p:cNvPr id="12" name="Text 10"/>
-          <p:cNvSpPr txBox="1"/>
-          <p:nvPr/>
-        </p:nvSpPr>
-        <p:spPr>
-          <a:xfrm>
-            <a:off x="8321040" y="1645920"/>
-            <a:ext cx="3017520" cy="411480"/>
-          </a:xfrm>
-          <a:prstGeom prst="rect">
-            <a:avLst/>
-          </a:prstGeom>
-          <a:noFill/>
-          <a:ln/>
-        </p:spPr>
-        <p:txBody>
-          <a:bodyPr wrap="square" lIns="0" tIns="0" rIns="0" bIns="0" rtlCol="0" anchor="t"/>
-          <a:lstStyle/>
-          <a:p>
-            <a:pPr indent="0" marL="0">
-              <a:buNone/>
-            </a:pPr>
-            <a:r>
-              <a:rPr lang="en-US" sz="1800" b="1" dirty="0">
-                <a:solidFill>
-                  <a:srgbClr val="070A13"/>
-                </a:solidFill>
-              </a:rPr>
-              <a:t>DORA</a:t>
-            </a:r>
-            <a:endParaRPr lang="en-US" sz="1800" dirty="0"/>
-          </a:p>
-        </p:txBody>
-      </p:sp>
-      <p:sp>
-        <p:nvSpPr>
-          <p:cNvPr id="13" name="Text 11"/>
-          <p:cNvSpPr txBox="1"/>
-          <p:nvPr/>
-        </p:nvSpPr>
-        <p:spPr>
-          <a:xfrm>
-            <a:off x="8321040" y="2075688"/>
-            <a:ext cx="3017520" cy="320040"/>
-          </a:xfrm>
-          <a:prstGeom prst="rect">
-            <a:avLst/>
-          </a:prstGeom>
-          <a:noFill/>
-          <a:ln/>
-        </p:spPr>
-        <p:txBody>
-          <a:bodyPr wrap="square" lIns="0" tIns="0" rIns="0" bIns="0" rtlCol="0" anchor="t"/>
-          <a:lstStyle/>
-          <a:p>
-            <a:pPr indent="0" marL="0">
-              <a:buNone/>
-            </a:pPr>
-            <a:r>
-              <a:rPr lang="en-US" sz="1200" b="1" dirty="0">
-                <a:solidFill>
-                  <a:srgbClr val="17766C"/>
-                </a:solidFill>
-              </a:rPr>
-              <a:t>Reg. (UE) 2022/2554</a:t>
-            </a:r>
-            <a:endParaRPr lang="en-US" sz="1200" dirty="0"/>
-          </a:p>
-        </p:txBody>
-      </p:sp>
-      <p:sp>
-        <p:nvSpPr>
-          <p:cNvPr id="14" name="Text 12"/>
-          <p:cNvSpPr txBox="1"/>
-          <p:nvPr/>
-        </p:nvSpPr>
-        <p:spPr>
-          <a:xfrm>
-            <a:off x="8321040" y="2468880"/>
-            <a:ext cx="3017520" cy="822960"/>
-          </a:xfrm>
-          <a:prstGeom prst="rect">
-            <a:avLst/>
-          </a:prstGeom>
-          <a:noFill/>
-          <a:ln/>
-        </p:spPr>
-        <p:txBody>
-          <a:bodyPr wrap="square" lIns="0" tIns="0" rIns="0" bIns="0" rtlCol="0" anchor="t"/>
-          <a:lstStyle/>
-          <a:p>
-            <a:pPr indent="0" marL="0">
-              <a:buNone/>
-            </a:pPr>
-            <a:r>
-              <a:rPr lang="en-US" sz="1300" dirty="0">
-                <a:solidFill>
-                  <a:srgbClr val="5B6474"/>
-                </a:solidFill>
-              </a:rPr>
-              <a:t>111 obrigações e prazos de incidentes para o setor financeiro</a:t>
-            </a:r>
-            <a:endParaRPr lang="en-US" sz="1300" dirty="0"/>
-          </a:p>
-        </p:txBody>
-      </p:sp>
-      <p:sp>
-        <p:nvSpPr>
-          <p:cNvPr id="15" name="card-74"/>
-          <p:cNvSpPr/>
-          <p:nvPr/>
-        </p:nvSpPr>
-        <p:spPr>
-          <a:xfrm>
-            <a:off x="548640" y="3657600"/>
-            <a:ext cx="3520440" cy="2011680"/>
-          </a:xfrm>
-          <a:prstGeom prst="roundRect">
-            <a:avLst>
-              <a:gd name="adj" fmla="val 5455"/>
-            </a:avLst>
-          </a:prstGeom>
-          <a:solidFill>
-            <a:srgbClr val="F3F5F8"/>
-          </a:solidFill>
-          <a:ln w="12700">
-            <a:solidFill>
-              <a:srgbClr val="F3F5F8"/>
-            </a:solidFill>
-            <a:prstDash val="solid"/>
-          </a:ln>
-        </p:spPr>
-      </p:sp>
-      <p:sp>
-        <p:nvSpPr>
-          <p:cNvPr id="16" name="Text 14"/>
-          <p:cNvSpPr txBox="1"/>
-          <p:nvPr/>
-        </p:nvSpPr>
-        <p:spPr>
-          <a:xfrm>
-            <a:off x="822960" y="3886200"/>
-            <a:ext cx="3017520" cy="411480"/>
-          </a:xfrm>
-          <a:prstGeom prst="rect">
-            <a:avLst/>
-          </a:prstGeom>
-          <a:noFill/>
-          <a:ln/>
-        </p:spPr>
-        <p:txBody>
-          <a:bodyPr wrap="square" lIns="0" tIns="0" rIns="0" bIns="0" rtlCol="0" anchor="t"/>
-          <a:lstStyle/>
-          <a:p>
-            <a:pPr indent="0" marL="0">
-              <a:buNone/>
-            </a:pPr>
-            <a:r>
-              <a:rPr lang="en-US" sz="1800" b="1" dirty="0">
-                <a:solidFill>
-                  <a:srgbClr val="070A13"/>
-                </a:solidFill>
-              </a:rPr>
-              <a:t>TISAX</a:t>
-            </a:r>
-            <a:endParaRPr lang="en-US" sz="1800" dirty="0"/>
-          </a:p>
-        </p:txBody>
-      </p:sp>
-      <p:sp>
-        <p:nvSpPr>
-          <p:cNvPr id="17" name="Text 15"/>
-          <p:cNvSpPr txBox="1"/>
-          <p:nvPr/>
-        </p:nvSpPr>
-        <p:spPr>
-          <a:xfrm>
-            <a:off x="822960" y="4315968"/>
-            <a:ext cx="3017520" cy="320040"/>
-          </a:xfrm>
-          <a:prstGeom prst="rect">
-            <a:avLst/>
-          </a:prstGeom>
-          <a:noFill/>
-          <a:ln/>
-        </p:spPr>
-        <p:txBody>
-          <a:bodyPr wrap="square" lIns="0" tIns="0" rIns="0" bIns="0" rtlCol="0" anchor="t"/>
-          <a:lstStyle/>
-          <a:p>
-            <a:pPr indent="0" marL="0">
-              <a:buNone/>
-            </a:pPr>
-            <a:r>
-              <a:rPr lang="en-US" sz="1200" b="1" dirty="0">
-                <a:solidFill>
-                  <a:srgbClr val="17766C"/>
-                </a:solidFill>
-              </a:rPr>
-              <a:t>VDA ISA 6.0.3 e 2027.1</a:t>
-            </a:r>
-            <a:endParaRPr lang="en-US" sz="1200" dirty="0"/>
-          </a:p>
-        </p:txBody>
-      </p:sp>
-      <p:sp>
-        <p:nvSpPr>
-          <p:cNvPr id="18" name="Text 16"/>
-          <p:cNvSpPr txBox="1"/>
-          <p:nvPr/>
-        </p:nvSpPr>
-        <p:spPr>
-          <a:xfrm>
-            <a:off x="822960" y="4709160"/>
-            <a:ext cx="3017520" cy="822960"/>
-          </a:xfrm>
-          <a:prstGeom prst="rect">
-            <a:avLst/>
-          </a:prstGeom>
-          <a:noFill/>
-          <a:ln/>
-        </p:spPr>
-        <p:txBody>
-          <a:bodyPr wrap="square" lIns="0" tIns="0" rIns="0" bIns="0" rtlCol="0" anchor="t"/>
-          <a:lstStyle/>
-          <a:p>
-            <a:pPr indent="0" marL="0">
-              <a:buNone/>
-            </a:pPr>
-            <a:r>
-              <a:rPr lang="en-US" sz="1300" dirty="0">
-                <a:solidFill>
-                  <a:srgbClr val="5B6474"/>
-                </a:solidFill>
-              </a:rPr>
-              <a:t>80 e 78 controlos para a indústria automóvel</a:t>
-            </a:r>
-            <a:endParaRPr lang="en-US" sz="1300" dirty="0"/>
-          </a:p>
-        </p:txBody>
-      </p:sp>
-      <p:sp>
-        <p:nvSpPr>
-          <p:cNvPr id="19" name="card-75"/>
-          <p:cNvSpPr/>
-          <p:nvPr/>
-        </p:nvSpPr>
-        <p:spPr>
-          <a:xfrm>
-            <a:off x="4297680" y="3657600"/>
-            <a:ext cx="3520440" cy="2011680"/>
-          </a:xfrm>
-          <a:prstGeom prst="roundRect">
-            <a:avLst>
-              <a:gd name="adj" fmla="val 5455"/>
-            </a:avLst>
-          </a:prstGeom>
-          <a:solidFill>
-            <a:srgbClr val="F3F5F8"/>
-          </a:solidFill>
-          <a:ln w="12700">
-            <a:solidFill>
-              <a:srgbClr val="F3F5F8"/>
-            </a:solidFill>
-            <a:prstDash val="solid"/>
-          </a:ln>
-        </p:spPr>
-      </p:sp>
-      <p:sp>
-        <p:nvSpPr>
-          <p:cNvPr id="20" name="Text 18"/>
-          <p:cNvSpPr txBox="1"/>
-          <p:nvPr/>
-        </p:nvSpPr>
-        <p:spPr>
-          <a:xfrm>
-            <a:off x="4572000" y="3886200"/>
-            <a:ext cx="3017520" cy="411480"/>
-          </a:xfrm>
-          <a:prstGeom prst="rect">
-            <a:avLst/>
-          </a:prstGeom>
-          <a:noFill/>
-          <a:ln/>
-        </p:spPr>
-        <p:txBody>
-          <a:bodyPr wrap="square" lIns="0" tIns="0" rIns="0" bIns="0" rtlCol="0" anchor="t"/>
-          <a:lstStyle/>
-          <a:p>
-            <a:pPr indent="0" marL="0">
-              <a:buNone/>
-            </a:pPr>
-            <a:r>
-              <a:rPr lang="en-US" sz="1800" b="1" dirty="0">
-                <a:solidFill>
-                  <a:srgbClr val="070A13"/>
-                </a:solidFill>
-              </a:rPr>
-              <a:t>CIS Controls v8.1</a:t>
-            </a:r>
-            <a:endParaRPr lang="en-US" sz="1800" dirty="0"/>
-          </a:p>
-        </p:txBody>
-      </p:sp>
-      <p:sp>
-        <p:nvSpPr>
-          <p:cNvPr id="21" name="Text 19"/>
-          <p:cNvSpPr txBox="1"/>
-          <p:nvPr/>
-        </p:nvSpPr>
-        <p:spPr>
-          <a:xfrm>
-            <a:off x="4572000" y="4315968"/>
-            <a:ext cx="3017520" cy="320040"/>
-          </a:xfrm>
-          <a:prstGeom prst="rect">
-            <a:avLst/>
-          </a:prstGeom>
-          <a:noFill/>
-          <a:ln/>
-        </p:spPr>
-        <p:txBody>
-          <a:bodyPr wrap="square" lIns="0" tIns="0" rIns="0" bIns="0" rtlCol="0" anchor="t"/>
-          <a:lstStyle/>
-          <a:p>
-            <a:pPr indent="0" marL="0">
-              <a:buNone/>
-            </a:pPr>
-            <a:r>
-              <a:rPr lang="en-US" sz="1200" b="1" dirty="0">
-                <a:solidFill>
-                  <a:srgbClr val="17766C"/>
-                </a:solidFill>
-              </a:rPr>
-              <a:t>CIS</a:t>
-            </a:r>
-            <a:endParaRPr lang="en-US" sz="1200" dirty="0"/>
-          </a:p>
-        </p:txBody>
-      </p:sp>
-      <p:sp>
-        <p:nvSpPr>
-          <p:cNvPr id="22" name="Text 20"/>
-          <p:cNvSpPr txBox="1"/>
-          <p:nvPr/>
-        </p:nvSpPr>
-        <p:spPr>
-          <a:xfrm>
-            <a:off x="4572000" y="4709160"/>
-            <a:ext cx="3017520" cy="822960"/>
-          </a:xfrm>
-          <a:prstGeom prst="rect">
-            <a:avLst/>
-          </a:prstGeom>
-          <a:noFill/>
-          <a:ln/>
-        </p:spPr>
-        <p:txBody>
-          <a:bodyPr wrap="square" lIns="0" tIns="0" rIns="0" bIns="0" rtlCol="0" anchor="t"/>
-          <a:lstStyle/>
-          <a:p>
-            <a:pPr indent="0" marL="0">
-              <a:buNone/>
-            </a:pPr>
-            <a:r>
-              <a:rPr lang="en-US" sz="1300" dirty="0">
-                <a:solidFill>
-                  <a:srgbClr val="5B6474"/>
-                </a:solidFill>
-              </a:rPr>
-              <a:t>Identificadores; o texto entra com o ficheiro oficial da entidade</a:t>
-            </a:r>
-            <a:endParaRPr lang="en-US" sz="1300" dirty="0"/>
-          </a:p>
-        </p:txBody>
-      </p:sp>
-      <p:sp>
-        <p:nvSpPr>
-          <p:cNvPr id="23" name="card-76"/>
-          <p:cNvSpPr/>
-          <p:nvPr/>
-        </p:nvSpPr>
-        <p:spPr>
-          <a:xfrm>
-            <a:off x="8046720" y="3657600"/>
-            <a:ext cx="3520440" cy="2011680"/>
-          </a:xfrm>
-          <a:prstGeom prst="roundRect">
-            <a:avLst>
-              <a:gd name="adj" fmla="val 5455"/>
-            </a:avLst>
-          </a:prstGeom>
-          <a:solidFill>
-            <a:srgbClr val="F3F5F8"/>
-          </a:solidFill>
-          <a:ln w="12700">
-            <a:solidFill>
-              <a:srgbClr val="F3F5F8"/>
-            </a:solidFill>
-            <a:prstDash val="solid"/>
-          </a:ln>
-        </p:spPr>
-      </p:sp>
-      <p:sp>
-        <p:nvSpPr>
-          <p:cNvPr id="24" name="Text 22"/>
-          <p:cNvSpPr txBox="1"/>
-          <p:nvPr/>
-        </p:nvSpPr>
-        <p:spPr>
-          <a:xfrm>
-            <a:off x="8321040" y="3886200"/>
-            <a:ext cx="3017520" cy="411480"/>
-          </a:xfrm>
-          <a:prstGeom prst="rect">
-            <a:avLst/>
-          </a:prstGeom>
-          <a:noFill/>
-          <a:ln/>
-        </p:spPr>
-        <p:txBody>
-          <a:bodyPr wrap="square" lIns="0" tIns="0" rIns="0" bIns="0" rtlCol="0" anchor="t"/>
-          <a:lstStyle/>
-          <a:p>
-            <a:pPr indent="0" marL="0">
-              <a:buNone/>
-            </a:pPr>
-            <a:r>
-              <a:rPr lang="en-US" sz="1800" b="1" dirty="0">
-                <a:solidFill>
-                  <a:srgbClr val="070A13"/>
-                </a:solidFill>
-              </a:rPr>
-              <a:t>NIST CSF 2.0</a:t>
-            </a:r>
-            <a:endParaRPr lang="en-US" sz="1800" dirty="0"/>
-          </a:p>
-        </p:txBody>
-      </p:sp>
-      <p:sp>
-        <p:nvSpPr>
-          <p:cNvPr id="25" name="Text 23"/>
-          <p:cNvSpPr txBox="1"/>
-          <p:nvPr/>
-        </p:nvSpPr>
-        <p:spPr>
-          <a:xfrm>
-            <a:off x="8321040" y="4315968"/>
-            <a:ext cx="3017520" cy="320040"/>
-          </a:xfrm>
-          <a:prstGeom prst="rect">
-            <a:avLst/>
-          </a:prstGeom>
-          <a:noFill/>
-          <a:ln/>
-        </p:spPr>
-        <p:txBody>
-          <a:bodyPr wrap="square" lIns="0" tIns="0" rIns="0" bIns="0" rtlCol="0" anchor="t"/>
-          <a:lstStyle/>
-          <a:p>
-            <a:pPr indent="0" marL="0">
-              <a:buNone/>
-            </a:pPr>
-            <a:r>
-              <a:rPr lang="en-US" sz="1200" b="1" dirty="0">
-                <a:solidFill>
-                  <a:srgbClr val="17766C"/>
-                </a:solidFill>
-              </a:rPr>
-              <a:t>NIST</a:t>
-            </a:r>
-            <a:endParaRPr lang="en-US" sz="1200" dirty="0"/>
-          </a:p>
-        </p:txBody>
-      </p:sp>
-      <p:sp>
-        <p:nvSpPr>
-          <p:cNvPr id="26" name="Text 24"/>
-          <p:cNvSpPr txBox="1"/>
-          <p:nvPr/>
-        </p:nvSpPr>
-        <p:spPr>
-          <a:xfrm>
-            <a:off x="8321040" y="4709160"/>
-            <a:ext cx="3017520" cy="822960"/>
-          </a:xfrm>
-          <a:prstGeom prst="rect">
-            <a:avLst/>
-          </a:prstGeom>
-          <a:noFill/>
-          <a:ln/>
-        </p:spPr>
-        <p:txBody>
-          <a:bodyPr wrap="square" lIns="0" tIns="0" rIns="0" bIns="0" rtlCol="0" anchor="t"/>
-          <a:lstStyle/>
-          <a:p>
-            <a:pPr indent="0" marL="0">
-              <a:buNone/>
-            </a:pPr>
-            <a:r>
-              <a:rPr lang="en-US" sz="1300" dirty="0">
-                <a:solidFill>
-                  <a:srgbClr val="5B6474"/>
-                </a:solidFill>
-              </a:rPr>
-              <a:t>Correspondências a partir do QNRCS</a:t>
-            </a:r>
-            <a:endParaRPr lang="en-US" sz="1300" dirty="0"/>
-          </a:p>
-        </p:txBody>
-      </p:sp>
-      <p:sp>
-        <p:nvSpPr>
-          <p:cNvPr id="27" name="Text 25"/>
-          <p:cNvSpPr txBox="1"/>
-          <p:nvPr/>
-        </p:nvSpPr>
-        <p:spPr>
-          <a:xfrm>
-            <a:off x="548640" y="5943600"/>
-            <a:ext cx="9692640" cy="320040"/>
-          </a:xfrm>
-          <a:prstGeom prst="rect">
-            <a:avLst/>
-          </a:prstGeom>
-          <a:noFill/>
-          <a:ln/>
-        </p:spPr>
-        <p:txBody>
-          <a:bodyPr wrap="square" lIns="0" tIns="0" rIns="0" bIns="0" rtlCol="0" anchor="t"/>
-          <a:lstStyle/>
-          <a:p>
-            <a:pPr indent="0" marL="0">
-              <a:buNone/>
-            </a:pPr>
-            <a:r>
-              <a:rPr lang="en-US" sz="1200" dirty="0">
-                <a:solidFill>
-                  <a:srgbClr val="5B6474"/>
-                </a:solidFill>
-              </a:rPr>
-              <a:t>Biblioteca Legal › Relações entre referenciais mostra as correspondências (1338 ligações) para reaproveitar evidências.</a:t>
-            </a:r>
-            <a:endParaRPr lang="en-US" sz="1200" dirty="0"/>
+              <a:t>Como trabalhar (Biblioteca Legal › ISO/IEC 27001)</a:t>
+            </a:r>
+            <a:endParaRPr lang="en-US" sz="1700" dirty="0"/>
+          </a:p>
+        </p:txBody>
+      </p:sp>
+      <p:sp>
+        <p:nvSpPr>
+          <p:cNvPr id="15" name="Text 13"/>
+          <p:cNvSpPr txBox="1"/>
+          <p:nvPr/>
+        </p:nvSpPr>
+        <p:spPr>
+          <a:xfrm>
+            <a:off x="5120640" y="2743200"/>
+            <a:ext cx="6492240" cy="3291840"/>
+          </a:xfrm>
+          <a:prstGeom prst="rect">
+            <a:avLst/>
+          </a:prstGeom>
+          <a:noFill/>
+          <a:ln/>
+        </p:spPr>
+        <p:txBody>
+          <a:bodyPr wrap="square" lIns="0" tIns="0" rIns="0" bIns="0" rtlCol="0" anchor="t"/>
+          <a:lstStyle/>
+          <a:p>
+            <a:pPr marL="342900" indent="-342900">
+              <a:spcAft>
+                <a:spcPts val="600"/>
+              </a:spcAft>
+              <a:buSzPct val="100000"/>
+              <a:buFont typeface="+mj-lt"/>
+              <a:buAutoNum type="arabicPeriod" startAt="1"/>
+            </a:pPr>
+            <a:r>
+              <a:rPr lang="en-US" sz="1400" dirty="0">
+                <a:solidFill>
+                  <a:srgbClr val="111827"/>
+                </a:solidFill>
+              </a:rPr>
+              <a:t>Cláusulas 4 a 6: âmbito, política, metodologia de riscos e objetivos</a:t>
+            </a:r>
+            <a:endParaRPr lang="en-US" sz="1400" dirty="0"/>
+          </a:p>
+          <a:p>
+            <a:pPr marL="342900" indent="-342900">
+              <a:spcAft>
+                <a:spcPts val="600"/>
+              </a:spcAft>
+              <a:buSzPct val="100000"/>
+              <a:buFont typeface="+mj-lt"/>
+              <a:buAutoNum type="arabicPeriod" startAt="1"/>
+            </a:pPr>
+            <a:r>
+              <a:rPr lang="en-US" sz="1400" dirty="0">
+                <a:solidFill>
+                  <a:srgbClr val="111827"/>
+                </a:solidFill>
+              </a:rPr>
+              <a:t>Avaliação e tratamento de riscos em Gestão de Risco</a:t>
+            </a:r>
+            <a:endParaRPr lang="en-US" sz="1400" dirty="0"/>
+          </a:p>
+          <a:p>
+            <a:pPr marL="342900" indent="-342900">
+              <a:spcAft>
+                <a:spcPts val="600"/>
+              </a:spcAft>
+              <a:buSzPct val="100000"/>
+              <a:buFont typeface="+mj-lt"/>
+              <a:buAutoNum type="arabicPeriod" startAt="1"/>
+            </a:pPr>
+            <a:r>
+              <a:rPr lang="en-US" sz="1400" dirty="0">
+                <a:solidFill>
+                  <a:srgbClr val="111827"/>
+                </a:solidFill>
+              </a:rPr>
+              <a:t>Anexo A: aplicável ou não, justificação e método de implementação</a:t>
+            </a:r>
+            <a:endParaRPr lang="en-US" sz="1400" dirty="0"/>
+          </a:p>
+          <a:p>
+            <a:pPr marL="342900" indent="-342900">
+              <a:spcAft>
+                <a:spcPts val="600"/>
+              </a:spcAft>
+              <a:buSzPct val="100000"/>
+              <a:buFont typeface="+mj-lt"/>
+              <a:buAutoNum type="arabicPeriod" startAt="1"/>
+            </a:pPr>
+            <a:r>
+              <a:rPr lang="en-US" sz="1400" dirty="0">
+                <a:solidFill>
+                  <a:srgbClr val="111827"/>
+                </a:solidFill>
+              </a:rPr>
+              <a:t>Exportar a Declaração de Aplicabilidade e aprová-la em Documentos</a:t>
+            </a:r>
+            <a:endParaRPr lang="en-US" sz="1400" dirty="0"/>
+          </a:p>
+          <a:p>
+            <a:pPr marL="342900" indent="-342900">
+              <a:spcAft>
+                <a:spcPts val="600"/>
+              </a:spcAft>
+              <a:buSzPct val="100000"/>
+              <a:buFont typeface="+mj-lt"/>
+              <a:buAutoNum type="arabicPeriod" startAt="1"/>
+            </a:pPr>
+            <a:r>
+              <a:rPr lang="en-US" sz="1400" dirty="0">
+                <a:solidFill>
+                  <a:srgbClr val="111827"/>
+                </a:solidFill>
+              </a:rPr>
+              <a:t>Evidências por controlo; as do RJC ligadas contam também</a:t>
+            </a:r>
+            <a:endParaRPr lang="en-US" sz="1400" dirty="0"/>
+          </a:p>
+          <a:p>
+            <a:pPr marL="342900" indent="-342900">
+              <a:spcAft>
+                <a:spcPts val="600"/>
+              </a:spcAft>
+              <a:buSzPct val="100000"/>
+              <a:buFont typeface="+mj-lt"/>
+              <a:buAutoNum type="arabicPeriod" startAt="1"/>
+            </a:pPr>
+            <a:r>
+              <a:rPr lang="en-US" sz="1400" dirty="0">
+                <a:solidFill>
+                  <a:srgbClr val="111827"/>
+                </a:solidFill>
+              </a:rPr>
+              <a:t>Análise de lacunas: sistema de gestão e controlos em separado</a:t>
+            </a:r>
+            <a:endParaRPr lang="en-US" sz="1400" dirty="0"/>
+          </a:p>
+          <a:p>
+            <a:pPr marL="342900" indent="-342900">
+              <a:spcAft>
+                <a:spcPts val="600"/>
+              </a:spcAft>
+              <a:buSzPct val="100000"/>
+              <a:buFont typeface="+mj-lt"/>
+              <a:buAutoNum type="arabicPeriod" startAt="1"/>
+            </a:pPr>
+            <a:r>
+              <a:rPr lang="en-US" sz="1400" dirty="0">
+                <a:solidFill>
+                  <a:srgbClr val="111827"/>
+                </a:solidFill>
+              </a:rPr>
+              <a:t>Auditoria interna (9.2) e revisão pela gestão (9.3) antes da certificação</a:t>
+            </a:r>
+            <a:endParaRPr lang="en-US" sz="1400" dirty="0"/>
           </a:p>
         </p:txBody>
       </p:sp>
@@ -8777,7 +8925,7 @@
                   <a:schemeClr val="tx1"/>
                 </a:solidFill>
               </a:rPr>
-              <a:t>Os primeiros 90 dias</a:t>
+              <a:t>ISO/IEC 42001: gerir a inteligência artificial</a:t>
             </a:r>
             <a:endParaRPr lang="en-US" sz="3200" dirty="0"/>
           </a:p>
@@ -8785,22 +8933,62 @@
       </p:sp>
       <p:sp>
         <p:nvSpPr>
-          <p:cNvPr id="3" name="linha-90"/>
+          <p:cNvPr id="3" name="Text 1"/>
+          <p:cNvSpPr txBox="1"/>
+          <p:nvPr/>
+        </p:nvSpPr>
+        <p:spPr>
+          <a:xfrm>
+            <a:off x="548640" y="1234440"/>
+            <a:ext cx="10972800" cy="411480"/>
+          </a:xfrm>
+          <a:prstGeom prst="rect">
+            <a:avLst/>
+          </a:prstGeom>
+          <a:noFill/>
+          <a:ln/>
+        </p:spPr>
+        <p:txBody>
+          <a:bodyPr wrap="square" lIns="0" tIns="0" rIns="0" bIns="0" rtlCol="0" anchor="t"/>
+          <a:lstStyle/>
+          <a:p>
+            <a:pPr indent="0" marL="0">
+              <a:buNone/>
+            </a:pPr>
+            <a:r>
+              <a:rPr lang="en-US" sz="1500" dirty="0">
+                <a:solidFill>
+                  <a:srgbClr val="5B6474"/>
+                </a:solidFill>
+              </a:rPr>
+              <a:t>Para quem desenvolve, fornece ou usa sistemas de IA. Guia em Biblioteca Legal › ISO/IEC 42001, com a mesma abordagem da 27001.</a:t>
+            </a:r>
+            <a:endParaRPr lang="en-US" sz="1500" dirty="0"/>
+          </a:p>
+        </p:txBody>
+      </p:sp>
+      <p:sp>
+        <p:nvSpPr>
+          <p:cNvPr id="4" name="card-80"/>
           <p:cNvSpPr/>
           <p:nvPr/>
         </p:nvSpPr>
         <p:spPr>
           <a:xfrm>
-            <a:off x="822960" y="2057400"/>
-            <a:ext cx="10515600" cy="0"/>
-          </a:xfrm>
-          <a:prstGeom prst="line">
-            <a:avLst/>
-          </a:prstGeom>
-          <a:noFill/>
-          <a:ln w="25400">
+            <a:off x="548640" y="1828800"/>
+            <a:ext cx="4206240" cy="1051560"/>
+          </a:xfrm>
+          <a:prstGeom prst="roundRect">
+            <a:avLst>
+              <a:gd name="adj" fmla="val 10435"/>
+            </a:avLst>
+          </a:prstGeom>
+          <a:solidFill>
+            <a:srgbClr val="F3F5F8"/>
+          </a:solidFill>
+          <a:ln w="12700">
             <a:solidFill>
-              <a:srgbClr val="DDE2EA"/>
+              <a:srgbClr val="F3F5F8"/>
             </a:solidFill>
             <a:prstDash val="solid"/>
           </a:ln>
@@ -8808,24 +8996,98 @@
       </p:sp>
       <p:sp>
         <p:nvSpPr>
-          <p:cNvPr id="4" name="fase-0"/>
+          <p:cNvPr id="5" name="Text 3"/>
+          <p:cNvSpPr txBox="1"/>
+          <p:nvPr/>
+        </p:nvSpPr>
+        <p:spPr>
+          <a:xfrm>
+            <a:off x="777240" y="1938528"/>
+            <a:ext cx="1188720" cy="822960"/>
+          </a:xfrm>
+          <a:prstGeom prst="rect">
+            <a:avLst/>
+          </a:prstGeom>
+          <a:noFill/>
+          <a:ln/>
+        </p:spPr>
+        <p:txBody>
+          <a:bodyPr wrap="square" lIns="0" tIns="0" rIns="0" bIns="0" rtlCol="0" anchor="ctr"/>
+          <a:lstStyle/>
+          <a:p>
+            <a:pPr indent="0" marL="0">
+              <a:buNone/>
+            </a:pPr>
+            <a:r>
+              <a:rPr lang="en-US" sz="4400" b="1" dirty="0">
+                <a:solidFill>
+                  <a:srgbClr val="070A13"/>
+                </a:solidFill>
+              </a:rPr>
+              <a:t>27</a:t>
+            </a:r>
+            <a:endParaRPr lang="en-US" sz="4400" dirty="0"/>
+          </a:p>
+        </p:txBody>
+      </p:sp>
+      <p:sp>
+        <p:nvSpPr>
+          <p:cNvPr id="6" name="Text 4"/>
+          <p:cNvSpPr txBox="1"/>
+          <p:nvPr/>
+        </p:nvSpPr>
+        <p:spPr>
+          <a:xfrm>
+            <a:off x="1965960" y="1965960"/>
+            <a:ext cx="2651760" cy="777240"/>
+          </a:xfrm>
+          <a:prstGeom prst="rect">
+            <a:avLst/>
+          </a:prstGeom>
+          <a:noFill/>
+          <a:ln/>
+        </p:spPr>
+        <p:txBody>
+          <a:bodyPr wrap="square" lIns="0" tIns="0" rIns="0" bIns="0" rtlCol="0" anchor="ctr"/>
+          <a:lstStyle/>
+          <a:p>
+            <a:pPr indent="0" marL="0">
+              <a:buNone/>
+            </a:pPr>
+            <a:r>
+              <a:rPr lang="en-US" sz="1400" dirty="0">
+                <a:solidFill>
+                  <a:srgbClr val="111827"/>
+                </a:solidFill>
+              </a:rPr>
+              <a:t>requisitos (cláusulas 4 a 10), com a avaliação de impacto em 6.1.4 e 8.4</a:t>
+            </a:r>
+            <a:endParaRPr lang="en-US" sz="1400" dirty="0"/>
+          </a:p>
+        </p:txBody>
+      </p:sp>
+      <p:sp>
+        <p:nvSpPr>
+          <p:cNvPr id="7" name="card-81"/>
           <p:cNvSpPr/>
           <p:nvPr/>
         </p:nvSpPr>
         <p:spPr>
           <a:xfrm>
-            <a:off x="640080" y="1828800"/>
-            <a:ext cx="457200" cy="457200"/>
-          </a:xfrm>
-          <a:prstGeom prst="ellipse">
-            <a:avLst/>
+            <a:off x="548640" y="3017520"/>
+            <a:ext cx="4206240" cy="1051560"/>
+          </a:xfrm>
+          <a:prstGeom prst="roundRect">
+            <a:avLst>
+              <a:gd name="adj" fmla="val 10435"/>
+            </a:avLst>
           </a:prstGeom>
           <a:solidFill>
             <a:srgbClr val="070A13"/>
           </a:solidFill>
-          <a:ln w="38100">
+          <a:ln w="12700">
             <a:solidFill>
-              <a:srgbClr val="FFFFFF"/>
+              <a:srgbClr val="070A13"/>
             </a:solidFill>
             <a:prstDash val="solid"/>
           </a:ln>
@@ -8833,59 +9095,59 @@
       </p:sp>
       <p:sp>
         <p:nvSpPr>
-          <p:cNvPr id="5" name="Text 3"/>
-          <p:cNvSpPr txBox="1"/>
-          <p:nvPr/>
-        </p:nvSpPr>
-        <p:spPr>
-          <a:xfrm>
-            <a:off x="548640" y="2514600"/>
-            <a:ext cx="2606040" cy="411480"/>
-          </a:xfrm>
-          <a:prstGeom prst="rect">
-            <a:avLst/>
-          </a:prstGeom>
-          <a:noFill/>
-          <a:ln/>
-        </p:spPr>
-        <p:txBody>
-          <a:bodyPr wrap="square" lIns="0" tIns="0" rIns="0" bIns="0" rtlCol="0" anchor="t"/>
+          <p:cNvPr id="8" name="Text 6"/>
+          <p:cNvSpPr txBox="1"/>
+          <p:nvPr/>
+        </p:nvSpPr>
+        <p:spPr>
+          <a:xfrm>
+            <a:off x="777240" y="3127248"/>
+            <a:ext cx="1188720" cy="822960"/>
+          </a:xfrm>
+          <a:prstGeom prst="rect">
+            <a:avLst/>
+          </a:prstGeom>
+          <a:noFill/>
+          <a:ln/>
+        </p:spPr>
+        <p:txBody>
+          <a:bodyPr wrap="square" lIns="0" tIns="0" rIns="0" bIns="0" rtlCol="0" anchor="ctr"/>
           <a:lstStyle/>
           <a:p>
             <a:pPr indent="0" marL="0">
               <a:buNone/>
             </a:pPr>
             <a:r>
-              <a:rPr lang="en-US" sz="1800" b="1" dirty="0">
-                <a:solidFill>
-                  <a:srgbClr val="070A13"/>
-                </a:solidFill>
-              </a:rPr>
-              <a:t>Semana 1</a:t>
-            </a:r>
-            <a:endParaRPr lang="en-US" sz="1800" dirty="0"/>
-          </a:p>
-        </p:txBody>
-      </p:sp>
-      <p:sp>
-        <p:nvSpPr>
-          <p:cNvPr id="6" name="Text 4"/>
-          <p:cNvSpPr txBox="1"/>
-          <p:nvPr/>
-        </p:nvSpPr>
-        <p:spPr>
-          <a:xfrm>
-            <a:off x="548640" y="2971800"/>
-            <a:ext cx="2514600" cy="1463040"/>
-          </a:xfrm>
-          <a:prstGeom prst="rect">
-            <a:avLst/>
-          </a:prstGeom>
-          <a:noFill/>
-          <a:ln/>
-        </p:spPr>
-        <p:txBody>
-          <a:bodyPr wrap="square" lIns="0" tIns="0" rIns="0" bIns="0" rtlCol="0" anchor="t"/>
+              <a:rPr lang="en-US" sz="4400" b="1" dirty="0">
+                <a:solidFill>
+                  <a:srgbClr val="CFA04A"/>
+                </a:solidFill>
+              </a:rPr>
+              <a:t>38</a:t>
+            </a:r>
+            <a:endParaRPr lang="en-US" sz="4400" dirty="0"/>
+          </a:p>
+        </p:txBody>
+      </p:sp>
+      <p:sp>
+        <p:nvSpPr>
+          <p:cNvPr id="9" name="Text 7"/>
+          <p:cNvSpPr txBox="1"/>
+          <p:nvPr/>
+        </p:nvSpPr>
+        <p:spPr>
+          <a:xfrm>
+            <a:off x="1965960" y="3154680"/>
+            <a:ext cx="2651760" cy="777240"/>
+          </a:xfrm>
+          <a:prstGeom prst="rect">
+            <a:avLst/>
+          </a:prstGeom>
+          <a:noFill/>
+          <a:ln/>
+        </p:spPr>
+        <p:txBody>
+          <a:bodyPr wrap="square" lIns="0" tIns="0" rIns="0" bIns="0" rtlCol="0" anchor="ctr"/>
           <a:lstStyle/>
           <a:p>
             <a:pPr indent="0" marL="0">
@@ -8894,10 +9156,10 @@
             <a:r>
               <a:rPr lang="en-US" sz="1400" dirty="0">
                 <a:solidFill>
-                  <a:srgbClr val="5B6474"/>
-                </a:solidFill>
-              </a:rPr>
-              <a:t>Conta, enquadramento e equipa convidada</a:t>
+                  <a:srgbClr val="FFFFFF"/>
+                </a:solidFill>
+              </a:rPr>
+              <a:t>controlos do Anexo A em 9 domínios</a:t>
             </a:r>
             <a:endParaRPr lang="en-US" sz="1400" dirty="0"/>
           </a:p>
@@ -8905,24 +9167,26 @@
       </p:sp>
       <p:sp>
         <p:nvSpPr>
-          <p:cNvPr id="7" name="fase-1"/>
+          <p:cNvPr id="10" name="card-82"/>
           <p:cNvSpPr/>
           <p:nvPr/>
         </p:nvSpPr>
         <p:spPr>
           <a:xfrm>
-            <a:off x="3429000" y="1828800"/>
-            <a:ext cx="457200" cy="457200"/>
-          </a:xfrm>
-          <a:prstGeom prst="ellipse">
-            <a:avLst/>
+            <a:off x="548640" y="4206240"/>
+            <a:ext cx="4206240" cy="1051560"/>
+          </a:xfrm>
+          <a:prstGeom prst="roundRect">
+            <a:avLst>
+              <a:gd name="adj" fmla="val 10435"/>
+            </a:avLst>
           </a:prstGeom>
           <a:solidFill>
-            <a:srgbClr val="070A13"/>
+            <a:srgbClr val="F3F5F8"/>
           </a:solidFill>
-          <a:ln w="38100">
+          <a:ln w="12700">
             <a:solidFill>
-              <a:srgbClr val="FFFFFF"/>
+              <a:srgbClr val="F3F5F8"/>
             </a:solidFill>
             <a:prstDash val="solid"/>
           </a:ln>
@@ -8930,59 +9194,59 @@
       </p:sp>
       <p:sp>
         <p:nvSpPr>
-          <p:cNvPr id="8" name="Text 6"/>
-          <p:cNvSpPr txBox="1"/>
-          <p:nvPr/>
-        </p:nvSpPr>
-        <p:spPr>
-          <a:xfrm>
-            <a:off x="3337560" y="2514600"/>
-            <a:ext cx="2606040" cy="411480"/>
-          </a:xfrm>
-          <a:prstGeom prst="rect">
-            <a:avLst/>
-          </a:prstGeom>
-          <a:noFill/>
-          <a:ln/>
-        </p:spPr>
-        <p:txBody>
-          <a:bodyPr wrap="square" lIns="0" tIns="0" rIns="0" bIns="0" rtlCol="0" anchor="t"/>
+          <p:cNvPr id="11" name="Text 9"/>
+          <p:cNvSpPr txBox="1"/>
+          <p:nvPr/>
+        </p:nvSpPr>
+        <p:spPr>
+          <a:xfrm>
+            <a:off x="777240" y="4315968"/>
+            <a:ext cx="1188720" cy="822960"/>
+          </a:xfrm>
+          <a:prstGeom prst="rect">
+            <a:avLst/>
+          </a:prstGeom>
+          <a:noFill/>
+          <a:ln/>
+        </p:spPr>
+        <p:txBody>
+          <a:bodyPr wrap="square" lIns="0" tIns="0" rIns="0" bIns="0" rtlCol="0" anchor="ctr"/>
           <a:lstStyle/>
           <a:p>
             <a:pPr indent="0" marL="0">
               <a:buNone/>
             </a:pPr>
             <a:r>
-              <a:rPr lang="en-US" sz="1800" b="1" dirty="0">
+              <a:rPr lang="en-US" sz="4400" b="1" dirty="0">
                 <a:solidFill>
                   <a:srgbClr val="070A13"/>
                 </a:solidFill>
               </a:rPr>
-              <a:t>Semanas 2 a 4</a:t>
-            </a:r>
-            <a:endParaRPr lang="en-US" sz="1800" dirty="0"/>
-          </a:p>
-        </p:txBody>
-      </p:sp>
-      <p:sp>
-        <p:nvSpPr>
-          <p:cNvPr id="9" name="Text 7"/>
-          <p:cNvSpPr txBox="1"/>
-          <p:nvPr/>
-        </p:nvSpPr>
-        <p:spPr>
-          <a:xfrm>
-            <a:off x="3337560" y="2971800"/>
-            <a:ext cx="2514600" cy="1463040"/>
-          </a:xfrm>
-          <a:prstGeom prst="rect">
-            <a:avLst/>
-          </a:prstGeom>
-          <a:noFill/>
-          <a:ln/>
-        </p:spPr>
-        <p:txBody>
-          <a:bodyPr wrap="square" lIns="0" tIns="0" rIns="0" bIns="0" rtlCol="0" anchor="t"/>
+              <a:t>33</a:t>
+            </a:r>
+            <a:endParaRPr lang="en-US" sz="4400" dirty="0"/>
+          </a:p>
+        </p:txBody>
+      </p:sp>
+      <p:sp>
+        <p:nvSpPr>
+          <p:cNvPr id="12" name="Text 10"/>
+          <p:cNvSpPr txBox="1"/>
+          <p:nvPr/>
+        </p:nvSpPr>
+        <p:spPr>
+          <a:xfrm>
+            <a:off x="1965960" y="4343400"/>
+            <a:ext cx="2651760" cy="777240"/>
+          </a:xfrm>
+          <a:prstGeom prst="rect">
+            <a:avLst/>
+          </a:prstGeom>
+          <a:noFill/>
+          <a:ln/>
+        </p:spPr>
+        <p:txBody>
+          <a:bodyPr wrap="square" lIns="0" tIns="0" rIns="0" bIns="0" rtlCol="0" anchor="ctr"/>
           <a:lstStyle/>
           <a:p>
             <a:pPr indent="0" marL="0">
@@ -8991,10 +9255,10 @@
             <a:r>
               <a:rPr lang="en-US" sz="1400" dirty="0">
                 <a:solidFill>
-                  <a:srgbClr val="5B6474"/>
-                </a:solidFill>
-              </a:rPr>
-              <a:t>Responsável e ponto de contacto; autoidentificação; primeira avaliação NIS2 e ISO</a:t>
+                  <a:srgbClr val="111827"/>
+                </a:solidFill>
+              </a:rPr>
+              <a:t>apoiam-se em requisitos da 27001; 5 são próprios da IA</a:t>
             </a:r>
             <a:endParaRPr lang="en-US" sz="1400" dirty="0"/>
           </a:p>
@@ -9002,24 +9266,26 @@
       </p:sp>
       <p:sp>
         <p:nvSpPr>
-          <p:cNvPr id="10" name="fase-2"/>
+          <p:cNvPr id="13" name="card-83"/>
           <p:cNvSpPr/>
           <p:nvPr/>
         </p:nvSpPr>
         <p:spPr>
           <a:xfrm>
-            <a:off x="6217920" y="1828800"/>
-            <a:ext cx="457200" cy="457200"/>
-          </a:xfrm>
-          <a:prstGeom prst="ellipse">
-            <a:avLst/>
+            <a:off x="548640" y="5440680"/>
+            <a:ext cx="4206240" cy="548640"/>
+          </a:xfrm>
+          <a:prstGeom prst="roundRect">
+            <a:avLst>
+              <a:gd name="adj" fmla="val 20000"/>
+            </a:avLst>
           </a:prstGeom>
           <a:solidFill>
-            <a:srgbClr val="070A13"/>
+            <a:srgbClr val="F7F2E7"/>
           </a:solidFill>
-          <a:ln w="38100">
+          <a:ln w="12700">
             <a:solidFill>
-              <a:srgbClr val="FFFFFF"/>
+              <a:srgbClr val="F7F2E7"/>
             </a:solidFill>
             <a:prstDash val="solid"/>
           </a:ln>
@@ -9027,96 +9293,62 @@
       </p:sp>
       <p:sp>
         <p:nvSpPr>
-          <p:cNvPr id="11" name="Text 9"/>
-          <p:cNvSpPr txBox="1"/>
-          <p:nvPr/>
-        </p:nvSpPr>
-        <p:spPr>
-          <a:xfrm>
-            <a:off x="6126480" y="2514600"/>
-            <a:ext cx="2606040" cy="411480"/>
-          </a:xfrm>
-          <a:prstGeom prst="rect">
-            <a:avLst/>
-          </a:prstGeom>
-          <a:noFill/>
-          <a:ln/>
-        </p:spPr>
-        <p:txBody>
-          <a:bodyPr wrap="square" lIns="0" tIns="0" rIns="0" bIns="0" rtlCol="0" anchor="t"/>
+          <p:cNvPr id="14" name="Text 12"/>
+          <p:cNvSpPr txBox="1"/>
+          <p:nvPr/>
+        </p:nvSpPr>
+        <p:spPr>
+          <a:xfrm>
+            <a:off x="731520" y="5440680"/>
+            <a:ext cx="3931920" cy="548640"/>
+          </a:xfrm>
+          <a:prstGeom prst="rect">
+            <a:avLst/>
+          </a:prstGeom>
+          <a:noFill/>
+          <a:ln/>
+        </p:spPr>
+        <p:txBody>
+          <a:bodyPr wrap="square" lIns="0" tIns="0" rIns="0" bIns="0" rtlCol="0" anchor="ctr"/>
           <a:lstStyle/>
           <a:p>
             <a:pPr indent="0" marL="0">
               <a:buNone/>
             </a:pPr>
             <a:r>
-              <a:rPr lang="en-US" sz="1800" b="1" dirty="0">
-                <a:solidFill>
-                  <a:srgbClr val="070A13"/>
-                </a:solidFill>
-              </a:rPr>
-              <a:t>Mês 2</a:t>
-            </a:r>
-            <a:endParaRPr lang="en-US" sz="1800" dirty="0"/>
-          </a:p>
-        </p:txBody>
-      </p:sp>
-      <p:sp>
-        <p:nvSpPr>
-          <p:cNvPr id="12" name="Text 10"/>
-          <p:cNvSpPr txBox="1"/>
-          <p:nvPr/>
-        </p:nvSpPr>
-        <p:spPr>
-          <a:xfrm>
-            <a:off x="6126480" y="2971800"/>
-            <a:ext cx="2514600" cy="1463040"/>
-          </a:xfrm>
-          <a:prstGeom prst="rect">
-            <a:avLst/>
-          </a:prstGeom>
-          <a:noFill/>
-          <a:ln/>
-        </p:spPr>
-        <p:txBody>
-          <a:bodyPr wrap="square" lIns="0" tIns="0" rIns="0" bIns="0" rtlCol="0" anchor="t"/>
-          <a:lstStyle/>
-          <a:p>
-            <a:pPr indent="0" marL="0">
-              <a:buNone/>
-            </a:pPr>
-            <a:r>
-              <a:rPr lang="en-US" sz="1400" dirty="0">
-                <a:solidFill>
-                  <a:srgbClr val="5B6474"/>
-                </a:solidFill>
-              </a:rPr>
-              <a:t>Políticas aprovadas; inventário de ativos; fornecedores críticos</a:t>
-            </a:r>
-            <a:endParaRPr lang="en-US" sz="1400" dirty="0"/>
-          </a:p>
-        </p:txBody>
-      </p:sp>
-      <p:sp>
-        <p:nvSpPr>
-          <p:cNvPr id="13" name="fase-3"/>
+              <a:rPr lang="en-US" sz="1300" b="1" dirty="0">
+                <a:solidFill>
+                  <a:srgbClr val="8A6620"/>
+                </a:solidFill>
+              </a:rPr>
+              <a:t>Não substitui o Regulamento (UE) 2024/1689.</a:t>
+            </a:r>
+            <a:endParaRPr lang="en-US" sz="1300" dirty="0"/>
+          </a:p>
+        </p:txBody>
+      </p:sp>
+      <p:sp>
+        <p:nvSpPr>
+          <p:cNvPr id="15" name="card-84"/>
           <p:cNvSpPr/>
           <p:nvPr/>
         </p:nvSpPr>
         <p:spPr>
           <a:xfrm>
-            <a:off x="9006840" y="1828800"/>
-            <a:ext cx="457200" cy="457200"/>
-          </a:xfrm>
-          <a:prstGeom prst="ellipse">
-            <a:avLst/>
+            <a:off x="5120640" y="1828800"/>
+            <a:ext cx="6492240" cy="4160520"/>
+          </a:xfrm>
+          <a:prstGeom prst="roundRect">
+            <a:avLst>
+              <a:gd name="adj" fmla="val 2637"/>
+            </a:avLst>
           </a:prstGeom>
           <a:solidFill>
-            <a:srgbClr val="CFA04A"/>
+            <a:srgbClr val="F3F5F8"/>
           </a:solidFill>
-          <a:ln w="38100">
+          <a:ln w="12700">
             <a:solidFill>
-              <a:srgbClr val="FFFFFF"/>
+              <a:srgbClr val="F3F5F8"/>
             </a:solidFill>
             <a:prstDash val="solid"/>
           </a:ln>
@@ -9124,113 +9356,63 @@
       </p:sp>
       <p:sp>
         <p:nvSpPr>
-          <p:cNvPr id="14" name="Text 12"/>
-          <p:cNvSpPr txBox="1"/>
-          <p:nvPr/>
-        </p:nvSpPr>
-        <p:spPr>
-          <a:xfrm>
-            <a:off x="8915400" y="2514600"/>
-            <a:ext cx="2606040" cy="411480"/>
-          </a:xfrm>
-          <a:prstGeom prst="rect">
-            <a:avLst/>
-          </a:prstGeom>
-          <a:noFill/>
-          <a:ln/>
-        </p:spPr>
-        <p:txBody>
-          <a:bodyPr wrap="square" lIns="0" tIns="0" rIns="0" bIns="0" rtlCol="0" anchor="t"/>
-          <a:lstStyle/>
-          <a:p>
-            <a:pPr indent="0" marL="0">
-              <a:buNone/>
-            </a:pPr>
-            <a:r>
-              <a:rPr lang="en-US" sz="1800" b="1" dirty="0">
-                <a:solidFill>
-                  <a:srgbClr val="070A13"/>
-                </a:solidFill>
-              </a:rPr>
-              <a:t>Mês 3</a:t>
-            </a:r>
-            <a:endParaRPr lang="en-US" sz="1800" dirty="0"/>
-          </a:p>
-        </p:txBody>
-      </p:sp>
-      <p:sp>
-        <p:nvSpPr>
-          <p:cNvPr id="15" name="Text 13"/>
-          <p:cNvSpPr txBox="1"/>
-          <p:nvPr/>
-        </p:nvSpPr>
-        <p:spPr>
-          <a:xfrm>
-            <a:off x="8915400" y="2971800"/>
-            <a:ext cx="2514600" cy="1463040"/>
-          </a:xfrm>
-          <a:prstGeom prst="rect">
-            <a:avLst/>
-          </a:prstGeom>
-          <a:noFill/>
-          <a:ln/>
-        </p:spPr>
-        <p:txBody>
-          <a:bodyPr wrap="square" lIns="0" tIns="0" rIns="0" bIns="0" rtlCol="0" anchor="t"/>
-          <a:lstStyle/>
-          <a:p>
-            <a:pPr indent="0" marL="0">
-              <a:buNone/>
-            </a:pPr>
-            <a:r>
-              <a:rPr lang="en-US" sz="1400" dirty="0">
-                <a:solidFill>
-                  <a:srgbClr val="5B6474"/>
-                </a:solidFill>
-              </a:rPr>
-              <a:t>Medidas com evidências; procedimento de incidentes testado; plano revisto</a:t>
-            </a:r>
-            <a:endParaRPr lang="en-US" sz="1400" dirty="0"/>
-          </a:p>
-        </p:txBody>
-      </p:sp>
-      <p:sp>
-        <p:nvSpPr>
-          <p:cNvPr id="16" name="card-77"/>
+          <p:cNvPr id="16" name="icon-bg-85"/>
           <p:cNvSpPr/>
           <p:nvPr/>
         </p:nvSpPr>
         <p:spPr>
           <a:xfrm>
-            <a:off x="548640" y="4663440"/>
-            <a:ext cx="11064240" cy="1325880"/>
-          </a:xfrm>
-          <a:prstGeom prst="roundRect">
-            <a:avLst>
-              <a:gd name="adj" fmla="val 8276"/>
-            </a:avLst>
+            <a:off x="5394960" y="2057400"/>
+            <a:ext cx="594360" cy="594360"/>
+          </a:xfrm>
+          <a:prstGeom prst="ellipse">
+            <a:avLst/>
           </a:prstGeom>
           <a:solidFill>
-            <a:srgbClr val="E6F5F3"/>
+            <a:schemeClr val="tx1"/>
           </a:solidFill>
           <a:ln w="12700">
             <a:solidFill>
-              <a:srgbClr val="E6F5F3"/>
+              <a:schemeClr val="tx1"/>
             </a:solidFill>
             <a:prstDash val="solid"/>
           </a:ln>
         </p:spPr>
       </p:sp>
-      <p:sp>
-        <p:nvSpPr>
-          <p:cNvPr id="17" name="Text 15"/>
-          <p:cNvSpPr txBox="1"/>
-          <p:nvPr/>
-        </p:nvSpPr>
-        <p:spPr>
-          <a:xfrm>
-            <a:off x="822960" y="4800600"/>
-            <a:ext cx="4572000" cy="365760"/>
+      <p:pic>
+        <p:nvPicPr>
+          <p:cNvPr id="17" name="icon-85" descr="preencoded.png">    </p:cNvPr>
+          <p:cNvPicPr>
+            <a:picLocks noChangeAspect="1"/>
+          </p:cNvPicPr>
+          <p:nvPr/>
+        </p:nvPicPr>
+        <p:blipFill>
+          <a:blip r:embed="rId1"/>
+          <a:stretch>
+            <a:fillRect/>
+          </a:stretch>
+        </p:blipFill>
+        <p:spPr>
+          <a:xfrm>
+            <a:off x="5525719" y="2188159"/>
+            <a:ext cx="332842" cy="332842"/>
+          </a:xfrm>
+          <a:prstGeom prst="rect">
+            <a:avLst/>
+          </a:prstGeom>
+        </p:spPr>
+      </p:pic>
+      <p:sp>
+        <p:nvSpPr>
+          <p:cNvPr id="18" name="Text 15"/>
+          <p:cNvSpPr txBox="1"/>
+          <p:nvPr/>
+        </p:nvSpPr>
+        <p:spPr>
+          <a:xfrm>
+            <a:off x="6172200" y="2148840"/>
+            <a:ext cx="5303520" cy="457200"/>
           </a:xfrm>
           <a:prstGeom prst="rect">
             <a:avLst/>
@@ -9246,40 +9428,44 @@
               <a:buNone/>
             </a:pPr>
             <a:r>
-              <a:rPr lang="en-US" sz="1600" b="1" dirty="0">
-                <a:solidFill>
-                  <a:srgbClr val="17766C"/>
-                </a:solidFill>
-              </a:rPr>
-              <a:t>Depois do arranque</a:t>
-            </a:r>
-            <a:endParaRPr lang="en-US" sz="1600" dirty="0"/>
-          </a:p>
-        </p:txBody>
-      </p:sp>
-      <p:sp>
-        <p:nvSpPr>
-          <p:cNvPr id="18" name="Text 16"/>
-          <p:cNvSpPr txBox="1"/>
-          <p:nvPr/>
-        </p:nvSpPr>
-        <p:spPr>
-          <a:xfrm>
-            <a:off x="822960" y="5212080"/>
-            <a:ext cx="10515600" cy="640080"/>
-          </a:xfrm>
-          <a:prstGeom prst="rect">
-            <a:avLst/>
-          </a:prstGeom>
-          <a:noFill/>
-          <a:ln/>
-        </p:spPr>
-        <p:txBody>
-          <a:bodyPr wrap="square" lIns="0" tIns="0" rIns="0" bIns="0" rtlCol="0" anchor="t"/>
-          <a:lstStyle/>
-          <a:p>
-            <a:pPr indent="0" marL="0">
-              <a:buNone/>
+              <a:rPr lang="en-US" sz="1800" b="1" dirty="0">
+                <a:solidFill>
+                  <a:srgbClr val="070A13"/>
+                </a:solidFill>
+              </a:rPr>
+              <a:t>Um só sistema de gestão com a 27001</a:t>
+            </a:r>
+            <a:endParaRPr lang="en-US" sz="1800" dirty="0"/>
+          </a:p>
+        </p:txBody>
+      </p:sp>
+      <p:sp>
+        <p:nvSpPr>
+          <p:cNvPr id="19" name="Text 16"/>
+          <p:cNvSpPr txBox="1"/>
+          <p:nvPr/>
+        </p:nvSpPr>
+        <p:spPr>
+          <a:xfrm>
+            <a:off x="5394960" y="2834640"/>
+            <a:ext cx="5943600" cy="3017520"/>
+          </a:xfrm>
+          <a:prstGeom prst="rect">
+            <a:avLst/>
+          </a:prstGeom>
+          <a:noFill/>
+          <a:ln/>
+        </p:spPr>
+        <p:txBody>
+          <a:bodyPr wrap="square" lIns="0" tIns="0" rIns="0" bIns="0" rtlCol="0" anchor="t"/>
+          <a:lstStyle/>
+          <a:p>
+            <a:pPr marL="342900" indent="-342900">
+              <a:spcAft>
+                <a:spcPts val="800"/>
+              </a:spcAft>
+              <a:buSzPct val="100000"/>
+              <a:buChar char="•"/>
             </a:pPr>
             <a:r>
               <a:rPr lang="en-US" sz="1400" dirty="0">
@@ -9287,7 +9473,79 @@
                   <a:srgbClr val="111827"/>
                 </a:solidFill>
               </a:rPr>
-              <a:t>Revisão trimestral da maturidade, análise anual dos riscos, lembretes de revisão de documentos e preparação do relatório anual.</a:t>
+              <a:t>Mesma análise de contexto, controlo documental, auditoria interna e revisão pela gestão</a:t>
+            </a:r>
+            <a:endParaRPr lang="en-US" sz="1400" dirty="0"/>
+          </a:p>
+          <a:p>
+            <a:pPr marL="342900" indent="-342900">
+              <a:spcAft>
+                <a:spcPts val="800"/>
+              </a:spcAft>
+              <a:buSzPct val="100000"/>
+              <a:buChar char="•"/>
+            </a:pPr>
+            <a:r>
+              <a:rPr lang="en-US" sz="1400" dirty="0">
+                <a:solidFill>
+                  <a:srgbClr val="111827"/>
+                </a:solidFill>
+              </a:rPr>
+              <a:t>Cada controlo mostra os requisitos da 27001 de base e conta as evidências que já lá estão</a:t>
+            </a:r>
+            <a:endParaRPr lang="en-US" sz="1400" dirty="0"/>
+          </a:p>
+          <a:p>
+            <a:pPr marL="342900" indent="-342900">
+              <a:spcAft>
+                <a:spcPts val="800"/>
+              </a:spcAft>
+              <a:buSzPct val="100000"/>
+              <a:buChar char="•"/>
+            </a:pPr>
+            <a:r>
+              <a:rPr lang="en-US" sz="1400" dirty="0">
+                <a:solidFill>
+                  <a:srgbClr val="111827"/>
+                </a:solidFill>
+              </a:rPr>
+              <a:t>Avaliação de impacto em pessoas e na sociedade: nova, sem equivalente na 27001</a:t>
+            </a:r>
+            <a:endParaRPr lang="en-US" sz="1400" dirty="0"/>
+          </a:p>
+          <a:p>
+            <a:pPr marL="342900" indent="-342900">
+              <a:spcAft>
+                <a:spcPts val="800"/>
+              </a:spcAft>
+              <a:buSzPct val="100000"/>
+              <a:buChar char="•"/>
+            </a:pPr>
+            <a:r>
+              <a:rPr lang="en-US" sz="1400" dirty="0">
+                <a:solidFill>
+                  <a:srgbClr val="111827"/>
+                </a:solidFill>
+              </a:rPr>
+              <a:t>Declaração de Aplicabilidade separada para cada norma</a:t>
+            </a:r>
+            <a:endParaRPr lang="en-US" sz="1400" dirty="0"/>
+          </a:p>
+          <a:p>
+            <a:pPr marL="342900" indent="-342900">
+              <a:spcAft>
+                <a:spcPts val="800"/>
+              </a:spcAft>
+              <a:buSzPct val="100000"/>
+              <a:buChar char="•"/>
+            </a:pPr>
+            <a:r>
+              <a:rPr lang="en-US" sz="1400" dirty="0">
+                <a:solidFill>
+                  <a:srgbClr val="111827"/>
+                </a:solidFill>
+              </a:rPr>
+              <a:t>Objetivos e fontes de risco do Anexo C como lista de apoio</a:t>
             </a:r>
             <a:endParaRPr lang="en-US" sz="1400" dirty="0"/>
           </a:p>
@@ -9368,51 +9626,967 @@
           <p:cNvPr id="2" name="Text 0"/>
           <p:cNvSpPr/>
           <p:nvPr>
-            <p:ph idx="101" type="body" hasCustomPrompt="1"/>
+            <p:ph idx="101" type="title" hasCustomPrompt="1"/>
           </p:nvPr>
         </p:nvSpPr>
         <p:spPr>
           <a:xfrm>
-            <a:off x="731520" y="2468880"/>
-            <a:ext cx="10058400" cy="365760"/>
-          </a:xfrm>
-          <a:prstGeom prst="rect">
-            <a:avLst/>
-          </a:prstGeom>
-          <a:noFill/>
-          <a:ln/>
-        </p:spPr>
-        <p:txBody>
-          <a:bodyPr wrap="square" lIns="0" tIns="0" rIns="0" bIns="0" rtlCol="0"/>
+            <a:off x="548640" y="411480"/>
+            <a:ext cx="11064240" cy="822960"/>
+          </a:xfrm>
+          <a:prstGeom prst="rect">
+            <a:avLst/>
+          </a:prstGeom>
+          <a:noFill/>
+          <a:ln/>
+        </p:spPr>
+        <p:txBody>
+          <a:bodyPr wrap="square" lIns="0" tIns="0" rIns="0" bIns="0" rtlCol="0" anchor="t"/>
+          <a:lstStyle/>
+          <a:p>
+            <a:pPr algn="l" indent="0" marL="0">
+              <a:buNone/>
+            </a:pPr>
+            <a:r>
+              <a:rPr lang="en-US" sz="3200" b="1" dirty="0">
+                <a:solidFill>
+                  <a:schemeClr val="tx1"/>
+                </a:solidFill>
+              </a:rPr>
+              <a:t>Outros referenciais disponíveis na plataforma</a:t>
+            </a:r>
+            <a:endParaRPr lang="en-US" sz="3200" dirty="0"/>
+          </a:p>
+        </p:txBody>
+      </p:sp>
+      <p:sp>
+        <p:nvSpPr>
+          <p:cNvPr id="3" name="card-86"/>
+          <p:cNvSpPr/>
+          <p:nvPr/>
+        </p:nvSpPr>
+        <p:spPr>
+          <a:xfrm>
+            <a:off x="548640" y="1417320"/>
+            <a:ext cx="3520440" cy="2011680"/>
+          </a:xfrm>
+          <a:prstGeom prst="roundRect">
+            <a:avLst>
+              <a:gd name="adj" fmla="val 5455"/>
+            </a:avLst>
+          </a:prstGeom>
+          <a:solidFill>
+            <a:srgbClr val="F3F5F8"/>
+          </a:solidFill>
+          <a:ln w="12700">
+            <a:solidFill>
+              <a:srgbClr val="F3F5F8"/>
+            </a:solidFill>
+            <a:prstDash val="solid"/>
+          </a:ln>
+        </p:spPr>
+      </p:sp>
+      <p:sp>
+        <p:nvSpPr>
+          <p:cNvPr id="4" name="Text 2"/>
+          <p:cNvSpPr txBox="1"/>
+          <p:nvPr/>
+        </p:nvSpPr>
+        <p:spPr>
+          <a:xfrm>
+            <a:off x="822960" y="1645920"/>
+            <a:ext cx="3017520" cy="411480"/>
+          </a:xfrm>
+          <a:prstGeom prst="rect">
+            <a:avLst/>
+          </a:prstGeom>
+          <a:noFill/>
+          <a:ln/>
+        </p:spPr>
+        <p:txBody>
+          <a:bodyPr wrap="square" lIns="0" tIns="0" rIns="0" bIns="0" rtlCol="0" anchor="t"/>
           <a:lstStyle/>
           <a:p>
             <a:pPr indent="0" marL="0">
               <a:buNone/>
             </a:pPr>
             <a:r>
-              <a:rPr lang="en-US" sz="1400" b="1" spc="400" kern="0" dirty="0">
-                <a:solidFill>
-                  <a:schemeClr val="accent1"/>
-                </a:solidFill>
-              </a:rPr>
-              <a:t>PRÓXIMO PASSO</a:t>
-            </a:r>
-            <a:endParaRPr lang="en-US" sz="1400" dirty="0"/>
-          </a:p>
-        </p:txBody>
-      </p:sp>
-      <p:sp>
-        <p:nvSpPr>
-          <p:cNvPr id="3" name="Text 0"/>
+              <a:rPr lang="en-US" sz="1800" b="1" dirty="0">
+                <a:solidFill>
+                  <a:srgbClr val="070A13"/>
+                </a:solidFill>
+              </a:rPr>
+              <a:t>QNRCS</a:t>
+            </a:r>
+            <a:endParaRPr lang="en-US" sz="1800" dirty="0"/>
+          </a:p>
+        </p:txBody>
+      </p:sp>
+      <p:sp>
+        <p:nvSpPr>
+          <p:cNvPr id="5" name="Text 3"/>
+          <p:cNvSpPr txBox="1"/>
+          <p:nvPr/>
+        </p:nvSpPr>
+        <p:spPr>
+          <a:xfrm>
+            <a:off x="822960" y="2075688"/>
+            <a:ext cx="3017520" cy="320040"/>
+          </a:xfrm>
+          <a:prstGeom prst="rect">
+            <a:avLst/>
+          </a:prstGeom>
+          <a:noFill/>
+          <a:ln/>
+        </p:spPr>
+        <p:txBody>
+          <a:bodyPr wrap="square" lIns="0" tIns="0" rIns="0" bIns="0" rtlCol="0" anchor="t"/>
+          <a:lstStyle/>
+          <a:p>
+            <a:pPr indent="0" marL="0">
+              <a:buNone/>
+            </a:pPr>
+            <a:r>
+              <a:rPr lang="en-US" sz="1200" b="1" dirty="0">
+                <a:solidFill>
+                  <a:srgbClr val="17766C"/>
+                </a:solidFill>
+              </a:rPr>
+              <a:t>Reg. 756/2026, Anexo I</a:t>
+            </a:r>
+            <a:endParaRPr lang="en-US" sz="1200" dirty="0"/>
+          </a:p>
+        </p:txBody>
+      </p:sp>
+      <p:sp>
+        <p:nvSpPr>
+          <p:cNvPr id="6" name="Text 4"/>
+          <p:cNvSpPr txBox="1"/>
+          <p:nvPr/>
+        </p:nvSpPr>
+        <p:spPr>
+          <a:xfrm>
+            <a:off x="822960" y="2468880"/>
+            <a:ext cx="3017520" cy="822960"/>
+          </a:xfrm>
+          <a:prstGeom prst="rect">
+            <a:avLst/>
+          </a:prstGeom>
+          <a:noFill/>
+          <a:ln/>
+        </p:spPr>
+        <p:txBody>
+          <a:bodyPr wrap="square" lIns="0" tIns="0" rIns="0" bIns="0" rtlCol="0" anchor="t"/>
+          <a:lstStyle/>
+          <a:p>
+            <a:pPr indent="0" marL="0">
+              <a:buNone/>
+            </a:pPr>
+            <a:r>
+              <a:rPr lang="en-US" sz="1300" dirty="0">
+                <a:solidFill>
+                  <a:srgbClr val="5B6474"/>
+                </a:solidFill>
+              </a:rPr>
+              <a:t>107 controlos em seis objetivos, com medida e verificação por nível</a:t>
+            </a:r>
+            <a:endParaRPr lang="en-US" sz="1300" dirty="0"/>
+          </a:p>
+        </p:txBody>
+      </p:sp>
+      <p:sp>
+        <p:nvSpPr>
+          <p:cNvPr id="7" name="card-87"/>
+          <p:cNvSpPr/>
+          <p:nvPr/>
+        </p:nvSpPr>
+        <p:spPr>
+          <a:xfrm>
+            <a:off x="4297680" y="1417320"/>
+            <a:ext cx="3520440" cy="2011680"/>
+          </a:xfrm>
+          <a:prstGeom prst="roundRect">
+            <a:avLst>
+              <a:gd name="adj" fmla="val 5455"/>
+            </a:avLst>
+          </a:prstGeom>
+          <a:solidFill>
+            <a:srgbClr val="F3F5F8"/>
+          </a:solidFill>
+          <a:ln w="12700">
+            <a:solidFill>
+              <a:srgbClr val="F3F5F8"/>
+            </a:solidFill>
+            <a:prstDash val="solid"/>
+          </a:ln>
+        </p:spPr>
+      </p:sp>
+      <p:sp>
+        <p:nvSpPr>
+          <p:cNvPr id="8" name="Text 6"/>
+          <p:cNvSpPr txBox="1"/>
+          <p:nvPr/>
+        </p:nvSpPr>
+        <p:spPr>
+          <a:xfrm>
+            <a:off x="4572000" y="1645920"/>
+            <a:ext cx="3017520" cy="411480"/>
+          </a:xfrm>
+          <a:prstGeom prst="rect">
+            <a:avLst/>
+          </a:prstGeom>
+          <a:noFill/>
+          <a:ln/>
+        </p:spPr>
+        <p:txBody>
+          <a:bodyPr wrap="square" lIns="0" tIns="0" rIns="0" bIns="0" rtlCol="0" anchor="t"/>
+          <a:lstStyle/>
+          <a:p>
+            <a:pPr indent="0" marL="0">
+              <a:buNone/>
+            </a:pPr>
+            <a:r>
+              <a:rPr lang="en-US" sz="1800" b="1" dirty="0">
+                <a:solidFill>
+                  <a:srgbClr val="070A13"/>
+                </a:solidFill>
+              </a:rPr>
+              <a:t>Requisitos técnicos NIS2</a:t>
+            </a:r>
+            <a:endParaRPr lang="en-US" sz="1800" dirty="0"/>
+          </a:p>
+        </p:txBody>
+      </p:sp>
+      <p:sp>
+        <p:nvSpPr>
+          <p:cNvPr id="9" name="Text 7"/>
+          <p:cNvSpPr txBox="1"/>
+          <p:nvPr/>
+        </p:nvSpPr>
+        <p:spPr>
+          <a:xfrm>
+            <a:off x="4572000" y="2075688"/>
+            <a:ext cx="3017520" cy="320040"/>
+          </a:xfrm>
+          <a:prstGeom prst="rect">
+            <a:avLst/>
+          </a:prstGeom>
+          <a:noFill/>
+          <a:ln/>
+        </p:spPr>
+        <p:txBody>
+          <a:bodyPr wrap="square" lIns="0" tIns="0" rIns="0" bIns="0" rtlCol="0" anchor="t"/>
+          <a:lstStyle/>
+          <a:p>
+            <a:pPr indent="0" marL="0">
+              <a:buNone/>
+            </a:pPr>
+            <a:r>
+              <a:rPr lang="en-US" sz="1200" b="1" dirty="0">
+                <a:solidFill>
+                  <a:srgbClr val="17766C"/>
+                </a:solidFill>
+              </a:rPr>
+              <a:t>Reg. de Execução (UE) 2024/2690</a:t>
+            </a:r>
+            <a:endParaRPr lang="en-US" sz="1200" dirty="0"/>
+          </a:p>
+        </p:txBody>
+      </p:sp>
+      <p:sp>
+        <p:nvSpPr>
+          <p:cNvPr id="10" name="Text 8"/>
+          <p:cNvSpPr txBox="1"/>
+          <p:nvPr/>
+        </p:nvSpPr>
+        <p:spPr>
+          <a:xfrm>
+            <a:off x="4572000" y="2468880"/>
+            <a:ext cx="3017520" cy="822960"/>
+          </a:xfrm>
+          <a:prstGeom prst="rect">
+            <a:avLst/>
+          </a:prstGeom>
+          <a:noFill/>
+          <a:ln/>
+        </p:spPr>
+        <p:txBody>
+          <a:bodyPr wrap="square" lIns="0" tIns="0" rIns="0" bIns="0" rtlCol="0" anchor="t"/>
+          <a:lstStyle/>
+          <a:p>
+            <a:pPr indent="0" marL="0">
+              <a:buNone/>
+            </a:pPr>
+            <a:r>
+              <a:rPr lang="en-US" sz="1300" dirty="0">
+                <a:solidFill>
+                  <a:srgbClr val="5B6474"/>
+                </a:solidFill>
+              </a:rPr>
+              <a:t>161 requisitos para serviços digitais</a:t>
+            </a:r>
+            <a:endParaRPr lang="en-US" sz="1300" dirty="0"/>
+          </a:p>
+        </p:txBody>
+      </p:sp>
+      <p:sp>
+        <p:nvSpPr>
+          <p:cNvPr id="11" name="card-88"/>
+          <p:cNvSpPr/>
+          <p:nvPr/>
+        </p:nvSpPr>
+        <p:spPr>
+          <a:xfrm>
+            <a:off x="8046720" y="1417320"/>
+            <a:ext cx="3520440" cy="2011680"/>
+          </a:xfrm>
+          <a:prstGeom prst="roundRect">
+            <a:avLst>
+              <a:gd name="adj" fmla="val 5455"/>
+            </a:avLst>
+          </a:prstGeom>
+          <a:solidFill>
+            <a:srgbClr val="F3F5F8"/>
+          </a:solidFill>
+          <a:ln w="12700">
+            <a:solidFill>
+              <a:srgbClr val="F3F5F8"/>
+            </a:solidFill>
+            <a:prstDash val="solid"/>
+          </a:ln>
+        </p:spPr>
+      </p:sp>
+      <p:sp>
+        <p:nvSpPr>
+          <p:cNvPr id="12" name="Text 10"/>
+          <p:cNvSpPr txBox="1"/>
+          <p:nvPr/>
+        </p:nvSpPr>
+        <p:spPr>
+          <a:xfrm>
+            <a:off x="8321040" y="1645920"/>
+            <a:ext cx="3017520" cy="411480"/>
+          </a:xfrm>
+          <a:prstGeom prst="rect">
+            <a:avLst/>
+          </a:prstGeom>
+          <a:noFill/>
+          <a:ln/>
+        </p:spPr>
+        <p:txBody>
+          <a:bodyPr wrap="square" lIns="0" tIns="0" rIns="0" bIns="0" rtlCol="0" anchor="t"/>
+          <a:lstStyle/>
+          <a:p>
+            <a:pPr indent="0" marL="0">
+              <a:buNone/>
+            </a:pPr>
+            <a:r>
+              <a:rPr lang="en-US" sz="1800" b="1" dirty="0">
+                <a:solidFill>
+                  <a:srgbClr val="070A13"/>
+                </a:solidFill>
+              </a:rPr>
+              <a:t>DORA</a:t>
+            </a:r>
+            <a:endParaRPr lang="en-US" sz="1800" dirty="0"/>
+          </a:p>
+        </p:txBody>
+      </p:sp>
+      <p:sp>
+        <p:nvSpPr>
+          <p:cNvPr id="13" name="Text 11"/>
+          <p:cNvSpPr txBox="1"/>
+          <p:nvPr/>
+        </p:nvSpPr>
+        <p:spPr>
+          <a:xfrm>
+            <a:off x="8321040" y="2075688"/>
+            <a:ext cx="3017520" cy="320040"/>
+          </a:xfrm>
+          <a:prstGeom prst="rect">
+            <a:avLst/>
+          </a:prstGeom>
+          <a:noFill/>
+          <a:ln/>
+        </p:spPr>
+        <p:txBody>
+          <a:bodyPr wrap="square" lIns="0" tIns="0" rIns="0" bIns="0" rtlCol="0" anchor="t"/>
+          <a:lstStyle/>
+          <a:p>
+            <a:pPr indent="0" marL="0">
+              <a:buNone/>
+            </a:pPr>
+            <a:r>
+              <a:rPr lang="en-US" sz="1200" b="1" dirty="0">
+                <a:solidFill>
+                  <a:srgbClr val="17766C"/>
+                </a:solidFill>
+              </a:rPr>
+              <a:t>Reg. (UE) 2022/2554</a:t>
+            </a:r>
+            <a:endParaRPr lang="en-US" sz="1200" dirty="0"/>
+          </a:p>
+        </p:txBody>
+      </p:sp>
+      <p:sp>
+        <p:nvSpPr>
+          <p:cNvPr id="14" name="Text 12"/>
+          <p:cNvSpPr txBox="1"/>
+          <p:nvPr/>
+        </p:nvSpPr>
+        <p:spPr>
+          <a:xfrm>
+            <a:off x="8321040" y="2468880"/>
+            <a:ext cx="3017520" cy="822960"/>
+          </a:xfrm>
+          <a:prstGeom prst="rect">
+            <a:avLst/>
+          </a:prstGeom>
+          <a:noFill/>
+          <a:ln/>
+        </p:spPr>
+        <p:txBody>
+          <a:bodyPr wrap="square" lIns="0" tIns="0" rIns="0" bIns="0" rtlCol="0" anchor="t"/>
+          <a:lstStyle/>
+          <a:p>
+            <a:pPr indent="0" marL="0">
+              <a:buNone/>
+            </a:pPr>
+            <a:r>
+              <a:rPr lang="en-US" sz="1300" dirty="0">
+                <a:solidFill>
+                  <a:srgbClr val="5B6474"/>
+                </a:solidFill>
+              </a:rPr>
+              <a:t>111 obrigações e prazos de incidentes para o setor financeiro</a:t>
+            </a:r>
+            <a:endParaRPr lang="en-US" sz="1300" dirty="0"/>
+          </a:p>
+        </p:txBody>
+      </p:sp>
+      <p:sp>
+        <p:nvSpPr>
+          <p:cNvPr id="15" name="card-89"/>
+          <p:cNvSpPr/>
+          <p:nvPr/>
+        </p:nvSpPr>
+        <p:spPr>
+          <a:xfrm>
+            <a:off x="548640" y="3657600"/>
+            <a:ext cx="3520440" cy="2011680"/>
+          </a:xfrm>
+          <a:prstGeom prst="roundRect">
+            <a:avLst>
+              <a:gd name="adj" fmla="val 5455"/>
+            </a:avLst>
+          </a:prstGeom>
+          <a:solidFill>
+            <a:srgbClr val="F3F5F8"/>
+          </a:solidFill>
+          <a:ln w="12700">
+            <a:solidFill>
+              <a:srgbClr val="F3F5F8"/>
+            </a:solidFill>
+            <a:prstDash val="solid"/>
+          </a:ln>
+        </p:spPr>
+      </p:sp>
+      <p:sp>
+        <p:nvSpPr>
+          <p:cNvPr id="16" name="Text 14"/>
+          <p:cNvSpPr txBox="1"/>
+          <p:nvPr/>
+        </p:nvSpPr>
+        <p:spPr>
+          <a:xfrm>
+            <a:off x="822960" y="3886200"/>
+            <a:ext cx="3017520" cy="411480"/>
+          </a:xfrm>
+          <a:prstGeom prst="rect">
+            <a:avLst/>
+          </a:prstGeom>
+          <a:noFill/>
+          <a:ln/>
+        </p:spPr>
+        <p:txBody>
+          <a:bodyPr wrap="square" lIns="0" tIns="0" rIns="0" bIns="0" rtlCol="0" anchor="t"/>
+          <a:lstStyle/>
+          <a:p>
+            <a:pPr indent="0" marL="0">
+              <a:buNone/>
+            </a:pPr>
+            <a:r>
+              <a:rPr lang="en-US" sz="1800" b="1" dirty="0">
+                <a:solidFill>
+                  <a:srgbClr val="070A13"/>
+                </a:solidFill>
+              </a:rPr>
+              <a:t>TISAX</a:t>
+            </a:r>
+            <a:endParaRPr lang="en-US" sz="1800" dirty="0"/>
+          </a:p>
+        </p:txBody>
+      </p:sp>
+      <p:sp>
+        <p:nvSpPr>
+          <p:cNvPr id="17" name="Text 15"/>
+          <p:cNvSpPr txBox="1"/>
+          <p:nvPr/>
+        </p:nvSpPr>
+        <p:spPr>
+          <a:xfrm>
+            <a:off x="822960" y="4315968"/>
+            <a:ext cx="3017520" cy="320040"/>
+          </a:xfrm>
+          <a:prstGeom prst="rect">
+            <a:avLst/>
+          </a:prstGeom>
+          <a:noFill/>
+          <a:ln/>
+        </p:spPr>
+        <p:txBody>
+          <a:bodyPr wrap="square" lIns="0" tIns="0" rIns="0" bIns="0" rtlCol="0" anchor="t"/>
+          <a:lstStyle/>
+          <a:p>
+            <a:pPr indent="0" marL="0">
+              <a:buNone/>
+            </a:pPr>
+            <a:r>
+              <a:rPr lang="en-US" sz="1200" b="1" dirty="0">
+                <a:solidFill>
+                  <a:srgbClr val="17766C"/>
+                </a:solidFill>
+              </a:rPr>
+              <a:t>VDA ISA 6.0.3 e 2027.1</a:t>
+            </a:r>
+            <a:endParaRPr lang="en-US" sz="1200" dirty="0"/>
+          </a:p>
+        </p:txBody>
+      </p:sp>
+      <p:sp>
+        <p:nvSpPr>
+          <p:cNvPr id="18" name="Text 16"/>
+          <p:cNvSpPr txBox="1"/>
+          <p:nvPr/>
+        </p:nvSpPr>
+        <p:spPr>
+          <a:xfrm>
+            <a:off x="822960" y="4709160"/>
+            <a:ext cx="3017520" cy="822960"/>
+          </a:xfrm>
+          <a:prstGeom prst="rect">
+            <a:avLst/>
+          </a:prstGeom>
+          <a:noFill/>
+          <a:ln/>
+        </p:spPr>
+        <p:txBody>
+          <a:bodyPr wrap="square" lIns="0" tIns="0" rIns="0" bIns="0" rtlCol="0" anchor="t"/>
+          <a:lstStyle/>
+          <a:p>
+            <a:pPr indent="0" marL="0">
+              <a:buNone/>
+            </a:pPr>
+            <a:r>
+              <a:rPr lang="en-US" sz="1300" dirty="0">
+                <a:solidFill>
+                  <a:srgbClr val="5B6474"/>
+                </a:solidFill>
+              </a:rPr>
+              <a:t>80 e 78 controlos para a indústria automóvel</a:t>
+            </a:r>
+            <a:endParaRPr lang="en-US" sz="1300" dirty="0"/>
+          </a:p>
+        </p:txBody>
+      </p:sp>
+      <p:sp>
+        <p:nvSpPr>
+          <p:cNvPr id="19" name="card-90"/>
+          <p:cNvSpPr/>
+          <p:nvPr/>
+        </p:nvSpPr>
+        <p:spPr>
+          <a:xfrm>
+            <a:off x="4297680" y="3657600"/>
+            <a:ext cx="3520440" cy="2011680"/>
+          </a:xfrm>
+          <a:prstGeom prst="roundRect">
+            <a:avLst>
+              <a:gd name="adj" fmla="val 5455"/>
+            </a:avLst>
+          </a:prstGeom>
+          <a:solidFill>
+            <a:srgbClr val="F3F5F8"/>
+          </a:solidFill>
+          <a:ln w="12700">
+            <a:solidFill>
+              <a:srgbClr val="F3F5F8"/>
+            </a:solidFill>
+            <a:prstDash val="solid"/>
+          </a:ln>
+        </p:spPr>
+      </p:sp>
+      <p:sp>
+        <p:nvSpPr>
+          <p:cNvPr id="20" name="Text 18"/>
+          <p:cNvSpPr txBox="1"/>
+          <p:nvPr/>
+        </p:nvSpPr>
+        <p:spPr>
+          <a:xfrm>
+            <a:off x="4572000" y="3886200"/>
+            <a:ext cx="3017520" cy="411480"/>
+          </a:xfrm>
+          <a:prstGeom prst="rect">
+            <a:avLst/>
+          </a:prstGeom>
+          <a:noFill/>
+          <a:ln/>
+        </p:spPr>
+        <p:txBody>
+          <a:bodyPr wrap="square" lIns="0" tIns="0" rIns="0" bIns="0" rtlCol="0" anchor="t"/>
+          <a:lstStyle/>
+          <a:p>
+            <a:pPr indent="0" marL="0">
+              <a:buNone/>
+            </a:pPr>
+            <a:r>
+              <a:rPr lang="en-US" sz="1800" b="1" dirty="0">
+                <a:solidFill>
+                  <a:srgbClr val="070A13"/>
+                </a:solidFill>
+              </a:rPr>
+              <a:t>CIS Controls v8.1</a:t>
+            </a:r>
+            <a:endParaRPr lang="en-US" sz="1800" dirty="0"/>
+          </a:p>
+        </p:txBody>
+      </p:sp>
+      <p:sp>
+        <p:nvSpPr>
+          <p:cNvPr id="21" name="Text 19"/>
+          <p:cNvSpPr txBox="1"/>
+          <p:nvPr/>
+        </p:nvSpPr>
+        <p:spPr>
+          <a:xfrm>
+            <a:off x="4572000" y="4315968"/>
+            <a:ext cx="3017520" cy="320040"/>
+          </a:xfrm>
+          <a:prstGeom prst="rect">
+            <a:avLst/>
+          </a:prstGeom>
+          <a:noFill/>
+          <a:ln/>
+        </p:spPr>
+        <p:txBody>
+          <a:bodyPr wrap="square" lIns="0" tIns="0" rIns="0" bIns="0" rtlCol="0" anchor="t"/>
+          <a:lstStyle/>
+          <a:p>
+            <a:pPr indent="0" marL="0">
+              <a:buNone/>
+            </a:pPr>
+            <a:r>
+              <a:rPr lang="en-US" sz="1200" b="1" dirty="0">
+                <a:solidFill>
+                  <a:srgbClr val="17766C"/>
+                </a:solidFill>
+              </a:rPr>
+              <a:t>CIS</a:t>
+            </a:r>
+            <a:endParaRPr lang="en-US" sz="1200" dirty="0"/>
+          </a:p>
+        </p:txBody>
+      </p:sp>
+      <p:sp>
+        <p:nvSpPr>
+          <p:cNvPr id="22" name="Text 20"/>
+          <p:cNvSpPr txBox="1"/>
+          <p:nvPr/>
+        </p:nvSpPr>
+        <p:spPr>
+          <a:xfrm>
+            <a:off x="4572000" y="4709160"/>
+            <a:ext cx="3017520" cy="822960"/>
+          </a:xfrm>
+          <a:prstGeom prst="rect">
+            <a:avLst/>
+          </a:prstGeom>
+          <a:noFill/>
+          <a:ln/>
+        </p:spPr>
+        <p:txBody>
+          <a:bodyPr wrap="square" lIns="0" tIns="0" rIns="0" bIns="0" rtlCol="0" anchor="t"/>
+          <a:lstStyle/>
+          <a:p>
+            <a:pPr indent="0" marL="0">
+              <a:buNone/>
+            </a:pPr>
+            <a:r>
+              <a:rPr lang="en-US" sz="1300" dirty="0">
+                <a:solidFill>
+                  <a:srgbClr val="5B6474"/>
+                </a:solidFill>
+              </a:rPr>
+              <a:t>Identificadores; o texto entra com o ficheiro oficial da entidade</a:t>
+            </a:r>
+            <a:endParaRPr lang="en-US" sz="1300" dirty="0"/>
+          </a:p>
+        </p:txBody>
+      </p:sp>
+      <p:sp>
+        <p:nvSpPr>
+          <p:cNvPr id="23" name="card-91"/>
+          <p:cNvSpPr/>
+          <p:nvPr/>
+        </p:nvSpPr>
+        <p:spPr>
+          <a:xfrm>
+            <a:off x="8046720" y="3657600"/>
+            <a:ext cx="3520440" cy="2011680"/>
+          </a:xfrm>
+          <a:prstGeom prst="roundRect">
+            <a:avLst>
+              <a:gd name="adj" fmla="val 5455"/>
+            </a:avLst>
+          </a:prstGeom>
+          <a:solidFill>
+            <a:srgbClr val="F3F5F8"/>
+          </a:solidFill>
+          <a:ln w="12700">
+            <a:solidFill>
+              <a:srgbClr val="F3F5F8"/>
+            </a:solidFill>
+            <a:prstDash val="solid"/>
+          </a:ln>
+        </p:spPr>
+      </p:sp>
+      <p:sp>
+        <p:nvSpPr>
+          <p:cNvPr id="24" name="Text 22"/>
+          <p:cNvSpPr txBox="1"/>
+          <p:nvPr/>
+        </p:nvSpPr>
+        <p:spPr>
+          <a:xfrm>
+            <a:off x="8321040" y="3886200"/>
+            <a:ext cx="3017520" cy="411480"/>
+          </a:xfrm>
+          <a:prstGeom prst="rect">
+            <a:avLst/>
+          </a:prstGeom>
+          <a:noFill/>
+          <a:ln/>
+        </p:spPr>
+        <p:txBody>
+          <a:bodyPr wrap="square" lIns="0" tIns="0" rIns="0" bIns="0" rtlCol="0" anchor="t"/>
+          <a:lstStyle/>
+          <a:p>
+            <a:pPr indent="0" marL="0">
+              <a:buNone/>
+            </a:pPr>
+            <a:r>
+              <a:rPr lang="en-US" sz="1800" b="1" dirty="0">
+                <a:solidFill>
+                  <a:srgbClr val="070A13"/>
+                </a:solidFill>
+              </a:rPr>
+              <a:t>NIST CSF 2.0</a:t>
+            </a:r>
+            <a:endParaRPr lang="en-US" sz="1800" dirty="0"/>
+          </a:p>
+        </p:txBody>
+      </p:sp>
+      <p:sp>
+        <p:nvSpPr>
+          <p:cNvPr id="25" name="Text 23"/>
+          <p:cNvSpPr txBox="1"/>
+          <p:nvPr/>
+        </p:nvSpPr>
+        <p:spPr>
+          <a:xfrm>
+            <a:off x="8321040" y="4315968"/>
+            <a:ext cx="3017520" cy="320040"/>
+          </a:xfrm>
+          <a:prstGeom prst="rect">
+            <a:avLst/>
+          </a:prstGeom>
+          <a:noFill/>
+          <a:ln/>
+        </p:spPr>
+        <p:txBody>
+          <a:bodyPr wrap="square" lIns="0" tIns="0" rIns="0" bIns="0" rtlCol="0" anchor="t"/>
+          <a:lstStyle/>
+          <a:p>
+            <a:pPr indent="0" marL="0">
+              <a:buNone/>
+            </a:pPr>
+            <a:r>
+              <a:rPr lang="en-US" sz="1200" b="1" dirty="0">
+                <a:solidFill>
+                  <a:srgbClr val="17766C"/>
+                </a:solidFill>
+              </a:rPr>
+              <a:t>NIST</a:t>
+            </a:r>
+            <a:endParaRPr lang="en-US" sz="1200" dirty="0"/>
+          </a:p>
+        </p:txBody>
+      </p:sp>
+      <p:sp>
+        <p:nvSpPr>
+          <p:cNvPr id="26" name="Text 24"/>
+          <p:cNvSpPr txBox="1"/>
+          <p:nvPr/>
+        </p:nvSpPr>
+        <p:spPr>
+          <a:xfrm>
+            <a:off x="8321040" y="4709160"/>
+            <a:ext cx="3017520" cy="822960"/>
+          </a:xfrm>
+          <a:prstGeom prst="rect">
+            <a:avLst/>
+          </a:prstGeom>
+          <a:noFill/>
+          <a:ln/>
+        </p:spPr>
+        <p:txBody>
+          <a:bodyPr wrap="square" lIns="0" tIns="0" rIns="0" bIns="0" rtlCol="0" anchor="t"/>
+          <a:lstStyle/>
+          <a:p>
+            <a:pPr indent="0" marL="0">
+              <a:buNone/>
+            </a:pPr>
+            <a:r>
+              <a:rPr lang="en-US" sz="1300" dirty="0">
+                <a:solidFill>
+                  <a:srgbClr val="5B6474"/>
+                </a:solidFill>
+              </a:rPr>
+              <a:t>Correspondências a partir do QNRCS</a:t>
+            </a:r>
+            <a:endParaRPr lang="en-US" sz="1300" dirty="0"/>
+          </a:p>
+        </p:txBody>
+      </p:sp>
+      <p:sp>
+        <p:nvSpPr>
+          <p:cNvPr id="27" name="Text 25"/>
+          <p:cNvSpPr txBox="1"/>
+          <p:nvPr/>
+        </p:nvSpPr>
+        <p:spPr>
+          <a:xfrm>
+            <a:off x="548640" y="5943600"/>
+            <a:ext cx="9692640" cy="320040"/>
+          </a:xfrm>
+          <a:prstGeom prst="rect">
+            <a:avLst/>
+          </a:prstGeom>
+          <a:noFill/>
+          <a:ln/>
+        </p:spPr>
+        <p:txBody>
+          <a:bodyPr wrap="square" lIns="0" tIns="0" rIns="0" bIns="0" rtlCol="0" anchor="t"/>
+          <a:lstStyle/>
+          <a:p>
+            <a:pPr indent="0" marL="0">
+              <a:buNone/>
+            </a:pPr>
+            <a:r>
+              <a:rPr lang="en-US" sz="1200" dirty="0">
+                <a:solidFill>
+                  <a:srgbClr val="5B6474"/>
+                </a:solidFill>
+              </a:rPr>
+              <a:t>Biblioteca Legal › Relações entre referenciais mostra as correspondências (1338 ligações) para reaproveitar evidências.</a:t>
+            </a:r>
+            <a:endParaRPr lang="en-US" sz="1200" dirty="0"/>
+          </a:p>
+        </p:txBody>
+      </p:sp>
+      <p:sp>
+        <p:nvSpPr>
+          <p:cNvPr id="25" name="Slide Number Placeholder 0"/>
+          <p:cNvSpPr>
+            <a:spLocks noGrp="1"/>
+          </p:cNvSpPr>
+          <p:nvPr>
+            <p:ph type="sldNum" sz="quarter" idx="4294967295"/>
+          </p:nvPr>
+        </p:nvSpPr>
+        <p:spPr>
+          <a:xfrm>
+            <a:off x="548640" y="6309360"/>
+            <a:ext cx="914400" cy="274320"/>
+          </a:xfrm>
+          <a:prstGeom prst="rect">
+            <a:avLst/>
+          </a:prstGeom>
+          <a:extLst>
+            <a:ext uri="{C572A759-6A51-4108-AA02-DFA0A04FC94B}">
+              <ma14:wrappingTextBoxFlag xmlns:ma14="http://schemas.microsoft.com/office/mac/drawingml/2011/main" val="0"/>
+            </a:ext>
+          </a:extLst>
+        </p:spPr>
+        <p:txBody>
+          <a:bodyPr/>
+          <a:lstStyle>
+            <a:lvl1pPr>
+              <a:defRPr sz="1000">
+                <a:solidFill>
+                  <a:srgbClr val="5B6474"/>
+                </a:solidFill>
+              </a:defRPr>
+            </a:lvl1pPr>
+          </a:lstStyle>
+          <a:p>
+            <a:pPr algn="l"/>
+            <a:fld id="{F7021451-1387-4CA6-816F-3879F97B5CBC}" type="slidenum">
+              <a:rPr b="0" lang="en-US"/>
+              <a:t>18</a:t>
+            </a:fld>
+            <a:endParaRPr lang="en-US"/>
+          </a:p>
+        </p:txBody>
+      </p:sp>
+    </p:spTree>
+  </p:cSld>
+  <p:clrMapOvr>
+    <a:masterClrMapping/>
+  </p:clrMapOvr>
+</p:sld>
+</file>
+
+<file path=ppt/slides/slide19.xml><?xml version="1.0" encoding="utf-8"?>
+<p:sld xmlns:a="http://schemas.openxmlformats.org/drawingml/2006/main" xmlns:r="http://schemas.openxmlformats.org/officeDocument/2006/relationships" xmlns:p="http://schemas.openxmlformats.org/presentationml/2006/main">
+  <p:cSld name="Slide 19">
+    <p:spTree>
+      <p:nvGrpSpPr>
+        <p:cNvPr id="1" name=""/>
+        <p:cNvGrpSpPr/>
+        <p:nvPr/>
+      </p:nvGrpSpPr>
+      <p:grpSpPr>
+        <a:xfrm>
+          <a:off x="0" y="0"/>
+          <a:ext cx="0" cy="0"/>
+          <a:chOff x="0" y="0"/>
+          <a:chExt cx="0" cy="0"/>
+        </a:xfrm>
+      </p:grpSpPr>
+      <p:sp>
+        <p:nvSpPr>
+          <p:cNvPr id="2" name="Text 0"/>
           <p:cNvSpPr/>
           <p:nvPr>
-            <p:ph idx="102" type="title" hasCustomPrompt="1"/>
+            <p:ph idx="101" type="title" hasCustomPrompt="1"/>
           </p:nvPr>
         </p:nvSpPr>
         <p:spPr>
           <a:xfrm>
-            <a:off x="731520" y="2880360"/>
-            <a:ext cx="10515600" cy="1188720"/>
+            <a:off x="548640" y="411480"/>
+            <a:ext cx="11064240" cy="822960"/>
           </a:xfrm>
           <a:prstGeom prst="rect">
             <a:avLst/>
@@ -9428,66 +10602,569 @@
               <a:buNone/>
             </a:pPr>
             <a:r>
-              <a:rPr lang="en-US" sz="4400" b="1" dirty="0">
-                <a:solidFill>
-                  <a:schemeClr val="bg1"/>
-                </a:solidFill>
-              </a:rPr>
-              <a:t>Marcar a reunião de criação da conta</a:t>
-            </a:r>
-            <a:endParaRPr lang="en-US" sz="4400" dirty="0"/>
-          </a:p>
-        </p:txBody>
-      </p:sp>
-      <p:sp>
-        <p:nvSpPr>
-          <p:cNvPr id="4" name="Text 0"/>
+              <a:rPr lang="en-US" sz="3200" b="1" dirty="0">
+                <a:solidFill>
+                  <a:schemeClr val="tx1"/>
+                </a:solidFill>
+              </a:rPr>
+              <a:t>Os primeiros 90 dias</a:t>
+            </a:r>
+            <a:endParaRPr lang="en-US" sz="3200" dirty="0"/>
+          </a:p>
+        </p:txBody>
+      </p:sp>
+      <p:sp>
+        <p:nvSpPr>
+          <p:cNvPr id="3" name="linha-90"/>
           <p:cNvSpPr/>
+          <p:nvPr/>
+        </p:nvSpPr>
+        <p:spPr>
+          <a:xfrm>
+            <a:off x="822960" y="2057400"/>
+            <a:ext cx="10515600" cy="0"/>
+          </a:xfrm>
+          <a:prstGeom prst="line">
+            <a:avLst/>
+          </a:prstGeom>
+          <a:noFill/>
+          <a:ln w="25400">
+            <a:solidFill>
+              <a:srgbClr val="DDE2EA"/>
+            </a:solidFill>
+            <a:prstDash val="solid"/>
+          </a:ln>
+        </p:spPr>
+      </p:sp>
+      <p:sp>
+        <p:nvSpPr>
+          <p:cNvPr id="4" name="fase-0"/>
+          <p:cNvSpPr/>
+          <p:nvPr/>
+        </p:nvSpPr>
+        <p:spPr>
+          <a:xfrm>
+            <a:off x="640080" y="1828800"/>
+            <a:ext cx="457200" cy="457200"/>
+          </a:xfrm>
+          <a:prstGeom prst="ellipse">
+            <a:avLst/>
+          </a:prstGeom>
+          <a:solidFill>
+            <a:srgbClr val="070A13"/>
+          </a:solidFill>
+          <a:ln w="38100">
+            <a:solidFill>
+              <a:srgbClr val="FFFFFF"/>
+            </a:solidFill>
+            <a:prstDash val="solid"/>
+          </a:ln>
+        </p:spPr>
+      </p:sp>
+      <p:sp>
+        <p:nvSpPr>
+          <p:cNvPr id="5" name="Text 3"/>
+          <p:cNvSpPr txBox="1"/>
+          <p:nvPr/>
+        </p:nvSpPr>
+        <p:spPr>
+          <a:xfrm>
+            <a:off x="548640" y="2514600"/>
+            <a:ext cx="2606040" cy="411480"/>
+          </a:xfrm>
+          <a:prstGeom prst="rect">
+            <a:avLst/>
+          </a:prstGeom>
+          <a:noFill/>
+          <a:ln/>
+        </p:spPr>
+        <p:txBody>
+          <a:bodyPr wrap="square" lIns="0" tIns="0" rIns="0" bIns="0" rtlCol="0" anchor="t"/>
+          <a:lstStyle/>
+          <a:p>
+            <a:pPr indent="0" marL="0">
+              <a:buNone/>
+            </a:pPr>
+            <a:r>
+              <a:rPr lang="en-US" sz="1800" b="1" dirty="0">
+                <a:solidFill>
+                  <a:srgbClr val="070A13"/>
+                </a:solidFill>
+              </a:rPr>
+              <a:t>Semana 1</a:t>
+            </a:r>
+            <a:endParaRPr lang="en-US" sz="1800" dirty="0"/>
+          </a:p>
+        </p:txBody>
+      </p:sp>
+      <p:sp>
+        <p:nvSpPr>
+          <p:cNvPr id="6" name="Text 4"/>
+          <p:cNvSpPr txBox="1"/>
+          <p:nvPr/>
+        </p:nvSpPr>
+        <p:spPr>
+          <a:xfrm>
+            <a:off x="548640" y="2971800"/>
+            <a:ext cx="2514600" cy="1463040"/>
+          </a:xfrm>
+          <a:prstGeom prst="rect">
+            <a:avLst/>
+          </a:prstGeom>
+          <a:noFill/>
+          <a:ln/>
+        </p:spPr>
+        <p:txBody>
+          <a:bodyPr wrap="square" lIns="0" tIns="0" rIns="0" bIns="0" rtlCol="0" anchor="t"/>
+          <a:lstStyle/>
+          <a:p>
+            <a:pPr indent="0" marL="0">
+              <a:buNone/>
+            </a:pPr>
+            <a:r>
+              <a:rPr lang="en-US" sz="1400" dirty="0">
+                <a:solidFill>
+                  <a:srgbClr val="5B6474"/>
+                </a:solidFill>
+              </a:rPr>
+              <a:t>Conta, enquadramento e equipa convidada</a:t>
+            </a:r>
+            <a:endParaRPr lang="en-US" sz="1400" dirty="0"/>
+          </a:p>
+        </p:txBody>
+      </p:sp>
+      <p:sp>
+        <p:nvSpPr>
+          <p:cNvPr id="7" name="fase-1"/>
+          <p:cNvSpPr/>
+          <p:nvPr/>
+        </p:nvSpPr>
+        <p:spPr>
+          <a:xfrm>
+            <a:off x="3429000" y="1828800"/>
+            <a:ext cx="457200" cy="457200"/>
+          </a:xfrm>
+          <a:prstGeom prst="ellipse">
+            <a:avLst/>
+          </a:prstGeom>
+          <a:solidFill>
+            <a:srgbClr val="070A13"/>
+          </a:solidFill>
+          <a:ln w="38100">
+            <a:solidFill>
+              <a:srgbClr val="FFFFFF"/>
+            </a:solidFill>
+            <a:prstDash val="solid"/>
+          </a:ln>
+        </p:spPr>
+      </p:sp>
+      <p:sp>
+        <p:nvSpPr>
+          <p:cNvPr id="8" name="Text 6"/>
+          <p:cNvSpPr txBox="1"/>
+          <p:nvPr/>
+        </p:nvSpPr>
+        <p:spPr>
+          <a:xfrm>
+            <a:off x="3337560" y="2514600"/>
+            <a:ext cx="2606040" cy="411480"/>
+          </a:xfrm>
+          <a:prstGeom prst="rect">
+            <a:avLst/>
+          </a:prstGeom>
+          <a:noFill/>
+          <a:ln/>
+        </p:spPr>
+        <p:txBody>
+          <a:bodyPr wrap="square" lIns="0" tIns="0" rIns="0" bIns="0" rtlCol="0" anchor="t"/>
+          <a:lstStyle/>
+          <a:p>
+            <a:pPr indent="0" marL="0">
+              <a:buNone/>
+            </a:pPr>
+            <a:r>
+              <a:rPr lang="en-US" sz="1800" b="1" dirty="0">
+                <a:solidFill>
+                  <a:srgbClr val="070A13"/>
+                </a:solidFill>
+              </a:rPr>
+              <a:t>Semanas 2 a 4</a:t>
+            </a:r>
+            <a:endParaRPr lang="en-US" sz="1800" dirty="0"/>
+          </a:p>
+        </p:txBody>
+      </p:sp>
+      <p:sp>
+        <p:nvSpPr>
+          <p:cNvPr id="9" name="Text 7"/>
+          <p:cNvSpPr txBox="1"/>
+          <p:nvPr/>
+        </p:nvSpPr>
+        <p:spPr>
+          <a:xfrm>
+            <a:off x="3337560" y="2971800"/>
+            <a:ext cx="2514600" cy="1463040"/>
+          </a:xfrm>
+          <a:prstGeom prst="rect">
+            <a:avLst/>
+          </a:prstGeom>
+          <a:noFill/>
+          <a:ln/>
+        </p:spPr>
+        <p:txBody>
+          <a:bodyPr wrap="square" lIns="0" tIns="0" rIns="0" bIns="0" rtlCol="0" anchor="t"/>
+          <a:lstStyle/>
+          <a:p>
+            <a:pPr indent="0" marL="0">
+              <a:buNone/>
+            </a:pPr>
+            <a:r>
+              <a:rPr lang="en-US" sz="1400" dirty="0">
+                <a:solidFill>
+                  <a:srgbClr val="5B6474"/>
+                </a:solidFill>
+              </a:rPr>
+              <a:t>Responsável e ponto de contacto; autoidentificação; primeira avaliação NIS2 e ISO</a:t>
+            </a:r>
+            <a:endParaRPr lang="en-US" sz="1400" dirty="0"/>
+          </a:p>
+        </p:txBody>
+      </p:sp>
+      <p:sp>
+        <p:nvSpPr>
+          <p:cNvPr id="10" name="fase-2"/>
+          <p:cNvSpPr/>
+          <p:nvPr/>
+        </p:nvSpPr>
+        <p:spPr>
+          <a:xfrm>
+            <a:off x="6217920" y="1828800"/>
+            <a:ext cx="457200" cy="457200"/>
+          </a:xfrm>
+          <a:prstGeom prst="ellipse">
+            <a:avLst/>
+          </a:prstGeom>
+          <a:solidFill>
+            <a:srgbClr val="070A13"/>
+          </a:solidFill>
+          <a:ln w="38100">
+            <a:solidFill>
+              <a:srgbClr val="FFFFFF"/>
+            </a:solidFill>
+            <a:prstDash val="solid"/>
+          </a:ln>
+        </p:spPr>
+      </p:sp>
+      <p:sp>
+        <p:nvSpPr>
+          <p:cNvPr id="11" name="Text 9"/>
+          <p:cNvSpPr txBox="1"/>
+          <p:nvPr/>
+        </p:nvSpPr>
+        <p:spPr>
+          <a:xfrm>
+            <a:off x="6126480" y="2514600"/>
+            <a:ext cx="2606040" cy="411480"/>
+          </a:xfrm>
+          <a:prstGeom prst="rect">
+            <a:avLst/>
+          </a:prstGeom>
+          <a:noFill/>
+          <a:ln/>
+        </p:spPr>
+        <p:txBody>
+          <a:bodyPr wrap="square" lIns="0" tIns="0" rIns="0" bIns="0" rtlCol="0" anchor="t"/>
+          <a:lstStyle/>
+          <a:p>
+            <a:pPr indent="0" marL="0">
+              <a:buNone/>
+            </a:pPr>
+            <a:r>
+              <a:rPr lang="en-US" sz="1800" b="1" dirty="0">
+                <a:solidFill>
+                  <a:srgbClr val="070A13"/>
+                </a:solidFill>
+              </a:rPr>
+              <a:t>Mês 2</a:t>
+            </a:r>
+            <a:endParaRPr lang="en-US" sz="1800" dirty="0"/>
+          </a:p>
+        </p:txBody>
+      </p:sp>
+      <p:sp>
+        <p:nvSpPr>
+          <p:cNvPr id="12" name="Text 10"/>
+          <p:cNvSpPr txBox="1"/>
+          <p:nvPr/>
+        </p:nvSpPr>
+        <p:spPr>
+          <a:xfrm>
+            <a:off x="6126480" y="2971800"/>
+            <a:ext cx="2514600" cy="1463040"/>
+          </a:xfrm>
+          <a:prstGeom prst="rect">
+            <a:avLst/>
+          </a:prstGeom>
+          <a:noFill/>
+          <a:ln/>
+        </p:spPr>
+        <p:txBody>
+          <a:bodyPr wrap="square" lIns="0" tIns="0" rIns="0" bIns="0" rtlCol="0" anchor="t"/>
+          <a:lstStyle/>
+          <a:p>
+            <a:pPr indent="0" marL="0">
+              <a:buNone/>
+            </a:pPr>
+            <a:r>
+              <a:rPr lang="en-US" sz="1400" dirty="0">
+                <a:solidFill>
+                  <a:srgbClr val="5B6474"/>
+                </a:solidFill>
+              </a:rPr>
+              <a:t>Políticas aprovadas; inventário de ativos e de sistemas de IA; documentos carregados em Por classificar</a:t>
+            </a:r>
+            <a:endParaRPr lang="en-US" sz="1400" dirty="0"/>
+          </a:p>
+        </p:txBody>
+      </p:sp>
+      <p:sp>
+        <p:nvSpPr>
+          <p:cNvPr id="13" name="fase-3"/>
+          <p:cNvSpPr/>
+          <p:nvPr/>
+        </p:nvSpPr>
+        <p:spPr>
+          <a:xfrm>
+            <a:off x="9006840" y="1828800"/>
+            <a:ext cx="457200" cy="457200"/>
+          </a:xfrm>
+          <a:prstGeom prst="ellipse">
+            <a:avLst/>
+          </a:prstGeom>
+          <a:solidFill>
+            <a:srgbClr val="CFA04A"/>
+          </a:solidFill>
+          <a:ln w="38100">
+            <a:solidFill>
+              <a:srgbClr val="FFFFFF"/>
+            </a:solidFill>
+            <a:prstDash val="solid"/>
+          </a:ln>
+        </p:spPr>
+      </p:sp>
+      <p:sp>
+        <p:nvSpPr>
+          <p:cNvPr id="14" name="Text 12"/>
+          <p:cNvSpPr txBox="1"/>
+          <p:nvPr/>
+        </p:nvSpPr>
+        <p:spPr>
+          <a:xfrm>
+            <a:off x="8915400" y="2514600"/>
+            <a:ext cx="2606040" cy="411480"/>
+          </a:xfrm>
+          <a:prstGeom prst="rect">
+            <a:avLst/>
+          </a:prstGeom>
+          <a:noFill/>
+          <a:ln/>
+        </p:spPr>
+        <p:txBody>
+          <a:bodyPr wrap="square" lIns="0" tIns="0" rIns="0" bIns="0" rtlCol="0" anchor="t"/>
+          <a:lstStyle/>
+          <a:p>
+            <a:pPr indent="0" marL="0">
+              <a:buNone/>
+            </a:pPr>
+            <a:r>
+              <a:rPr lang="en-US" sz="1800" b="1" dirty="0">
+                <a:solidFill>
+                  <a:srgbClr val="070A13"/>
+                </a:solidFill>
+              </a:rPr>
+              <a:t>Mês 3</a:t>
+            </a:r>
+            <a:endParaRPr lang="en-US" sz="1800" dirty="0"/>
+          </a:p>
+        </p:txBody>
+      </p:sp>
+      <p:sp>
+        <p:nvSpPr>
+          <p:cNvPr id="15" name="Text 13"/>
+          <p:cNvSpPr txBox="1"/>
+          <p:nvPr/>
+        </p:nvSpPr>
+        <p:spPr>
+          <a:xfrm>
+            <a:off x="8915400" y="2971800"/>
+            <a:ext cx="2514600" cy="1463040"/>
+          </a:xfrm>
+          <a:prstGeom prst="rect">
+            <a:avLst/>
+          </a:prstGeom>
+          <a:noFill/>
+          <a:ln/>
+        </p:spPr>
+        <p:txBody>
+          <a:bodyPr wrap="square" lIns="0" tIns="0" rIns="0" bIns="0" rtlCol="0" anchor="t"/>
+          <a:lstStyle/>
+          <a:p>
+            <a:pPr indent="0" marL="0">
+              <a:buNone/>
+            </a:pPr>
+            <a:r>
+              <a:rPr lang="en-US" sz="1400" dirty="0">
+                <a:solidFill>
+                  <a:srgbClr val="5B6474"/>
+                </a:solidFill>
+              </a:rPr>
+              <a:t>Medidas com evidências; Declarações de Aplicabilidade; incidentes testados; plano revisto</a:t>
+            </a:r>
+            <a:endParaRPr lang="en-US" sz="1400" dirty="0"/>
+          </a:p>
+        </p:txBody>
+      </p:sp>
+      <p:sp>
+        <p:nvSpPr>
+          <p:cNvPr id="16" name="card-92"/>
+          <p:cNvSpPr/>
+          <p:nvPr/>
+        </p:nvSpPr>
+        <p:spPr>
+          <a:xfrm>
+            <a:off x="548640" y="4663440"/>
+            <a:ext cx="11064240" cy="1325880"/>
+          </a:xfrm>
+          <a:prstGeom prst="roundRect">
+            <a:avLst>
+              <a:gd name="adj" fmla="val 8276"/>
+            </a:avLst>
+          </a:prstGeom>
+          <a:solidFill>
+            <a:srgbClr val="E6F5F3"/>
+          </a:solidFill>
+          <a:ln w="12700">
+            <a:solidFill>
+              <a:srgbClr val="E6F5F3"/>
+            </a:solidFill>
+            <a:prstDash val="solid"/>
+          </a:ln>
+        </p:spPr>
+      </p:sp>
+      <p:sp>
+        <p:nvSpPr>
+          <p:cNvPr id="17" name="Text 15"/>
+          <p:cNvSpPr txBox="1"/>
+          <p:nvPr/>
+        </p:nvSpPr>
+        <p:spPr>
+          <a:xfrm>
+            <a:off x="822960" y="4800600"/>
+            <a:ext cx="4572000" cy="365760"/>
+          </a:xfrm>
+          <a:prstGeom prst="rect">
+            <a:avLst/>
+          </a:prstGeom>
+          <a:noFill/>
+          <a:ln/>
+        </p:spPr>
+        <p:txBody>
+          <a:bodyPr wrap="square" lIns="0" tIns="0" rIns="0" bIns="0" rtlCol="0" anchor="t"/>
+          <a:lstStyle/>
+          <a:p>
+            <a:pPr indent="0" marL="0">
+              <a:buNone/>
+            </a:pPr>
+            <a:r>
+              <a:rPr lang="en-US" sz="1600" b="1" dirty="0">
+                <a:solidFill>
+                  <a:srgbClr val="17766C"/>
+                </a:solidFill>
+              </a:rPr>
+              <a:t>Depois do arranque</a:t>
+            </a:r>
+            <a:endParaRPr lang="en-US" sz="1600" dirty="0"/>
+          </a:p>
+        </p:txBody>
+      </p:sp>
+      <p:sp>
+        <p:nvSpPr>
+          <p:cNvPr id="18" name="Text 16"/>
+          <p:cNvSpPr txBox="1"/>
+          <p:nvPr/>
+        </p:nvSpPr>
+        <p:spPr>
+          <a:xfrm>
+            <a:off x="822960" y="5212080"/>
+            <a:ext cx="10515600" cy="640080"/>
+          </a:xfrm>
+          <a:prstGeom prst="rect">
+            <a:avLst/>
+          </a:prstGeom>
+          <a:noFill/>
+          <a:ln/>
+        </p:spPr>
+        <p:txBody>
+          <a:bodyPr wrap="square" lIns="0" tIns="0" rIns="0" bIns="0" rtlCol="0" anchor="t"/>
+          <a:lstStyle/>
+          <a:p>
+            <a:pPr indent="0" marL="0">
+              <a:buNone/>
+            </a:pPr>
+            <a:r>
+              <a:rPr lang="en-US" sz="1400" dirty="0">
+                <a:solidFill>
+                  <a:srgbClr val="111827"/>
+                </a:solidFill>
+              </a:rPr>
+              <a:t>Revisão trimestral da maturidade, análise anual dos riscos, lembretes de revisão de documentos e preparação do relatório anual.</a:t>
+            </a:r>
+            <a:endParaRPr lang="en-US" sz="1400" dirty="0"/>
+          </a:p>
+        </p:txBody>
+      </p:sp>
+      <p:sp>
+        <p:nvSpPr>
+          <p:cNvPr id="25" name="Slide Number Placeholder 0"/>
+          <p:cNvSpPr>
+            <a:spLocks noGrp="1"/>
+          </p:cNvSpPr>
           <p:nvPr>
-            <p:ph idx="103" type="body" hasCustomPrompt="1"/>
+            <p:ph type="sldNum" sz="quarter" idx="4294967295"/>
           </p:nvPr>
         </p:nvSpPr>
         <p:spPr>
           <a:xfrm>
-            <a:off x="731520" y="4160520"/>
-            <a:ext cx="8686800" cy="1097280"/>
-          </a:xfrm>
-          <a:prstGeom prst="rect">
-            <a:avLst/>
-          </a:prstGeom>
-          <a:noFill/>
-          <a:ln/>
-        </p:spPr>
-        <p:txBody>
-          <a:bodyPr wrap="square" lIns="0" tIns="0" rIns="0" bIns="0" rtlCol="0" anchor="t"/>
-          <a:lstStyle/>
-          <a:p>
-            <a:pPr indent="0" marL="0">
-              <a:buNone/>
-            </a:pPr>
-            <a:r>
-              <a:rPr lang="en-US" sz="1800" dirty="0">
-                <a:solidFill>
-                  <a:srgbClr val="C9CFDA"/>
-                </a:solidFill>
-              </a:rPr>
-              <a:t>Traga a informação da secção 2 do manual de onboarding.</a:t>
-            </a:r>
-            <a:endParaRPr lang="en-US" sz="1800" dirty="0"/>
-          </a:p>
-          <a:p>
-            <a:pPr indent="0" marL="0">
-              <a:buNone/>
-            </a:pPr>
-            <a:r>
-              <a:rPr lang="en-US" sz="1800" dirty="0">
-                <a:solidFill>
-                  <a:srgbClr val="C9CFDA"/>
-                </a:solidFill>
-              </a:rPr>
-              <a:t>app.ankoraone.com  ·  daniel.carvalho@ankoraone.com</a:t>
-            </a:r>
-            <a:endParaRPr lang="en-US" sz="1800" dirty="0"/>
+            <a:off x="548640" y="6309360"/>
+            <a:ext cx="914400" cy="274320"/>
+          </a:xfrm>
+          <a:prstGeom prst="rect">
+            <a:avLst/>
+          </a:prstGeom>
+          <a:extLst>
+            <a:ext uri="{C572A759-6A51-4108-AA02-DFA0A04FC94B}">
+              <ma14:wrappingTextBoxFlag xmlns:ma14="http://schemas.microsoft.com/office/mac/drawingml/2011/main" val="0"/>
+            </a:ext>
+          </a:extLst>
+        </p:spPr>
+        <p:txBody>
+          <a:bodyPr/>
+          <a:lstStyle>
+            <a:lvl1pPr>
+              <a:defRPr sz="1000">
+                <a:solidFill>
+                  <a:srgbClr val="5B6474"/>
+                </a:solidFill>
+              </a:defRPr>
+            </a:lvl1pPr>
+          </a:lstStyle>
+          <a:p>
+            <a:pPr algn="l"/>
+            <a:fld id="{F7021451-1387-4CA6-816F-3879F97B5CBC}" type="slidenum">
+              <a:rPr b="0" lang="en-US"/>
+              <a:t>19</a:t>
+            </a:fld>
+            <a:endParaRPr lang="en-US"/>
           </a:p>
         </p:txBody>
       </p:sp>
@@ -10531,6 +12208,159 @@
 </p:sld>
 </file>
 
+<file path=ppt/slides/slide20.xml><?xml version="1.0" encoding="utf-8"?>
+<p:sld xmlns:a="http://schemas.openxmlformats.org/drawingml/2006/main" xmlns:r="http://schemas.openxmlformats.org/officeDocument/2006/relationships" xmlns:p="http://schemas.openxmlformats.org/presentationml/2006/main">
+  <p:cSld name="Slide 20">
+    <p:spTree>
+      <p:nvGrpSpPr>
+        <p:cNvPr id="1" name=""/>
+        <p:cNvGrpSpPr/>
+        <p:nvPr/>
+      </p:nvGrpSpPr>
+      <p:grpSpPr>
+        <a:xfrm>
+          <a:off x="0" y="0"/>
+          <a:ext cx="0" cy="0"/>
+          <a:chOff x="0" y="0"/>
+          <a:chExt cx="0" cy="0"/>
+        </a:xfrm>
+      </p:grpSpPr>
+      <p:sp>
+        <p:nvSpPr>
+          <p:cNvPr id="2" name="Text 0"/>
+          <p:cNvSpPr/>
+          <p:nvPr>
+            <p:ph idx="101" type="body" hasCustomPrompt="1"/>
+          </p:nvPr>
+        </p:nvSpPr>
+        <p:spPr>
+          <a:xfrm>
+            <a:off x="731520" y="2468880"/>
+            <a:ext cx="10058400" cy="365760"/>
+          </a:xfrm>
+          <a:prstGeom prst="rect">
+            <a:avLst/>
+          </a:prstGeom>
+          <a:noFill/>
+          <a:ln/>
+        </p:spPr>
+        <p:txBody>
+          <a:bodyPr wrap="square" lIns="0" tIns="0" rIns="0" bIns="0" rtlCol="0"/>
+          <a:lstStyle/>
+          <a:p>
+            <a:pPr indent="0" marL="0">
+              <a:buNone/>
+            </a:pPr>
+            <a:r>
+              <a:rPr lang="en-US" sz="1400" b="1" spc="400" kern="0" dirty="0">
+                <a:solidFill>
+                  <a:schemeClr val="accent1"/>
+                </a:solidFill>
+              </a:rPr>
+              <a:t>PRÓXIMO PASSO</a:t>
+            </a:r>
+            <a:endParaRPr lang="en-US" sz="1400" dirty="0"/>
+          </a:p>
+        </p:txBody>
+      </p:sp>
+      <p:sp>
+        <p:nvSpPr>
+          <p:cNvPr id="3" name="Text 0"/>
+          <p:cNvSpPr/>
+          <p:nvPr>
+            <p:ph idx="102" type="title" hasCustomPrompt="1"/>
+          </p:nvPr>
+        </p:nvSpPr>
+        <p:spPr>
+          <a:xfrm>
+            <a:off x="731520" y="2880360"/>
+            <a:ext cx="10515600" cy="1188720"/>
+          </a:xfrm>
+          <a:prstGeom prst="rect">
+            <a:avLst/>
+          </a:prstGeom>
+          <a:noFill/>
+          <a:ln/>
+        </p:spPr>
+        <p:txBody>
+          <a:bodyPr wrap="square" lIns="0" tIns="0" rIns="0" bIns="0" rtlCol="0" anchor="t"/>
+          <a:lstStyle/>
+          <a:p>
+            <a:pPr algn="l" indent="0" marL="0">
+              <a:buNone/>
+            </a:pPr>
+            <a:r>
+              <a:rPr lang="en-US" sz="4400" b="1" dirty="0">
+                <a:solidFill>
+                  <a:schemeClr val="bg1"/>
+                </a:solidFill>
+              </a:rPr>
+              <a:t>Marcar a reunião de criação da conta</a:t>
+            </a:r>
+            <a:endParaRPr lang="en-US" sz="4400" dirty="0"/>
+          </a:p>
+        </p:txBody>
+      </p:sp>
+      <p:sp>
+        <p:nvSpPr>
+          <p:cNvPr id="4" name="Text 0"/>
+          <p:cNvSpPr/>
+          <p:nvPr>
+            <p:ph idx="103" type="body" hasCustomPrompt="1"/>
+          </p:nvPr>
+        </p:nvSpPr>
+        <p:spPr>
+          <a:xfrm>
+            <a:off x="731520" y="4160520"/>
+            <a:ext cx="8686800" cy="1097280"/>
+          </a:xfrm>
+          <a:prstGeom prst="rect">
+            <a:avLst/>
+          </a:prstGeom>
+          <a:noFill/>
+          <a:ln/>
+        </p:spPr>
+        <p:txBody>
+          <a:bodyPr wrap="square" lIns="0" tIns="0" rIns="0" bIns="0" rtlCol="0" anchor="t"/>
+          <a:lstStyle/>
+          <a:p>
+            <a:pPr indent="0" marL="0">
+              <a:buNone/>
+            </a:pPr>
+            <a:r>
+              <a:rPr lang="en-US" sz="1800" dirty="0">
+                <a:solidFill>
+                  <a:srgbClr val="C9CFDA"/>
+                </a:solidFill>
+              </a:rPr>
+              <a:t>Traga a informação da secção 2 do manual de onboarding. Guias de implementação: NIS2, ISO/IEC 27001 e ISO/IEC 42001.</a:t>
+            </a:r>
+            <a:endParaRPr lang="en-US" sz="1800" dirty="0"/>
+          </a:p>
+          <a:p>
+            <a:pPr indent="0" marL="0">
+              <a:buNone/>
+            </a:pPr>
+            <a:r>
+              <a:rPr lang="en-US" sz="1800" dirty="0">
+                <a:solidFill>
+                  <a:srgbClr val="C9CFDA"/>
+                </a:solidFill>
+              </a:rPr>
+              <a:t>app.ankoraone.com  ·  daniel.carvalho@ankoraone.com</a:t>
+            </a:r>
+            <a:endParaRPr lang="en-US" sz="1800" dirty="0"/>
+          </a:p>
+        </p:txBody>
+      </p:sp>
+    </p:spTree>
+  </p:cSld>
+  <p:clrMapOvr>
+    <a:masterClrMapping/>
+  </p:clrMapOvr>
+</p:sld>
+</file>
+
 <file path=ppt/slides/slide3.xml><?xml version="1.0" encoding="utf-8"?>
 <p:sld xmlns:a="http://schemas.openxmlformats.org/drawingml/2006/main" xmlns:r="http://schemas.openxmlformats.org/officeDocument/2006/relationships" xmlns:p="http://schemas.openxmlformats.org/presentationml/2006/main">
   <p:cSld name="Slide 3">
@@ -12694,7 +14524,7 @@
                   <a:srgbClr val="111827"/>
                 </a:solidFill>
               </a:rPr>
-              <a:t>Tipo de entidade (art. 4.º)</a:t>
+              <a:t>Estabelecimento (art. 4.º)</a:t>
             </a:r>
             <a:endParaRPr lang="en-US" sz="1500" dirty="0"/>
           </a:p>
@@ -14289,7 +16119,7 @@
                   <a:srgbClr val="5B6474"/>
                 </a:solidFill>
               </a:rPr>
-              <a:t>A licença define também os referenciais disponíveis e o número de utilizadores (mínimo de 5). O menu só mostra o que está incluído.</a:t>
+              <a:t>A licença define também os referenciais (NIS2, QNRCS, ISO/IEC 27001, ISO/IEC 42001, DORA…) e o número de utilizadores (mínimo de 5). O menu só mostra o que está incluído.</a:t>
             </a:r>
             <a:endParaRPr lang="en-US" sz="1400" dirty="0"/>
           </a:p>
@@ -15209,7 +17039,7 @@
                   <a:srgbClr val="5B6474"/>
                 </a:solidFill>
               </a:rPr>
-              <a:t>Documentos · Auditoria de Documentos · Cadeia de Abastecimento · Fornecedores</a:t>
+              <a:t>Documentos · Repositório documental · Auditoria · Cadeia de Abastecimento · Fornecedores</a:t>
             </a:r>
             <a:endParaRPr lang="en-US" sz="1300" dirty="0"/>
           </a:p>

--- a/docs/onboarding/AnkoraOne-Apresentacao-Onboarding.pptx
+++ b/docs/onboarding/AnkoraOne-Apresentacao-Onboarding.pptx
@@ -126,7 +126,7 @@
   <p:extLst>
     <p:ext uri="{521415D9-36F7-43E2-AB2F-B90AF26B5E84}">
       <p14:sectionLst xmlns:p14="http://schemas.microsoft.com/office/powerpoint/2010/main">
-        <p14:section name="Abertura" id="{7799d756-8d4d-6123-205e-8b284313985f}">
+        <p14:section name="Abertura" id="{4bdba960-c940-bedd-b8ff-65a0817df64c}">
           <p14:sldIdLst>
             <p14:sldId id="256"/>
             <p14:sldId id="257"/>
@@ -136,7 +136,7 @@
             <p14:sldId id="261"/>
           </p14:sldIdLst>
         </p14:section>
-        <p14:section name="Navegar e trabalhar" id="{5965bf51-68b1-7bb9-8d5e-9bfe19719ba5}">
+        <p14:section name="Navegar e trabalhar" id="{2a0ec043-9f62-6884-d72d-9323602e426e}">
           <p14:sldIdLst>
             <p14:sldId id="262"/>
             <p14:sldId id="263"/>
@@ -147,7 +147,7 @@
             <p14:sldId id="268"/>
           </p14:sldIdLst>
         </p14:section>
-        <p14:section name="Guia por referencial" id="{9e1ca1e4-23cd-b549-267a-28c28de2b812}">
+        <p14:section name="Guia por referencial" id="{b5d10f21-63c1-2877-7256-d7894a7ad04c}">
           <p14:sldIdLst>
             <p14:sldId id="269"/>
             <p14:sldId id="270"/>
@@ -156,7 +156,7 @@
             <p14:sldId id="273"/>
           </p14:sldIdLst>
         </p14:section>
-        <p14:section name="Fecho" id="{836ef8ac-61ba-46e9-5de1-b1223c54bc9c}">
+        <p14:section name="Fecho" id="{8c70fa58-36e7-c151-a1a0-6de7e719e8ec}">
           <p14:sldIdLst>
             <p14:sldId id="274"/>
             <p14:sldId id="275"/>
@@ -3300,6 +3300,53 @@
       <p:sp>
         <p:nvSpPr>
           <p:cNvPr id="5" name="Text 3"/>
+          <p:cNvSpPr txBox="1"/>
+          <p:nvPr/>
+        </p:nvSpPr>
+        <p:spPr>
+          <a:xfrm>
+            <a:off x="731520" y="5623560"/>
+            <a:ext cx="10058400" cy="320040"/>
+          </a:xfrm>
+          <a:prstGeom prst="rect">
+            <a:avLst/>
+          </a:prstGeom>
+          <a:noFill/>
+          <a:ln/>
+        </p:spPr>
+        <p:txBody>
+          <a:bodyPr wrap="square" lIns="0" tIns="0" rIns="0" bIns="0" rtlCol="0" anchor="t"/>
+          <a:lstStyle/>
+          <a:p>
+            <a:pPr indent="0" marL="0">
+              <a:buNone/>
+            </a:pPr>
+            <a:r>
+              <a:rPr lang="en-US" sz="1400" b="1" dirty="0">
+                <a:solidFill>
+                  <a:srgbClr val="CFA04A"/>
+                </a:solidFill>
+              </a:rPr>
+              <a:t>AnkoraOne: </a:t>
+            </a:r>
+            <a:pPr indent="0" marL="0">
+              <a:buNone/>
+            </a:pPr>
+            <a:r>
+              <a:rPr lang="en-US" sz="1400" dirty="0">
+                <a:solidFill>
+                  <a:srgbClr val="FFFFFF"/>
+                </a:solidFill>
+              </a:rPr>
+              <a:t>a infraestrutura inteligente de governação, risco e conformidade</a:t>
+            </a:r>
+            <a:endParaRPr lang="en-US" sz="1400" dirty="0"/>
+          </a:p>
+        </p:txBody>
+      </p:sp>
+      <p:sp>
+        <p:nvSpPr>
+          <p:cNvPr id="6" name="Text 4"/>
           <p:cNvSpPr txBox="1"/>
           <p:nvPr/>
         </p:nvSpPr>
